--- a/Week04_IntegerArithmetic/Ch05_Integer Arithmetic_V4.pptx
+++ b/Week04_IntegerArithmetic/Ch05_Integer Arithmetic_V4.pptx
@@ -7,10 +7,10 @@
     <p:sldMasterId id="2147483687" r:id="rId3"/>
   </p:sldMasterIdLst>
   <p:notesMasterIdLst>
-    <p:notesMasterId r:id="rId40"/>
+    <p:notesMasterId r:id="rId41"/>
   </p:notesMasterIdLst>
   <p:handoutMasterIdLst>
-    <p:handoutMasterId r:id="rId41"/>
+    <p:handoutMasterId r:id="rId42"/>
   </p:handoutMasterIdLst>
   <p:sldIdLst>
     <p:sldId id="333" r:id="rId4"/>
@@ -49,6 +49,7 @@
     <p:sldId id="372" r:id="rId37"/>
     <p:sldId id="373" r:id="rId38"/>
     <p:sldId id="336" r:id="rId39"/>
+    <p:sldId id="509" r:id="rId40"/>
   </p:sldIdLst>
   <p:sldSz cx="12192000" cy="6858000"/>
   <p:notesSz cx="7010400" cy="9296400"/>
@@ -237,7 +238,7 @@
           <a:p>
             <a:fld id="{8E938536-29D3-49BD-A567-41CAF057586A}" type="datetimeFigureOut">
               <a:rPr lang="en-US" smtClean="0"/>
-              <a:t>8/20/2026</a:t>
+              <a:t>9/22/2026</a:t>
             </a:fld>
             <a:endParaRPr lang="en-US"/>
           </a:p>
@@ -402,7 +403,7 @@
           <a:p>
             <a:fld id="{71559A16-B3AD-4CE2-9A5E-FAAD3C2C27CA}" type="datetimeFigureOut">
               <a:rPr lang="en-US" smtClean="0"/>
-              <a:t>8/20/2026</a:t>
+              <a:t>9/22/2026</a:t>
             </a:fld>
             <a:endParaRPr lang="en-US"/>
           </a:p>
@@ -6057,7 +6058,7 @@
                 <a:tabLst/>
                 <a:defRPr/>
               </a:pPr>
-              <a:t>8/20/2026</a:t>
+              <a:t>9/22/2026</a:t>
             </a:fld>
             <a:endParaRPr kumimoji="0" lang="en-US" sz="1800" b="0" i="0" u="none" strike="noStrike" kern="1200" cap="none" spc="0" normalizeH="0" baseline="0" noProof="0">
               <a:ln>
@@ -6286,7 +6287,7 @@
             <a:fld id="{1D8BD707-D9CF-40AE-B4C6-C98DA3205C09}" type="datetimeFigureOut">
               <a:rPr lang="en-US" smtClean="0"/>
               <a:pPr/>
-              <a:t>8/20/2026</a:t>
+              <a:t>9/22/2026</a:t>
             </a:fld>
             <a:endParaRPr lang="en-US"/>
           </a:p>
@@ -6383,7 +6384,7 @@
             <a:fld id="{1D8BD707-D9CF-40AE-B4C6-C98DA3205C09}" type="datetimeFigureOut">
               <a:rPr lang="en-US" smtClean="0"/>
               <a:pPr/>
-              <a:t>8/20/2026</a:t>
+              <a:t>9/22/2026</a:t>
             </a:fld>
             <a:endParaRPr lang="en-US"/>
           </a:p>
@@ -42599,6 +42600,70 @@
 </p:sld>
 </file>
 
+<file path=ppt/slides/slide37.xml><?xml version="1.0" encoding="utf-8"?>
+<p:sld xmlns:a="http://schemas.openxmlformats.org/drawingml/2006/main" xmlns:r="http://schemas.openxmlformats.org/officeDocument/2006/relationships" xmlns:p="http://schemas.openxmlformats.org/presentationml/2006/main">
+  <p:cSld>
+    <p:spTree>
+      <p:nvGrpSpPr>
+        <p:cNvPr id="1" name="">
+          <a:extLst>
+            <a:ext uri="{FF2B5EF4-FFF2-40B4-BE49-F238E27FC236}">
+              <a16:creationId xmlns:a16="http://schemas.microsoft.com/office/drawing/2014/main" id="{84DA25F2-3AE0-BDCF-0880-EDD5EEF55E54}"/>
+            </a:ext>
+          </a:extLst>
+        </p:cNvPr>
+        <p:cNvGrpSpPr/>
+        <p:nvPr/>
+      </p:nvGrpSpPr>
+      <p:grpSpPr>
+        <a:xfrm>
+          <a:off x="0" y="0"/>
+          <a:ext cx="0" cy="0"/>
+          <a:chOff x="0" y="0"/>
+          <a:chExt cx="0" cy="0"/>
+        </a:xfrm>
+      </p:grpSpPr>
+      <p:sp>
+        <p:nvSpPr>
+          <p:cNvPr id="2" name="Title 1">
+            <a:extLst>
+              <a:ext uri="{FF2B5EF4-FFF2-40B4-BE49-F238E27FC236}">
+                <a16:creationId xmlns:a16="http://schemas.microsoft.com/office/drawing/2014/main" id="{6EAE57A2-3A61-C5F8-EEFD-EA2961784338}"/>
+              </a:ext>
+            </a:extLst>
+          </p:cNvPr>
+          <p:cNvSpPr>
+            <a:spLocks noGrp="1"/>
+          </p:cNvSpPr>
+          <p:nvPr>
+            <p:ph type="ctrTitle"/>
+          </p:nvPr>
+        </p:nvSpPr>
+        <p:spPr/>
+        <p:txBody>
+          <a:bodyPr/>
+          <a:lstStyle/>
+          <a:p>
+            <a:r>
+              <a:rPr lang="en-US" dirty="0"/>
+              <a:t>… to here …</a:t>
+            </a:r>
+          </a:p>
+        </p:txBody>
+      </p:sp>
+    </p:spTree>
+    <p:extLst>
+      <p:ext uri="{BB962C8B-B14F-4D97-AF65-F5344CB8AC3E}">
+        <p14:creationId xmlns:p14="http://schemas.microsoft.com/office/powerpoint/2010/main" val="2815624037"/>
+      </p:ext>
+    </p:extLst>
+  </p:cSld>
+  <p:clrMapOvr>
+    <a:masterClrMapping/>
+  </p:clrMapOvr>
+</p:sld>
+</file>
+
 <file path=ppt/slides/slide4.xml><?xml version="1.0" encoding="utf-8"?>
 <p:sld xmlns:a="http://schemas.openxmlformats.org/drawingml/2006/main" xmlns:r="http://schemas.openxmlformats.org/officeDocument/2006/relationships" xmlns:p="http://schemas.openxmlformats.org/presentationml/2006/main">
   <p:cSld>

--- a/Week04_IntegerArithmetic/Ch05_Integer Arithmetic_V4.pptx
+++ b/Week04_IntegerArithmetic/Ch05_Integer Arithmetic_V4.pptx
@@ -7,10 +7,10 @@
     <p:sldMasterId id="2147483687" r:id="rId3"/>
   </p:sldMasterIdLst>
   <p:notesMasterIdLst>
-    <p:notesMasterId r:id="rId41"/>
+    <p:notesMasterId r:id="rId42"/>
   </p:notesMasterIdLst>
   <p:handoutMasterIdLst>
-    <p:handoutMasterId r:id="rId42"/>
+    <p:handoutMasterId r:id="rId43"/>
   </p:handoutMasterIdLst>
   <p:sldIdLst>
     <p:sldId id="333" r:id="rId4"/>
@@ -20,36 +20,37 @@
     <p:sldId id="342" r:id="rId8"/>
     <p:sldId id="374" r:id="rId9"/>
     <p:sldId id="344" r:id="rId10"/>
-    <p:sldId id="345" r:id="rId11"/>
-    <p:sldId id="346" r:id="rId12"/>
-    <p:sldId id="347" r:id="rId13"/>
-    <p:sldId id="348" r:id="rId14"/>
-    <p:sldId id="349" r:id="rId15"/>
-    <p:sldId id="350" r:id="rId16"/>
-    <p:sldId id="351" r:id="rId17"/>
-    <p:sldId id="352" r:id="rId18"/>
-    <p:sldId id="354" r:id="rId19"/>
-    <p:sldId id="355" r:id="rId20"/>
-    <p:sldId id="356" r:id="rId21"/>
-    <p:sldId id="357" r:id="rId22"/>
-    <p:sldId id="376" r:id="rId23"/>
-    <p:sldId id="377" r:id="rId24"/>
-    <p:sldId id="378" r:id="rId25"/>
-    <p:sldId id="358" r:id="rId26"/>
-    <p:sldId id="362" r:id="rId27"/>
-    <p:sldId id="363" r:id="rId28"/>
-    <p:sldId id="364" r:id="rId29"/>
-    <p:sldId id="365" r:id="rId30"/>
-    <p:sldId id="379" r:id="rId31"/>
-    <p:sldId id="380" r:id="rId32"/>
-    <p:sldId id="368" r:id="rId33"/>
-    <p:sldId id="369" r:id="rId34"/>
-    <p:sldId id="370" r:id="rId35"/>
-    <p:sldId id="371" r:id="rId36"/>
-    <p:sldId id="372" r:id="rId37"/>
-    <p:sldId id="373" r:id="rId38"/>
-    <p:sldId id="336" r:id="rId39"/>
-    <p:sldId id="509" r:id="rId40"/>
+    <p:sldId id="349" r:id="rId11"/>
+    <p:sldId id="345" r:id="rId12"/>
+    <p:sldId id="346" r:id="rId13"/>
+    <p:sldId id="347" r:id="rId14"/>
+    <p:sldId id="348" r:id="rId15"/>
+    <p:sldId id="510" r:id="rId16"/>
+    <p:sldId id="350" r:id="rId17"/>
+    <p:sldId id="351" r:id="rId18"/>
+    <p:sldId id="352" r:id="rId19"/>
+    <p:sldId id="354" r:id="rId20"/>
+    <p:sldId id="355" r:id="rId21"/>
+    <p:sldId id="356" r:id="rId22"/>
+    <p:sldId id="357" r:id="rId23"/>
+    <p:sldId id="376" r:id="rId24"/>
+    <p:sldId id="377" r:id="rId25"/>
+    <p:sldId id="378" r:id="rId26"/>
+    <p:sldId id="358" r:id="rId27"/>
+    <p:sldId id="362" r:id="rId28"/>
+    <p:sldId id="363" r:id="rId29"/>
+    <p:sldId id="364" r:id="rId30"/>
+    <p:sldId id="365" r:id="rId31"/>
+    <p:sldId id="379" r:id="rId32"/>
+    <p:sldId id="380" r:id="rId33"/>
+    <p:sldId id="368" r:id="rId34"/>
+    <p:sldId id="369" r:id="rId35"/>
+    <p:sldId id="370" r:id="rId36"/>
+    <p:sldId id="371" r:id="rId37"/>
+    <p:sldId id="372" r:id="rId38"/>
+    <p:sldId id="373" r:id="rId39"/>
+    <p:sldId id="336" r:id="rId40"/>
+    <p:sldId id="509" r:id="rId41"/>
   </p:sldIdLst>
   <p:sldSz cx="12192000" cy="6858000"/>
   <p:notesSz cx="7010400" cy="9296400"/>
@@ -238,7 +239,7 @@
           <a:p>
             <a:fld id="{8E938536-29D3-49BD-A567-41CAF057586A}" type="datetimeFigureOut">
               <a:rPr lang="en-US" smtClean="0"/>
-              <a:t>9/22/2026</a:t>
+              <a:t>10/21/2026</a:t>
             </a:fld>
             <a:endParaRPr lang="en-US"/>
           </a:p>
@@ -403,7 +404,7 @@
           <a:p>
             <a:fld id="{71559A16-B3AD-4CE2-9A5E-FAAD3C2C27CA}" type="datetimeFigureOut">
               <a:rPr lang="en-US" smtClean="0"/>
-              <a:t>9/22/2026</a:t>
+              <a:t>10/21/2026</a:t>
             </a:fld>
             <a:endParaRPr lang="en-US"/>
           </a:p>
@@ -6058,7 +6059,7 @@
                 <a:tabLst/>
                 <a:defRPr/>
               </a:pPr>
-              <a:t>9/22/2026</a:t>
+              <a:t>10/21/2026</a:t>
             </a:fld>
             <a:endParaRPr kumimoji="0" lang="en-US" sz="1800" b="0" i="0" u="none" strike="noStrike" kern="1200" cap="none" spc="0" normalizeH="0" baseline="0" noProof="0">
               <a:ln>
@@ -6287,7 +6288,7 @@
             <a:fld id="{1D8BD707-D9CF-40AE-B4C6-C98DA3205C09}" type="datetimeFigureOut">
               <a:rPr lang="en-US" smtClean="0"/>
               <a:pPr/>
-              <a:t>9/22/2026</a:t>
+              <a:t>10/21/2026</a:t>
             </a:fld>
             <a:endParaRPr lang="en-US"/>
           </a:p>
@@ -6384,7 +6385,7 @@
             <a:fld id="{1D8BD707-D9CF-40AE-B4C6-C98DA3205C09}" type="datetimeFigureOut">
               <a:rPr lang="en-US" smtClean="0"/>
               <a:pPr/>
-              <a:t>9/22/2026</a:t>
+              <a:t>10/21/2026</a:t>
             </a:fld>
             <a:endParaRPr lang="en-US"/>
           </a:p>
@@ -9968,6 +9969,1163 @@
 </file>
 
 <file path=ppt/slides/slide10.xml><?xml version="1.0" encoding="utf-8"?>
+<p:sld xmlns:a="http://schemas.openxmlformats.org/drawingml/2006/main" xmlns:r="http://schemas.openxmlformats.org/officeDocument/2006/relationships" xmlns:p="http://schemas.openxmlformats.org/presentationml/2006/main">
+  <p:cSld>
+    <p:spTree>
+      <p:nvGrpSpPr>
+        <p:cNvPr id="1" name=""/>
+        <p:cNvGrpSpPr/>
+        <p:nvPr/>
+      </p:nvGrpSpPr>
+      <p:grpSpPr>
+        <a:xfrm>
+          <a:off x="0" y="0"/>
+          <a:ext cx="0" cy="0"/>
+          <a:chOff x="0" y="0"/>
+          <a:chExt cx="0" cy="0"/>
+        </a:xfrm>
+      </p:grpSpPr>
+      <p:grpSp>
+        <p:nvGrpSpPr>
+          <p:cNvPr id="42" name="Group 41"/>
+          <p:cNvGrpSpPr/>
+          <p:nvPr/>
+        </p:nvGrpSpPr>
+        <p:grpSpPr>
+          <a:xfrm>
+            <a:off x="1796795" y="2446575"/>
+            <a:ext cx="4308046" cy="1134884"/>
+            <a:chOff x="453188" y="1044890"/>
+            <a:chExt cx="5744061" cy="764294"/>
+          </a:xfrm>
+        </p:grpSpPr>
+        <p:grpSp>
+          <p:nvGrpSpPr>
+            <p:cNvPr id="30" name="Group 29"/>
+            <p:cNvGrpSpPr/>
+            <p:nvPr/>
+          </p:nvGrpSpPr>
+          <p:grpSpPr>
+            <a:xfrm>
+              <a:off x="453188" y="1178564"/>
+              <a:ext cx="5744061" cy="630620"/>
+              <a:chOff x="145012" y="809298"/>
+              <a:chExt cx="5744061" cy="630620"/>
+            </a:xfrm>
+          </p:grpSpPr>
+          <p:pic>
+            <p:nvPicPr>
+              <p:cNvPr id="5" name="Picture 4"/>
+              <p:cNvPicPr>
+                <a:picLocks noChangeAspect="1"/>
+              </p:cNvPicPr>
+              <p:nvPr/>
+            </p:nvPicPr>
+            <p:blipFill rotWithShape="1">
+              <a:blip r:embed="rId2"/>
+              <a:srcRect t="8189" r="47406" b="82112"/>
+              <a:stretch/>
+            </p:blipFill>
+            <p:spPr>
+              <a:xfrm>
+                <a:off x="145012" y="809298"/>
+                <a:ext cx="5744061" cy="630620"/>
+              </a:xfrm>
+              <a:prstGeom prst="rect">
+                <a:avLst/>
+              </a:prstGeom>
+            </p:spPr>
+          </p:pic>
+          <p:sp>
+            <p:nvSpPr>
+              <p:cNvPr id="6" name="Rectangle 5"/>
+              <p:cNvSpPr/>
+              <p:nvPr/>
+            </p:nvSpPr>
+            <p:spPr>
+              <a:xfrm>
+                <a:off x="3616083" y="1091247"/>
+                <a:ext cx="1942602" cy="260463"/>
+              </a:xfrm>
+              <a:prstGeom prst="rect">
+                <a:avLst/>
+              </a:prstGeom>
+              <a:solidFill>
+                <a:srgbClr val="FF0000">
+                  <a:alpha val="25000"/>
+                </a:srgbClr>
+              </a:solidFill>
+            </p:spPr>
+            <p:style>
+              <a:lnRef idx="2">
+                <a:schemeClr val="accent1">
+                  <a:shade val="50000"/>
+                </a:schemeClr>
+              </a:lnRef>
+              <a:fillRef idx="1">
+                <a:schemeClr val="accent1"/>
+              </a:fillRef>
+              <a:effectRef idx="0">
+                <a:schemeClr val="accent1"/>
+              </a:effectRef>
+              <a:fontRef idx="minor">
+                <a:schemeClr val="lt1"/>
+              </a:fontRef>
+            </p:style>
+            <p:txBody>
+              <a:bodyPr rtlCol="0" anchor="ctr"/>
+              <a:lstStyle/>
+              <a:p>
+                <a:pPr algn="ctr"/>
+                <a:endParaRPr lang="en-US" sz="1350"/>
+              </a:p>
+            </p:txBody>
+          </p:sp>
+          <p:sp>
+            <p:nvSpPr>
+              <p:cNvPr id="12" name="Rectangle 11"/>
+              <p:cNvSpPr/>
+              <p:nvPr/>
+            </p:nvSpPr>
+            <p:spPr>
+              <a:xfrm>
+                <a:off x="2680662" y="1087533"/>
+                <a:ext cx="935421" cy="257622"/>
+              </a:xfrm>
+              <a:prstGeom prst="rect">
+                <a:avLst/>
+              </a:prstGeom>
+              <a:solidFill>
+                <a:srgbClr val="0070C0">
+                  <a:alpha val="25000"/>
+                </a:srgbClr>
+              </a:solidFill>
+            </p:spPr>
+            <p:style>
+              <a:lnRef idx="2">
+                <a:schemeClr val="accent1">
+                  <a:shade val="50000"/>
+                </a:schemeClr>
+              </a:lnRef>
+              <a:fillRef idx="1">
+                <a:schemeClr val="accent1"/>
+              </a:fillRef>
+              <a:effectRef idx="0">
+                <a:schemeClr val="accent1"/>
+              </a:effectRef>
+              <a:fontRef idx="minor">
+                <a:schemeClr val="lt1"/>
+              </a:fontRef>
+            </p:style>
+            <p:txBody>
+              <a:bodyPr rtlCol="0" anchor="ctr"/>
+              <a:lstStyle/>
+              <a:p>
+                <a:pPr algn="ctr"/>
+                <a:endParaRPr lang="en-US" sz="1350"/>
+              </a:p>
+            </p:txBody>
+          </p:sp>
+        </p:grpSp>
+        <p:sp>
+          <p:nvSpPr>
+            <p:cNvPr id="20" name="TextBox 19"/>
+            <p:cNvSpPr txBox="1"/>
+            <p:nvPr/>
+          </p:nvSpPr>
+          <p:spPr>
+            <a:xfrm>
+              <a:off x="656551" y="1044890"/>
+              <a:ext cx="3527818" cy="279819"/>
+            </a:xfrm>
+            <a:prstGeom prst="rect">
+              <a:avLst/>
+            </a:prstGeom>
+            <a:noFill/>
+          </p:spPr>
+          <p:txBody>
+            <a:bodyPr wrap="square" rtlCol="0">
+              <a:spAutoFit/>
+            </a:bodyPr>
+            <a:lstStyle/>
+            <a:p>
+              <a:r>
+                <a:rPr lang="en-US" sz="2100" b="1" dirty="0"/>
+                <a:t>ADDS </a:t>
+              </a:r>
+              <a:r>
+                <a:rPr lang="en-US" sz="2100" b="1" dirty="0">
+                  <a:solidFill>
+                    <a:srgbClr val="FF0000"/>
+                  </a:solidFill>
+                </a:rPr>
+                <a:t>Rd</a:t>
+              </a:r>
+              <a:r>
+                <a:rPr lang="en-US" sz="2100" b="1" dirty="0"/>
+                <a:t>,</a:t>
+              </a:r>
+              <a:r>
+                <a:rPr lang="en-US" sz="2100" b="1" dirty="0">
+                  <a:solidFill>
+                    <a:srgbClr val="FF0000"/>
+                  </a:solidFill>
+                </a:rPr>
+                <a:t>Rn</a:t>
+              </a:r>
+              <a:r>
+                <a:rPr lang="en-US" sz="2100" b="1" dirty="0"/>
+                <a:t>,</a:t>
+              </a:r>
+              <a:r>
+                <a:rPr lang="en-US" sz="2100" b="1" i="1" dirty="0">
+                  <a:solidFill>
+                    <a:srgbClr val="0070C0"/>
+                  </a:solidFill>
+                  <a:latin typeface="Times New Roman" panose="02020603050405020304" pitchFamily="18" charset="0"/>
+                  <a:cs typeface="Times New Roman" panose="02020603050405020304" pitchFamily="18" charset="0"/>
+                </a:rPr>
+                <a:t>imm3</a:t>
+              </a:r>
+            </a:p>
+          </p:txBody>
+        </p:sp>
+      </p:grpSp>
+      <p:sp>
+        <p:nvSpPr>
+          <p:cNvPr id="43" name="Title 42"/>
+          <p:cNvSpPr>
+            <a:spLocks noGrp="1"/>
+          </p:cNvSpPr>
+          <p:nvPr>
+            <p:ph type="title"/>
+          </p:nvPr>
+        </p:nvSpPr>
+        <p:spPr>
+          <a:xfrm>
+            <a:off x="960370" y="739547"/>
+            <a:ext cx="4120967" cy="724296"/>
+          </a:xfrm>
+        </p:spPr>
+        <p:txBody>
+          <a:bodyPr>
+            <a:normAutofit/>
+          </a:bodyPr>
+          <a:lstStyle/>
+          <a:p>
+            <a:r>
+              <a:rPr lang="en-US" sz="4050" dirty="0"/>
+              <a:t>ADD Immediate</a:t>
+            </a:r>
+          </a:p>
+        </p:txBody>
+      </p:sp>
+      <p:grpSp>
+        <p:nvGrpSpPr>
+          <p:cNvPr id="3" name="Group 2"/>
+          <p:cNvGrpSpPr/>
+          <p:nvPr/>
+        </p:nvGrpSpPr>
+        <p:grpSpPr>
+          <a:xfrm>
+            <a:off x="1816141" y="4017256"/>
+            <a:ext cx="8081819" cy="1245818"/>
+            <a:chOff x="449288" y="5107571"/>
+            <a:chExt cx="10775759" cy="1661090"/>
+          </a:xfrm>
+        </p:grpSpPr>
+        <p:grpSp>
+          <p:nvGrpSpPr>
+            <p:cNvPr id="38" name="Group 37"/>
+            <p:cNvGrpSpPr/>
+            <p:nvPr/>
+          </p:nvGrpSpPr>
+          <p:grpSpPr>
+            <a:xfrm>
+              <a:off x="449288" y="5107571"/>
+              <a:ext cx="10775759" cy="1661090"/>
+              <a:chOff x="453189" y="3734882"/>
+              <a:chExt cx="6119154" cy="799392"/>
+            </a:xfrm>
+          </p:grpSpPr>
+          <p:grpSp>
+            <p:nvGrpSpPr>
+              <p:cNvPr id="32" name="Group 31"/>
+              <p:cNvGrpSpPr/>
+              <p:nvPr/>
+            </p:nvGrpSpPr>
+            <p:grpSpPr>
+              <a:xfrm>
+                <a:off x="453189" y="3882633"/>
+                <a:ext cx="6119154" cy="651641"/>
+                <a:chOff x="145013" y="3584028"/>
+                <a:chExt cx="6119154" cy="651641"/>
+              </a:xfrm>
+            </p:grpSpPr>
+            <p:pic>
+              <p:nvPicPr>
+                <p:cNvPr id="28" name="Picture 27"/>
+                <p:cNvPicPr>
+                  <a:picLocks noChangeAspect="1"/>
+                </p:cNvPicPr>
+                <p:nvPr/>
+              </p:nvPicPr>
+              <p:blipFill rotWithShape="1">
+                <a:blip r:embed="rId2"/>
+                <a:srcRect t="50902" b="39076"/>
+                <a:stretch/>
+              </p:blipFill>
+              <p:spPr>
+                <a:xfrm>
+                  <a:off x="145013" y="3584028"/>
+                  <a:ext cx="6119154" cy="651641"/>
+                </a:xfrm>
+                <a:prstGeom prst="rect">
+                  <a:avLst/>
+                </a:prstGeom>
+              </p:spPr>
+            </p:pic>
+            <p:sp>
+              <p:nvSpPr>
+                <p:cNvPr id="8" name="Rectangle 7"/>
+                <p:cNvSpPr/>
+                <p:nvPr/>
+              </p:nvSpPr>
+              <p:spPr>
+                <a:xfrm>
+                  <a:off x="2488324" y="3859925"/>
+                  <a:ext cx="713201" cy="276646"/>
+                </a:xfrm>
+                <a:prstGeom prst="rect">
+                  <a:avLst/>
+                </a:prstGeom>
+                <a:solidFill>
+                  <a:srgbClr val="FF0000">
+                    <a:alpha val="25000"/>
+                  </a:srgbClr>
+                </a:solidFill>
+              </p:spPr>
+              <p:style>
+                <a:lnRef idx="2">
+                  <a:schemeClr val="accent1">
+                    <a:shade val="50000"/>
+                  </a:schemeClr>
+                </a:lnRef>
+                <a:fillRef idx="1">
+                  <a:schemeClr val="accent1"/>
+                </a:fillRef>
+                <a:effectRef idx="0">
+                  <a:schemeClr val="accent1"/>
+                </a:effectRef>
+                <a:fontRef idx="minor">
+                  <a:schemeClr val="lt1"/>
+                </a:fontRef>
+              </p:style>
+              <p:txBody>
+                <a:bodyPr rtlCol="0" anchor="ctr"/>
+                <a:lstStyle/>
+                <a:p>
+                  <a:pPr algn="ctr"/>
+                  <a:endParaRPr lang="en-US" sz="1350"/>
+                </a:p>
+              </p:txBody>
+            </p:sp>
+            <p:sp>
+              <p:nvSpPr>
+                <p:cNvPr id="9" name="Rectangle 8"/>
+                <p:cNvSpPr/>
+                <p:nvPr/>
+              </p:nvSpPr>
+              <p:spPr>
+                <a:xfrm>
+                  <a:off x="3936124" y="3859925"/>
+                  <a:ext cx="717331" cy="276646"/>
+                </a:xfrm>
+                <a:prstGeom prst="rect">
+                  <a:avLst/>
+                </a:prstGeom>
+                <a:solidFill>
+                  <a:srgbClr val="FF0000">
+                    <a:alpha val="25000"/>
+                  </a:srgbClr>
+                </a:solidFill>
+              </p:spPr>
+              <p:style>
+                <a:lnRef idx="2">
+                  <a:schemeClr val="accent1">
+                    <a:shade val="50000"/>
+                  </a:schemeClr>
+                </a:lnRef>
+                <a:fillRef idx="1">
+                  <a:schemeClr val="accent1"/>
+                </a:fillRef>
+                <a:effectRef idx="0">
+                  <a:schemeClr val="accent1"/>
+                </a:effectRef>
+                <a:fontRef idx="minor">
+                  <a:schemeClr val="lt1"/>
+                </a:fontRef>
+              </p:style>
+              <p:txBody>
+                <a:bodyPr rtlCol="0" anchor="ctr"/>
+                <a:lstStyle/>
+                <a:p>
+                  <a:pPr algn="ctr"/>
+                  <a:endParaRPr lang="en-US" sz="1350"/>
+                </a:p>
+              </p:txBody>
+            </p:sp>
+            <p:sp>
+              <p:nvSpPr>
+                <p:cNvPr id="14" name="Rectangle 13"/>
+                <p:cNvSpPr/>
+                <p:nvPr/>
+              </p:nvSpPr>
+              <p:spPr>
+                <a:xfrm>
+                  <a:off x="1202120" y="3859925"/>
+                  <a:ext cx="164037" cy="276646"/>
+                </a:xfrm>
+                <a:prstGeom prst="rect">
+                  <a:avLst/>
+                </a:prstGeom>
+                <a:solidFill>
+                  <a:srgbClr val="0070C0">
+                    <a:alpha val="25000"/>
+                  </a:srgbClr>
+                </a:solidFill>
+              </p:spPr>
+              <p:style>
+                <a:lnRef idx="2">
+                  <a:schemeClr val="accent1">
+                    <a:shade val="50000"/>
+                  </a:schemeClr>
+                </a:lnRef>
+                <a:fillRef idx="1">
+                  <a:schemeClr val="accent1"/>
+                </a:fillRef>
+                <a:effectRef idx="0">
+                  <a:schemeClr val="accent1"/>
+                </a:effectRef>
+                <a:fontRef idx="minor">
+                  <a:schemeClr val="lt1"/>
+                </a:fontRef>
+              </p:style>
+              <p:txBody>
+                <a:bodyPr rtlCol="0" anchor="ctr"/>
+                <a:lstStyle/>
+                <a:p>
+                  <a:pPr algn="ctr"/>
+                  <a:endParaRPr lang="en-US" sz="1350"/>
+                </a:p>
+              </p:txBody>
+            </p:sp>
+            <p:sp>
+              <p:nvSpPr>
+                <p:cNvPr id="15" name="Rectangle 14"/>
+                <p:cNvSpPr/>
+                <p:nvPr/>
+              </p:nvSpPr>
+              <p:spPr>
+                <a:xfrm>
+                  <a:off x="3406852" y="3859925"/>
+                  <a:ext cx="529271" cy="276646"/>
+                </a:xfrm>
+                <a:prstGeom prst="rect">
+                  <a:avLst/>
+                </a:prstGeom>
+                <a:solidFill>
+                  <a:srgbClr val="0070C0">
+                    <a:alpha val="25000"/>
+                  </a:srgbClr>
+                </a:solidFill>
+              </p:spPr>
+              <p:style>
+                <a:lnRef idx="2">
+                  <a:schemeClr val="accent1">
+                    <a:shade val="50000"/>
+                  </a:schemeClr>
+                </a:lnRef>
+                <a:fillRef idx="1">
+                  <a:schemeClr val="accent1"/>
+                </a:fillRef>
+                <a:effectRef idx="0">
+                  <a:schemeClr val="accent1"/>
+                </a:effectRef>
+                <a:fontRef idx="minor">
+                  <a:schemeClr val="lt1"/>
+                </a:fontRef>
+              </p:style>
+              <p:txBody>
+                <a:bodyPr rtlCol="0" anchor="ctr"/>
+                <a:lstStyle/>
+                <a:p>
+                  <a:pPr algn="ctr"/>
+                  <a:endParaRPr lang="en-US" sz="1350"/>
+                </a:p>
+              </p:txBody>
+            </p:sp>
+            <p:sp>
+              <p:nvSpPr>
+                <p:cNvPr id="16" name="Rectangle 15"/>
+                <p:cNvSpPr/>
+                <p:nvPr/>
+              </p:nvSpPr>
+              <p:spPr>
+                <a:xfrm>
+                  <a:off x="4653454" y="3859925"/>
+                  <a:ext cx="1451930" cy="276646"/>
+                </a:xfrm>
+                <a:prstGeom prst="rect">
+                  <a:avLst/>
+                </a:prstGeom>
+                <a:solidFill>
+                  <a:srgbClr val="0070C0">
+                    <a:alpha val="25000"/>
+                  </a:srgbClr>
+                </a:solidFill>
+              </p:spPr>
+              <p:style>
+                <a:lnRef idx="2">
+                  <a:schemeClr val="accent1">
+                    <a:shade val="50000"/>
+                  </a:schemeClr>
+                </a:lnRef>
+                <a:fillRef idx="1">
+                  <a:schemeClr val="accent1"/>
+                </a:fillRef>
+                <a:effectRef idx="0">
+                  <a:schemeClr val="accent1"/>
+                </a:effectRef>
+                <a:fontRef idx="minor">
+                  <a:schemeClr val="lt1"/>
+                </a:fontRef>
+              </p:style>
+              <p:txBody>
+                <a:bodyPr rtlCol="0" anchor="ctr"/>
+                <a:lstStyle/>
+                <a:p>
+                  <a:pPr algn="ctr"/>
+                  <a:endParaRPr lang="en-US" sz="1350"/>
+                </a:p>
+              </p:txBody>
+            </p:sp>
+          </p:grpSp>
+          <p:sp>
+            <p:nvSpPr>
+              <p:cNvPr id="37" name="TextBox 36"/>
+              <p:cNvSpPr txBox="1"/>
+              <p:nvPr/>
+            </p:nvSpPr>
+            <p:spPr>
+              <a:xfrm>
+                <a:off x="568671" y="3734882"/>
+                <a:ext cx="4161147" cy="266609"/>
+              </a:xfrm>
+              <a:prstGeom prst="rect">
+                <a:avLst/>
+              </a:prstGeom>
+              <a:noFill/>
+            </p:spPr>
+            <p:txBody>
+              <a:bodyPr wrap="square" rtlCol="0">
+                <a:spAutoFit/>
+              </a:bodyPr>
+              <a:lstStyle/>
+              <a:p>
+                <a:r>
+                  <a:rPr lang="en-US" sz="2100" b="1" dirty="0"/>
+                  <a:t>ADD{</a:t>
+                </a:r>
+                <a:r>
+                  <a:rPr lang="en-US" sz="2100" b="1" dirty="0">
+                    <a:solidFill>
+                      <a:srgbClr val="00B050"/>
+                    </a:solidFill>
+                  </a:rPr>
+                  <a:t>S</a:t>
+                </a:r>
+                <a:r>
+                  <a:rPr lang="en-US" sz="2100" b="1" dirty="0"/>
+                  <a:t>} </a:t>
+                </a:r>
+                <a:r>
+                  <a:rPr lang="en-US" sz="2100" b="1" dirty="0">
+                    <a:solidFill>
+                      <a:srgbClr val="FF0000"/>
+                    </a:solidFill>
+                  </a:rPr>
+                  <a:t>Rd</a:t>
+                </a:r>
+                <a:r>
+                  <a:rPr lang="en-US" sz="2100" b="1" dirty="0"/>
+                  <a:t>,</a:t>
+                </a:r>
+                <a:r>
+                  <a:rPr lang="en-US" sz="2100" b="1" dirty="0">
+                    <a:solidFill>
+                      <a:srgbClr val="FF0000"/>
+                    </a:solidFill>
+                  </a:rPr>
+                  <a:t>Rn</a:t>
+                </a:r>
+                <a:r>
+                  <a:rPr lang="en-US" sz="2100" b="1" dirty="0"/>
+                  <a:t>,</a:t>
+                </a:r>
+                <a:r>
+                  <a:rPr lang="en-US" sz="2100" b="1" i="1" dirty="0">
+                    <a:solidFill>
+                      <a:srgbClr val="0070C0"/>
+                    </a:solidFill>
+                    <a:latin typeface="Times New Roman" panose="02020603050405020304" pitchFamily="18" charset="0"/>
+                    <a:cs typeface="Times New Roman" panose="02020603050405020304" pitchFamily="18" charset="0"/>
+                  </a:rPr>
+                  <a:t>imm12</a:t>
+                </a:r>
+              </a:p>
+            </p:txBody>
+          </p:sp>
+        </p:grpSp>
+        <p:sp>
+          <p:nvSpPr>
+            <p:cNvPr id="29" name="Rectangle 28"/>
+            <p:cNvSpPr/>
+            <p:nvPr/>
+          </p:nvSpPr>
+          <p:spPr>
+            <a:xfrm>
+              <a:off x="4221525" y="5962859"/>
+              <a:ext cx="347035" cy="596037"/>
+            </a:xfrm>
+            <a:prstGeom prst="rect">
+              <a:avLst/>
+            </a:prstGeom>
+            <a:solidFill>
+              <a:srgbClr val="00B050">
+                <a:alpha val="25000"/>
+              </a:srgbClr>
+            </a:solidFill>
+          </p:spPr>
+          <p:style>
+            <a:lnRef idx="2">
+              <a:schemeClr val="accent1">
+                <a:shade val="50000"/>
+              </a:schemeClr>
+            </a:lnRef>
+            <a:fillRef idx="1">
+              <a:schemeClr val="accent1"/>
+            </a:fillRef>
+            <a:effectRef idx="0">
+              <a:schemeClr val="accent1"/>
+            </a:effectRef>
+            <a:fontRef idx="minor">
+              <a:schemeClr val="lt1"/>
+            </a:fontRef>
+          </p:style>
+          <p:txBody>
+            <a:bodyPr rtlCol="0" anchor="ctr"/>
+            <a:lstStyle/>
+            <a:p>
+              <a:pPr algn="ctr"/>
+              <a:endParaRPr lang="en-US" sz="1350"/>
+            </a:p>
+          </p:txBody>
+        </p:sp>
+      </p:grpSp>
+      <p:graphicFrame>
+        <p:nvGraphicFramePr>
+          <p:cNvPr id="4" name="Table 3"/>
+          <p:cNvGraphicFramePr>
+            <a:graphicFrameLocks noGrp="1"/>
+          </p:cNvGraphicFramePr>
+          <p:nvPr/>
+        </p:nvGraphicFramePr>
+        <p:xfrm>
+          <a:off x="6202843" y="2584326"/>
+          <a:ext cx="4286306" cy="1234440"/>
+        </p:xfrm>
+        <a:graphic>
+          <a:graphicData uri="http://schemas.openxmlformats.org/drawingml/2006/table">
+            <a:tbl>
+              <a:tblPr firstRow="1" bandRow="1">
+                <a:tableStyleId>{073A0DAA-6AF3-43AB-8588-CEC1D06C72B9}</a:tableStyleId>
+              </a:tblPr>
+              <a:tblGrid>
+                <a:gridCol w="2143153">
+                  <a:extLst>
+                    <a:ext uri="{9D8B030D-6E8A-4147-A177-3AD203B41FA5}">
+                      <a16:colId xmlns:a16="http://schemas.microsoft.com/office/drawing/2014/main" val="3572006396"/>
+                    </a:ext>
+                  </a:extLst>
+                </a:gridCol>
+                <a:gridCol w="2143153">
+                  <a:extLst>
+                    <a:ext uri="{9D8B030D-6E8A-4147-A177-3AD203B41FA5}">
+                      <a16:colId xmlns:a16="http://schemas.microsoft.com/office/drawing/2014/main" val="1502081145"/>
+                    </a:ext>
+                  </a:extLst>
+                </a:gridCol>
+              </a:tblGrid>
+              <a:tr h="342900">
+                <a:tc>
+                  <a:txBody>
+                    <a:bodyPr/>
+                    <a:lstStyle/>
+                    <a:p>
+                      <a:pPr algn="ctr"/>
+                      <a:r>
+                        <a:rPr lang="en-US" sz="1800" dirty="0"/>
+                        <a:t>16-bit</a:t>
+                      </a:r>
+                    </a:p>
+                  </a:txBody>
+                  <a:tcPr marL="68580" marR="68580" marT="34290" marB="34290">
+                    <a:lnL w="12700" cap="flat" cmpd="sng" algn="ctr">
+                      <a:solidFill>
+                        <a:schemeClr val="tx1"/>
+                      </a:solidFill>
+                      <a:prstDash val="solid"/>
+                      <a:round/>
+                      <a:headEnd type="none" w="med" len="med"/>
+                      <a:tailEnd type="none" w="med" len="med"/>
+                    </a:lnL>
+                    <a:lnR w="12700" cap="flat" cmpd="sng" algn="ctr">
+                      <a:solidFill>
+                        <a:schemeClr val="tx1"/>
+                      </a:solidFill>
+                      <a:prstDash val="solid"/>
+                      <a:round/>
+                      <a:headEnd type="none" w="med" len="med"/>
+                      <a:tailEnd type="none" w="med" len="med"/>
+                    </a:lnR>
+                    <a:lnT w="12700" cap="flat" cmpd="sng" algn="ctr">
+                      <a:solidFill>
+                        <a:schemeClr val="tx1"/>
+                      </a:solidFill>
+                      <a:prstDash val="solid"/>
+                      <a:round/>
+                      <a:headEnd type="none" w="med" len="med"/>
+                      <a:tailEnd type="none" w="med" len="med"/>
+                    </a:lnT>
+                    <a:lnB w="12700" cap="flat" cmpd="sng" algn="ctr">
+                      <a:solidFill>
+                        <a:schemeClr val="tx1"/>
+                      </a:solidFill>
+                      <a:prstDash val="solid"/>
+                      <a:round/>
+                      <a:headEnd type="none" w="med" len="med"/>
+                      <a:tailEnd type="none" w="med" len="med"/>
+                    </a:lnB>
+                  </a:tcPr>
+                </a:tc>
+                <a:tc>
+                  <a:txBody>
+                    <a:bodyPr/>
+                    <a:lstStyle/>
+                    <a:p>
+                      <a:pPr algn="ctr"/>
+                      <a:r>
+                        <a:rPr lang="en-US" sz="1800" dirty="0"/>
+                        <a:t>32-bit</a:t>
+                      </a:r>
+                    </a:p>
+                  </a:txBody>
+                  <a:tcPr marL="68580" marR="68580" marT="34290" marB="34290">
+                    <a:lnL w="12700" cap="flat" cmpd="sng" algn="ctr">
+                      <a:solidFill>
+                        <a:schemeClr val="tx1"/>
+                      </a:solidFill>
+                      <a:prstDash val="solid"/>
+                      <a:round/>
+                      <a:headEnd type="none" w="med" len="med"/>
+                      <a:tailEnd type="none" w="med" len="med"/>
+                    </a:lnL>
+                    <a:lnR w="12700" cap="flat" cmpd="sng" algn="ctr">
+                      <a:solidFill>
+                        <a:schemeClr val="tx1"/>
+                      </a:solidFill>
+                      <a:prstDash val="solid"/>
+                      <a:round/>
+                      <a:headEnd type="none" w="med" len="med"/>
+                      <a:tailEnd type="none" w="med" len="med"/>
+                    </a:lnR>
+                    <a:lnT w="12700" cap="flat" cmpd="sng" algn="ctr">
+                      <a:solidFill>
+                        <a:schemeClr val="tx1"/>
+                      </a:solidFill>
+                      <a:prstDash val="solid"/>
+                      <a:round/>
+                      <a:headEnd type="none" w="med" len="med"/>
+                      <a:tailEnd type="none" w="med" len="med"/>
+                    </a:lnT>
+                    <a:lnB w="12700" cap="flat" cmpd="sng" algn="ctr">
+                      <a:solidFill>
+                        <a:schemeClr val="tx1"/>
+                      </a:solidFill>
+                      <a:prstDash val="solid"/>
+                      <a:round/>
+                      <a:headEnd type="none" w="med" len="med"/>
+                      <a:tailEnd type="none" w="med" len="med"/>
+                    </a:lnB>
+                  </a:tcPr>
+                </a:tc>
+                <a:extLst>
+                  <a:ext uri="{0D108BD9-81ED-4DB2-BD59-A6C34878D82A}">
+                    <a16:rowId xmlns:a16="http://schemas.microsoft.com/office/drawing/2014/main" val="4090351082"/>
+                  </a:ext>
+                </a:extLst>
+              </a:tr>
+              <a:tr h="891540">
+                <a:tc>
+                  <a:txBody>
+                    <a:bodyPr/>
+                    <a:lstStyle/>
+                    <a:p>
+                      <a:r>
+                        <a:rPr lang="en-US" sz="1800" dirty="0"/>
+                        <a:t>Registers R0-R7</a:t>
+                      </a:r>
+                    </a:p>
+                    <a:p>
+                      <a:r>
+                        <a:rPr lang="en-US" sz="1800" dirty="0"/>
+                        <a:t>3-bit constants</a:t>
+                      </a:r>
+                      <a:endParaRPr lang="en-US" sz="1800" baseline="0" dirty="0"/>
+                    </a:p>
+                    <a:p>
+                      <a:r>
+                        <a:rPr lang="en-US" sz="1800" dirty="0"/>
+                        <a:t>"S" required</a:t>
+                      </a:r>
+                    </a:p>
+                  </a:txBody>
+                  <a:tcPr marL="68580" marR="68580" marT="34290" marB="34290">
+                    <a:lnL w="12700" cap="flat" cmpd="sng" algn="ctr">
+                      <a:solidFill>
+                        <a:schemeClr val="tx1"/>
+                      </a:solidFill>
+                      <a:prstDash val="solid"/>
+                      <a:round/>
+                      <a:headEnd type="none" w="med" len="med"/>
+                      <a:tailEnd type="none" w="med" len="med"/>
+                    </a:lnL>
+                    <a:lnR w="12700" cap="flat" cmpd="sng" algn="ctr">
+                      <a:solidFill>
+                        <a:schemeClr val="tx1"/>
+                      </a:solidFill>
+                      <a:prstDash val="solid"/>
+                      <a:round/>
+                      <a:headEnd type="none" w="med" len="med"/>
+                      <a:tailEnd type="none" w="med" len="med"/>
+                    </a:lnR>
+                    <a:lnT w="12700" cap="flat" cmpd="sng" algn="ctr">
+                      <a:solidFill>
+                        <a:schemeClr val="tx1"/>
+                      </a:solidFill>
+                      <a:prstDash val="solid"/>
+                      <a:round/>
+                      <a:headEnd type="none" w="med" len="med"/>
+                      <a:tailEnd type="none" w="med" len="med"/>
+                    </a:lnT>
+                    <a:lnB w="12700" cap="flat" cmpd="sng" algn="ctr">
+                      <a:solidFill>
+                        <a:schemeClr val="tx1"/>
+                      </a:solidFill>
+                      <a:prstDash val="solid"/>
+                      <a:round/>
+                      <a:headEnd type="none" w="med" len="med"/>
+                      <a:tailEnd type="none" w="med" len="med"/>
+                    </a:lnB>
+                    <a:solidFill>
+                      <a:schemeClr val="bg1">
+                        <a:lumMod val="95000"/>
+                      </a:schemeClr>
+                    </a:solidFill>
+                  </a:tcPr>
+                </a:tc>
+                <a:tc>
+                  <a:txBody>
+                    <a:bodyPr/>
+                    <a:lstStyle/>
+                    <a:p>
+                      <a:r>
+                        <a:rPr lang="en-US" sz="1800" dirty="0"/>
+                        <a:t>Registers R0-R15</a:t>
+                      </a:r>
+                    </a:p>
+                    <a:p>
+                      <a:r>
+                        <a:rPr lang="en-US" sz="1800" dirty="0"/>
+                        <a:t>12-bit constants</a:t>
+                      </a:r>
+                    </a:p>
+                    <a:p>
+                      <a:r>
+                        <a:rPr lang="en-US" sz="1800" dirty="0"/>
+                        <a:t>"S" optional</a:t>
+                      </a:r>
+                    </a:p>
+                  </a:txBody>
+                  <a:tcPr marL="68580" marR="68580" marT="34290" marB="34290">
+                    <a:lnL w="12700" cap="flat" cmpd="sng" algn="ctr">
+                      <a:solidFill>
+                        <a:schemeClr val="tx1"/>
+                      </a:solidFill>
+                      <a:prstDash val="solid"/>
+                      <a:round/>
+                      <a:headEnd type="none" w="med" len="med"/>
+                      <a:tailEnd type="none" w="med" len="med"/>
+                    </a:lnL>
+                    <a:lnR w="12700" cap="flat" cmpd="sng" algn="ctr">
+                      <a:solidFill>
+                        <a:schemeClr val="tx1"/>
+                      </a:solidFill>
+                      <a:prstDash val="solid"/>
+                      <a:round/>
+                      <a:headEnd type="none" w="med" len="med"/>
+                      <a:tailEnd type="none" w="med" len="med"/>
+                    </a:lnR>
+                    <a:lnT w="12700" cap="flat" cmpd="sng" algn="ctr">
+                      <a:solidFill>
+                        <a:schemeClr val="tx1"/>
+                      </a:solidFill>
+                      <a:prstDash val="solid"/>
+                      <a:round/>
+                      <a:headEnd type="none" w="med" len="med"/>
+                      <a:tailEnd type="none" w="med" len="med"/>
+                    </a:lnT>
+                    <a:lnB w="12700" cap="flat" cmpd="sng" algn="ctr">
+                      <a:solidFill>
+                        <a:schemeClr val="tx1"/>
+                      </a:solidFill>
+                      <a:prstDash val="solid"/>
+                      <a:round/>
+                      <a:headEnd type="none" w="med" len="med"/>
+                      <a:tailEnd type="none" w="med" len="med"/>
+                    </a:lnB>
+                    <a:solidFill>
+                      <a:schemeClr val="bg1">
+                        <a:lumMod val="95000"/>
+                      </a:schemeClr>
+                    </a:solidFill>
+                  </a:tcPr>
+                </a:tc>
+                <a:extLst>
+                  <a:ext uri="{0D108BD9-81ED-4DB2-BD59-A6C34878D82A}">
+                    <a16:rowId xmlns:a16="http://schemas.microsoft.com/office/drawing/2014/main" val="1516577694"/>
+                  </a:ext>
+                </a:extLst>
+              </a:tr>
+            </a:tbl>
+          </a:graphicData>
+        </a:graphic>
+      </p:graphicFrame>
+      <p:cxnSp>
+        <p:nvCxnSpPr>
+          <p:cNvPr id="7" name="Straight Arrow Connector 6"/>
+          <p:cNvCxnSpPr/>
+          <p:nvPr/>
+        </p:nvCxnSpPr>
+        <p:spPr>
+          <a:xfrm flipH="1" flipV="1">
+            <a:off x="5924707" y="3204179"/>
+            <a:ext cx="332656" cy="7557"/>
+          </a:xfrm>
+          <a:prstGeom prst="straightConnector1">
+            <a:avLst/>
+          </a:prstGeom>
+          <a:ln>
+            <a:tailEnd type="triangle"/>
+          </a:ln>
+        </p:spPr>
+        <p:style>
+          <a:lnRef idx="1">
+            <a:schemeClr val="accent1"/>
+          </a:lnRef>
+          <a:fillRef idx="0">
+            <a:schemeClr val="accent1"/>
+          </a:fillRef>
+          <a:effectRef idx="0">
+            <a:schemeClr val="accent1"/>
+          </a:effectRef>
+          <a:fontRef idx="minor">
+            <a:schemeClr val="tx1"/>
+          </a:fontRef>
+        </p:style>
+      </p:cxnSp>
+      <p:cxnSp>
+        <p:nvCxnSpPr>
+          <p:cNvPr id="11" name="Straight Arrow Connector 10"/>
+          <p:cNvCxnSpPr/>
+          <p:nvPr/>
+        </p:nvCxnSpPr>
+        <p:spPr>
+          <a:xfrm flipH="1">
+            <a:off x="5335260" y="3818766"/>
+            <a:ext cx="3952323" cy="534080"/>
+          </a:xfrm>
+          <a:prstGeom prst="straightConnector1">
+            <a:avLst/>
+          </a:prstGeom>
+          <a:ln>
+            <a:tailEnd type="triangle"/>
+          </a:ln>
+        </p:spPr>
+        <p:style>
+          <a:lnRef idx="1">
+            <a:schemeClr val="accent1"/>
+          </a:lnRef>
+          <a:fillRef idx="0">
+            <a:schemeClr val="accent1"/>
+          </a:fillRef>
+          <a:effectRef idx="0">
+            <a:schemeClr val="accent1"/>
+          </a:effectRef>
+          <a:fontRef idx="minor">
+            <a:schemeClr val="tx1"/>
+          </a:fontRef>
+        </p:style>
+      </p:cxnSp>
+      <p:sp>
+        <p:nvSpPr>
+          <p:cNvPr id="2" name="TextBox 1">
+            <a:extLst>
+              <a:ext uri="{FF2B5EF4-FFF2-40B4-BE49-F238E27FC236}">
+                <a16:creationId xmlns:a16="http://schemas.microsoft.com/office/drawing/2014/main" id="{E679E529-EB23-B0BA-0E8E-16C28891E893}"/>
+              </a:ext>
+            </a:extLst>
+          </p:cNvPr>
+          <p:cNvSpPr txBox="1"/>
+          <p:nvPr/>
+        </p:nvSpPr>
+        <p:spPr>
+          <a:xfrm>
+            <a:off x="7089999" y="6149848"/>
+            <a:ext cx="748923" cy="369332"/>
+          </a:xfrm>
+          <a:prstGeom prst="rect">
+            <a:avLst/>
+          </a:prstGeom>
+          <a:noFill/>
+          <a:ln w="38100">
+            <a:solidFill>
+              <a:srgbClr val="0000FF"/>
+            </a:solidFill>
+          </a:ln>
+        </p:spPr>
+        <p:txBody>
+          <a:bodyPr wrap="none" rtlCol="0">
+            <a:spAutoFit/>
+          </a:bodyPr>
+          <a:lstStyle/>
+          <a:p>
+            <a:r>
+              <a:rPr lang="en-US" dirty="0"/>
+              <a:t>12bit </a:t>
+            </a:r>
+          </a:p>
+        </p:txBody>
+      </p:sp>
+      <p:cxnSp>
+        <p:nvCxnSpPr>
+          <p:cNvPr id="13" name="Straight Arrow Connector 12">
+            <a:extLst>
+              <a:ext uri="{FF2B5EF4-FFF2-40B4-BE49-F238E27FC236}">
+                <a16:creationId xmlns:a16="http://schemas.microsoft.com/office/drawing/2014/main" id="{FD098D2B-6D53-BBF9-9CEE-3AD6691A0190}"/>
+              </a:ext>
+            </a:extLst>
+          </p:cNvPr>
+          <p:cNvCxnSpPr>
+            <a:stCxn id="2" idx="0"/>
+            <a:endCxn id="15" idx="2"/>
+          </p:cNvCxnSpPr>
+          <p:nvPr/>
+        </p:nvCxnSpPr>
+        <p:spPr>
+          <a:xfrm flipH="1" flipV="1">
+            <a:off x="6473701" y="5108634"/>
+            <a:ext cx="990760" cy="1041214"/>
+          </a:xfrm>
+          <a:prstGeom prst="straightConnector1">
+            <a:avLst/>
+          </a:prstGeom>
+          <a:ln>
+            <a:tailEnd type="triangle"/>
+          </a:ln>
+        </p:spPr>
+        <p:style>
+          <a:lnRef idx="1">
+            <a:schemeClr val="accent1"/>
+          </a:lnRef>
+          <a:fillRef idx="0">
+            <a:schemeClr val="accent1"/>
+          </a:fillRef>
+          <a:effectRef idx="0">
+            <a:schemeClr val="accent1"/>
+          </a:effectRef>
+          <a:fontRef idx="minor">
+            <a:schemeClr val="tx1"/>
+          </a:fontRef>
+        </p:style>
+      </p:cxnSp>
+      <p:cxnSp>
+        <p:nvCxnSpPr>
+          <p:cNvPr id="18" name="Straight Arrow Connector 17">
+            <a:extLst>
+              <a:ext uri="{FF2B5EF4-FFF2-40B4-BE49-F238E27FC236}">
+                <a16:creationId xmlns:a16="http://schemas.microsoft.com/office/drawing/2014/main" id="{E7D2D08B-0C97-739E-3B77-14E8685D2CF5}"/>
+              </a:ext>
+            </a:extLst>
+          </p:cNvPr>
+          <p:cNvCxnSpPr>
+            <a:cxnSpLocks/>
+            <a:stCxn id="2" idx="0"/>
+          </p:cNvCxnSpPr>
+          <p:nvPr/>
+        </p:nvCxnSpPr>
+        <p:spPr>
+          <a:xfrm flipV="1">
+            <a:off x="7464461" y="5158140"/>
+            <a:ext cx="1278504" cy="991708"/>
+          </a:xfrm>
+          <a:prstGeom prst="straightConnector1">
+            <a:avLst/>
+          </a:prstGeom>
+          <a:ln>
+            <a:tailEnd type="triangle"/>
+          </a:ln>
+        </p:spPr>
+        <p:style>
+          <a:lnRef idx="1">
+            <a:schemeClr val="accent1"/>
+          </a:lnRef>
+          <a:fillRef idx="0">
+            <a:schemeClr val="accent1"/>
+          </a:fillRef>
+          <a:effectRef idx="0">
+            <a:schemeClr val="accent1"/>
+          </a:effectRef>
+          <a:fontRef idx="minor">
+            <a:schemeClr val="tx1"/>
+          </a:fontRef>
+        </p:style>
+      </p:cxnSp>
+    </p:spTree>
+    <p:extLst>
+      <p:ext uri="{BB962C8B-B14F-4D97-AF65-F5344CB8AC3E}">
+        <p14:creationId xmlns:p14="http://schemas.microsoft.com/office/powerpoint/2010/main" val="2573631357"/>
+      </p:ext>
+    </p:extLst>
+  </p:cSld>
+  <p:clrMapOvr>
+    <a:masterClrMapping/>
+  </p:clrMapOvr>
+</p:sld>
+</file>
+
+<file path=ppt/slides/slide11.xml><?xml version="1.0" encoding="utf-8"?>
 <p:sld xmlns:a="http://schemas.openxmlformats.org/drawingml/2006/main" xmlns:r="http://schemas.openxmlformats.org/officeDocument/2006/relationships" xmlns:p="http://schemas.openxmlformats.org/presentationml/2006/main">
   <p:cSld>
     <p:spTree>
@@ -10998,7 +12156,7 @@
 </p:sld>
 </file>
 
-<file path=ppt/slides/slide11.xml><?xml version="1.0" encoding="utf-8"?>
+<file path=ppt/slides/slide12.xml><?xml version="1.0" encoding="utf-8"?>
 <p:sld xmlns:a="http://schemas.openxmlformats.org/drawingml/2006/main" xmlns:r="http://schemas.openxmlformats.org/officeDocument/2006/relationships" xmlns:p="http://schemas.openxmlformats.org/presentationml/2006/main">
   <p:cSld>
     <p:spTree>
@@ -11093,18 +12251,6 @@
                 <a:spcPts val="1800"/>
               </a:spcBef>
             </a:pPr>
-            <a:endParaRPr lang="en-US" dirty="0">
-              <a:solidFill>
-                <a:schemeClr val="tx1"/>
-              </a:solidFill>
-            </a:endParaRPr>
-          </a:p>
-          <a:p>
-            <a:pPr>
-              <a:spcBef>
-                <a:spcPts val="1800"/>
-              </a:spcBef>
-            </a:pPr>
             <a:r>
               <a:rPr lang="en-US" dirty="0">
                 <a:solidFill>
@@ -11195,11 +12341,6 @@
               </a:rPr>
               <a:t> be 32 bits wide!</a:t>
             </a:r>
-            <a:endParaRPr lang="en-US" i="1" dirty="0">
-              <a:solidFill>
-                <a:schemeClr val="tx1"/>
-              </a:solidFill>
-            </a:endParaRPr>
           </a:p>
           <a:p>
             <a:pPr>
@@ -11225,7 +12366,7 @@
                   <a:schemeClr val="tx1"/>
                 </a:solidFill>
               </a:rPr>
-              <a:t>Use the “narrow” suffix to verify (e.g., ADD</a:t>
+              <a:t>Use the “narrow” 16-bit instruction if available (e.g., ADD</a:t>
             </a:r>
             <a:r>
               <a:rPr lang="en-US" b="1" dirty="0">
@@ -11271,7 +12412,43 @@
             </a:r>
           </a:p>
           <a:p>
-            <a:endParaRPr lang="en-US" dirty="0"/>
+            <a:pPr>
+              <a:spcBef>
+                <a:spcPts val="1800"/>
+              </a:spcBef>
+            </a:pPr>
+            <a:endParaRPr lang="en-US" dirty="0">
+              <a:solidFill>
+                <a:schemeClr val="tx1"/>
+              </a:solidFill>
+            </a:endParaRPr>
+          </a:p>
+          <a:p>
+            <a:pPr>
+              <a:spcBef>
+                <a:spcPts val="1800"/>
+              </a:spcBef>
+            </a:pPr>
+            <a:r>
+              <a:rPr lang="en-US" dirty="0">
+                <a:solidFill>
+                  <a:schemeClr val="tx1"/>
+                </a:solidFill>
+              </a:rPr>
+              <a:t>Use the “wide” 32-bit instruction (e.g., ADD</a:t>
+            </a:r>
+            <a:r>
+              <a:rPr lang="en-US" b="1" dirty="0">
+                <a:solidFill>
+                  <a:srgbClr val="FF0000"/>
+                </a:solidFill>
+              </a:rPr>
+              <a:t>.W</a:t>
+            </a:r>
+            <a:r>
+              <a:rPr lang="en-US" dirty="0"/>
+              <a:t>)</a:t>
+            </a:r>
           </a:p>
         </p:txBody>
       </p:sp>
@@ -11288,12 +12465,18 @@
 </p:sld>
 </file>
 
-<file path=ppt/slides/slide12.xml><?xml version="1.0" encoding="utf-8"?>
+<file path=ppt/slides/slide13.xml><?xml version="1.0" encoding="utf-8"?>
 <p:sld xmlns:a="http://schemas.openxmlformats.org/drawingml/2006/main" xmlns:r="http://schemas.openxmlformats.org/officeDocument/2006/relationships" xmlns:p="http://schemas.openxmlformats.org/presentationml/2006/main">
   <p:cSld>
     <p:spTree>
       <p:nvGrpSpPr>
-        <p:cNvPr id="1" name=""/>
+        <p:cNvPr id="1" name="">
+          <a:extLst>
+            <a:ext uri="{FF2B5EF4-FFF2-40B4-BE49-F238E27FC236}">
+              <a16:creationId xmlns:a16="http://schemas.microsoft.com/office/drawing/2014/main" id="{23F00892-770F-7633-70AA-BD70A8F50F74}"/>
+            </a:ext>
+          </a:extLst>
+        </p:cNvPr>
         <p:cNvGrpSpPr/>
         <p:nvPr/>
       </p:nvGrpSpPr>
@@ -11310,7 +12493,7 @@
           <p:cNvPr id="2" name="Title 1">
             <a:extLst>
               <a:ext uri="{FF2B5EF4-FFF2-40B4-BE49-F238E27FC236}">
-                <a16:creationId xmlns:a16="http://schemas.microsoft.com/office/drawing/2014/main" id="{65EA0FE0-C12B-4B4A-993E-7C314D1F5F28}"/>
+                <a16:creationId xmlns:a16="http://schemas.microsoft.com/office/drawing/2014/main" id="{93681582-1C6F-B0F0-7AA8-FF273CBD7B69}"/>
               </a:ext>
             </a:extLst>
           </p:cNvPr>
@@ -11347,7 +12530,7 @@
           <p:cNvPr id="3" name="Subtitle 2">
             <a:extLst>
               <a:ext uri="{FF2B5EF4-FFF2-40B4-BE49-F238E27FC236}">
-                <a16:creationId xmlns:a16="http://schemas.microsoft.com/office/drawing/2014/main" id="{D9355697-670B-41F3-8F1B-53B8AE6CE00E}"/>
+                <a16:creationId xmlns:a16="http://schemas.microsoft.com/office/drawing/2014/main" id="{09BC50E5-1764-0115-F479-79E4DDFCDE1A}"/>
               </a:ext>
             </a:extLst>
           </p:cNvPr>
@@ -11373,7 +12556,7 @@
     </p:spTree>
     <p:extLst>
       <p:ext uri="{BB962C8B-B14F-4D97-AF65-F5344CB8AC3E}">
-        <p14:creationId xmlns:p14="http://schemas.microsoft.com/office/powerpoint/2010/main" val="661231473"/>
+        <p14:creationId xmlns:p14="http://schemas.microsoft.com/office/powerpoint/2010/main" val="3269856286"/>
       </p:ext>
     </p:extLst>
   </p:cSld>
@@ -11383,7 +12566,7 @@
 </p:sld>
 </file>
 
-<file path=ppt/slides/slide13.xml><?xml version="1.0" encoding="utf-8"?>
+<file path=ppt/slides/slide14.xml><?xml version="1.0" encoding="utf-8"?>
 <p:sld xmlns:a="http://schemas.openxmlformats.org/drawingml/2006/main" xmlns:r="http://schemas.openxmlformats.org/officeDocument/2006/relationships" xmlns:p="http://schemas.openxmlformats.org/presentationml/2006/main">
   <p:cSld>
     <p:spTree>
@@ -11688,7 +12871,7 @@
 </p:sld>
 </file>
 
-<file path=ppt/slides/slide14.xml><?xml version="1.0" encoding="utf-8"?>
+<file path=ppt/slides/slide15.xml><?xml version="1.0" encoding="utf-8"?>
 <p:sld xmlns:a="http://schemas.openxmlformats.org/drawingml/2006/main" xmlns:r="http://schemas.openxmlformats.org/officeDocument/2006/relationships" xmlns:p="http://schemas.openxmlformats.org/presentationml/2006/main">
   <p:cSld>
     <p:spTree>
@@ -12376,7 +13559,7 @@
 </p:sld>
 </file>
 
-<file path=ppt/slides/slide15.xml><?xml version="1.0" encoding="utf-8"?>
+<file path=ppt/slides/slide16.xml><?xml version="1.0" encoding="utf-8"?>
 <p:sld xmlns:a="http://schemas.openxmlformats.org/drawingml/2006/main" xmlns:r="http://schemas.openxmlformats.org/officeDocument/2006/relationships" xmlns:p="http://schemas.openxmlformats.org/presentationml/2006/main">
   <p:cSld>
     <p:spTree>
@@ -13175,8 +14358,8 @@
         </p:nvSpPr>
         <p:spPr>
           <a:xfrm>
-            <a:off x="944537" y="5533492"/>
-            <a:ext cx="5326486" cy="461665"/>
+            <a:off x="247904" y="5928169"/>
+            <a:ext cx="5639493" cy="553998"/>
           </a:xfrm>
           <a:prstGeom prst="rect">
             <a:avLst/>
@@ -13238,7 +14421,7 @@
               <a:t> products are </a:t>
             </a:r>
             <a:r>
-              <a:rPr lang="en-US" b="1" dirty="0">
+              <a:rPr lang="en-US" sz="2400" b="1" dirty="0">
                 <a:solidFill>
                   <a:srgbClr val="FF0000"/>
                 </a:solidFill>
@@ -13260,7 +14443,7 @@
         </p:nvSpPr>
         <p:spPr>
           <a:xfrm>
-            <a:off x="6355661" y="5539245"/>
+            <a:off x="6096000" y="5954590"/>
             <a:ext cx="4114800" cy="461665"/>
           </a:xfrm>
           <a:prstGeom prst="rect">
@@ -13429,7 +14612,7 @@
         <p:spPr>
           <a:xfrm flipH="1" flipV="1">
             <a:off x="5319259" y="5002929"/>
-            <a:ext cx="4644546" cy="608269"/>
+            <a:ext cx="4359579" cy="954441"/>
           </a:xfrm>
           <a:prstGeom prst="straightConnector1">
             <a:avLst/>
@@ -13470,7 +14653,7 @@
         <p:spPr>
           <a:xfrm flipH="1" flipV="1">
             <a:off x="7655713" y="4986417"/>
-            <a:ext cx="2308092" cy="634992"/>
+            <a:ext cx="2023125" cy="952377"/>
           </a:xfrm>
           <a:prstGeom prst="straightConnector1">
             <a:avLst/>
@@ -13512,7 +14695,7 @@
         <p:spPr>
           <a:xfrm flipH="1" flipV="1">
             <a:off x="4434369" y="5002929"/>
-            <a:ext cx="1187762" cy="608269"/>
+            <a:ext cx="533131" cy="949336"/>
           </a:xfrm>
           <a:prstGeom prst="straightConnector1">
             <a:avLst/>
@@ -13555,8 +14738,8 @@
         </p:nvCxnSpPr>
         <p:spPr>
           <a:xfrm flipV="1">
-            <a:off x="5622131" y="5014749"/>
-            <a:ext cx="961898" cy="586238"/>
+            <a:off x="5142037" y="5014749"/>
+            <a:ext cx="1441992" cy="956003"/>
           </a:xfrm>
           <a:prstGeom prst="straightConnector1">
             <a:avLst/>
@@ -13596,7 +14779,7 @@
 </p:sld>
 </file>
 
-<file path=ppt/slides/slide16.xml><?xml version="1.0" encoding="utf-8"?>
+<file path=ppt/slides/slide17.xml><?xml version="1.0" encoding="utf-8"?>
 <p:sld xmlns:a="http://schemas.openxmlformats.org/drawingml/2006/main" xmlns:r="http://schemas.openxmlformats.org/officeDocument/2006/relationships" xmlns:p="http://schemas.openxmlformats.org/presentationml/2006/main">
   <p:cSld>
     <p:spTree>
@@ -14460,7 +15643,7 @@
 </p:sld>
 </file>
 
-<file path=ppt/slides/slide17.xml><?xml version="1.0" encoding="utf-8"?>
+<file path=ppt/slides/slide18.xml><?xml version="1.0" encoding="utf-8"?>
 <p:sld xmlns:a="http://schemas.openxmlformats.org/drawingml/2006/main" xmlns:r="http://schemas.openxmlformats.org/officeDocument/2006/relationships" xmlns:p="http://schemas.openxmlformats.org/presentationml/2006/main">
   <p:cSld>
     <p:spTree>
@@ -15506,7 +16689,7 @@
 </p:sld>
 </file>
 
-<file path=ppt/slides/slide18.xml><?xml version="1.0" encoding="utf-8"?>
+<file path=ppt/slides/slide19.xml><?xml version="1.0" encoding="utf-8"?>
 <p:sld xmlns:a="http://schemas.openxmlformats.org/drawingml/2006/main" xmlns:r="http://schemas.openxmlformats.org/officeDocument/2006/relationships" xmlns:p="http://schemas.openxmlformats.org/presentationml/2006/main">
   <p:cSld>
     <p:spTree>
@@ -16270,7 +17453,102 @@
 </p:sld>
 </file>
 
-<file path=ppt/slides/slide19.xml><?xml version="1.0" encoding="utf-8"?>
+<file path=ppt/slides/slide2.xml><?xml version="1.0" encoding="utf-8"?>
+<p:sld xmlns:a="http://schemas.openxmlformats.org/drawingml/2006/main" xmlns:r="http://schemas.openxmlformats.org/officeDocument/2006/relationships" xmlns:p="http://schemas.openxmlformats.org/presentationml/2006/main">
+  <p:cSld>
+    <p:spTree>
+      <p:nvGrpSpPr>
+        <p:cNvPr id="1" name=""/>
+        <p:cNvGrpSpPr/>
+        <p:nvPr/>
+      </p:nvGrpSpPr>
+      <p:grpSpPr>
+        <a:xfrm>
+          <a:off x="0" y="0"/>
+          <a:ext cx="0" cy="0"/>
+          <a:chOff x="0" y="0"/>
+          <a:chExt cx="0" cy="0"/>
+        </a:xfrm>
+      </p:grpSpPr>
+      <p:sp>
+        <p:nvSpPr>
+          <p:cNvPr id="4" name="Title 3">
+            <a:extLst>
+              <a:ext uri="{FF2B5EF4-FFF2-40B4-BE49-F238E27FC236}">
+                <a16:creationId xmlns:a16="http://schemas.microsoft.com/office/drawing/2014/main" id="{024714AB-CA8D-4FA4-92B4-5E14A654B6AB}"/>
+              </a:ext>
+            </a:extLst>
+          </p:cNvPr>
+          <p:cNvSpPr>
+            <a:spLocks noGrp="1"/>
+          </p:cNvSpPr>
+          <p:nvPr>
+            <p:ph type="ctrTitle"/>
+          </p:nvPr>
+        </p:nvSpPr>
+        <p:spPr/>
+        <p:txBody>
+          <a:bodyPr>
+            <a:normAutofit/>
+          </a:bodyPr>
+          <a:lstStyle/>
+          <a:p>
+            <a:r>
+              <a:rPr lang="en-US" dirty="0"/>
+              <a:t>Chapter 5</a:t>
+            </a:r>
+            <a:br>
+              <a:rPr lang="en-US" dirty="0"/>
+            </a:br>
+            <a:r>
+              <a:rPr lang="en-US" dirty="0"/>
+              <a:t>Integer Arithmetic</a:t>
+            </a:r>
+          </a:p>
+        </p:txBody>
+      </p:sp>
+      <p:sp>
+        <p:nvSpPr>
+          <p:cNvPr id="5" name="Subtitle 4">
+            <a:extLst>
+              <a:ext uri="{FF2B5EF4-FFF2-40B4-BE49-F238E27FC236}">
+                <a16:creationId xmlns:a16="http://schemas.microsoft.com/office/drawing/2014/main" id="{4F948820-43CA-4C1D-AFD1-5DA2F4D1EFC4}"/>
+              </a:ext>
+            </a:extLst>
+          </p:cNvPr>
+          <p:cNvSpPr>
+            <a:spLocks noGrp="1"/>
+          </p:cNvSpPr>
+          <p:nvPr>
+            <p:ph type="subTitle" idx="1"/>
+          </p:nvPr>
+        </p:nvSpPr>
+        <p:spPr/>
+        <p:txBody>
+          <a:bodyPr/>
+          <a:lstStyle/>
+          <a:p>
+            <a:r>
+              <a:rPr lang="en-US" dirty="0"/>
+              <a:t>Part 1: Addition and Subtraction</a:t>
+            </a:r>
+          </a:p>
+        </p:txBody>
+      </p:sp>
+    </p:spTree>
+    <p:extLst>
+      <p:ext uri="{BB962C8B-B14F-4D97-AF65-F5344CB8AC3E}">
+        <p14:creationId xmlns:p14="http://schemas.microsoft.com/office/powerpoint/2010/main" val="3025098875"/>
+      </p:ext>
+    </p:extLst>
+  </p:cSld>
+  <p:clrMapOvr>
+    <a:masterClrMapping/>
+  </p:clrMapOvr>
+</p:sld>
+</file>
+
+<file path=ppt/slides/slide20.xml><?xml version="1.0" encoding="utf-8"?>
 <p:sld xmlns:a="http://schemas.openxmlformats.org/drawingml/2006/main" xmlns:r="http://schemas.openxmlformats.org/officeDocument/2006/relationships" xmlns:p="http://schemas.openxmlformats.org/presentationml/2006/main">
   <p:cSld>
     <p:spTree>
@@ -18627,102 +19905,7 @@
 </p:sld>
 </file>
 
-<file path=ppt/slides/slide2.xml><?xml version="1.0" encoding="utf-8"?>
-<p:sld xmlns:a="http://schemas.openxmlformats.org/drawingml/2006/main" xmlns:r="http://schemas.openxmlformats.org/officeDocument/2006/relationships" xmlns:p="http://schemas.openxmlformats.org/presentationml/2006/main">
-  <p:cSld>
-    <p:spTree>
-      <p:nvGrpSpPr>
-        <p:cNvPr id="1" name=""/>
-        <p:cNvGrpSpPr/>
-        <p:nvPr/>
-      </p:nvGrpSpPr>
-      <p:grpSpPr>
-        <a:xfrm>
-          <a:off x="0" y="0"/>
-          <a:ext cx="0" cy="0"/>
-          <a:chOff x="0" y="0"/>
-          <a:chExt cx="0" cy="0"/>
-        </a:xfrm>
-      </p:grpSpPr>
-      <p:sp>
-        <p:nvSpPr>
-          <p:cNvPr id="4" name="Title 3">
-            <a:extLst>
-              <a:ext uri="{FF2B5EF4-FFF2-40B4-BE49-F238E27FC236}">
-                <a16:creationId xmlns:a16="http://schemas.microsoft.com/office/drawing/2014/main" id="{024714AB-CA8D-4FA4-92B4-5E14A654B6AB}"/>
-              </a:ext>
-            </a:extLst>
-          </p:cNvPr>
-          <p:cNvSpPr>
-            <a:spLocks noGrp="1"/>
-          </p:cNvSpPr>
-          <p:nvPr>
-            <p:ph type="ctrTitle"/>
-          </p:nvPr>
-        </p:nvSpPr>
-        <p:spPr/>
-        <p:txBody>
-          <a:bodyPr>
-            <a:normAutofit/>
-          </a:bodyPr>
-          <a:lstStyle/>
-          <a:p>
-            <a:r>
-              <a:rPr lang="en-US" dirty="0"/>
-              <a:t>Chapter 5</a:t>
-            </a:r>
-            <a:br>
-              <a:rPr lang="en-US" dirty="0"/>
-            </a:br>
-            <a:r>
-              <a:rPr lang="en-US" dirty="0"/>
-              <a:t>Integer Arithmetic</a:t>
-            </a:r>
-          </a:p>
-        </p:txBody>
-      </p:sp>
-      <p:sp>
-        <p:nvSpPr>
-          <p:cNvPr id="5" name="Subtitle 4">
-            <a:extLst>
-              <a:ext uri="{FF2B5EF4-FFF2-40B4-BE49-F238E27FC236}">
-                <a16:creationId xmlns:a16="http://schemas.microsoft.com/office/drawing/2014/main" id="{4F948820-43CA-4C1D-AFD1-5DA2F4D1EFC4}"/>
-              </a:ext>
-            </a:extLst>
-          </p:cNvPr>
-          <p:cNvSpPr>
-            <a:spLocks noGrp="1"/>
-          </p:cNvSpPr>
-          <p:nvPr>
-            <p:ph type="subTitle" idx="1"/>
-          </p:nvPr>
-        </p:nvSpPr>
-        <p:spPr/>
-        <p:txBody>
-          <a:bodyPr/>
-          <a:lstStyle/>
-          <a:p>
-            <a:r>
-              <a:rPr lang="en-US" dirty="0"/>
-              <a:t>Part 1: Addition and Subtraction</a:t>
-            </a:r>
-          </a:p>
-        </p:txBody>
-      </p:sp>
-    </p:spTree>
-    <p:extLst>
-      <p:ext uri="{BB962C8B-B14F-4D97-AF65-F5344CB8AC3E}">
-        <p14:creationId xmlns:p14="http://schemas.microsoft.com/office/powerpoint/2010/main" val="3025098875"/>
-      </p:ext>
-    </p:extLst>
-  </p:cSld>
-  <p:clrMapOvr>
-    <a:masterClrMapping/>
-  </p:clrMapOvr>
-</p:sld>
-</file>
-
-<file path=ppt/slides/slide20.xml><?xml version="1.0" encoding="utf-8"?>
+<file path=ppt/slides/slide21.xml><?xml version="1.0" encoding="utf-8"?>
 <p:sld xmlns:a="http://schemas.openxmlformats.org/drawingml/2006/main" xmlns:r="http://schemas.openxmlformats.org/officeDocument/2006/relationships" xmlns:p="http://schemas.openxmlformats.org/presentationml/2006/main">
   <p:cSld>
     <p:spTree>
@@ -20448,7 +21631,7 @@
 </p:sld>
 </file>
 
-<file path=ppt/slides/slide21.xml><?xml version="1.0" encoding="utf-8"?>
+<file path=ppt/slides/slide22.xml><?xml version="1.0" encoding="utf-8"?>
 <p:sld xmlns:a="http://schemas.openxmlformats.org/drawingml/2006/main" xmlns:r="http://schemas.openxmlformats.org/officeDocument/2006/relationships" xmlns:p="http://schemas.openxmlformats.org/presentationml/2006/main">
   <p:cSld>
     <p:spTree>
@@ -25024,7 +26207,7 @@
 </p:sld>
 </file>
 
-<file path=ppt/slides/slide22.xml><?xml version="1.0" encoding="utf-8"?>
+<file path=ppt/slides/slide23.xml><?xml version="1.0" encoding="utf-8"?>
 <p:sld xmlns:a="http://schemas.openxmlformats.org/drawingml/2006/main" xmlns:r="http://schemas.openxmlformats.org/officeDocument/2006/relationships" xmlns:p="http://schemas.openxmlformats.org/presentationml/2006/main">
   <p:cSld>
     <p:spTree>
@@ -25569,7 +26752,92 @@
                 <a:ea typeface="+mn-ea"/>
                 <a:cs typeface="Consolas" panose="020B0609020204030204" pitchFamily="49" charset="0"/>
               </a:rPr>
-              <a:t>	// R1    = Ahi x Blo</a:t>
+              <a:t>	// </a:t>
+            </a:r>
+            <a:r>
+              <a:rPr kumimoji="0" lang="pt-BR" sz="1800" b="1" i="0" u="none" strike="noStrike" kern="1200" cap="none" spc="0" normalizeH="0" baseline="0" noProof="0" dirty="0">
+                <a:ln>
+                  <a:noFill/>
+                </a:ln>
+                <a:solidFill>
+                  <a:srgbClr val="0000FF"/>
+                </a:solidFill>
+                <a:effectLst/>
+                <a:uLnTx/>
+                <a:uFillTx/>
+                <a:latin typeface="Consolas" panose="020B0609020204030204" pitchFamily="49" charset="0"/>
+                <a:ea typeface="+mn-ea"/>
+                <a:cs typeface="Consolas" panose="020B0609020204030204" pitchFamily="49" charset="0"/>
+              </a:rPr>
+              <a:t>R1</a:t>
+            </a:r>
+            <a:r>
+              <a:rPr kumimoji="0" lang="pt-BR" sz="1800" b="0" i="0" u="none" strike="noStrike" kern="1200" cap="none" spc="0" normalizeH="0" baseline="0" noProof="0" dirty="0">
+                <a:ln>
+                  <a:noFill/>
+                </a:ln>
+                <a:solidFill>
+                  <a:srgbClr val="000000"/>
+                </a:solidFill>
+                <a:effectLst/>
+                <a:uLnTx/>
+                <a:uFillTx/>
+                <a:latin typeface="Consolas" panose="020B0609020204030204" pitchFamily="49" charset="0"/>
+                <a:ea typeface="+mn-ea"/>
+                <a:cs typeface="Consolas" panose="020B0609020204030204" pitchFamily="49" charset="0"/>
+              </a:rPr>
+              <a:t>    = </a:t>
+            </a:r>
+            <a:r>
+              <a:rPr kumimoji="0" lang="pt-BR" sz="1800" b="1" i="0" u="none" strike="noStrike" kern="1200" cap="none" spc="0" normalizeH="0" baseline="0" noProof="0" dirty="0">
+                <a:ln>
+                  <a:noFill/>
+                </a:ln>
+                <a:solidFill>
+                  <a:srgbClr val="0000FF"/>
+                </a:solidFill>
+                <a:effectLst/>
+                <a:uLnTx/>
+                <a:uFillTx/>
+                <a:latin typeface="Consolas" panose="020B0609020204030204" pitchFamily="49" charset="0"/>
+                <a:ea typeface="+mn-ea"/>
+                <a:cs typeface="Consolas" panose="020B0609020204030204" pitchFamily="49" charset="0"/>
+              </a:rPr>
+              <a:t>AHI</a:t>
+            </a:r>
+            <a:r>
+              <a:rPr kumimoji="0" lang="pt-BR" sz="1800" b="0" i="0" u="none" strike="noStrike" kern="1200" cap="none" spc="0" normalizeH="0" baseline="0" noProof="0" dirty="0">
+                <a:ln>
+                  <a:noFill/>
+                </a:ln>
+                <a:solidFill>
+                  <a:srgbClr val="000000"/>
+                </a:solidFill>
+                <a:effectLst/>
+                <a:uLnTx/>
+                <a:uFillTx/>
+                <a:latin typeface="Consolas" panose="020B0609020204030204" pitchFamily="49" charset="0"/>
+                <a:ea typeface="+mn-ea"/>
+                <a:cs typeface="Consolas" panose="020B0609020204030204" pitchFamily="49" charset="0"/>
+              </a:rPr>
+              <a:t> x </a:t>
+            </a:r>
+            <a:r>
+              <a:rPr kumimoji="0" lang="pt-BR" sz="1800" b="1" i="0" u="none" strike="noStrike" kern="1200" cap="none" spc="0" normalizeH="0" baseline="0" noProof="0" dirty="0">
+                <a:ln>
+                  <a:noFill/>
+                </a:ln>
+                <a:solidFill>
+                  <a:srgbClr val="FF0000"/>
+                </a:solidFill>
+                <a:effectLst/>
+                <a:uLnTx/>
+                <a:uFillTx/>
+                <a:latin typeface="Consolas" panose="020B0609020204030204" pitchFamily="49" charset="0"/>
+                <a:ea typeface="+mn-ea"/>
+                <a:cs typeface="Consolas" panose="020B0609020204030204" pitchFamily="49" charset="0"/>
+              </a:rPr>
+              <a:t>BLO</a:t>
             </a:r>
           </a:p>
           <a:p>
@@ -25743,7 +27011,92 @@
                 <a:ea typeface="+mn-ea"/>
                 <a:cs typeface="Consolas" panose="020B0609020204030204" pitchFamily="49" charset="0"/>
               </a:rPr>
-              <a:t>	// R1   += Alo x Bhi</a:t>
+              <a:t>	// </a:t>
+            </a:r>
+            <a:r>
+              <a:rPr kumimoji="0" lang="pt-BR" sz="1800" b="1" i="0" u="none" strike="noStrike" kern="1200" cap="none" spc="0" normalizeH="0" baseline="0" noProof="0" dirty="0">
+                <a:ln>
+                  <a:noFill/>
+                </a:ln>
+                <a:solidFill>
+                  <a:srgbClr val="0000FF"/>
+                </a:solidFill>
+                <a:effectLst/>
+                <a:uLnTx/>
+                <a:uFillTx/>
+                <a:latin typeface="Consolas" panose="020B0609020204030204" pitchFamily="49" charset="0"/>
+                <a:ea typeface="+mn-ea"/>
+                <a:cs typeface="Consolas" panose="020B0609020204030204" pitchFamily="49" charset="0"/>
+              </a:rPr>
+              <a:t>R1</a:t>
+            </a:r>
+            <a:r>
+              <a:rPr kumimoji="0" lang="pt-BR" sz="1800" b="0" i="0" u="none" strike="noStrike" kern="1200" cap="none" spc="0" normalizeH="0" baseline="0" noProof="0" dirty="0">
+                <a:ln>
+                  <a:noFill/>
+                </a:ln>
+                <a:solidFill>
+                  <a:srgbClr val="000000"/>
+                </a:solidFill>
+                <a:effectLst/>
+                <a:uLnTx/>
+                <a:uFillTx/>
+                <a:latin typeface="Consolas" panose="020B0609020204030204" pitchFamily="49" charset="0"/>
+                <a:ea typeface="+mn-ea"/>
+                <a:cs typeface="Consolas" panose="020B0609020204030204" pitchFamily="49" charset="0"/>
+              </a:rPr>
+              <a:t>   += </a:t>
+            </a:r>
+            <a:r>
+              <a:rPr kumimoji="0" lang="pt-BR" sz="1800" b="1" i="0" u="none" strike="noStrike" kern="1200" cap="none" spc="0" normalizeH="0" baseline="0" noProof="0" dirty="0">
+                <a:ln>
+                  <a:noFill/>
+                </a:ln>
+                <a:solidFill>
+                  <a:srgbClr val="0000FF"/>
+                </a:solidFill>
+                <a:effectLst/>
+                <a:uLnTx/>
+                <a:uFillTx/>
+                <a:latin typeface="Consolas" panose="020B0609020204030204" pitchFamily="49" charset="0"/>
+                <a:ea typeface="+mn-ea"/>
+                <a:cs typeface="Consolas" panose="020B0609020204030204" pitchFamily="49" charset="0"/>
+              </a:rPr>
+              <a:t>ALO</a:t>
+            </a:r>
+            <a:r>
+              <a:rPr kumimoji="0" lang="pt-BR" sz="1800" b="0" i="0" u="none" strike="noStrike" kern="1200" cap="none" spc="0" normalizeH="0" baseline="0" noProof="0" dirty="0">
+                <a:ln>
+                  <a:noFill/>
+                </a:ln>
+                <a:solidFill>
+                  <a:srgbClr val="000000"/>
+                </a:solidFill>
+                <a:effectLst/>
+                <a:uLnTx/>
+                <a:uFillTx/>
+                <a:latin typeface="Consolas" panose="020B0609020204030204" pitchFamily="49" charset="0"/>
+                <a:ea typeface="+mn-ea"/>
+                <a:cs typeface="Consolas" panose="020B0609020204030204" pitchFamily="49" charset="0"/>
+              </a:rPr>
+              <a:t> x </a:t>
+            </a:r>
+            <a:r>
+              <a:rPr kumimoji="0" lang="pt-BR" sz="1800" b="1" i="0" u="none" strike="noStrike" kern="1200" cap="none" spc="0" normalizeH="0" baseline="0" noProof="0" dirty="0">
+                <a:ln>
+                  <a:noFill/>
+                </a:ln>
+                <a:solidFill>
+                  <a:srgbClr val="FF0000"/>
+                </a:solidFill>
+                <a:effectLst/>
+                <a:uLnTx/>
+                <a:uFillTx/>
+                <a:latin typeface="Consolas" panose="020B0609020204030204" pitchFamily="49" charset="0"/>
+                <a:ea typeface="+mn-ea"/>
+                <a:cs typeface="Consolas" panose="020B0609020204030204" pitchFamily="49" charset="0"/>
+              </a:rPr>
+              <a:t>BHI</a:t>
             </a:r>
           </a:p>
           <a:p>
@@ -25919,7 +27272,126 @@
                 <a:ea typeface="+mn-ea"/>
                 <a:cs typeface="Consolas" panose="020B0609020204030204" pitchFamily="49" charset="0"/>
               </a:rPr>
-              <a:t>	// R2.R0 = Alo x Blo</a:t>
+              <a:t>	// </a:t>
+            </a:r>
+            <a:r>
+              <a:rPr kumimoji="0" lang="pt-BR" sz="1800" b="1" i="0" u="none" strike="noStrike" kern="1200" cap="none" spc="0" normalizeH="0" baseline="0" noProof="0" dirty="0">
+                <a:ln>
+                  <a:noFill/>
+                </a:ln>
+                <a:solidFill>
+                  <a:srgbClr val="FF0000"/>
+                </a:solidFill>
+                <a:effectLst/>
+                <a:uLnTx/>
+                <a:uFillTx/>
+                <a:latin typeface="Consolas" panose="020B0609020204030204" pitchFamily="49" charset="0"/>
+                <a:ea typeface="+mn-ea"/>
+                <a:cs typeface="Consolas" panose="020B0609020204030204" pitchFamily="49" charset="0"/>
+              </a:rPr>
+              <a:t>R2</a:t>
+            </a:r>
+            <a:r>
+              <a:rPr kumimoji="0" lang="pt-BR" sz="1800" b="0" i="0" u="none" strike="noStrike" kern="1200" cap="none" spc="0" normalizeH="0" baseline="0" noProof="0" dirty="0">
+                <a:ln>
+                  <a:noFill/>
+                </a:ln>
+                <a:solidFill>
+                  <a:srgbClr val="000000"/>
+                </a:solidFill>
+                <a:effectLst/>
+                <a:uLnTx/>
+                <a:uFillTx/>
+                <a:latin typeface="Consolas" panose="020B0609020204030204" pitchFamily="49" charset="0"/>
+                <a:ea typeface="+mn-ea"/>
+                <a:cs typeface="Consolas" panose="020B0609020204030204" pitchFamily="49" charset="0"/>
+              </a:rPr>
+              <a:t>.</a:t>
+            </a:r>
+            <a:r>
+              <a:rPr kumimoji="0" lang="pt-BR" sz="1800" b="1" i="0" u="none" strike="noStrike" kern="1200" cap="none" spc="0" normalizeH="0" baseline="0" noProof="0" dirty="0">
+                <a:ln>
+                  <a:noFill/>
+                </a:ln>
+                <a:solidFill>
+                  <a:srgbClr val="0000FF"/>
+                </a:solidFill>
+                <a:effectLst/>
+                <a:uLnTx/>
+                <a:uFillTx/>
+                <a:latin typeface="Consolas" panose="020B0609020204030204" pitchFamily="49" charset="0"/>
+                <a:ea typeface="+mn-ea"/>
+                <a:cs typeface="Consolas" panose="020B0609020204030204" pitchFamily="49" charset="0"/>
+              </a:rPr>
+              <a:t>R0</a:t>
+            </a:r>
+            <a:r>
+              <a:rPr kumimoji="0" lang="pt-BR" sz="1800" b="0" i="0" u="none" strike="noStrike" kern="1200" cap="none" spc="0" normalizeH="0" baseline="0" noProof="0" dirty="0">
+                <a:ln>
+                  <a:noFill/>
+                </a:ln>
+                <a:solidFill>
+                  <a:srgbClr val="000000"/>
+                </a:solidFill>
+                <a:effectLst/>
+                <a:uLnTx/>
+                <a:uFillTx/>
+                <a:latin typeface="Consolas" panose="020B0609020204030204" pitchFamily="49" charset="0"/>
+                <a:ea typeface="+mn-ea"/>
+                <a:cs typeface="Consolas" panose="020B0609020204030204" pitchFamily="49" charset="0"/>
+              </a:rPr>
+              <a:t> = </a:t>
+            </a:r>
+            <a:r>
+              <a:rPr kumimoji="0" lang="pt-BR" sz="1800" b="1" i="0" u="none" strike="noStrike" kern="1200" cap="none" spc="0" normalizeH="0" baseline="0" noProof="0" dirty="0">
+                <a:ln>
+                  <a:noFill/>
+                </a:ln>
+                <a:solidFill>
+                  <a:srgbClr val="0000FF"/>
+                </a:solidFill>
+                <a:effectLst/>
+                <a:uLnTx/>
+                <a:uFillTx/>
+                <a:latin typeface="Consolas" panose="020B0609020204030204" pitchFamily="49" charset="0"/>
+                <a:ea typeface="+mn-ea"/>
+                <a:cs typeface="Consolas" panose="020B0609020204030204" pitchFamily="49" charset="0"/>
+              </a:rPr>
+              <a:t>ALO</a:t>
+            </a:r>
+            <a:r>
+              <a:rPr kumimoji="0" lang="pt-BR" sz="1800" b="0" i="0" u="none" strike="noStrike" kern="1200" cap="none" spc="0" normalizeH="0" baseline="0" noProof="0" dirty="0">
+                <a:ln>
+                  <a:noFill/>
+                </a:ln>
+                <a:solidFill>
+                  <a:srgbClr val="000000"/>
+                </a:solidFill>
+                <a:effectLst/>
+                <a:uLnTx/>
+                <a:uFillTx/>
+                <a:latin typeface="Consolas" panose="020B0609020204030204" pitchFamily="49" charset="0"/>
+                <a:ea typeface="+mn-ea"/>
+                <a:cs typeface="Consolas" panose="020B0609020204030204" pitchFamily="49" charset="0"/>
+              </a:rPr>
+              <a:t> x </a:t>
+            </a:r>
+            <a:r>
+              <a:rPr kumimoji="0" lang="pt-BR" sz="1800" b="1" i="0" u="none" strike="noStrike" kern="1200" cap="none" spc="0" normalizeH="0" baseline="0" noProof="0" dirty="0">
+                <a:ln>
+                  <a:noFill/>
+                </a:ln>
+                <a:solidFill>
+                  <a:srgbClr val="FF0000"/>
+                </a:solidFill>
+                <a:effectLst/>
+                <a:uLnTx/>
+                <a:uFillTx/>
+                <a:latin typeface="Consolas" panose="020B0609020204030204" pitchFamily="49" charset="0"/>
+                <a:ea typeface="+mn-ea"/>
+                <a:cs typeface="Consolas" panose="020B0609020204030204" pitchFamily="49" charset="0"/>
+              </a:rPr>
+              <a:t>BLO</a:t>
             </a:r>
           </a:p>
           <a:p>
@@ -26059,7 +27531,92 @@
                 <a:ea typeface="+mn-ea"/>
                 <a:cs typeface="Consolas" panose="020B0609020204030204" pitchFamily="49" charset="0"/>
               </a:rPr>
-              <a:t>	// R1   += MSHalf of Alo x Blo</a:t>
+              <a:t>	// </a:t>
+            </a:r>
+            <a:r>
+              <a:rPr kumimoji="0" lang="pt-BR" sz="1800" b="1" i="0" u="none" strike="noStrike" kern="1200" cap="none" spc="0" normalizeH="0" baseline="0" noProof="0" dirty="0">
+                <a:ln>
+                  <a:noFill/>
+                </a:ln>
+                <a:solidFill>
+                  <a:srgbClr val="0000FF"/>
+                </a:solidFill>
+                <a:effectLst/>
+                <a:uLnTx/>
+                <a:uFillTx/>
+                <a:latin typeface="Consolas" panose="020B0609020204030204" pitchFamily="49" charset="0"/>
+                <a:ea typeface="+mn-ea"/>
+                <a:cs typeface="Consolas" panose="020B0609020204030204" pitchFamily="49" charset="0"/>
+              </a:rPr>
+              <a:t>R1</a:t>
+            </a:r>
+            <a:r>
+              <a:rPr kumimoji="0" lang="pt-BR" sz="1800" b="0" i="0" u="none" strike="noStrike" kern="1200" cap="none" spc="0" normalizeH="0" baseline="0" noProof="0" dirty="0">
+                <a:ln>
+                  <a:noFill/>
+                </a:ln>
+                <a:solidFill>
+                  <a:srgbClr val="000000"/>
+                </a:solidFill>
+                <a:effectLst/>
+                <a:uLnTx/>
+                <a:uFillTx/>
+                <a:latin typeface="Consolas" panose="020B0609020204030204" pitchFamily="49" charset="0"/>
+                <a:ea typeface="+mn-ea"/>
+                <a:cs typeface="Consolas" panose="020B0609020204030204" pitchFamily="49" charset="0"/>
+              </a:rPr>
+              <a:t>   += MSHalf of </a:t>
+            </a:r>
+            <a:r>
+              <a:rPr kumimoji="0" lang="pt-BR" sz="1800" b="1" i="0" u="none" strike="noStrike" kern="1200" cap="none" spc="0" normalizeH="0" baseline="0" noProof="0" dirty="0">
+                <a:ln>
+                  <a:noFill/>
+                </a:ln>
+                <a:solidFill>
+                  <a:srgbClr val="0000FF"/>
+                </a:solidFill>
+                <a:effectLst/>
+                <a:uLnTx/>
+                <a:uFillTx/>
+                <a:latin typeface="Consolas" panose="020B0609020204030204" pitchFamily="49" charset="0"/>
+                <a:ea typeface="+mn-ea"/>
+                <a:cs typeface="Consolas" panose="020B0609020204030204" pitchFamily="49" charset="0"/>
+              </a:rPr>
+              <a:t>ALO</a:t>
+            </a:r>
+            <a:r>
+              <a:rPr kumimoji="0" lang="pt-BR" sz="1800" b="0" i="0" u="none" strike="noStrike" kern="1200" cap="none" spc="0" normalizeH="0" baseline="0" noProof="0" dirty="0">
+                <a:ln>
+                  <a:noFill/>
+                </a:ln>
+                <a:solidFill>
+                  <a:srgbClr val="000000"/>
+                </a:solidFill>
+                <a:effectLst/>
+                <a:uLnTx/>
+                <a:uFillTx/>
+                <a:latin typeface="Consolas" panose="020B0609020204030204" pitchFamily="49" charset="0"/>
+                <a:ea typeface="+mn-ea"/>
+                <a:cs typeface="Consolas" panose="020B0609020204030204" pitchFamily="49" charset="0"/>
+              </a:rPr>
+              <a:t> x </a:t>
+            </a:r>
+            <a:r>
+              <a:rPr kumimoji="0" lang="pt-BR" sz="1800" b="1" i="0" u="none" strike="noStrike" kern="1200" cap="none" spc="0" normalizeH="0" baseline="0" noProof="0" dirty="0">
+                <a:ln>
+                  <a:noFill/>
+                </a:ln>
+                <a:solidFill>
+                  <a:srgbClr val="FF0000"/>
+                </a:solidFill>
+                <a:effectLst/>
+                <a:uLnTx/>
+                <a:uFillTx/>
+                <a:latin typeface="Consolas" panose="020B0609020204030204" pitchFamily="49" charset="0"/>
+                <a:ea typeface="+mn-ea"/>
+                <a:cs typeface="Consolas" panose="020B0609020204030204" pitchFamily="49" charset="0"/>
+              </a:rPr>
+              <a:t>BLO</a:t>
             </a:r>
           </a:p>
           <a:p>
@@ -26191,6 +27748,85 @@
           </a:p>
         </p:txBody>
       </p:sp>
+      <p:sp>
+        <p:nvSpPr>
+          <p:cNvPr id="4" name="TextBox 3">
+            <a:extLst>
+              <a:ext uri="{FF2B5EF4-FFF2-40B4-BE49-F238E27FC236}">
+                <a16:creationId xmlns:a16="http://schemas.microsoft.com/office/drawing/2014/main" id="{78F42A76-BBE9-093E-9FF7-4617A05A3194}"/>
+              </a:ext>
+            </a:extLst>
+          </p:cNvPr>
+          <p:cNvSpPr txBox="1"/>
+          <p:nvPr/>
+        </p:nvSpPr>
+        <p:spPr>
+          <a:xfrm>
+            <a:off x="5840083" y="5909094"/>
+            <a:ext cx="3871573" cy="369332"/>
+          </a:xfrm>
+          <a:prstGeom prst="rect">
+            <a:avLst/>
+          </a:prstGeom>
+          <a:noFill/>
+        </p:spPr>
+        <p:txBody>
+          <a:bodyPr wrap="none" rtlCol="0">
+            <a:spAutoFit/>
+          </a:bodyPr>
+          <a:lstStyle/>
+          <a:p>
+            <a:pPr lvl="0"/>
+            <a:r>
+              <a:rPr lang="en-US" dirty="0" err="1"/>
+              <a:t>MSHalf</a:t>
+            </a:r>
+            <a:r>
+              <a:rPr lang="en-US" dirty="0"/>
+              <a:t> = Most Significant Halfword</a:t>
+            </a:r>
+          </a:p>
+        </p:txBody>
+      </p:sp>
+      <p:cxnSp>
+        <p:nvCxnSpPr>
+          <p:cNvPr id="6" name="Straight Arrow Connector 5">
+            <a:extLst>
+              <a:ext uri="{FF2B5EF4-FFF2-40B4-BE49-F238E27FC236}">
+                <a16:creationId xmlns:a16="http://schemas.microsoft.com/office/drawing/2014/main" id="{ACA7B540-2F5A-40D4-A193-6FA3B17B7A11}"/>
+              </a:ext>
+            </a:extLst>
+          </p:cNvPr>
+          <p:cNvCxnSpPr/>
+          <p:nvPr/>
+        </p:nvCxnSpPr>
+        <p:spPr>
+          <a:xfrm flipV="1">
+            <a:off x="6357668" y="4796287"/>
+            <a:ext cx="534838" cy="1112807"/>
+          </a:xfrm>
+          <a:prstGeom prst="straightConnector1">
+            <a:avLst/>
+          </a:prstGeom>
+          <a:ln>
+            <a:tailEnd type="triangle"/>
+          </a:ln>
+        </p:spPr>
+        <p:style>
+          <a:lnRef idx="1">
+            <a:schemeClr val="accent1"/>
+          </a:lnRef>
+          <a:fillRef idx="0">
+            <a:schemeClr val="accent1"/>
+          </a:fillRef>
+          <a:effectRef idx="0">
+            <a:schemeClr val="accent1"/>
+          </a:effectRef>
+          <a:fontRef idx="minor">
+            <a:schemeClr val="tx1"/>
+          </a:fontRef>
+        </p:style>
+      </p:cxnSp>
     </p:spTree>
     <p:extLst>
       <p:ext uri="{BB962C8B-B14F-4D97-AF65-F5344CB8AC3E}">
@@ -26204,7 +27840,7 @@
 </p:sld>
 </file>
 
-<file path=ppt/slides/slide23.xml><?xml version="1.0" encoding="utf-8"?>
+<file path=ppt/slides/slide24.xml><?xml version="1.0" encoding="utf-8"?>
 <p:sld xmlns:a="http://schemas.openxmlformats.org/drawingml/2006/main" xmlns:r="http://schemas.openxmlformats.org/officeDocument/2006/relationships" xmlns:p="http://schemas.openxmlformats.org/presentationml/2006/main">
   <p:cSld>
     <p:spTree>
@@ -29034,7 +30670,7 @@
 </p:sld>
 </file>
 
-<file path=ppt/slides/slide24.xml><?xml version="1.0" encoding="utf-8"?>
+<file path=ppt/slides/slide25.xml><?xml version="1.0" encoding="utf-8"?>
 <p:sld xmlns:a="http://schemas.openxmlformats.org/drawingml/2006/main" xmlns:r="http://schemas.openxmlformats.org/officeDocument/2006/relationships" xmlns:p="http://schemas.openxmlformats.org/presentationml/2006/main">
   <p:cSld>
     <p:spTree>
@@ -29078,15 +30714,21 @@
           </a:p>
         </p:txBody>
       </p:sp>
-      <mc:AlternateContent xmlns:mc="http://schemas.openxmlformats.org/markup-compatibility/2006" xmlns:a14="http://schemas.microsoft.com/office/drawing/2010/main">
-        <mc:Choice Requires="a14">
+      <mc:AlternateContent xmlns:mc="http://schemas.openxmlformats.org/markup-compatibility/2006">
+        <mc:Choice xmlns:a14="http://schemas.microsoft.com/office/drawing/2010/main" Requires="a14">
           <p:graphicFrame>
             <p:nvGraphicFramePr>
               <p:cNvPr id="3" name="Table 2"/>
               <p:cNvGraphicFramePr>
                 <a:graphicFrameLocks noGrp="1"/>
               </p:cNvGraphicFramePr>
-              <p:nvPr/>
+              <p:nvPr>
+                <p:extLst>
+                  <p:ext uri="{D42A27DB-BD31-4B8C-83A1-F6EECF244321}">
+                    <p14:modId xmlns:p14="http://schemas.microsoft.com/office/powerpoint/2010/main" val="2583990598"/>
+                  </p:ext>
+                </p:extLst>
+              </p:nvPr>
             </p:nvGraphicFramePr>
             <p:xfrm>
               <a:off x="1981201" y="1722120"/>
@@ -29347,7 +30989,10 @@
                             <a:t>MUL R3,</a:t>
                           </a:r>
                           <a:r>
-                            <a:rPr lang="en-US" sz="2000" baseline="0" dirty="0">
+                            <a:rPr lang="en-US" sz="2000" b="1" baseline="0" dirty="0">
+                              <a:solidFill>
+                                <a:srgbClr val="0000FF"/>
+                              </a:solidFill>
                               <a:latin typeface="Consolas" panose="020B0609020204030204" pitchFamily="49" charset="0"/>
                             </a:rPr>
                             <a:t>R1,R2</a:t>
@@ -29478,7 +31123,16 @@
                             <a:rPr lang="pt-BR" sz="2000" dirty="0">
                               <a:latin typeface="Consolas" panose="020B0609020204030204" pitchFamily="49" charset="0"/>
                             </a:rPr>
-                            <a:t>	R2,R3,R0,R1</a:t>
+                            <a:t>	R2,R3,</a:t>
+                          </a:r>
+                          <a:r>
+                            <a:rPr lang="pt-BR" sz="2000" b="1" dirty="0">
+                              <a:solidFill>
+                                <a:srgbClr val="0000FF"/>
+                              </a:solidFill>
+                              <a:latin typeface="Consolas" panose="020B0609020204030204" pitchFamily="49" charset="0"/>
+                            </a:rPr>
+                            <a:t>R0,R1</a:t>
                           </a:r>
                         </a:p>
                         <a:p>
@@ -29582,9 +31236,21 @@
                           </a:pPr>
                           <a:r>
                             <a:rPr lang="pt-BR" sz="2000" dirty="0">
+                              <a:solidFill>
+                                <a:schemeClr val="tx1"/>
+                              </a:solidFill>
                               <a:latin typeface="Consolas" panose="020B0609020204030204" pitchFamily="49" charset="0"/>
                             </a:rPr>
-                            <a:t>UMULL	R4,R5,R0,R2</a:t>
+                            <a:t>UMULL	R4,R5,</a:t>
+                          </a:r>
+                          <a:r>
+                            <a:rPr lang="pt-BR" sz="2000" b="1" dirty="0">
+                              <a:solidFill>
+                                <a:srgbClr val="0000FF"/>
+                              </a:solidFill>
+                              <a:latin typeface="Consolas" panose="020B0609020204030204" pitchFamily="49" charset="0"/>
+                            </a:rPr>
+                            <a:t>R0,R2</a:t>
                           </a:r>
                         </a:p>
                         <a:p>
@@ -29595,19 +31261,31 @@
                           </a:pPr>
                           <a:r>
                             <a:rPr lang="pt-BR" sz="2000" dirty="0">
+                              <a:solidFill>
+                                <a:schemeClr val="tx1"/>
+                              </a:solidFill>
                               <a:latin typeface="Consolas" panose="020B0609020204030204" pitchFamily="49" charset="0"/>
                             </a:rPr>
-                            <a:t>MLA	R5,R1,R2</a:t>
+                            <a:t>MLA	R5,</a:t>
                           </a:r>
                           <a:r>
-                            <a:rPr lang="pt-BR" sz="2000">
+                            <a:rPr lang="pt-BR" sz="2000" b="1" dirty="0">
+                              <a:solidFill>
+                                <a:srgbClr val="0000FF"/>
+                              </a:solidFill>
+                              <a:latin typeface="Consolas" panose="020B0609020204030204" pitchFamily="49" charset="0"/>
+                            </a:rPr>
+                            <a:t>R1,R2</a:t>
+                          </a:r>
+                          <a:r>
+                            <a:rPr lang="pt-BR" sz="2000" dirty="0">
+                              <a:solidFill>
+                                <a:schemeClr val="tx1"/>
+                              </a:solidFill>
                               <a:latin typeface="Consolas" panose="020B0609020204030204" pitchFamily="49" charset="0"/>
                             </a:rPr>
                             <a:t>,R5</a:t>
                           </a:r>
-                          <a:endParaRPr lang="pt-BR" sz="2000" dirty="0">
-                            <a:latin typeface="Consolas" panose="020B0609020204030204" pitchFamily="49" charset="0"/>
-                          </a:endParaRPr>
                         </a:p>
                         <a:p>
                           <a:pPr marL="122238" indent="0" algn="l">
@@ -29620,9 +31298,30 @@
                           </a:pPr>
                           <a:r>
                             <a:rPr lang="pt-BR" sz="2000" dirty="0">
+                              <a:solidFill>
+                                <a:schemeClr val="tx1"/>
+                              </a:solidFill>
                               <a:latin typeface="Consolas" panose="020B0609020204030204" pitchFamily="49" charset="0"/>
                             </a:rPr>
-                            <a:t>MLA	R5,R0,R3,R5</a:t>
+                            <a:t>MLA	R5,</a:t>
+                          </a:r>
+                          <a:r>
+                            <a:rPr lang="pt-BR" sz="2000" b="1" dirty="0">
+                              <a:solidFill>
+                                <a:srgbClr val="0000FF"/>
+                              </a:solidFill>
+                              <a:latin typeface="Consolas" panose="020B0609020204030204" pitchFamily="49" charset="0"/>
+                            </a:rPr>
+                            <a:t>R0,R3</a:t>
+                          </a:r>
+                          <a:r>
+                            <a:rPr lang="pt-BR" sz="2000" dirty="0">
+                              <a:solidFill>
+                                <a:schemeClr val="tx1"/>
+                              </a:solidFill>
+                              <a:latin typeface="Consolas" panose="020B0609020204030204" pitchFamily="49" charset="0"/>
+                            </a:rPr>
+                            <a:t>,R5</a:t>
                           </a:r>
                         </a:p>
                         <a:p>
@@ -29641,6 +31340,9 @@
                                   <m:dPr>
                                     <m:ctrlPr>
                                       <a:rPr lang="en-US" sz="2000" b="0" i="1" baseline="0" smtClean="0">
+                                        <a:solidFill>
+                                          <a:schemeClr val="tx1"/>
+                                        </a:solidFill>
                                         <a:latin typeface="Cambria Math" panose="02040503050406030204" pitchFamily="18" charset="0"/>
                                       </a:rPr>
                                     </m:ctrlPr>
@@ -29648,30 +31350,45 @@
                                   <m:e>
                                     <m:r>
                                       <a:rPr lang="en-US" sz="2000" b="0" i="1" baseline="0" smtClean="0">
+                                        <a:solidFill>
+                                          <a:schemeClr val="tx1"/>
+                                        </a:solidFill>
                                         <a:latin typeface="Cambria Math" panose="02040503050406030204" pitchFamily="18" charset="0"/>
                                       </a:rPr>
                                       <m:t>𝑠𝑖𝑔𝑛𝑒𝑑</m:t>
                                     </m:r>
                                     <m:r>
                                       <a:rPr lang="en-US" sz="2000" b="0" i="1" baseline="0" smtClean="0">
+                                        <a:solidFill>
+                                          <a:schemeClr val="tx1"/>
+                                        </a:solidFill>
                                         <a:latin typeface="Cambria Math" panose="02040503050406030204" pitchFamily="18" charset="0"/>
                                       </a:rPr>
                                       <m:t> </m:t>
                                     </m:r>
                                     <m:r>
                                       <a:rPr lang="en-US" sz="2000" b="0" i="1" baseline="0" smtClean="0">
+                                        <a:solidFill>
+                                          <a:schemeClr val="tx1"/>
+                                        </a:solidFill>
                                         <a:latin typeface="Cambria Math" panose="02040503050406030204" pitchFamily="18" charset="0"/>
                                       </a:rPr>
                                       <m:t>𝑜𝑟</m:t>
                                     </m:r>
                                     <m:r>
                                       <a:rPr lang="en-US" sz="2000" b="0" i="1" baseline="0" smtClean="0">
+                                        <a:solidFill>
+                                          <a:schemeClr val="tx1"/>
+                                        </a:solidFill>
                                         <a:latin typeface="Cambria Math" panose="02040503050406030204" pitchFamily="18" charset="0"/>
                                       </a:rPr>
                                       <m:t> </m:t>
                                     </m:r>
                                     <m:r>
                                       <a:rPr lang="en-US" sz="2000" b="0" i="1" baseline="0" smtClean="0">
+                                        <a:solidFill>
+                                          <a:schemeClr val="tx1"/>
+                                        </a:solidFill>
                                         <a:latin typeface="Cambria Math" panose="02040503050406030204" pitchFamily="18" charset="0"/>
                                       </a:rPr>
                                       <m:t>𝑢𝑛𝑠𝑖𝑔𝑛𝑒𝑑</m:t>
@@ -29682,6 +31399,9 @@
                             </m:oMathPara>
                           </a14:m>
                           <a:endParaRPr lang="en-US" sz="2000" dirty="0">
+                            <a:solidFill>
+                              <a:schemeClr val="tx1"/>
+                            </a:solidFill>
                             <a:latin typeface="Consolas" panose="020B0609020204030204" pitchFamily="49" charset="0"/>
                           </a:endParaRPr>
                         </a:p>
@@ -29765,7 +31485,16 @@
                             <a:rPr lang="pt-BR" sz="2000" dirty="0">
                               <a:latin typeface="Consolas" panose="020B0609020204030204" pitchFamily="49" charset="0"/>
                             </a:rPr>
-                            <a:t>	R2,R3,R0,R1</a:t>
+                            <a:t>	R2,R3,</a:t>
+                          </a:r>
+                          <a:r>
+                            <a:rPr lang="pt-BR" sz="2000" b="1" dirty="0">
+                              <a:solidFill>
+                                <a:srgbClr val="0000FF"/>
+                              </a:solidFill>
+                              <a:latin typeface="Consolas" panose="020B0609020204030204" pitchFamily="49" charset="0"/>
+                            </a:rPr>
+                            <a:t>R0,R1</a:t>
                           </a:r>
                         </a:p>
                         <a:p>
@@ -29879,12 +31608,25 @@
                               <a:latin typeface="Consolas" panose="020B0609020204030204" pitchFamily="49" charset="0"/>
                               <a:sym typeface="Wingdings" panose="05000000000000000000" pitchFamily="2" charset="2"/>
                             </a:rPr>
-                            <a:t>=R1</a:t>
+                            <a:t>=</a:t>
+                          </a:r>
+                          <a:r>
+                            <a:rPr lang="en-US" sz="2000" b="1" dirty="0">
+                              <a:solidFill>
+                                <a:srgbClr val="0000FF"/>
+                              </a:solidFill>
+                              <a:latin typeface="Consolas" panose="020B0609020204030204" pitchFamily="49" charset="0"/>
+                              <a:sym typeface="Wingdings" panose="05000000000000000000" pitchFamily="2" charset="2"/>
+                            </a:rPr>
+                            <a:t>R1</a:t>
                           </a:r>
                           <a14:m>
                             <m:oMath xmlns:m="http://schemas.openxmlformats.org/officeDocument/2006/math">
                               <m:r>
-                                <a:rPr lang="en-US" sz="2000" b="0" i="0" dirty="0" smtClean="0">
+                                <a:rPr lang="en-US" sz="2000" b="1" i="0" dirty="0" smtClean="0">
+                                  <a:solidFill>
+                                    <a:srgbClr val="0000FF"/>
+                                  </a:solidFill>
                                   <a:latin typeface="Cambria Math" panose="02040503050406030204" pitchFamily="18" charset="0"/>
                                   <a:ea typeface="Cambria Math" panose="02040503050406030204" pitchFamily="18" charset="0"/>
                                   <a:sym typeface="Wingdings" panose="05000000000000000000" pitchFamily="2" charset="2"/>
@@ -29892,31 +31634,29 @@
                                 <m:t> </m:t>
                               </m:r>
                               <m:r>
-                                <a:rPr lang="en-US" sz="2000" i="1" dirty="0" smtClean="0">
+                                <a:rPr lang="en-US" sz="2000" b="1" i="1" dirty="0" smtClean="0">
+                                  <a:solidFill>
+                                    <a:srgbClr val="0000FF"/>
+                                  </a:solidFill>
                                   <a:latin typeface="Cambria Math" panose="02040503050406030204" pitchFamily="18" charset="0"/>
                                   <a:ea typeface="Cambria Math" panose="02040503050406030204" pitchFamily="18" charset="0"/>
                                   <a:sym typeface="Wingdings" panose="05000000000000000000" pitchFamily="2" charset="2"/>
                                 </a:rPr>
-                                <m:t>×</m:t>
-                              </m:r>
-                              <m:r>
-                                <a:rPr lang="en-US" sz="2000" b="0" i="1" dirty="0" smtClean="0">
-                                  <a:latin typeface="Cambria Math" panose="02040503050406030204" pitchFamily="18" charset="0"/>
-                                  <a:ea typeface="Cambria Math" panose="02040503050406030204" pitchFamily="18" charset="0"/>
-                                  <a:sym typeface="Wingdings" panose="05000000000000000000" pitchFamily="2" charset="2"/>
-                                </a:rPr>
-                                <m:t> </m:t>
+                                <m:t>× </m:t>
                               </m:r>
                             </m:oMath>
                           </a14:m>
                           <a:r>
-                            <a:rPr lang="en-US" sz="2000" dirty="0">
+                            <a:rPr lang="en-US" sz="2000" b="1" dirty="0">
+                              <a:solidFill>
+                                <a:srgbClr val="0000FF"/>
+                              </a:solidFill>
                               <a:latin typeface="Consolas" panose="020B0609020204030204" pitchFamily="49" charset="0"/>
                               <a:sym typeface="Wingdings" panose="05000000000000000000" pitchFamily="2" charset="2"/>
                             </a:rPr>
                             <a:t>R2</a:t>
                           </a:r>
-                          <a:endParaRPr lang="en-US" sz="2000" dirty="0">
+                          <a:endParaRPr lang="en-US" sz="2000" b="1" dirty="0">
                             <a:latin typeface="Consolas" panose="020B0609020204030204" pitchFamily="49" charset="0"/>
                           </a:endParaRPr>
                         </a:p>
@@ -29977,12 +31717,24 @@
                             <a:rPr lang="en-US" sz="2000" dirty="0">
                               <a:sym typeface="Wingdings" panose="05000000000000000000" pitchFamily="2" charset="2"/>
                             </a:rPr>
-                            <a:t>=R0 </a:t>
+                            <a:t>=</a:t>
+                          </a:r>
+                          <a:r>
+                            <a:rPr lang="en-US" sz="2000" b="1" dirty="0">
+                              <a:solidFill>
+                                <a:srgbClr val="0000FF"/>
+                              </a:solidFill>
+                              <a:sym typeface="Wingdings" panose="05000000000000000000" pitchFamily="2" charset="2"/>
+                            </a:rPr>
+                            <a:t>R0 </a:t>
                           </a:r>
                           <a14:m>
                             <m:oMath xmlns:m="http://schemas.openxmlformats.org/officeDocument/2006/math">
                               <m:r>
-                                <a:rPr lang="en-US" sz="2000" i="1" dirty="0" smtClean="0">
+                                <a:rPr lang="en-US" sz="2000" b="1" i="1" dirty="0" smtClean="0">
+                                  <a:solidFill>
+                                    <a:srgbClr val="0000FF"/>
+                                  </a:solidFill>
                                   <a:latin typeface="Cambria Math" panose="02040503050406030204" pitchFamily="18" charset="0"/>
                                   <a:ea typeface="Cambria Math" panose="02040503050406030204" pitchFamily="18" charset="0"/>
                                   <a:sym typeface="Wingdings" panose="05000000000000000000" pitchFamily="2" charset="2"/>
@@ -29992,12 +31744,15 @@
                             </m:oMath>
                           </a14:m>
                           <a:r>
-                            <a:rPr lang="en-US" sz="2000" dirty="0">
+                            <a:rPr lang="en-US" sz="2000" b="1" dirty="0">
+                              <a:solidFill>
+                                <a:srgbClr val="0000FF"/>
+                              </a:solidFill>
                               <a:sym typeface="Wingdings" panose="05000000000000000000" pitchFamily="2" charset="2"/>
                             </a:rPr>
                             <a:t> R1</a:t>
                           </a:r>
-                          <a:endParaRPr lang="en-US" sz="2000" dirty="0"/>
+                          <a:endParaRPr lang="en-US" sz="2000" b="1" dirty="0"/>
                         </a:p>
                       </a:txBody>
                       <a:tcPr anchor="ctr">
@@ -30059,12 +31814,25 @@
                               <a:latin typeface="Consolas" panose="020B0609020204030204" pitchFamily="49" charset="0"/>
                               <a:sym typeface="Wingdings" panose="05000000000000000000" pitchFamily="2" charset="2"/>
                             </a:rPr>
-                            <a:t>=R1.R0</a:t>
+                            <a:t>=R1.</a:t>
+                          </a:r>
+                          <a:r>
+                            <a:rPr lang="en-US" sz="2000" b="1" dirty="0">
+                              <a:solidFill>
+                                <a:srgbClr val="0000FF"/>
+                              </a:solidFill>
+                              <a:latin typeface="Consolas" panose="020B0609020204030204" pitchFamily="49" charset="0"/>
+                              <a:sym typeface="Wingdings" panose="05000000000000000000" pitchFamily="2" charset="2"/>
+                            </a:rPr>
+                            <a:t>R0</a:t>
                           </a:r>
                           <a14:m>
                             <m:oMath xmlns:m="http://schemas.openxmlformats.org/officeDocument/2006/math">
                               <m:r>
-                                <a:rPr lang="en-US" sz="2000" b="0" i="0" dirty="0" smtClean="0">
+                                <a:rPr lang="en-US" sz="2000" b="1" i="0" dirty="0" smtClean="0">
+                                  <a:solidFill>
+                                    <a:srgbClr val="0000FF"/>
+                                  </a:solidFill>
                                   <a:latin typeface="Cambria Math" panose="02040503050406030204" pitchFamily="18" charset="0"/>
                                   <a:ea typeface="Cambria Math" panose="02040503050406030204" pitchFamily="18" charset="0"/>
                                   <a:sym typeface="Wingdings" panose="05000000000000000000" pitchFamily="2" charset="2"/>
@@ -30072,29 +31840,34 @@
                                 <m:t> </m:t>
                               </m:r>
                               <m:r>
-                                <a:rPr lang="en-US" sz="2000" i="1" dirty="0" smtClean="0">
+                                <a:rPr lang="en-US" sz="2000" b="1" i="1" dirty="0" smtClean="0">
+                                  <a:solidFill>
+                                    <a:srgbClr val="0000FF"/>
+                                  </a:solidFill>
                                   <a:latin typeface="Cambria Math" panose="02040503050406030204" pitchFamily="18" charset="0"/>
                                   <a:ea typeface="Cambria Math" panose="02040503050406030204" pitchFamily="18" charset="0"/>
                                   <a:sym typeface="Wingdings" panose="05000000000000000000" pitchFamily="2" charset="2"/>
                                 </a:rPr>
-                                <m:t>×</m:t>
-                              </m:r>
-                              <m:r>
-                                <a:rPr lang="en-US" sz="2000" b="0" i="1" dirty="0" smtClean="0">
-                                  <a:latin typeface="Cambria Math" panose="02040503050406030204" pitchFamily="18" charset="0"/>
-                                  <a:ea typeface="Cambria Math" panose="02040503050406030204" pitchFamily="18" charset="0"/>
-                                  <a:sym typeface="Wingdings" panose="05000000000000000000" pitchFamily="2" charset="2"/>
-                                </a:rPr>
-                                <m:t> </m:t>
+                                <m:t>× </m:t>
                               </m:r>
                             </m:oMath>
                           </a14:m>
+                          <a:r>
+                            <a:rPr lang="en-US" sz="2000" b="1" dirty="0">
+                              <a:solidFill>
+                                <a:srgbClr val="0000FF"/>
+                              </a:solidFill>
+                              <a:latin typeface="Consolas" panose="020B0609020204030204" pitchFamily="49" charset="0"/>
+                              <a:sym typeface="Wingdings" panose="05000000000000000000" pitchFamily="2" charset="2"/>
+                            </a:rPr>
+                            <a:t>R3</a:t>
+                          </a:r>
                           <a:r>
                             <a:rPr lang="en-US" sz="2000" dirty="0">
                               <a:latin typeface="Consolas" panose="020B0609020204030204" pitchFamily="49" charset="0"/>
                               <a:sym typeface="Wingdings" panose="05000000000000000000" pitchFamily="2" charset="2"/>
                             </a:rPr>
-                            <a:t>R3.R2</a:t>
+                            <a:t>.R2</a:t>
                           </a:r>
                           <a:endParaRPr lang="en-US" sz="2000" dirty="0">
                             <a:latin typeface="Consolas" panose="020B0609020204030204" pitchFamily="49" charset="0"/>
@@ -30154,7 +31927,7 @@
             </a:graphic>
           </p:graphicFrame>
         </mc:Choice>
-        <mc:Fallback xmlns="">
+        <mc:Fallback>
           <p:graphicFrame>
             <p:nvGraphicFramePr>
               <p:cNvPr id="3" name="Table 2"/>
@@ -30164,7 +31937,7 @@
               <p:nvPr>
                 <p:extLst>
                   <p:ext uri="{D42A27DB-BD31-4B8C-83A1-F6EECF244321}">
-                    <p14:modId xmlns:p14="http://schemas.microsoft.com/office/powerpoint/2010/main" val="1180062191"/>
+                    <p14:modId xmlns:p14="http://schemas.microsoft.com/office/powerpoint/2010/main" val="2583990598"/>
                   </p:ext>
                 </p:extLst>
               </p:nvPr>
@@ -30841,7 +32614,7 @@
 </p:sld>
 </file>
 
-<file path=ppt/slides/slide25.xml><?xml version="1.0" encoding="utf-8"?>
+<file path=ppt/slides/slide26.xml><?xml version="1.0" encoding="utf-8"?>
 <p:sld xmlns:a="http://schemas.openxmlformats.org/drawingml/2006/main" xmlns:r="http://schemas.openxmlformats.org/officeDocument/2006/relationships" xmlns:p="http://schemas.openxmlformats.org/presentationml/2006/main">
   <p:cSld>
     <p:spTree>
@@ -30934,7 +32707,7 @@
 </p:sld>
 </file>
 
-<file path=ppt/slides/slide26.xml><?xml version="1.0" encoding="utf-8"?>
+<file path=ppt/slides/slide27.xml><?xml version="1.0" encoding="utf-8"?>
 <p:sld xmlns:a="http://schemas.openxmlformats.org/drawingml/2006/main" xmlns:r="http://schemas.openxmlformats.org/officeDocument/2006/relationships" xmlns:p="http://schemas.openxmlformats.org/presentationml/2006/main">
   <p:cSld>
     <p:spTree>
@@ -31468,7 +33241,7 @@
 </p:sld>
 </file>
 
-<file path=ppt/slides/slide27.xml><?xml version="1.0" encoding="utf-8"?>
+<file path=ppt/slides/slide28.xml><?xml version="1.0" encoding="utf-8"?>
 <p:sld xmlns:a="http://schemas.openxmlformats.org/drawingml/2006/main" xmlns:r="http://schemas.openxmlformats.org/officeDocument/2006/relationships" xmlns:p="http://schemas.openxmlformats.org/presentationml/2006/main">
   <p:cSld>
     <p:spTree>
@@ -33556,7 +35329,7 @@
 </p:sld>
 </file>
 
-<file path=ppt/slides/slide28.xml><?xml version="1.0" encoding="utf-8"?>
+<file path=ppt/slides/slide29.xml><?xml version="1.0" encoding="utf-8"?>
 <p:sld xmlns:a="http://schemas.openxmlformats.org/drawingml/2006/main" xmlns:r="http://schemas.openxmlformats.org/officeDocument/2006/relationships" xmlns:p="http://schemas.openxmlformats.org/presentationml/2006/main">
   <p:cSld>
     <p:spTree>
@@ -34488,7 +36261,564 @@
 </p:sld>
 </file>
 
-<file path=ppt/slides/slide29.xml><?xml version="1.0" encoding="utf-8"?>
+<file path=ppt/slides/slide3.xml><?xml version="1.0" encoding="utf-8"?>
+<p:sld xmlns:a="http://schemas.openxmlformats.org/drawingml/2006/main" xmlns:r="http://schemas.openxmlformats.org/officeDocument/2006/relationships" xmlns:p="http://schemas.openxmlformats.org/presentationml/2006/main">
+  <p:cSld>
+    <p:spTree>
+      <p:nvGrpSpPr>
+        <p:cNvPr id="1" name=""/>
+        <p:cNvGrpSpPr/>
+        <p:nvPr/>
+      </p:nvGrpSpPr>
+      <p:grpSpPr>
+        <a:xfrm>
+          <a:off x="0" y="0"/>
+          <a:ext cx="0" cy="0"/>
+          <a:chOff x="0" y="0"/>
+          <a:chExt cx="0" cy="0"/>
+        </a:xfrm>
+      </p:grpSpPr>
+      <p:sp>
+        <p:nvSpPr>
+          <p:cNvPr id="2" name="Title 1"/>
+          <p:cNvSpPr>
+            <a:spLocks noGrp="1"/>
+          </p:cNvSpPr>
+          <p:nvPr>
+            <p:ph type="title"/>
+          </p:nvPr>
+        </p:nvSpPr>
+        <p:spPr>
+          <a:xfrm>
+            <a:off x="940527" y="726230"/>
+            <a:ext cx="7136673" cy="666899"/>
+          </a:xfrm>
+        </p:spPr>
+        <p:txBody>
+          <a:bodyPr/>
+          <a:lstStyle/>
+          <a:p>
+            <a:r>
+              <a:rPr lang="en-US" dirty="0"/>
+              <a:t>ADDITION AND SUBTRACTION</a:t>
+            </a:r>
+          </a:p>
+        </p:txBody>
+      </p:sp>
+      <p:sp>
+        <p:nvSpPr>
+          <p:cNvPr id="5" name="TextBox 4"/>
+          <p:cNvSpPr txBox="1"/>
+          <p:nvPr/>
+        </p:nvSpPr>
+        <p:spPr>
+          <a:xfrm>
+            <a:off x="5390583" y="2101586"/>
+            <a:ext cx="1283576" cy="2246769"/>
+          </a:xfrm>
+          <a:prstGeom prst="rect">
+            <a:avLst/>
+          </a:prstGeom>
+          <a:noFill/>
+        </p:spPr>
+        <p:txBody>
+          <a:bodyPr wrap="square" rtlCol="0">
+            <a:spAutoFit/>
+          </a:bodyPr>
+          <a:lstStyle/>
+          <a:p>
+            <a:pPr algn="ctr">
+              <a:tabLst>
+                <a:tab pos="3086100" algn="l"/>
+                <a:tab pos="5715000" algn="l"/>
+              </a:tabLst>
+            </a:pPr>
+            <a:r>
+              <a:rPr lang="en-US" sz="2800" i="1" dirty="0"/>
+              <a:t>Binary</a:t>
+            </a:r>
+          </a:p>
+          <a:p>
+            <a:pPr>
+              <a:tabLst>
+                <a:tab pos="3086100" algn="l"/>
+                <a:tab pos="5715000" algn="l"/>
+              </a:tabLst>
+            </a:pPr>
+            <a:endParaRPr lang="en-US" sz="2800" i="1" dirty="0"/>
+          </a:p>
+          <a:p>
+            <a:pPr>
+              <a:tabLst>
+                <a:tab pos="571500" algn="r"/>
+                <a:tab pos="3886200" algn="r"/>
+                <a:tab pos="6686550" algn="r"/>
+              </a:tabLst>
+            </a:pPr>
+            <a:r>
+              <a:rPr lang="en-US" sz="2800" dirty="0"/>
+              <a:t>  	0011</a:t>
+            </a:r>
+          </a:p>
+          <a:p>
+            <a:pPr>
+              <a:tabLst>
+                <a:tab pos="571500" algn="r"/>
+                <a:tab pos="3886200" algn="r"/>
+                <a:tab pos="6686550" algn="r"/>
+              </a:tabLst>
+            </a:pPr>
+            <a:r>
+              <a:rPr lang="en-US" sz="2800" dirty="0"/>
+              <a:t>+</a:t>
+            </a:r>
+            <a:r>
+              <a:rPr lang="en-US" sz="2800" u="sng" dirty="0"/>
+              <a:t>1010</a:t>
+            </a:r>
+          </a:p>
+          <a:p>
+            <a:pPr>
+              <a:tabLst>
+                <a:tab pos="857250" algn="r"/>
+                <a:tab pos="4000500" algn="r"/>
+                <a:tab pos="6858000" algn="r"/>
+              </a:tabLst>
+            </a:pPr>
+            <a:r>
+              <a:rPr lang="en-US" sz="2800" dirty="0"/>
+              <a:t>	  1101</a:t>
+            </a:r>
+            <a:r>
+              <a:rPr lang="en-US" sz="2800" baseline="-25000" dirty="0"/>
+              <a:t>2</a:t>
+            </a:r>
+            <a:endParaRPr lang="en-US" sz="2800" dirty="0"/>
+          </a:p>
+        </p:txBody>
+      </p:sp>
+      <p:grpSp>
+        <p:nvGrpSpPr>
+          <p:cNvPr id="12" name="Group 11"/>
+          <p:cNvGrpSpPr/>
+          <p:nvPr/>
+        </p:nvGrpSpPr>
+        <p:grpSpPr>
+          <a:xfrm>
+            <a:off x="4438569" y="5026231"/>
+            <a:ext cx="3794760" cy="1015663"/>
+            <a:chOff x="1620391" y="4175686"/>
+            <a:chExt cx="3794760" cy="1015663"/>
+          </a:xfrm>
+          <a:solidFill>
+            <a:schemeClr val="accent4">
+              <a:lumMod val="20000"/>
+              <a:lumOff val="80000"/>
+            </a:schemeClr>
+          </a:solidFill>
+        </p:grpSpPr>
+        <p:sp>
+          <p:nvSpPr>
+            <p:cNvPr id="10" name="TextBox 9"/>
+            <p:cNvSpPr txBox="1"/>
+            <p:nvPr/>
+          </p:nvSpPr>
+          <p:spPr>
+            <a:xfrm>
+              <a:off x="1620391" y="4175686"/>
+              <a:ext cx="3794760" cy="1015663"/>
+            </a:xfrm>
+            <a:prstGeom prst="rect">
+              <a:avLst/>
+            </a:prstGeom>
+            <a:grpFill/>
+            <a:ln/>
+          </p:spPr>
+          <p:style>
+            <a:lnRef idx="1">
+              <a:schemeClr val="accent2"/>
+            </a:lnRef>
+            <a:fillRef idx="2">
+              <a:schemeClr val="accent2"/>
+            </a:fillRef>
+            <a:effectRef idx="1">
+              <a:schemeClr val="accent2"/>
+            </a:effectRef>
+            <a:fontRef idx="minor">
+              <a:schemeClr val="dk1"/>
+            </a:fontRef>
+          </p:style>
+          <p:txBody>
+            <a:bodyPr wrap="square" tIns="91440" bIns="91440" rtlCol="0">
+              <a:spAutoFit/>
+            </a:bodyPr>
+            <a:lstStyle/>
+            <a:p>
+              <a:pPr marL="1027113" lvl="1"/>
+              <a:r>
+                <a:rPr lang="en-US" dirty="0"/>
+                <a:t>A single ADD (or SUB) instruction works for both </a:t>
+              </a:r>
+              <a:r>
+                <a:rPr lang="en-US" b="1" dirty="0">
+                  <a:solidFill>
+                    <a:srgbClr val="92D050"/>
+                  </a:solidFill>
+                </a:rPr>
+                <a:t>unsigned</a:t>
+              </a:r>
+              <a:r>
+                <a:rPr lang="en-US" dirty="0"/>
+                <a:t> and </a:t>
+              </a:r>
+              <a:r>
+                <a:rPr lang="en-US" b="1" dirty="0">
+                  <a:solidFill>
+                    <a:srgbClr val="FF0000"/>
+                  </a:solidFill>
+                </a:rPr>
+                <a:t>2’s comp</a:t>
+              </a:r>
+              <a:r>
+                <a:rPr lang="en-US" dirty="0"/>
+                <a:t>.</a:t>
+              </a:r>
+            </a:p>
+          </p:txBody>
+        </p:sp>
+        <p:pic>
+          <p:nvPicPr>
+            <p:cNvPr id="11" name="Picture 10" descr="http://www.aamu.edu/campuslife/living-on-campus/residentialLife/SiteAssets/pages/default/Warning_sign.png"/>
+            <p:cNvPicPr>
+              <a:picLocks noChangeAspect="1" noChangeArrowheads="1"/>
+            </p:cNvPicPr>
+            <p:nvPr/>
+          </p:nvPicPr>
+          <p:blipFill>
+            <a:blip r:embed="rId2" cstate="print">
+              <a:extLst>
+                <a:ext uri="{28A0092B-C50C-407E-A947-70E740481C1C}">
+                  <a14:useLocalDpi xmlns:a14="http://schemas.microsoft.com/office/drawing/2010/main" val="0"/>
+                </a:ext>
+              </a:extLst>
+            </a:blip>
+            <a:srcRect/>
+            <a:stretch>
+              <a:fillRect/>
+            </a:stretch>
+          </p:blipFill>
+          <p:spPr bwMode="auto">
+            <a:xfrm flipH="1">
+              <a:off x="1620391" y="4264417"/>
+              <a:ext cx="971826" cy="838200"/>
+            </a:xfrm>
+            <a:prstGeom prst="rect">
+              <a:avLst/>
+            </a:prstGeom>
+            <a:grpFill/>
+          </p:spPr>
+        </p:pic>
+      </p:grpSp>
+      <p:sp>
+        <p:nvSpPr>
+          <p:cNvPr id="22" name="TextBox 21"/>
+          <p:cNvSpPr txBox="1"/>
+          <p:nvPr/>
+        </p:nvSpPr>
+        <p:spPr>
+          <a:xfrm>
+            <a:off x="2057400" y="2101585"/>
+            <a:ext cx="1905000" cy="2246769"/>
+          </a:xfrm>
+          <a:prstGeom prst="rect">
+            <a:avLst/>
+          </a:prstGeom>
+          <a:noFill/>
+        </p:spPr>
+        <p:txBody>
+          <a:bodyPr wrap="square" rtlCol="0">
+            <a:spAutoFit/>
+          </a:bodyPr>
+          <a:lstStyle/>
+          <a:p>
+            <a:r>
+              <a:rPr lang="en-US" sz="2800" b="1" dirty="0">
+                <a:solidFill>
+                  <a:srgbClr val="92D050"/>
+                </a:solidFill>
+              </a:rPr>
+              <a:t>Unsigned</a:t>
+            </a:r>
+          </a:p>
+          <a:p>
+            <a:r>
+              <a:rPr lang="en-US" sz="2800" i="1" dirty="0"/>
+              <a:t> </a:t>
+            </a:r>
+          </a:p>
+          <a:p>
+            <a:r>
+              <a:rPr lang="en-US" sz="2800" dirty="0">
+                <a:latin typeface="Consolas" panose="020B0609020204030204" pitchFamily="49" charset="0"/>
+              </a:rPr>
+              <a:t>   3</a:t>
+            </a:r>
+          </a:p>
+          <a:p>
+            <a:r>
+              <a:rPr lang="en-US" sz="2800" dirty="0">
+                <a:latin typeface="Consolas" panose="020B0609020204030204" pitchFamily="49" charset="0"/>
+              </a:rPr>
+              <a:t> </a:t>
+            </a:r>
+            <a:r>
+              <a:rPr lang="en-US" sz="2800" u="sng" dirty="0">
+                <a:latin typeface="Consolas" panose="020B0609020204030204" pitchFamily="49" charset="0"/>
+              </a:rPr>
+              <a:t>+10</a:t>
+            </a:r>
+          </a:p>
+          <a:p>
+            <a:r>
+              <a:rPr lang="en-US" sz="2800" dirty="0">
+                <a:latin typeface="Consolas" panose="020B0609020204030204" pitchFamily="49" charset="0"/>
+              </a:rPr>
+              <a:t>  13</a:t>
+            </a:r>
+            <a:r>
+              <a:rPr lang="en-US" sz="2800" baseline="-25000" dirty="0">
+                <a:latin typeface="Consolas" panose="020B0609020204030204" pitchFamily="49" charset="0"/>
+              </a:rPr>
+              <a:t>10</a:t>
+            </a:r>
+          </a:p>
+        </p:txBody>
+      </p:sp>
+      <p:sp>
+        <p:nvSpPr>
+          <p:cNvPr id="23" name="TextBox 22"/>
+          <p:cNvSpPr txBox="1"/>
+          <p:nvPr/>
+        </p:nvSpPr>
+        <p:spPr>
+          <a:xfrm>
+            <a:off x="7821856" y="2108310"/>
+            <a:ext cx="3166986" cy="2246769"/>
+          </a:xfrm>
+          <a:prstGeom prst="rect">
+            <a:avLst/>
+          </a:prstGeom>
+          <a:noFill/>
+        </p:spPr>
+        <p:txBody>
+          <a:bodyPr wrap="square" rtlCol="0">
+            <a:spAutoFit/>
+          </a:bodyPr>
+          <a:lstStyle/>
+          <a:p>
+            <a:r>
+              <a:rPr lang="en-US" sz="2800" i="1" dirty="0"/>
+              <a:t>  </a:t>
+            </a:r>
+            <a:r>
+              <a:rPr lang="en-US" sz="2800" b="1" dirty="0">
+                <a:solidFill>
+                  <a:srgbClr val="FF0000"/>
+                </a:solidFill>
+              </a:rPr>
+              <a:t>2’s Complement </a:t>
+            </a:r>
+          </a:p>
+          <a:p>
+            <a:r>
+              <a:rPr lang="en-US" sz="2800" i="1" dirty="0"/>
+              <a:t> </a:t>
+            </a:r>
+          </a:p>
+          <a:p>
+            <a:r>
+              <a:rPr lang="en-US" sz="2800" dirty="0">
+                <a:latin typeface="Consolas" panose="020B0609020204030204" pitchFamily="49" charset="0"/>
+              </a:rPr>
+              <a:t>   (+3)</a:t>
+            </a:r>
+          </a:p>
+          <a:p>
+            <a:r>
+              <a:rPr lang="en-US" sz="2800" dirty="0">
+                <a:latin typeface="Consolas" panose="020B0609020204030204" pitchFamily="49" charset="0"/>
+              </a:rPr>
+              <a:t>  </a:t>
+            </a:r>
+            <a:r>
+              <a:rPr lang="en-US" sz="2800" u="sng" dirty="0">
+                <a:latin typeface="Consolas" panose="020B0609020204030204" pitchFamily="49" charset="0"/>
+              </a:rPr>
+              <a:t>+(-6)</a:t>
+            </a:r>
+          </a:p>
+          <a:p>
+            <a:r>
+              <a:rPr lang="en-US" sz="2800" dirty="0">
+                <a:latin typeface="Consolas" panose="020B0609020204030204" pitchFamily="49" charset="0"/>
+              </a:rPr>
+              <a:t>    -3</a:t>
+            </a:r>
+            <a:r>
+              <a:rPr lang="en-US" sz="2800" baseline="-25000" dirty="0">
+                <a:latin typeface="Consolas" panose="020B0609020204030204" pitchFamily="49" charset="0"/>
+              </a:rPr>
+              <a:t>10</a:t>
+            </a:r>
+          </a:p>
+        </p:txBody>
+      </p:sp>
+      <p:cxnSp>
+        <p:nvCxnSpPr>
+          <p:cNvPr id="34" name="Straight Arrow Connector 33"/>
+          <p:cNvCxnSpPr/>
+          <p:nvPr/>
+        </p:nvCxnSpPr>
+        <p:spPr>
+          <a:xfrm>
+            <a:off x="6915150" y="3503268"/>
+            <a:ext cx="906706" cy="0"/>
+          </a:xfrm>
+          <a:prstGeom prst="straightConnector1">
+            <a:avLst/>
+          </a:prstGeom>
+          <a:ln w="76200">
+            <a:solidFill>
+              <a:srgbClr val="FF0000"/>
+            </a:solidFill>
+            <a:tailEnd type="triangle"/>
+          </a:ln>
+        </p:spPr>
+        <p:style>
+          <a:lnRef idx="1">
+            <a:schemeClr val="accent1"/>
+          </a:lnRef>
+          <a:fillRef idx="0">
+            <a:schemeClr val="accent1"/>
+          </a:fillRef>
+          <a:effectRef idx="0">
+            <a:schemeClr val="accent1"/>
+          </a:effectRef>
+          <a:fontRef idx="minor">
+            <a:schemeClr val="tx1"/>
+          </a:fontRef>
+        </p:style>
+      </p:cxnSp>
+      <p:cxnSp>
+        <p:nvCxnSpPr>
+          <p:cNvPr id="35" name="Straight Arrow Connector 34"/>
+          <p:cNvCxnSpPr/>
+          <p:nvPr/>
+        </p:nvCxnSpPr>
+        <p:spPr>
+          <a:xfrm flipH="1" flipV="1">
+            <a:off x="3967547" y="3457930"/>
+            <a:ext cx="942045" cy="11332"/>
+          </a:xfrm>
+          <a:prstGeom prst="straightConnector1">
+            <a:avLst/>
+          </a:prstGeom>
+          <a:ln w="76200">
+            <a:solidFill>
+              <a:srgbClr val="FF0000"/>
+            </a:solidFill>
+            <a:tailEnd type="triangle"/>
+          </a:ln>
+        </p:spPr>
+        <p:style>
+          <a:lnRef idx="1">
+            <a:schemeClr val="accent1"/>
+          </a:lnRef>
+          <a:fillRef idx="0">
+            <a:schemeClr val="accent1"/>
+          </a:fillRef>
+          <a:effectRef idx="0">
+            <a:schemeClr val="accent1"/>
+          </a:effectRef>
+          <a:fontRef idx="minor">
+            <a:schemeClr val="tx1"/>
+          </a:fontRef>
+        </p:style>
+      </p:cxnSp>
+      <p:pic>
+        <p:nvPicPr>
+          <p:cNvPr id="13" name="Picture 12"/>
+          <p:cNvPicPr>
+            <a:picLocks noChangeAspect="1"/>
+          </p:cNvPicPr>
+          <p:nvPr/>
+        </p:nvPicPr>
+        <p:blipFill>
+          <a:blip r:embed="rId3" cstate="print">
+            <a:extLst>
+              <a:ext uri="{28A0092B-C50C-407E-A947-70E740481C1C}">
+                <a14:useLocalDpi xmlns:a14="http://schemas.microsoft.com/office/drawing/2010/main" val="0"/>
+              </a:ext>
+            </a:extLst>
+          </a:blip>
+          <a:stretch>
+            <a:fillRect/>
+          </a:stretch>
+        </p:blipFill>
+        <p:spPr>
+          <a:xfrm>
+            <a:off x="3413280" y="3765302"/>
+            <a:ext cx="533399" cy="523398"/>
+          </a:xfrm>
+          <a:prstGeom prst="rect">
+            <a:avLst/>
+          </a:prstGeom>
+        </p:spPr>
+      </p:pic>
+      <p:pic>
+        <p:nvPicPr>
+          <p:cNvPr id="14" name="Picture 13"/>
+          <p:cNvPicPr>
+            <a:picLocks noChangeAspect="1"/>
+          </p:cNvPicPr>
+          <p:nvPr/>
+        </p:nvPicPr>
+        <p:blipFill>
+          <a:blip r:embed="rId3" cstate="print">
+            <a:extLst>
+              <a:ext uri="{28A0092B-C50C-407E-A947-70E740481C1C}">
+                <a14:useLocalDpi xmlns:a14="http://schemas.microsoft.com/office/drawing/2010/main" val="0"/>
+              </a:ext>
+            </a:extLst>
+          </a:blip>
+          <a:stretch>
+            <a:fillRect/>
+          </a:stretch>
+        </p:blipFill>
+        <p:spPr>
+          <a:xfrm>
+            <a:off x="9533148" y="3766324"/>
+            <a:ext cx="533399" cy="523398"/>
+          </a:xfrm>
+          <a:prstGeom prst="rect">
+            <a:avLst/>
+          </a:prstGeom>
+        </p:spPr>
+      </p:pic>
+    </p:spTree>
+    <p:extLst>
+      <p:ext uri="{BB962C8B-B14F-4D97-AF65-F5344CB8AC3E}">
+        <p14:creationId xmlns:p14="http://schemas.microsoft.com/office/powerpoint/2010/main" val="1403904733"/>
+      </p:ext>
+    </p:extLst>
+  </p:cSld>
+  <p:clrMapOvr>
+    <a:masterClrMapping/>
+  </p:clrMapOvr>
+</p:sld>
+</file>
+
+<file path=ppt/slides/slide30.xml><?xml version="1.0" encoding="utf-8"?>
 <p:sld xmlns:a="http://schemas.openxmlformats.org/drawingml/2006/main" xmlns:r="http://schemas.openxmlformats.org/officeDocument/2006/relationships" xmlns:p="http://schemas.openxmlformats.org/presentationml/2006/main">
   <p:cSld>
     <p:spTree>
@@ -39531,564 +41861,7 @@
 </p:sld>
 </file>
 
-<file path=ppt/slides/slide3.xml><?xml version="1.0" encoding="utf-8"?>
-<p:sld xmlns:a="http://schemas.openxmlformats.org/drawingml/2006/main" xmlns:r="http://schemas.openxmlformats.org/officeDocument/2006/relationships" xmlns:p="http://schemas.openxmlformats.org/presentationml/2006/main">
-  <p:cSld>
-    <p:spTree>
-      <p:nvGrpSpPr>
-        <p:cNvPr id="1" name=""/>
-        <p:cNvGrpSpPr/>
-        <p:nvPr/>
-      </p:nvGrpSpPr>
-      <p:grpSpPr>
-        <a:xfrm>
-          <a:off x="0" y="0"/>
-          <a:ext cx="0" cy="0"/>
-          <a:chOff x="0" y="0"/>
-          <a:chExt cx="0" cy="0"/>
-        </a:xfrm>
-      </p:grpSpPr>
-      <p:sp>
-        <p:nvSpPr>
-          <p:cNvPr id="2" name="Title 1"/>
-          <p:cNvSpPr>
-            <a:spLocks noGrp="1"/>
-          </p:cNvSpPr>
-          <p:nvPr>
-            <p:ph type="title"/>
-          </p:nvPr>
-        </p:nvSpPr>
-        <p:spPr>
-          <a:xfrm>
-            <a:off x="940527" y="726230"/>
-            <a:ext cx="7136673" cy="666899"/>
-          </a:xfrm>
-        </p:spPr>
-        <p:txBody>
-          <a:bodyPr/>
-          <a:lstStyle/>
-          <a:p>
-            <a:r>
-              <a:rPr lang="en-US" dirty="0"/>
-              <a:t>ADDITION AND SUBTRACTION</a:t>
-            </a:r>
-          </a:p>
-        </p:txBody>
-      </p:sp>
-      <p:sp>
-        <p:nvSpPr>
-          <p:cNvPr id="5" name="TextBox 4"/>
-          <p:cNvSpPr txBox="1"/>
-          <p:nvPr/>
-        </p:nvSpPr>
-        <p:spPr>
-          <a:xfrm>
-            <a:off x="5390583" y="2101586"/>
-            <a:ext cx="1283576" cy="2246769"/>
-          </a:xfrm>
-          <a:prstGeom prst="rect">
-            <a:avLst/>
-          </a:prstGeom>
-          <a:noFill/>
-        </p:spPr>
-        <p:txBody>
-          <a:bodyPr wrap="square" rtlCol="0">
-            <a:spAutoFit/>
-          </a:bodyPr>
-          <a:lstStyle/>
-          <a:p>
-            <a:pPr algn="ctr">
-              <a:tabLst>
-                <a:tab pos="3086100" algn="l"/>
-                <a:tab pos="5715000" algn="l"/>
-              </a:tabLst>
-            </a:pPr>
-            <a:r>
-              <a:rPr lang="en-US" sz="2800" i="1" dirty="0"/>
-              <a:t>Binary</a:t>
-            </a:r>
-          </a:p>
-          <a:p>
-            <a:pPr>
-              <a:tabLst>
-                <a:tab pos="3086100" algn="l"/>
-                <a:tab pos="5715000" algn="l"/>
-              </a:tabLst>
-            </a:pPr>
-            <a:endParaRPr lang="en-US" sz="2800" i="1" dirty="0"/>
-          </a:p>
-          <a:p>
-            <a:pPr>
-              <a:tabLst>
-                <a:tab pos="571500" algn="r"/>
-                <a:tab pos="3886200" algn="r"/>
-                <a:tab pos="6686550" algn="r"/>
-              </a:tabLst>
-            </a:pPr>
-            <a:r>
-              <a:rPr lang="en-US" sz="2800" dirty="0"/>
-              <a:t>  	0011</a:t>
-            </a:r>
-          </a:p>
-          <a:p>
-            <a:pPr>
-              <a:tabLst>
-                <a:tab pos="571500" algn="r"/>
-                <a:tab pos="3886200" algn="r"/>
-                <a:tab pos="6686550" algn="r"/>
-              </a:tabLst>
-            </a:pPr>
-            <a:r>
-              <a:rPr lang="en-US" sz="2800" dirty="0"/>
-              <a:t>+</a:t>
-            </a:r>
-            <a:r>
-              <a:rPr lang="en-US" sz="2800" u="sng" dirty="0"/>
-              <a:t>1010</a:t>
-            </a:r>
-          </a:p>
-          <a:p>
-            <a:pPr>
-              <a:tabLst>
-                <a:tab pos="857250" algn="r"/>
-                <a:tab pos="4000500" algn="r"/>
-                <a:tab pos="6858000" algn="r"/>
-              </a:tabLst>
-            </a:pPr>
-            <a:r>
-              <a:rPr lang="en-US" sz="2800" dirty="0"/>
-              <a:t>	  1101</a:t>
-            </a:r>
-            <a:r>
-              <a:rPr lang="en-US" sz="2800" baseline="-25000" dirty="0"/>
-              <a:t>2</a:t>
-            </a:r>
-            <a:endParaRPr lang="en-US" sz="2800" dirty="0"/>
-          </a:p>
-        </p:txBody>
-      </p:sp>
-      <p:grpSp>
-        <p:nvGrpSpPr>
-          <p:cNvPr id="12" name="Group 11"/>
-          <p:cNvGrpSpPr/>
-          <p:nvPr/>
-        </p:nvGrpSpPr>
-        <p:grpSpPr>
-          <a:xfrm>
-            <a:off x="4438569" y="5026231"/>
-            <a:ext cx="3794760" cy="1015663"/>
-            <a:chOff x="1620391" y="4175686"/>
-            <a:chExt cx="3794760" cy="1015663"/>
-          </a:xfrm>
-          <a:solidFill>
-            <a:schemeClr val="accent4">
-              <a:lumMod val="20000"/>
-              <a:lumOff val="80000"/>
-            </a:schemeClr>
-          </a:solidFill>
-        </p:grpSpPr>
-        <p:sp>
-          <p:nvSpPr>
-            <p:cNvPr id="10" name="TextBox 9"/>
-            <p:cNvSpPr txBox="1"/>
-            <p:nvPr/>
-          </p:nvSpPr>
-          <p:spPr>
-            <a:xfrm>
-              <a:off x="1620391" y="4175686"/>
-              <a:ext cx="3794760" cy="1015663"/>
-            </a:xfrm>
-            <a:prstGeom prst="rect">
-              <a:avLst/>
-            </a:prstGeom>
-            <a:grpFill/>
-            <a:ln/>
-          </p:spPr>
-          <p:style>
-            <a:lnRef idx="1">
-              <a:schemeClr val="accent2"/>
-            </a:lnRef>
-            <a:fillRef idx="2">
-              <a:schemeClr val="accent2"/>
-            </a:fillRef>
-            <a:effectRef idx="1">
-              <a:schemeClr val="accent2"/>
-            </a:effectRef>
-            <a:fontRef idx="minor">
-              <a:schemeClr val="dk1"/>
-            </a:fontRef>
-          </p:style>
-          <p:txBody>
-            <a:bodyPr wrap="square" tIns="91440" bIns="91440" rtlCol="0">
-              <a:spAutoFit/>
-            </a:bodyPr>
-            <a:lstStyle/>
-            <a:p>
-              <a:pPr marL="1027113" lvl="1"/>
-              <a:r>
-                <a:rPr lang="en-US" dirty="0"/>
-                <a:t>A single ADD (or SUB) instruction works for both </a:t>
-              </a:r>
-              <a:r>
-                <a:rPr lang="en-US" b="1" dirty="0">
-                  <a:solidFill>
-                    <a:srgbClr val="92D050"/>
-                  </a:solidFill>
-                </a:rPr>
-                <a:t>unsigned</a:t>
-              </a:r>
-              <a:r>
-                <a:rPr lang="en-US" dirty="0"/>
-                <a:t> and </a:t>
-              </a:r>
-              <a:r>
-                <a:rPr lang="en-US" b="1" dirty="0">
-                  <a:solidFill>
-                    <a:srgbClr val="FF0000"/>
-                  </a:solidFill>
-                </a:rPr>
-                <a:t>2’s comp</a:t>
-              </a:r>
-              <a:r>
-                <a:rPr lang="en-US" dirty="0"/>
-                <a:t>.</a:t>
-              </a:r>
-            </a:p>
-          </p:txBody>
-        </p:sp>
-        <p:pic>
-          <p:nvPicPr>
-            <p:cNvPr id="11" name="Picture 10" descr="http://www.aamu.edu/campuslife/living-on-campus/residentialLife/SiteAssets/pages/default/Warning_sign.png"/>
-            <p:cNvPicPr>
-              <a:picLocks noChangeAspect="1" noChangeArrowheads="1"/>
-            </p:cNvPicPr>
-            <p:nvPr/>
-          </p:nvPicPr>
-          <p:blipFill>
-            <a:blip r:embed="rId2" cstate="print">
-              <a:extLst>
-                <a:ext uri="{28A0092B-C50C-407E-A947-70E740481C1C}">
-                  <a14:useLocalDpi xmlns:a14="http://schemas.microsoft.com/office/drawing/2010/main" val="0"/>
-                </a:ext>
-              </a:extLst>
-            </a:blip>
-            <a:srcRect/>
-            <a:stretch>
-              <a:fillRect/>
-            </a:stretch>
-          </p:blipFill>
-          <p:spPr bwMode="auto">
-            <a:xfrm flipH="1">
-              <a:off x="1620391" y="4264417"/>
-              <a:ext cx="971826" cy="838200"/>
-            </a:xfrm>
-            <a:prstGeom prst="rect">
-              <a:avLst/>
-            </a:prstGeom>
-            <a:grpFill/>
-          </p:spPr>
-        </p:pic>
-      </p:grpSp>
-      <p:sp>
-        <p:nvSpPr>
-          <p:cNvPr id="22" name="TextBox 21"/>
-          <p:cNvSpPr txBox="1"/>
-          <p:nvPr/>
-        </p:nvSpPr>
-        <p:spPr>
-          <a:xfrm>
-            <a:off x="2057400" y="2101585"/>
-            <a:ext cx="1905000" cy="2246769"/>
-          </a:xfrm>
-          <a:prstGeom prst="rect">
-            <a:avLst/>
-          </a:prstGeom>
-          <a:noFill/>
-        </p:spPr>
-        <p:txBody>
-          <a:bodyPr wrap="square" rtlCol="0">
-            <a:spAutoFit/>
-          </a:bodyPr>
-          <a:lstStyle/>
-          <a:p>
-            <a:r>
-              <a:rPr lang="en-US" sz="2800" b="1" dirty="0">
-                <a:solidFill>
-                  <a:srgbClr val="92D050"/>
-                </a:solidFill>
-              </a:rPr>
-              <a:t>Unsigned</a:t>
-            </a:r>
-          </a:p>
-          <a:p>
-            <a:r>
-              <a:rPr lang="en-US" sz="2800" i="1" dirty="0"/>
-              <a:t> </a:t>
-            </a:r>
-          </a:p>
-          <a:p>
-            <a:r>
-              <a:rPr lang="en-US" sz="2800" dirty="0">
-                <a:latin typeface="Consolas" panose="020B0609020204030204" pitchFamily="49" charset="0"/>
-              </a:rPr>
-              <a:t>   3</a:t>
-            </a:r>
-          </a:p>
-          <a:p>
-            <a:r>
-              <a:rPr lang="en-US" sz="2800" dirty="0">
-                <a:latin typeface="Consolas" panose="020B0609020204030204" pitchFamily="49" charset="0"/>
-              </a:rPr>
-              <a:t> </a:t>
-            </a:r>
-            <a:r>
-              <a:rPr lang="en-US" sz="2800" u="sng" dirty="0">
-                <a:latin typeface="Consolas" panose="020B0609020204030204" pitchFamily="49" charset="0"/>
-              </a:rPr>
-              <a:t>+10</a:t>
-            </a:r>
-          </a:p>
-          <a:p>
-            <a:r>
-              <a:rPr lang="en-US" sz="2800" dirty="0">
-                <a:latin typeface="Consolas" panose="020B0609020204030204" pitchFamily="49" charset="0"/>
-              </a:rPr>
-              <a:t>  13</a:t>
-            </a:r>
-            <a:r>
-              <a:rPr lang="en-US" sz="2800" baseline="-25000" dirty="0">
-                <a:latin typeface="Consolas" panose="020B0609020204030204" pitchFamily="49" charset="0"/>
-              </a:rPr>
-              <a:t>10</a:t>
-            </a:r>
-          </a:p>
-        </p:txBody>
-      </p:sp>
-      <p:sp>
-        <p:nvSpPr>
-          <p:cNvPr id="23" name="TextBox 22"/>
-          <p:cNvSpPr txBox="1"/>
-          <p:nvPr/>
-        </p:nvSpPr>
-        <p:spPr>
-          <a:xfrm>
-            <a:off x="7821856" y="2108310"/>
-            <a:ext cx="3166986" cy="2246769"/>
-          </a:xfrm>
-          <a:prstGeom prst="rect">
-            <a:avLst/>
-          </a:prstGeom>
-          <a:noFill/>
-        </p:spPr>
-        <p:txBody>
-          <a:bodyPr wrap="square" rtlCol="0">
-            <a:spAutoFit/>
-          </a:bodyPr>
-          <a:lstStyle/>
-          <a:p>
-            <a:r>
-              <a:rPr lang="en-US" sz="2800" i="1" dirty="0"/>
-              <a:t>  </a:t>
-            </a:r>
-            <a:r>
-              <a:rPr lang="en-US" sz="2800" b="1" dirty="0">
-                <a:solidFill>
-                  <a:srgbClr val="FF0000"/>
-                </a:solidFill>
-              </a:rPr>
-              <a:t>2’s Complement </a:t>
-            </a:r>
-          </a:p>
-          <a:p>
-            <a:r>
-              <a:rPr lang="en-US" sz="2800" i="1" dirty="0"/>
-              <a:t> </a:t>
-            </a:r>
-          </a:p>
-          <a:p>
-            <a:r>
-              <a:rPr lang="en-US" sz="2800" dirty="0">
-                <a:latin typeface="Consolas" panose="020B0609020204030204" pitchFamily="49" charset="0"/>
-              </a:rPr>
-              <a:t>   (+3)</a:t>
-            </a:r>
-          </a:p>
-          <a:p>
-            <a:r>
-              <a:rPr lang="en-US" sz="2800" dirty="0">
-                <a:latin typeface="Consolas" panose="020B0609020204030204" pitchFamily="49" charset="0"/>
-              </a:rPr>
-              <a:t>  </a:t>
-            </a:r>
-            <a:r>
-              <a:rPr lang="en-US" sz="2800" u="sng" dirty="0">
-                <a:latin typeface="Consolas" panose="020B0609020204030204" pitchFamily="49" charset="0"/>
-              </a:rPr>
-              <a:t>+(-6)</a:t>
-            </a:r>
-          </a:p>
-          <a:p>
-            <a:r>
-              <a:rPr lang="en-US" sz="2800" dirty="0">
-                <a:latin typeface="Consolas" panose="020B0609020204030204" pitchFamily="49" charset="0"/>
-              </a:rPr>
-              <a:t>    -3</a:t>
-            </a:r>
-            <a:r>
-              <a:rPr lang="en-US" sz="2800" baseline="-25000" dirty="0">
-                <a:latin typeface="Consolas" panose="020B0609020204030204" pitchFamily="49" charset="0"/>
-              </a:rPr>
-              <a:t>10</a:t>
-            </a:r>
-          </a:p>
-        </p:txBody>
-      </p:sp>
-      <p:cxnSp>
-        <p:nvCxnSpPr>
-          <p:cNvPr id="34" name="Straight Arrow Connector 33"/>
-          <p:cNvCxnSpPr/>
-          <p:nvPr/>
-        </p:nvCxnSpPr>
-        <p:spPr>
-          <a:xfrm>
-            <a:off x="6915150" y="3503268"/>
-            <a:ext cx="906706" cy="0"/>
-          </a:xfrm>
-          <a:prstGeom prst="straightConnector1">
-            <a:avLst/>
-          </a:prstGeom>
-          <a:ln w="76200">
-            <a:solidFill>
-              <a:srgbClr val="FF0000"/>
-            </a:solidFill>
-            <a:tailEnd type="triangle"/>
-          </a:ln>
-        </p:spPr>
-        <p:style>
-          <a:lnRef idx="1">
-            <a:schemeClr val="accent1"/>
-          </a:lnRef>
-          <a:fillRef idx="0">
-            <a:schemeClr val="accent1"/>
-          </a:fillRef>
-          <a:effectRef idx="0">
-            <a:schemeClr val="accent1"/>
-          </a:effectRef>
-          <a:fontRef idx="minor">
-            <a:schemeClr val="tx1"/>
-          </a:fontRef>
-        </p:style>
-      </p:cxnSp>
-      <p:cxnSp>
-        <p:nvCxnSpPr>
-          <p:cNvPr id="35" name="Straight Arrow Connector 34"/>
-          <p:cNvCxnSpPr/>
-          <p:nvPr/>
-        </p:nvCxnSpPr>
-        <p:spPr>
-          <a:xfrm flipH="1" flipV="1">
-            <a:off x="3967547" y="3457930"/>
-            <a:ext cx="942045" cy="11332"/>
-          </a:xfrm>
-          <a:prstGeom prst="straightConnector1">
-            <a:avLst/>
-          </a:prstGeom>
-          <a:ln w="76200">
-            <a:solidFill>
-              <a:srgbClr val="FF0000"/>
-            </a:solidFill>
-            <a:tailEnd type="triangle"/>
-          </a:ln>
-        </p:spPr>
-        <p:style>
-          <a:lnRef idx="1">
-            <a:schemeClr val="accent1"/>
-          </a:lnRef>
-          <a:fillRef idx="0">
-            <a:schemeClr val="accent1"/>
-          </a:fillRef>
-          <a:effectRef idx="0">
-            <a:schemeClr val="accent1"/>
-          </a:effectRef>
-          <a:fontRef idx="minor">
-            <a:schemeClr val="tx1"/>
-          </a:fontRef>
-        </p:style>
-      </p:cxnSp>
-      <p:pic>
-        <p:nvPicPr>
-          <p:cNvPr id="13" name="Picture 12"/>
-          <p:cNvPicPr>
-            <a:picLocks noChangeAspect="1"/>
-          </p:cNvPicPr>
-          <p:nvPr/>
-        </p:nvPicPr>
-        <p:blipFill>
-          <a:blip r:embed="rId3" cstate="print">
-            <a:extLst>
-              <a:ext uri="{28A0092B-C50C-407E-A947-70E740481C1C}">
-                <a14:useLocalDpi xmlns:a14="http://schemas.microsoft.com/office/drawing/2010/main" val="0"/>
-              </a:ext>
-            </a:extLst>
-          </a:blip>
-          <a:stretch>
-            <a:fillRect/>
-          </a:stretch>
-        </p:blipFill>
-        <p:spPr>
-          <a:xfrm>
-            <a:off x="3413280" y="3765302"/>
-            <a:ext cx="533399" cy="523398"/>
-          </a:xfrm>
-          <a:prstGeom prst="rect">
-            <a:avLst/>
-          </a:prstGeom>
-        </p:spPr>
-      </p:pic>
-      <p:pic>
-        <p:nvPicPr>
-          <p:cNvPr id="14" name="Picture 13"/>
-          <p:cNvPicPr>
-            <a:picLocks noChangeAspect="1"/>
-          </p:cNvPicPr>
-          <p:nvPr/>
-        </p:nvPicPr>
-        <p:blipFill>
-          <a:blip r:embed="rId3" cstate="print">
-            <a:extLst>
-              <a:ext uri="{28A0092B-C50C-407E-A947-70E740481C1C}">
-                <a14:useLocalDpi xmlns:a14="http://schemas.microsoft.com/office/drawing/2010/main" val="0"/>
-              </a:ext>
-            </a:extLst>
-          </a:blip>
-          <a:stretch>
-            <a:fillRect/>
-          </a:stretch>
-        </p:blipFill>
-        <p:spPr>
-          <a:xfrm>
-            <a:off x="9533148" y="3766324"/>
-            <a:ext cx="533399" cy="523398"/>
-          </a:xfrm>
-          <a:prstGeom prst="rect">
-            <a:avLst/>
-          </a:prstGeom>
-        </p:spPr>
-      </p:pic>
-    </p:spTree>
-    <p:extLst>
-      <p:ext uri="{BB962C8B-B14F-4D97-AF65-F5344CB8AC3E}">
-        <p14:creationId xmlns:p14="http://schemas.microsoft.com/office/powerpoint/2010/main" val="1403904733"/>
-      </p:ext>
-    </p:extLst>
-  </p:cSld>
-  <p:clrMapOvr>
-    <a:masterClrMapping/>
-  </p:clrMapOvr>
-</p:sld>
-</file>
-
-<file path=ppt/slides/slide30.xml><?xml version="1.0" encoding="utf-8"?>
+<file path=ppt/slides/slide31.xml><?xml version="1.0" encoding="utf-8"?>
 <p:sld xmlns:a="http://schemas.openxmlformats.org/drawingml/2006/main" xmlns:r="http://schemas.openxmlformats.org/officeDocument/2006/relationships" xmlns:p="http://schemas.openxmlformats.org/presentationml/2006/main">
   <p:cSld>
     <p:spTree>
@@ -40165,444 +41938,6 @@
     <p:extLst>
       <p:ext uri="{BB962C8B-B14F-4D97-AF65-F5344CB8AC3E}">
         <p14:creationId xmlns:p14="http://schemas.microsoft.com/office/powerpoint/2010/main" val="338773540"/>
-      </p:ext>
-    </p:extLst>
-  </p:cSld>
-  <p:clrMapOvr>
-    <a:masterClrMapping/>
-  </p:clrMapOvr>
-</p:sld>
-</file>
-
-<file path=ppt/slides/slide31.xml><?xml version="1.0" encoding="utf-8"?>
-<p:sld xmlns:a="http://schemas.openxmlformats.org/drawingml/2006/main" xmlns:r="http://schemas.openxmlformats.org/officeDocument/2006/relationships" xmlns:p="http://schemas.openxmlformats.org/presentationml/2006/main">
-  <p:cSld>
-    <p:spTree>
-      <p:nvGrpSpPr>
-        <p:cNvPr id="1" name=""/>
-        <p:cNvGrpSpPr/>
-        <p:nvPr/>
-      </p:nvGrpSpPr>
-      <p:grpSpPr>
-        <a:xfrm>
-          <a:off x="0" y="0"/>
-          <a:ext cx="0" cy="0"/>
-          <a:chOff x="0" y="0"/>
-          <a:chExt cx="0" cy="0"/>
-        </a:xfrm>
-      </p:grpSpPr>
-      <p:sp>
-        <p:nvSpPr>
-          <p:cNvPr id="2" name="Title 1"/>
-          <p:cNvSpPr>
-            <a:spLocks noGrp="1"/>
-          </p:cNvSpPr>
-          <p:nvPr>
-            <p:ph type="title"/>
-          </p:nvPr>
-        </p:nvSpPr>
-        <p:spPr>
-          <a:xfrm>
-            <a:off x="936516" y="749193"/>
-            <a:ext cx="4112737" cy="654492"/>
-          </a:xfrm>
-        </p:spPr>
-        <p:txBody>
-          <a:bodyPr/>
-          <a:lstStyle/>
-          <a:p>
-            <a:r>
-              <a:rPr lang="en-US" dirty="0"/>
-              <a:t>Integer Addition</a:t>
-            </a:r>
-          </a:p>
-        </p:txBody>
-      </p:sp>
-      <p:sp>
-        <p:nvSpPr>
-          <p:cNvPr id="5" name="Content Placeholder 4"/>
-          <p:cNvSpPr>
-            <a:spLocks noGrp="1"/>
-          </p:cNvSpPr>
-          <p:nvPr>
-            <p:ph idx="1"/>
-          </p:nvPr>
-        </p:nvSpPr>
-        <p:spPr>
-          <a:xfrm>
-            <a:off x="936516" y="1643270"/>
-            <a:ext cx="10433326" cy="4974098"/>
-          </a:xfrm>
-        </p:spPr>
-        <p:txBody>
-          <a:bodyPr>
-            <a:normAutofit/>
-          </a:bodyPr>
-          <a:lstStyle/>
-          <a:p>
-            <a:r>
-              <a:rPr lang="en-US" dirty="0">
-                <a:solidFill>
-                  <a:schemeClr val="tx1"/>
-                </a:solidFill>
-              </a:rPr>
-              <a:t>Instructions: </a:t>
-            </a:r>
-            <a:r>
-              <a:rPr lang="en-US" dirty="0">
-                <a:solidFill>
-                  <a:srgbClr val="0070C0"/>
-                </a:solidFill>
-              </a:rPr>
-              <a:t>ADD{</a:t>
-            </a:r>
-            <a:r>
-              <a:rPr lang="en-US" b="1" dirty="0">
-                <a:solidFill>
-                  <a:srgbClr val="FF0000"/>
-                </a:solidFill>
-              </a:rPr>
-              <a:t>S</a:t>
-            </a:r>
-            <a:r>
-              <a:rPr lang="en-US" dirty="0">
-                <a:solidFill>
-                  <a:srgbClr val="0070C0"/>
-                </a:solidFill>
-              </a:rPr>
-              <a:t>}</a:t>
-            </a:r>
-            <a:r>
-              <a:rPr lang="en-US" dirty="0">
-                <a:solidFill>
-                  <a:schemeClr val="tx1"/>
-                </a:solidFill>
-              </a:rPr>
-              <a:t>,</a:t>
-            </a:r>
-            <a:r>
-              <a:rPr lang="en-US" dirty="0">
-                <a:solidFill>
-                  <a:srgbClr val="0070C0"/>
-                </a:solidFill>
-              </a:rPr>
-              <a:t> ADC{</a:t>
-            </a:r>
-            <a:r>
-              <a:rPr lang="en-US" b="1" dirty="0">
-                <a:solidFill>
-                  <a:srgbClr val="FF0000"/>
-                </a:solidFill>
-              </a:rPr>
-              <a:t>S</a:t>
-            </a:r>
-            <a:r>
-              <a:rPr lang="en-US" dirty="0">
-                <a:solidFill>
-                  <a:srgbClr val="0070C0"/>
-                </a:solidFill>
-              </a:rPr>
-              <a:t>}</a:t>
-            </a:r>
-          </a:p>
-          <a:p>
-            <a:r>
-              <a:rPr lang="en-US" dirty="0">
-                <a:solidFill>
-                  <a:schemeClr val="tx1"/>
-                </a:solidFill>
-              </a:rPr>
-              <a:t>Format Examples:</a:t>
-            </a:r>
-          </a:p>
-          <a:p>
-            <a:pPr lvl="1"/>
-            <a:r>
-              <a:rPr lang="en-US" dirty="0">
-                <a:solidFill>
-                  <a:schemeClr val="tx1"/>
-                </a:solidFill>
-              </a:rPr>
-              <a:t>ADD	R0,R1,</a:t>
-            </a:r>
-            <a:r>
-              <a:rPr lang="en-US" b="1" dirty="0">
-                <a:solidFill>
-                  <a:srgbClr val="0000FF"/>
-                </a:solidFill>
-              </a:rPr>
-              <a:t>#5</a:t>
-            </a:r>
-            <a:r>
-              <a:rPr lang="en-US" dirty="0">
-                <a:solidFill>
-                  <a:schemeClr val="tx1"/>
-                </a:solidFill>
-              </a:rPr>
-              <a:t>			// R0 </a:t>
-            </a:r>
-            <a:r>
-              <a:rPr lang="en-US" dirty="0">
-                <a:solidFill>
-                  <a:schemeClr val="tx1"/>
-                </a:solidFill>
-                <a:sym typeface="Wingdings" panose="05000000000000000000" pitchFamily="2" charset="2"/>
-              </a:rPr>
-              <a:t>= R1 + 5</a:t>
-            </a:r>
-            <a:endParaRPr lang="en-US" dirty="0">
-              <a:solidFill>
-                <a:schemeClr val="tx1"/>
-              </a:solidFill>
-            </a:endParaRPr>
-          </a:p>
-          <a:p>
-            <a:pPr lvl="1"/>
-            <a:r>
-              <a:rPr lang="en-US" dirty="0">
-                <a:solidFill>
-                  <a:schemeClr val="tx1"/>
-                </a:solidFill>
-              </a:rPr>
-              <a:t>ADD	R0,R1,R2		// R0 </a:t>
-            </a:r>
-            <a:r>
-              <a:rPr lang="en-US" dirty="0">
-                <a:solidFill>
-                  <a:schemeClr val="tx1"/>
-                </a:solidFill>
-                <a:sym typeface="Wingdings" panose="05000000000000000000" pitchFamily="2" charset="2"/>
-              </a:rPr>
-              <a:t>= R1 + R2</a:t>
-            </a:r>
-            <a:endParaRPr lang="en-US" dirty="0">
-              <a:solidFill>
-                <a:schemeClr val="tx1"/>
-              </a:solidFill>
-            </a:endParaRPr>
-          </a:p>
-          <a:p>
-            <a:pPr lvl="1"/>
-            <a:r>
-              <a:rPr lang="en-US" dirty="0">
-                <a:solidFill>
-                  <a:schemeClr val="tx1"/>
-                </a:solidFill>
-              </a:rPr>
-              <a:t>ADD	R0,R1,</a:t>
-            </a:r>
-            <a:r>
-              <a:rPr lang="en-US" b="1" dirty="0">
-                <a:solidFill>
-                  <a:srgbClr val="0000FF"/>
-                </a:solidFill>
-              </a:rPr>
-              <a:t>R2,LSL #2</a:t>
-            </a:r>
-            <a:r>
-              <a:rPr lang="en-US" dirty="0">
-                <a:solidFill>
-                  <a:schemeClr val="tx1"/>
-                </a:solidFill>
-              </a:rPr>
-              <a:t>		// R0 </a:t>
-            </a:r>
-            <a:r>
-              <a:rPr lang="en-US" dirty="0">
-                <a:solidFill>
-                  <a:schemeClr val="tx1"/>
-                </a:solidFill>
-                <a:sym typeface="Wingdings" panose="05000000000000000000" pitchFamily="2" charset="2"/>
-              </a:rPr>
-              <a:t>= R1 + </a:t>
-            </a:r>
-            <a:r>
-              <a:rPr lang="en-US" b="1" dirty="0">
-                <a:solidFill>
-                  <a:srgbClr val="0000FF"/>
-                </a:solidFill>
-                <a:sym typeface="Wingdings" panose="05000000000000000000" pitchFamily="2" charset="2"/>
-              </a:rPr>
-              <a:t>(R2 &lt;&lt; 2)</a:t>
-            </a:r>
-            <a:endParaRPr lang="en-US" b="1" dirty="0">
-              <a:solidFill>
-                <a:srgbClr val="0000FF"/>
-              </a:solidFill>
-            </a:endParaRPr>
-          </a:p>
-          <a:p>
-            <a:r>
-              <a:rPr lang="en-US" dirty="0">
-                <a:solidFill>
-                  <a:schemeClr val="tx1"/>
-                </a:solidFill>
-              </a:rPr>
-              <a:t>Flags: </a:t>
-            </a:r>
-            <a:r>
-              <a:rPr lang="en-US" dirty="0">
-                <a:solidFill>
-                  <a:srgbClr val="0070C0"/>
-                </a:solidFill>
-              </a:rPr>
-              <a:t>Append “S” to capture result characteristics in NCVZ</a:t>
-            </a:r>
-          </a:p>
-          <a:p>
-            <a:endParaRPr lang="en-US" dirty="0"/>
-          </a:p>
-          <a:p>
-            <a:r>
-              <a:rPr lang="en-US" dirty="0">
-                <a:solidFill>
-                  <a:schemeClr val="tx1"/>
-                </a:solidFill>
-              </a:rPr>
-              <a:t>Overflow:</a:t>
-            </a:r>
-          </a:p>
-          <a:p>
-            <a:pPr lvl="1"/>
-            <a:r>
-              <a:rPr lang="en-US" b="1" dirty="0">
-                <a:solidFill>
-                  <a:srgbClr val="92D050"/>
-                </a:solidFill>
-              </a:rPr>
-              <a:t>Unsigned</a:t>
-            </a:r>
-            <a:r>
-              <a:rPr lang="en-US" dirty="0">
-                <a:solidFill>
-                  <a:srgbClr val="0070C0"/>
-                </a:solidFill>
-              </a:rPr>
-              <a:t>: Carry Flag (C) = 1</a:t>
-            </a:r>
-          </a:p>
-          <a:p>
-            <a:pPr lvl="1"/>
-            <a:r>
-              <a:rPr lang="en-US" dirty="0">
-                <a:solidFill>
-                  <a:srgbClr val="0070C0"/>
-                </a:solidFill>
-              </a:rPr>
-              <a:t>     </a:t>
-            </a:r>
-            <a:r>
-              <a:rPr lang="en-US" b="1" dirty="0">
-                <a:solidFill>
-                  <a:srgbClr val="FF0000"/>
-                </a:solidFill>
-              </a:rPr>
-              <a:t>Signed</a:t>
-            </a:r>
-            <a:r>
-              <a:rPr lang="en-US" dirty="0">
-                <a:solidFill>
-                  <a:srgbClr val="0070C0"/>
-                </a:solidFill>
-              </a:rPr>
-              <a:t>: Overflow Flag (V) = 1 (Set when C</a:t>
-            </a:r>
-            <a:r>
-              <a:rPr lang="en-US" baseline="-25000" dirty="0">
-                <a:solidFill>
-                  <a:srgbClr val="0070C0"/>
-                </a:solidFill>
-              </a:rPr>
-              <a:t>N</a:t>
-            </a:r>
-            <a:r>
-              <a:rPr lang="en-US" dirty="0">
-                <a:solidFill>
-                  <a:srgbClr val="0070C0"/>
-                </a:solidFill>
-              </a:rPr>
-              <a:t>≠C</a:t>
-            </a:r>
-            <a:r>
-              <a:rPr lang="en-US" baseline="-25000" dirty="0">
-                <a:solidFill>
-                  <a:srgbClr val="0070C0"/>
-                </a:solidFill>
-              </a:rPr>
-              <a:t>N-1</a:t>
-            </a:r>
-            <a:r>
-              <a:rPr lang="en-US" dirty="0">
-                <a:solidFill>
-                  <a:srgbClr val="0070C0"/>
-                </a:solidFill>
-              </a:rPr>
-              <a:t>)</a:t>
-            </a:r>
-          </a:p>
-          <a:p>
-            <a:endParaRPr lang="en-US" dirty="0"/>
-          </a:p>
-          <a:p>
-            <a:r>
-              <a:rPr lang="en-US" dirty="0">
-                <a:solidFill>
-                  <a:schemeClr val="tx1"/>
-                </a:solidFill>
-              </a:rPr>
-              <a:t>Multiple precision addition: </a:t>
-            </a:r>
-            <a:r>
-              <a:rPr lang="en-US" dirty="0">
-                <a:solidFill>
-                  <a:srgbClr val="0070C0"/>
-                </a:solidFill>
-              </a:rPr>
-              <a:t>ADD</a:t>
-            </a:r>
-            <a:r>
-              <a:rPr lang="en-US" b="1" dirty="0">
-                <a:solidFill>
-                  <a:srgbClr val="FF0000"/>
-                </a:solidFill>
-              </a:rPr>
-              <a:t>S</a:t>
-            </a:r>
-            <a:r>
-              <a:rPr lang="en-US" dirty="0">
-                <a:solidFill>
-                  <a:srgbClr val="0070C0"/>
-                </a:solidFill>
-              </a:rPr>
-              <a:t> </a:t>
-            </a:r>
-            <a:r>
-              <a:rPr lang="en-US" dirty="0">
-                <a:solidFill>
-                  <a:srgbClr val="0070C0"/>
-                </a:solidFill>
-                <a:sym typeface="Wingdings" panose="05000000000000000000" pitchFamily="2" charset="2"/>
-              </a:rPr>
-              <a:t> ADC</a:t>
-            </a:r>
-            <a:endParaRPr lang="en-US" dirty="0">
-              <a:solidFill>
-                <a:srgbClr val="0070C0"/>
-              </a:solidFill>
-            </a:endParaRPr>
-          </a:p>
-          <a:p>
-            <a:endParaRPr lang="en-US" dirty="0"/>
-          </a:p>
-          <a:p>
-            <a:endParaRPr lang="en-US" dirty="0"/>
-          </a:p>
-        </p:txBody>
-      </p:sp>
-    </p:spTree>
-    <p:extLst>
-      <p:ext uri="{BB962C8B-B14F-4D97-AF65-F5344CB8AC3E}">
-        <p14:creationId xmlns:p14="http://schemas.microsoft.com/office/powerpoint/2010/main" val="385189333"/>
       </p:ext>
     </p:extLst>
   </p:cSld>
@@ -40641,8 +41976,8 @@
         </p:nvSpPr>
         <p:spPr>
           <a:xfrm>
-            <a:off x="936516" y="749192"/>
-            <a:ext cx="4606031" cy="662513"/>
+            <a:off x="936516" y="749193"/>
+            <a:ext cx="4112737" cy="654492"/>
           </a:xfrm>
         </p:spPr>
         <p:txBody>
@@ -40651,467 +41986,396 @@
           <a:p>
             <a:r>
               <a:rPr lang="en-US" dirty="0"/>
-              <a:t>Integer Subtraction</a:t>
+              <a:t>Integer Addition</a:t>
             </a:r>
           </a:p>
         </p:txBody>
       </p:sp>
       <p:sp>
         <p:nvSpPr>
-          <p:cNvPr id="6" name="Content Placeholder 4"/>
-          <p:cNvSpPr txBox="1">
-            <a:spLocks/>
+          <p:cNvPr id="5" name="Content Placeholder 4"/>
+          <p:cNvSpPr>
+            <a:spLocks noGrp="1"/>
           </p:cNvSpPr>
-          <p:nvPr/>
+          <p:nvPr>
+            <p:ph idx="1"/>
+          </p:nvPr>
         </p:nvSpPr>
         <p:spPr>
           <a:xfrm>
-            <a:off x="936515" y="1708172"/>
-            <a:ext cx="10425305" cy="4953311"/>
+            <a:off x="936516" y="1643270"/>
+            <a:ext cx="10433326" cy="4974098"/>
           </a:xfrm>
-          <a:prstGeom prst="rect">
-            <a:avLst/>
-          </a:prstGeom>
         </p:spPr>
         <p:txBody>
-          <a:bodyPr vert="horz" lIns="68580" tIns="34290" rIns="68580" bIns="34290" rtlCol="0">
+          <a:bodyPr>
             <a:normAutofit/>
           </a:bodyPr>
-          <a:lstStyle>
-            <a:lvl1pPr marL="228600" indent="-228600" algn="l" defTabSz="914400" rtl="0" eaLnBrk="1" latinLnBrk="0" hangingPunct="1">
-              <a:lnSpc>
-                <a:spcPct val="90000"/>
-              </a:lnSpc>
-              <a:spcBef>
-                <a:spcPts val="1000"/>
-              </a:spcBef>
-              <a:buFont typeface="Arial" panose="020B0604020202020204" pitchFamily="34" charset="0"/>
-              <a:buChar char="•"/>
-              <a:defRPr sz="2800" kern="1200">
+          <a:lstStyle/>
+          <a:p>
+            <a:r>
+              <a:rPr lang="en-US" dirty="0">
                 <a:solidFill>
                   <a:schemeClr val="tx1"/>
                 </a:solidFill>
-                <a:latin typeface="+mn-lt"/>
-                <a:ea typeface="+mn-ea"/>
-                <a:cs typeface="+mn-cs"/>
-              </a:defRPr>
-            </a:lvl1pPr>
-            <a:lvl2pPr marL="685800" indent="-228600" algn="l" defTabSz="914400" rtl="0" eaLnBrk="1" latinLnBrk="0" hangingPunct="1">
-              <a:lnSpc>
-                <a:spcPct val="90000"/>
-              </a:lnSpc>
-              <a:spcBef>
-                <a:spcPts val="500"/>
-              </a:spcBef>
-              <a:buFont typeface="Arial" panose="020B0604020202020204" pitchFamily="34" charset="0"/>
-              <a:buChar char="•"/>
-              <a:defRPr sz="2400" kern="1200">
+              </a:rPr>
+              <a:t>Instructions: </a:t>
+            </a:r>
+            <a:r>
+              <a:rPr lang="en-US" dirty="0">
+                <a:solidFill>
+                  <a:srgbClr val="0070C0"/>
+                </a:solidFill>
+              </a:rPr>
+              <a:t>ADD{</a:t>
+            </a:r>
+            <a:r>
+              <a:rPr lang="en-US" b="1" dirty="0">
+                <a:solidFill>
+                  <a:srgbClr val="FF0000"/>
+                </a:solidFill>
+              </a:rPr>
+              <a:t>S</a:t>
+            </a:r>
+            <a:r>
+              <a:rPr lang="en-US" dirty="0">
+                <a:solidFill>
+                  <a:srgbClr val="0070C0"/>
+                </a:solidFill>
+              </a:rPr>
+              <a:t>}</a:t>
+            </a:r>
+            <a:r>
+              <a:rPr lang="en-US" dirty="0">
                 <a:solidFill>
                   <a:schemeClr val="tx1"/>
                 </a:solidFill>
-                <a:latin typeface="+mn-lt"/>
-                <a:ea typeface="+mn-ea"/>
-                <a:cs typeface="+mn-cs"/>
-              </a:defRPr>
-            </a:lvl2pPr>
-            <a:lvl3pPr marL="1143000" indent="-228600" algn="l" defTabSz="914400" rtl="0" eaLnBrk="1" latinLnBrk="0" hangingPunct="1">
-              <a:lnSpc>
-                <a:spcPct val="90000"/>
-              </a:lnSpc>
-              <a:spcBef>
-                <a:spcPts val="500"/>
-              </a:spcBef>
-              <a:buFont typeface="Arial" panose="020B0604020202020204" pitchFamily="34" charset="0"/>
-              <a:buChar char="•"/>
-              <a:defRPr sz="2000" kern="1200">
+              </a:rPr>
+              <a:t>,</a:t>
+            </a:r>
+            <a:r>
+              <a:rPr lang="en-US" dirty="0">
+                <a:solidFill>
+                  <a:srgbClr val="0070C0"/>
+                </a:solidFill>
+              </a:rPr>
+              <a:t> ADC{</a:t>
+            </a:r>
+            <a:r>
+              <a:rPr lang="en-US" b="1" dirty="0">
+                <a:solidFill>
+                  <a:srgbClr val="FF0000"/>
+                </a:solidFill>
+              </a:rPr>
+              <a:t>S</a:t>
+            </a:r>
+            <a:r>
+              <a:rPr lang="en-US" dirty="0">
+                <a:solidFill>
+                  <a:srgbClr val="0070C0"/>
+                </a:solidFill>
+              </a:rPr>
+              <a:t>}</a:t>
+            </a:r>
+          </a:p>
+          <a:p>
+            <a:r>
+              <a:rPr lang="en-US" dirty="0">
                 <a:solidFill>
                   <a:schemeClr val="tx1"/>
                 </a:solidFill>
-                <a:latin typeface="+mn-lt"/>
-                <a:ea typeface="+mn-ea"/>
-                <a:cs typeface="+mn-cs"/>
-              </a:defRPr>
-            </a:lvl3pPr>
-            <a:lvl4pPr marL="1600200" indent="-228600" algn="l" defTabSz="914400" rtl="0" eaLnBrk="1" latinLnBrk="0" hangingPunct="1">
-              <a:lnSpc>
-                <a:spcPct val="90000"/>
-              </a:lnSpc>
-              <a:spcBef>
-                <a:spcPts val="500"/>
-              </a:spcBef>
-              <a:buFont typeface="Arial" panose="020B0604020202020204" pitchFamily="34" charset="0"/>
-              <a:buChar char="•"/>
-              <a:defRPr sz="1800" kern="1200">
+              </a:rPr>
+              <a:t>Format Examples:</a:t>
+            </a:r>
+          </a:p>
+          <a:p>
+            <a:pPr lvl="1"/>
+            <a:r>
+              <a:rPr lang="en-US" dirty="0">
                 <a:solidFill>
                   <a:schemeClr val="tx1"/>
                 </a:solidFill>
-                <a:latin typeface="+mn-lt"/>
-                <a:ea typeface="+mn-ea"/>
-                <a:cs typeface="+mn-cs"/>
-              </a:defRPr>
-            </a:lvl4pPr>
-            <a:lvl5pPr marL="2057400" indent="-228600" algn="l" defTabSz="914400" rtl="0" eaLnBrk="1" latinLnBrk="0" hangingPunct="1">
-              <a:lnSpc>
-                <a:spcPct val="90000"/>
-              </a:lnSpc>
-              <a:spcBef>
-                <a:spcPts val="500"/>
-              </a:spcBef>
-              <a:buFont typeface="Arial" panose="020B0604020202020204" pitchFamily="34" charset="0"/>
-              <a:buChar char="•"/>
-              <a:defRPr sz="1800" kern="1200">
+              </a:rPr>
+              <a:t>ADD	R0,R1,</a:t>
+            </a:r>
+            <a:r>
+              <a:rPr lang="en-US" b="1" dirty="0">
+                <a:solidFill>
+                  <a:srgbClr val="0000FF"/>
+                </a:solidFill>
+              </a:rPr>
+              <a:t>#5</a:t>
+            </a:r>
+            <a:r>
+              <a:rPr lang="en-US" dirty="0">
                 <a:solidFill>
                   <a:schemeClr val="tx1"/>
                 </a:solidFill>
-                <a:latin typeface="+mn-lt"/>
-                <a:ea typeface="+mn-ea"/>
-                <a:cs typeface="+mn-cs"/>
-              </a:defRPr>
-            </a:lvl5pPr>
-            <a:lvl6pPr marL="2514600" indent="-228600" algn="l" defTabSz="914400" rtl="0" eaLnBrk="1" latinLnBrk="0" hangingPunct="1">
-              <a:lnSpc>
-                <a:spcPct val="90000"/>
-              </a:lnSpc>
-              <a:spcBef>
-                <a:spcPts val="500"/>
-              </a:spcBef>
-              <a:buFont typeface="Arial" panose="020B0604020202020204" pitchFamily="34" charset="0"/>
-              <a:buChar char="•"/>
-              <a:defRPr sz="1800" kern="1200">
+              </a:rPr>
+              <a:t>			// R0 </a:t>
+            </a:r>
+            <a:r>
+              <a:rPr lang="en-US" dirty="0">
                 <a:solidFill>
                   <a:schemeClr val="tx1"/>
                 </a:solidFill>
-                <a:latin typeface="+mn-lt"/>
-                <a:ea typeface="+mn-ea"/>
-                <a:cs typeface="+mn-cs"/>
-              </a:defRPr>
-            </a:lvl6pPr>
-            <a:lvl7pPr marL="2971800" indent="-228600" algn="l" defTabSz="914400" rtl="0" eaLnBrk="1" latinLnBrk="0" hangingPunct="1">
-              <a:lnSpc>
-                <a:spcPct val="90000"/>
-              </a:lnSpc>
-              <a:spcBef>
-                <a:spcPts val="500"/>
-              </a:spcBef>
-              <a:buFont typeface="Arial" panose="020B0604020202020204" pitchFamily="34" charset="0"/>
-              <a:buChar char="•"/>
-              <a:defRPr sz="1800" kern="1200">
+                <a:sym typeface="Wingdings" panose="05000000000000000000" pitchFamily="2" charset="2"/>
+              </a:rPr>
+              <a:t>= R1 + 5</a:t>
+            </a:r>
+            <a:endParaRPr lang="en-US" dirty="0">
+              <a:solidFill>
+                <a:schemeClr val="tx1"/>
+              </a:solidFill>
+            </a:endParaRPr>
+          </a:p>
+          <a:p>
+            <a:pPr lvl="1"/>
+            <a:r>
+              <a:rPr lang="en-US" dirty="0">
                 <a:solidFill>
                   <a:schemeClr val="tx1"/>
                 </a:solidFill>
-                <a:latin typeface="+mn-lt"/>
-                <a:ea typeface="+mn-ea"/>
-                <a:cs typeface="+mn-cs"/>
-              </a:defRPr>
-            </a:lvl7pPr>
-            <a:lvl8pPr marL="3429000" indent="-228600" algn="l" defTabSz="914400" rtl="0" eaLnBrk="1" latinLnBrk="0" hangingPunct="1">
-              <a:lnSpc>
-                <a:spcPct val="90000"/>
-              </a:lnSpc>
-              <a:spcBef>
-                <a:spcPts val="500"/>
-              </a:spcBef>
-              <a:buFont typeface="Arial" panose="020B0604020202020204" pitchFamily="34" charset="0"/>
-              <a:buChar char="•"/>
-              <a:defRPr sz="1800" kern="1200">
+              </a:rPr>
+              <a:t>ADD	R0,R1,R2		// R0 </a:t>
+            </a:r>
+            <a:r>
+              <a:rPr lang="en-US" dirty="0">
                 <a:solidFill>
                   <a:schemeClr val="tx1"/>
                 </a:solidFill>
-                <a:latin typeface="+mn-lt"/>
-                <a:ea typeface="+mn-ea"/>
-                <a:cs typeface="+mn-cs"/>
-              </a:defRPr>
-            </a:lvl8pPr>
-            <a:lvl9pPr marL="3886200" indent="-228600" algn="l" defTabSz="914400" rtl="0" eaLnBrk="1" latinLnBrk="0" hangingPunct="1">
-              <a:lnSpc>
-                <a:spcPct val="90000"/>
-              </a:lnSpc>
-              <a:spcBef>
-                <a:spcPts val="500"/>
-              </a:spcBef>
-              <a:buFont typeface="Arial" panose="020B0604020202020204" pitchFamily="34" charset="0"/>
-              <a:buChar char="•"/>
-              <a:defRPr sz="1800" kern="1200">
+                <a:sym typeface="Wingdings" panose="05000000000000000000" pitchFamily="2" charset="2"/>
+              </a:rPr>
+              <a:t>= R1 + R2</a:t>
+            </a:r>
+            <a:endParaRPr lang="en-US" dirty="0">
+              <a:solidFill>
+                <a:schemeClr val="tx1"/>
+              </a:solidFill>
+            </a:endParaRPr>
+          </a:p>
+          <a:p>
+            <a:pPr lvl="1"/>
+            <a:r>
+              <a:rPr lang="en-US" dirty="0">
                 <a:solidFill>
                   <a:schemeClr val="tx1"/>
                 </a:solidFill>
-                <a:latin typeface="+mn-lt"/>
-                <a:ea typeface="+mn-ea"/>
-                <a:cs typeface="+mn-cs"/>
-              </a:defRPr>
-            </a:lvl9pPr>
-          </a:lstStyle>
-          <a:p>
-            <a:r>
-              <a:rPr lang="en-US" sz="2100" dirty="0"/>
-              <a:t>Instructions: </a:t>
-            </a:r>
-            <a:r>
-              <a:rPr lang="en-US" sz="2100" dirty="0">
+              </a:rPr>
+              <a:t>ADD	R0,R1,</a:t>
+            </a:r>
+            <a:r>
+              <a:rPr lang="en-US" b="1" dirty="0">
+                <a:solidFill>
+                  <a:srgbClr val="0000FF"/>
+                </a:solidFill>
+              </a:rPr>
+              <a:t>R2,LSL #2</a:t>
+            </a:r>
+            <a:r>
+              <a:rPr lang="en-US" dirty="0">
+                <a:solidFill>
+                  <a:schemeClr val="tx1"/>
+                </a:solidFill>
+              </a:rPr>
+              <a:t>		// R0 </a:t>
+            </a:r>
+            <a:r>
+              <a:rPr lang="en-US" dirty="0">
+                <a:solidFill>
+                  <a:schemeClr val="tx1"/>
+                </a:solidFill>
+                <a:sym typeface="Wingdings" panose="05000000000000000000" pitchFamily="2" charset="2"/>
+              </a:rPr>
+              <a:t>= R1 + </a:t>
+            </a:r>
+            <a:r>
+              <a:rPr lang="en-US" b="1" dirty="0">
+                <a:solidFill>
+                  <a:srgbClr val="0000FF"/>
+                </a:solidFill>
+                <a:sym typeface="Wingdings" panose="05000000000000000000" pitchFamily="2" charset="2"/>
+              </a:rPr>
+              <a:t>(R2 &lt;&lt; 2)</a:t>
+            </a:r>
+            <a:endParaRPr lang="en-US" b="1" dirty="0">
+              <a:solidFill>
+                <a:srgbClr val="0000FF"/>
+              </a:solidFill>
+            </a:endParaRPr>
+          </a:p>
+          <a:p>
+            <a:r>
+              <a:rPr lang="en-US" dirty="0">
+                <a:solidFill>
+                  <a:schemeClr val="tx1"/>
+                </a:solidFill>
+              </a:rPr>
+              <a:t>Flags: </a:t>
+            </a:r>
+            <a:r>
+              <a:rPr lang="en-US" dirty="0">
                 <a:solidFill>
                   <a:srgbClr val="0070C0"/>
                 </a:solidFill>
               </a:rPr>
-              <a:t>SUB{S}, SBC{S}, RSB{S}</a:t>
-            </a:r>
-          </a:p>
-          <a:p>
-            <a:r>
-              <a:rPr lang="en-US" sz="2100" dirty="0"/>
-              <a:t>Format Examples:</a:t>
+              <a:t>Append “S” to capture result characteristics in NCVZ</a:t>
+            </a:r>
+          </a:p>
+          <a:p>
+            <a:endParaRPr lang="en-US" dirty="0"/>
+          </a:p>
+          <a:p>
+            <a:r>
+              <a:rPr lang="en-US" dirty="0">
+                <a:solidFill>
+                  <a:schemeClr val="tx1"/>
+                </a:solidFill>
+              </a:rPr>
+              <a:t>Overflow:</a:t>
             </a:r>
           </a:p>
           <a:p>
             <a:pPr lvl="1"/>
             <a:r>
-              <a:rPr lang="en-US" sz="1800" dirty="0"/>
-              <a:t>SUB	R0,R1,</a:t>
-            </a:r>
-            <a:r>
-              <a:rPr lang="en-US" sz="1800" b="1" dirty="0">
-                <a:solidFill>
-                  <a:srgbClr val="0000FF"/>
-                </a:solidFill>
-              </a:rPr>
-              <a:t>#5</a:t>
-            </a:r>
-            <a:r>
-              <a:rPr lang="en-US" sz="1800" dirty="0"/>
-              <a:t>		// R0 </a:t>
-            </a:r>
-            <a:r>
-              <a:rPr lang="en-US" sz="1800" dirty="0">
+              <a:rPr lang="en-US" b="1" dirty="0">
+                <a:solidFill>
+                  <a:srgbClr val="92D050"/>
+                </a:solidFill>
+              </a:rPr>
+              <a:t>Unsigned</a:t>
+            </a:r>
+            <a:r>
+              <a:rPr lang="en-US" dirty="0">
+                <a:solidFill>
+                  <a:srgbClr val="0070C0"/>
+                </a:solidFill>
+              </a:rPr>
+              <a:t>: Carry Flag (C) = 1</a:t>
+            </a:r>
+          </a:p>
+          <a:p>
+            <a:pPr lvl="1"/>
+            <a:r>
+              <a:rPr lang="en-US" dirty="0">
+                <a:solidFill>
+                  <a:srgbClr val="0070C0"/>
+                </a:solidFill>
+              </a:rPr>
+              <a:t>     </a:t>
+            </a:r>
+            <a:r>
+              <a:rPr lang="en-US" b="1" dirty="0">
+                <a:solidFill>
+                  <a:srgbClr val="FF0000"/>
+                </a:solidFill>
+              </a:rPr>
+              <a:t>Signed</a:t>
+            </a:r>
+            <a:r>
+              <a:rPr lang="en-US" dirty="0">
+                <a:solidFill>
+                  <a:srgbClr val="0070C0"/>
+                </a:solidFill>
+              </a:rPr>
+              <a:t>: Overflow Flag (V) = 1 (Set when C</a:t>
+            </a:r>
+            <a:r>
+              <a:rPr lang="en-US" baseline="-25000" dirty="0">
+                <a:solidFill>
+                  <a:srgbClr val="0070C0"/>
+                </a:solidFill>
+              </a:rPr>
+              <a:t>N</a:t>
+            </a:r>
+            <a:r>
+              <a:rPr lang="en-US" dirty="0">
+                <a:solidFill>
+                  <a:srgbClr val="0070C0"/>
+                </a:solidFill>
+              </a:rPr>
+              <a:t>≠C</a:t>
+            </a:r>
+            <a:r>
+              <a:rPr lang="en-US" baseline="-25000" dirty="0">
+                <a:solidFill>
+                  <a:srgbClr val="0070C0"/>
+                </a:solidFill>
+              </a:rPr>
+              <a:t>N-1</a:t>
+            </a:r>
+            <a:r>
+              <a:rPr lang="en-US" dirty="0">
+                <a:solidFill>
+                  <a:srgbClr val="0070C0"/>
+                </a:solidFill>
+              </a:rPr>
+              <a:t>)</a:t>
+            </a:r>
+          </a:p>
+          <a:p>
+            <a:endParaRPr lang="en-US" dirty="0"/>
+          </a:p>
+          <a:p>
+            <a:r>
+              <a:rPr lang="en-US" dirty="0">
+                <a:solidFill>
+                  <a:schemeClr val="tx1"/>
+                </a:solidFill>
+              </a:rPr>
+              <a:t>Multiple precision addition: </a:t>
+            </a:r>
+            <a:r>
+              <a:rPr lang="en-US" dirty="0">
+                <a:solidFill>
+                  <a:srgbClr val="0070C0"/>
+                </a:solidFill>
+              </a:rPr>
+              <a:t>ADD</a:t>
+            </a:r>
+            <a:r>
+              <a:rPr lang="en-US" b="1" dirty="0">
+                <a:solidFill>
+                  <a:srgbClr val="FF0000"/>
+                </a:solidFill>
+              </a:rPr>
+              <a:t>S</a:t>
+            </a:r>
+            <a:r>
+              <a:rPr lang="en-US" dirty="0">
+                <a:solidFill>
+                  <a:srgbClr val="0070C0"/>
+                </a:solidFill>
+              </a:rPr>
+              <a:t> </a:t>
+            </a:r>
+            <a:r>
+              <a:rPr lang="en-US" dirty="0">
+                <a:solidFill>
+                  <a:srgbClr val="0070C0"/>
+                </a:solidFill>
                 <a:sym typeface="Wingdings" panose="05000000000000000000" pitchFamily="2" charset="2"/>
               </a:rPr>
-              <a:t>= R1 - 5</a:t>
-            </a:r>
-            <a:endParaRPr lang="en-US" sz="1800" dirty="0"/>
-          </a:p>
-          <a:p>
-            <a:pPr lvl="1"/>
-            <a:r>
-              <a:rPr lang="en-US" sz="1800" dirty="0"/>
-              <a:t>SUB	R0,R1,R2		// R0 </a:t>
-            </a:r>
-            <a:r>
-              <a:rPr lang="en-US" sz="1800" dirty="0">
-                <a:sym typeface="Wingdings" panose="05000000000000000000" pitchFamily="2" charset="2"/>
-              </a:rPr>
-              <a:t>= R1 - R2</a:t>
-            </a:r>
-            <a:endParaRPr lang="en-US" sz="1800" dirty="0"/>
-          </a:p>
-          <a:p>
-            <a:pPr lvl="1"/>
-            <a:r>
-              <a:rPr lang="en-US" sz="1800" dirty="0"/>
-              <a:t>SUB	R0,R1,</a:t>
-            </a:r>
-            <a:r>
-              <a:rPr lang="en-US" sz="1800" b="1" dirty="0">
-                <a:solidFill>
-                  <a:srgbClr val="0000FF"/>
-                </a:solidFill>
-              </a:rPr>
-              <a:t>R2,LSL #2</a:t>
-            </a:r>
-            <a:r>
-              <a:rPr lang="en-US" sz="1800" dirty="0"/>
-              <a:t>		// R0 </a:t>
-            </a:r>
-            <a:r>
-              <a:rPr lang="en-US" sz="1800" dirty="0">
-                <a:sym typeface="Wingdings" panose="05000000000000000000" pitchFamily="2" charset="2"/>
-              </a:rPr>
-              <a:t>= R1 - </a:t>
-            </a:r>
-            <a:r>
-              <a:rPr lang="en-US" sz="1800" b="1" dirty="0">
-                <a:solidFill>
-                  <a:srgbClr val="0000FF"/>
-                </a:solidFill>
-                <a:sym typeface="Wingdings" panose="05000000000000000000" pitchFamily="2" charset="2"/>
-              </a:rPr>
-              <a:t>(R2 &lt;&lt; 2)</a:t>
-            </a:r>
-            <a:r>
-              <a:rPr lang="en-US" sz="1800" dirty="0">
-                <a:solidFill>
-                  <a:srgbClr val="0070C0"/>
-                </a:solidFill>
-                <a:sym typeface="Wingdings" panose="05000000000000000000" pitchFamily="2" charset="2"/>
-              </a:rPr>
-              <a:t>	</a:t>
-            </a:r>
-            <a:endParaRPr lang="en-US" sz="1800" dirty="0">
+              <a:t> ADC</a:t>
+            </a:r>
+            <a:endParaRPr lang="en-US" dirty="0">
               <a:solidFill>
                 <a:srgbClr val="0070C0"/>
               </a:solidFill>
             </a:endParaRPr>
           </a:p>
           <a:p>
-            <a:endParaRPr lang="en-US" sz="2100" dirty="0"/>
-          </a:p>
-          <a:p>
-            <a:r>
-              <a:rPr lang="en-US" sz="2100" dirty="0"/>
-              <a:t>Flags: </a:t>
-            </a:r>
-            <a:r>
-              <a:rPr lang="en-US" sz="2100" dirty="0">
-                <a:solidFill>
-                  <a:srgbClr val="0070C0"/>
-                </a:solidFill>
-              </a:rPr>
-              <a:t>Append “S” to capture result characteristics in NCVZ</a:t>
-            </a:r>
-          </a:p>
-          <a:p>
-            <a:endParaRPr lang="en-US" sz="2100" dirty="0"/>
-          </a:p>
-          <a:p>
-            <a:r>
-              <a:rPr lang="en-US" sz="2100" dirty="0"/>
-              <a:t>Overflow:</a:t>
-            </a:r>
-          </a:p>
-          <a:p>
-            <a:pPr lvl="1"/>
-            <a:r>
-              <a:rPr lang="en-US" sz="1800" b="1" dirty="0">
-                <a:solidFill>
-                  <a:srgbClr val="92D050"/>
-                </a:solidFill>
-              </a:rPr>
-              <a:t>Unsigned</a:t>
-            </a:r>
-            <a:r>
-              <a:rPr lang="en-US" sz="1800" dirty="0">
-                <a:solidFill>
-                  <a:srgbClr val="0070C0"/>
-                </a:solidFill>
-              </a:rPr>
-              <a:t>: Carry Flag       (C) = 0</a:t>
-            </a:r>
-          </a:p>
-          <a:p>
-            <a:pPr lvl="1"/>
-            <a:r>
-              <a:rPr lang="en-US" sz="1800" dirty="0">
-                <a:solidFill>
-                  <a:srgbClr val="0070C0"/>
-                </a:solidFill>
-              </a:rPr>
-              <a:t>     </a:t>
-            </a:r>
-            <a:r>
-              <a:rPr lang="en-US" sz="1800" b="1" dirty="0">
-                <a:solidFill>
-                  <a:srgbClr val="FF0000"/>
-                </a:solidFill>
-              </a:rPr>
-              <a:t>Signed</a:t>
-            </a:r>
-            <a:r>
-              <a:rPr lang="en-US" sz="1800" dirty="0">
-                <a:solidFill>
-                  <a:srgbClr val="0070C0"/>
-                </a:solidFill>
-              </a:rPr>
-              <a:t>: Overflow Flag (V) = 1 (Set when C</a:t>
-            </a:r>
-            <a:r>
-              <a:rPr lang="en-US" sz="1800" baseline="-25000" dirty="0">
-                <a:solidFill>
-                  <a:srgbClr val="0070C0"/>
-                </a:solidFill>
-              </a:rPr>
-              <a:t>N</a:t>
-            </a:r>
-            <a:r>
-              <a:rPr lang="en-US" sz="1800" dirty="0">
-                <a:solidFill>
-                  <a:srgbClr val="0070C0"/>
-                </a:solidFill>
-              </a:rPr>
-              <a:t>≠C</a:t>
-            </a:r>
-            <a:r>
-              <a:rPr lang="en-US" sz="1800" baseline="-25000" dirty="0">
-                <a:solidFill>
-                  <a:srgbClr val="0070C0"/>
-                </a:solidFill>
-              </a:rPr>
-              <a:t>N-1</a:t>
-            </a:r>
-            <a:r>
-              <a:rPr lang="en-US" sz="1800" dirty="0">
-                <a:solidFill>
-                  <a:srgbClr val="0070C0"/>
-                </a:solidFill>
-              </a:rPr>
-              <a:t>)</a:t>
-            </a:r>
-          </a:p>
-          <a:p>
-            <a:endParaRPr lang="en-US" sz="2100" dirty="0"/>
-          </a:p>
-          <a:p>
-            <a:r>
-              <a:rPr lang="en-US" sz="2100" dirty="0"/>
-              <a:t>Multiple precision subtraction: </a:t>
-            </a:r>
-            <a:r>
-              <a:rPr lang="en-US" sz="2100" dirty="0">
-                <a:solidFill>
-                  <a:srgbClr val="0070C0"/>
-                </a:solidFill>
-              </a:rPr>
-              <a:t>SUB</a:t>
-            </a:r>
-            <a:r>
-              <a:rPr lang="en-US" sz="2100" b="1" dirty="0">
-                <a:solidFill>
-                  <a:srgbClr val="FF0000"/>
-                </a:solidFill>
-              </a:rPr>
-              <a:t>S</a:t>
-            </a:r>
-            <a:r>
-              <a:rPr lang="en-US" sz="2100" dirty="0">
-                <a:solidFill>
-                  <a:srgbClr val="0070C0"/>
-                </a:solidFill>
-              </a:rPr>
-              <a:t> </a:t>
-            </a:r>
-            <a:r>
-              <a:rPr lang="en-US" sz="2100" dirty="0">
-                <a:solidFill>
-                  <a:srgbClr val="0070C0"/>
-                </a:solidFill>
-                <a:sym typeface="Wingdings" panose="05000000000000000000" pitchFamily="2" charset="2"/>
-              </a:rPr>
-              <a:t> SBC</a:t>
-            </a:r>
-            <a:endParaRPr lang="en-US" sz="2100" dirty="0">
-              <a:solidFill>
-                <a:srgbClr val="0070C0"/>
-              </a:solidFill>
-            </a:endParaRPr>
-          </a:p>
-          <a:p>
-            <a:endParaRPr lang="en-US" sz="2100" dirty="0"/>
-          </a:p>
-          <a:p>
-            <a:endParaRPr lang="en-US" sz="2100" dirty="0"/>
+            <a:endParaRPr lang="en-US" dirty="0"/>
+          </a:p>
+          <a:p>
+            <a:endParaRPr lang="en-US" dirty="0"/>
           </a:p>
         </p:txBody>
       </p:sp>
     </p:spTree>
     <p:extLst>
       <p:ext uri="{BB962C8B-B14F-4D97-AF65-F5344CB8AC3E}">
-        <p14:creationId xmlns:p14="http://schemas.microsoft.com/office/powerpoint/2010/main" val="2046813644"/>
+        <p14:creationId xmlns:p14="http://schemas.microsoft.com/office/powerpoint/2010/main" val="385189333"/>
       </p:ext>
     </p:extLst>
   </p:cSld>
@@ -41150,355 +42414,477 @@
         </p:nvSpPr>
         <p:spPr>
           <a:xfrm>
-            <a:off x="936516" y="745181"/>
-            <a:ext cx="9466789" cy="686577"/>
+            <a:off x="936516" y="749192"/>
+            <a:ext cx="4606031" cy="662513"/>
           </a:xfrm>
         </p:spPr>
         <p:txBody>
-          <a:bodyPr>
-            <a:normAutofit/>
-          </a:bodyPr>
+          <a:bodyPr/>
           <a:lstStyle/>
           <a:p>
             <a:r>
               <a:rPr lang="en-US" dirty="0"/>
-              <a:t>Single-Length 32x32 Integer Multiplication</a:t>
+              <a:t>Integer Subtraction</a:t>
             </a:r>
           </a:p>
         </p:txBody>
       </p:sp>
       <p:sp>
         <p:nvSpPr>
-          <p:cNvPr id="3" name="Content Placeholder 2"/>
-          <p:cNvSpPr>
-            <a:spLocks noGrp="1"/>
+          <p:cNvPr id="6" name="Content Placeholder 4"/>
+          <p:cNvSpPr txBox="1">
+            <a:spLocks/>
           </p:cNvSpPr>
-          <p:nvPr>
-            <p:ph idx="1"/>
-          </p:nvPr>
+          <p:nvPr/>
         </p:nvSpPr>
         <p:spPr>
           <a:xfrm>
-            <a:off x="936515" y="1807701"/>
-            <a:ext cx="10441347" cy="4841752"/>
+            <a:off x="936515" y="1708172"/>
+            <a:ext cx="10425305" cy="4953311"/>
           </a:xfrm>
+          <a:prstGeom prst="rect">
+            <a:avLst/>
+          </a:prstGeom>
         </p:spPr>
         <p:txBody>
-          <a:bodyPr>
-            <a:normAutofit lnSpcReduction="10000"/>
+          <a:bodyPr vert="horz" lIns="68580" tIns="34290" rIns="68580" bIns="34290" rtlCol="0">
+            <a:normAutofit/>
           </a:bodyPr>
-          <a:lstStyle/>
-          <a:p>
-            <a:r>
-              <a:rPr lang="en-US" dirty="0">
+          <a:lstStyle>
+            <a:lvl1pPr marL="228600" indent="-228600" algn="l" defTabSz="914400" rtl="0" eaLnBrk="1" latinLnBrk="0" hangingPunct="1">
+              <a:lnSpc>
+                <a:spcPct val="90000"/>
+              </a:lnSpc>
+              <a:spcBef>
+                <a:spcPts val="1000"/>
+              </a:spcBef>
+              <a:buFont typeface="Arial" panose="020B0604020202020204" pitchFamily="34" charset="0"/>
+              <a:buChar char="•"/>
+              <a:defRPr sz="2800" kern="1200">
                 <a:solidFill>
                   <a:schemeClr val="tx1"/>
                 </a:solidFill>
-              </a:rPr>
-              <a:t>Instructions:</a:t>
-            </a:r>
-            <a:r>
-              <a:rPr lang="en-US" dirty="0"/>
+                <a:latin typeface="+mn-lt"/>
+                <a:ea typeface="+mn-ea"/>
+                <a:cs typeface="+mn-cs"/>
+              </a:defRPr>
+            </a:lvl1pPr>
+            <a:lvl2pPr marL="685800" indent="-228600" algn="l" defTabSz="914400" rtl="0" eaLnBrk="1" latinLnBrk="0" hangingPunct="1">
+              <a:lnSpc>
+                <a:spcPct val="90000"/>
+              </a:lnSpc>
+              <a:spcBef>
+                <a:spcPts val="500"/>
+              </a:spcBef>
+              <a:buFont typeface="Arial" panose="020B0604020202020204" pitchFamily="34" charset="0"/>
+              <a:buChar char="•"/>
+              <a:defRPr sz="2400" kern="1200">
+                <a:solidFill>
+                  <a:schemeClr val="tx1"/>
+                </a:solidFill>
+                <a:latin typeface="+mn-lt"/>
+                <a:ea typeface="+mn-ea"/>
+                <a:cs typeface="+mn-cs"/>
+              </a:defRPr>
+            </a:lvl2pPr>
+            <a:lvl3pPr marL="1143000" indent="-228600" algn="l" defTabSz="914400" rtl="0" eaLnBrk="1" latinLnBrk="0" hangingPunct="1">
+              <a:lnSpc>
+                <a:spcPct val="90000"/>
+              </a:lnSpc>
+              <a:spcBef>
+                <a:spcPts val="500"/>
+              </a:spcBef>
+              <a:buFont typeface="Arial" panose="020B0604020202020204" pitchFamily="34" charset="0"/>
+              <a:buChar char="•"/>
+              <a:defRPr sz="2000" kern="1200">
+                <a:solidFill>
+                  <a:schemeClr val="tx1"/>
+                </a:solidFill>
+                <a:latin typeface="+mn-lt"/>
+                <a:ea typeface="+mn-ea"/>
+                <a:cs typeface="+mn-cs"/>
+              </a:defRPr>
+            </a:lvl3pPr>
+            <a:lvl4pPr marL="1600200" indent="-228600" algn="l" defTabSz="914400" rtl="0" eaLnBrk="1" latinLnBrk="0" hangingPunct="1">
+              <a:lnSpc>
+                <a:spcPct val="90000"/>
+              </a:lnSpc>
+              <a:spcBef>
+                <a:spcPts val="500"/>
+              </a:spcBef>
+              <a:buFont typeface="Arial" panose="020B0604020202020204" pitchFamily="34" charset="0"/>
+              <a:buChar char="•"/>
+              <a:defRPr sz="1800" kern="1200">
+                <a:solidFill>
+                  <a:schemeClr val="tx1"/>
+                </a:solidFill>
+                <a:latin typeface="+mn-lt"/>
+                <a:ea typeface="+mn-ea"/>
+                <a:cs typeface="+mn-cs"/>
+              </a:defRPr>
+            </a:lvl4pPr>
+            <a:lvl5pPr marL="2057400" indent="-228600" algn="l" defTabSz="914400" rtl="0" eaLnBrk="1" latinLnBrk="0" hangingPunct="1">
+              <a:lnSpc>
+                <a:spcPct val="90000"/>
+              </a:lnSpc>
+              <a:spcBef>
+                <a:spcPts val="500"/>
+              </a:spcBef>
+              <a:buFont typeface="Arial" panose="020B0604020202020204" pitchFamily="34" charset="0"/>
+              <a:buChar char="•"/>
+              <a:defRPr sz="1800" kern="1200">
+                <a:solidFill>
+                  <a:schemeClr val="tx1"/>
+                </a:solidFill>
+                <a:latin typeface="+mn-lt"/>
+                <a:ea typeface="+mn-ea"/>
+                <a:cs typeface="+mn-cs"/>
+              </a:defRPr>
+            </a:lvl5pPr>
+            <a:lvl6pPr marL="2514600" indent="-228600" algn="l" defTabSz="914400" rtl="0" eaLnBrk="1" latinLnBrk="0" hangingPunct="1">
+              <a:lnSpc>
+                <a:spcPct val="90000"/>
+              </a:lnSpc>
+              <a:spcBef>
+                <a:spcPts val="500"/>
+              </a:spcBef>
+              <a:buFont typeface="Arial" panose="020B0604020202020204" pitchFamily="34" charset="0"/>
+              <a:buChar char="•"/>
+              <a:defRPr sz="1800" kern="1200">
+                <a:solidFill>
+                  <a:schemeClr val="tx1"/>
+                </a:solidFill>
+                <a:latin typeface="+mn-lt"/>
+                <a:ea typeface="+mn-ea"/>
+                <a:cs typeface="+mn-cs"/>
+              </a:defRPr>
+            </a:lvl6pPr>
+            <a:lvl7pPr marL="2971800" indent="-228600" algn="l" defTabSz="914400" rtl="0" eaLnBrk="1" latinLnBrk="0" hangingPunct="1">
+              <a:lnSpc>
+                <a:spcPct val="90000"/>
+              </a:lnSpc>
+              <a:spcBef>
+                <a:spcPts val="500"/>
+              </a:spcBef>
+              <a:buFont typeface="Arial" panose="020B0604020202020204" pitchFamily="34" charset="0"/>
+              <a:buChar char="•"/>
+              <a:defRPr sz="1800" kern="1200">
+                <a:solidFill>
+                  <a:schemeClr val="tx1"/>
+                </a:solidFill>
+                <a:latin typeface="+mn-lt"/>
+                <a:ea typeface="+mn-ea"/>
+                <a:cs typeface="+mn-cs"/>
+              </a:defRPr>
+            </a:lvl7pPr>
+            <a:lvl8pPr marL="3429000" indent="-228600" algn="l" defTabSz="914400" rtl="0" eaLnBrk="1" latinLnBrk="0" hangingPunct="1">
+              <a:lnSpc>
+                <a:spcPct val="90000"/>
+              </a:lnSpc>
+              <a:spcBef>
+                <a:spcPts val="500"/>
+              </a:spcBef>
+              <a:buFont typeface="Arial" panose="020B0604020202020204" pitchFamily="34" charset="0"/>
+              <a:buChar char="•"/>
+              <a:defRPr sz="1800" kern="1200">
+                <a:solidFill>
+                  <a:schemeClr val="tx1"/>
+                </a:solidFill>
+                <a:latin typeface="+mn-lt"/>
+                <a:ea typeface="+mn-ea"/>
+                <a:cs typeface="+mn-cs"/>
+              </a:defRPr>
+            </a:lvl8pPr>
+            <a:lvl9pPr marL="3886200" indent="-228600" algn="l" defTabSz="914400" rtl="0" eaLnBrk="1" latinLnBrk="0" hangingPunct="1">
+              <a:lnSpc>
+                <a:spcPct val="90000"/>
+              </a:lnSpc>
+              <a:spcBef>
+                <a:spcPts val="500"/>
+              </a:spcBef>
+              <a:buFont typeface="Arial" panose="020B0604020202020204" pitchFamily="34" charset="0"/>
+              <a:buChar char="•"/>
+              <a:defRPr sz="1800" kern="1200">
+                <a:solidFill>
+                  <a:schemeClr val="tx1"/>
+                </a:solidFill>
+                <a:latin typeface="+mn-lt"/>
+                <a:ea typeface="+mn-ea"/>
+                <a:cs typeface="+mn-cs"/>
+              </a:defRPr>
+            </a:lvl9pPr>
+          </a:lstStyle>
+          <a:p>
+            <a:r>
+              <a:rPr lang="en-US" sz="2100" dirty="0"/>
+              <a:t>Instructions: </a:t>
+            </a:r>
+            <a:r>
+              <a:rPr lang="en-US" sz="2100" dirty="0">
+                <a:solidFill>
+                  <a:srgbClr val="0070C0"/>
+                </a:solidFill>
+              </a:rPr>
+              <a:t>SUB{S}, SBC{S}, RSB{S}</a:t>
+            </a:r>
+          </a:p>
+          <a:p>
+            <a:r>
+              <a:rPr lang="en-US" sz="2100" dirty="0"/>
+              <a:t>Format Examples:</a:t>
+            </a:r>
+          </a:p>
+          <a:p>
+            <a:pPr lvl="1"/>
+            <a:r>
+              <a:rPr lang="en-US" sz="1800" dirty="0"/>
+              <a:t>SUB	R0,R1,</a:t>
+            </a:r>
+            <a:r>
+              <a:rPr lang="en-US" sz="1800" b="1" dirty="0">
+                <a:solidFill>
+                  <a:srgbClr val="0000FF"/>
+                </a:solidFill>
+              </a:rPr>
+              <a:t>#5</a:t>
+            </a:r>
+            <a:r>
+              <a:rPr lang="en-US" sz="1800" dirty="0"/>
+              <a:t>		// R0 </a:t>
+            </a:r>
+            <a:r>
+              <a:rPr lang="en-US" sz="1800" dirty="0">
+                <a:sym typeface="Wingdings" panose="05000000000000000000" pitchFamily="2" charset="2"/>
+              </a:rPr>
+              <a:t>= R1 - 5</a:t>
+            </a:r>
+            <a:endParaRPr lang="en-US" sz="1800" dirty="0"/>
+          </a:p>
+          <a:p>
+            <a:pPr lvl="1"/>
+            <a:r>
+              <a:rPr lang="en-US" sz="1800" dirty="0"/>
+              <a:t>SUB	R0,R1,R2		// R0 </a:t>
+            </a:r>
+            <a:r>
+              <a:rPr lang="en-US" sz="1800" dirty="0">
+                <a:sym typeface="Wingdings" panose="05000000000000000000" pitchFamily="2" charset="2"/>
+              </a:rPr>
+              <a:t>= R1 - R2</a:t>
+            </a:r>
+            <a:endParaRPr lang="en-US" sz="1800" dirty="0"/>
+          </a:p>
+          <a:p>
+            <a:pPr lvl="1"/>
+            <a:r>
+              <a:rPr lang="en-US" sz="1800" dirty="0"/>
+              <a:t>SUB	R0,R1,</a:t>
+            </a:r>
+            <a:r>
+              <a:rPr lang="en-US" sz="1800" b="1" dirty="0">
+                <a:solidFill>
+                  <a:srgbClr val="0000FF"/>
+                </a:solidFill>
+              </a:rPr>
+              <a:t>R2,LSL #2</a:t>
+            </a:r>
+            <a:r>
+              <a:rPr lang="en-US" sz="1800" dirty="0"/>
+              <a:t>		// R0 </a:t>
+            </a:r>
+            <a:r>
+              <a:rPr lang="en-US" sz="1800" dirty="0">
+                <a:sym typeface="Wingdings" panose="05000000000000000000" pitchFamily="2" charset="2"/>
+              </a:rPr>
+              <a:t>= R1 - </a:t>
+            </a:r>
+            <a:r>
+              <a:rPr lang="en-US" sz="1800" b="1" dirty="0">
+                <a:solidFill>
+                  <a:srgbClr val="0000FF"/>
+                </a:solidFill>
+                <a:sym typeface="Wingdings" panose="05000000000000000000" pitchFamily="2" charset="2"/>
+              </a:rPr>
+              <a:t>(R2 &lt;&lt; 2)</a:t>
+            </a:r>
+            <a:r>
+              <a:rPr lang="en-US" sz="1800" dirty="0">
+                <a:solidFill>
+                  <a:srgbClr val="0070C0"/>
+                </a:solidFill>
+                <a:sym typeface="Wingdings" panose="05000000000000000000" pitchFamily="2" charset="2"/>
+              </a:rPr>
+              <a:t>	</a:t>
+            </a:r>
+            <a:endParaRPr lang="en-US" sz="1800" dirty="0">
+              <a:solidFill>
+                <a:srgbClr val="0070C0"/>
+              </a:solidFill>
+            </a:endParaRPr>
+          </a:p>
+          <a:p>
+            <a:endParaRPr lang="en-US" sz="2100" dirty="0"/>
+          </a:p>
+          <a:p>
+            <a:r>
+              <a:rPr lang="en-US" sz="2100" dirty="0"/>
+              <a:t>Flags: </a:t>
+            </a:r>
+            <a:r>
+              <a:rPr lang="en-US" sz="2100" dirty="0">
+                <a:solidFill>
+                  <a:srgbClr val="0070C0"/>
+                </a:solidFill>
+              </a:rPr>
+              <a:t>Append “S” to capture result characteristics in NCVZ</a:t>
+            </a:r>
+          </a:p>
+          <a:p>
+            <a:endParaRPr lang="en-US" sz="2100" dirty="0"/>
+          </a:p>
+          <a:p>
+            <a:r>
+              <a:rPr lang="en-US" sz="2100" dirty="0"/>
+              <a:t>Overflow:</a:t>
+            </a:r>
+          </a:p>
+          <a:p>
+            <a:pPr lvl="1"/>
+            <a:r>
+              <a:rPr lang="en-US" sz="1800" b="1" dirty="0">
+                <a:solidFill>
+                  <a:srgbClr val="92D050"/>
+                </a:solidFill>
+              </a:rPr>
+              <a:t>Unsigned</a:t>
+            </a:r>
+            <a:r>
+              <a:rPr lang="en-US" sz="1800" dirty="0">
+                <a:solidFill>
+                  <a:srgbClr val="0070C0"/>
+                </a:solidFill>
+              </a:rPr>
+              <a:t>: Carry Flag       (C) = 0</a:t>
+            </a:r>
+          </a:p>
+          <a:p>
+            <a:pPr lvl="1"/>
+            <a:r>
+              <a:rPr lang="en-US" sz="1800" dirty="0">
+                <a:solidFill>
+                  <a:srgbClr val="0070C0"/>
+                </a:solidFill>
+              </a:rPr>
+              <a:t>     </a:t>
+            </a:r>
+            <a:r>
+              <a:rPr lang="en-US" sz="1800" b="1" dirty="0">
+                <a:solidFill>
+                  <a:srgbClr val="FF0000"/>
+                </a:solidFill>
+              </a:rPr>
+              <a:t>Signed</a:t>
+            </a:r>
+            <a:r>
+              <a:rPr lang="en-US" sz="1800" dirty="0">
+                <a:solidFill>
+                  <a:srgbClr val="0070C0"/>
+                </a:solidFill>
+              </a:rPr>
+              <a:t>: Overflow Flag (V) = 1 (Set when C</a:t>
+            </a:r>
+            <a:r>
+              <a:rPr lang="en-US" sz="1800" baseline="-25000" dirty="0">
+                <a:solidFill>
+                  <a:srgbClr val="0070C0"/>
+                </a:solidFill>
+              </a:rPr>
+              <a:t>N</a:t>
+            </a:r>
+            <a:r>
+              <a:rPr lang="en-US" sz="1800" dirty="0">
+                <a:solidFill>
+                  <a:srgbClr val="0070C0"/>
+                </a:solidFill>
+              </a:rPr>
+              <a:t>≠C</a:t>
+            </a:r>
+            <a:r>
+              <a:rPr lang="en-US" sz="1800" baseline="-25000" dirty="0">
+                <a:solidFill>
+                  <a:srgbClr val="0070C0"/>
+                </a:solidFill>
+              </a:rPr>
+              <a:t>N-1</a:t>
+            </a:r>
+            <a:r>
+              <a:rPr lang="en-US" sz="1800" dirty="0">
+                <a:solidFill>
+                  <a:srgbClr val="0070C0"/>
+                </a:solidFill>
+              </a:rPr>
+              <a:t>)</a:t>
+            </a:r>
+          </a:p>
+          <a:p>
+            <a:endParaRPr lang="en-US" sz="2100" dirty="0"/>
+          </a:p>
+          <a:p>
+            <a:r>
+              <a:rPr lang="en-US" sz="2100" dirty="0"/>
+              <a:t>Multiple precision subtraction: </a:t>
+            </a:r>
+            <a:r>
+              <a:rPr lang="en-US" sz="2100" dirty="0">
+                <a:solidFill>
+                  <a:srgbClr val="0070C0"/>
+                </a:solidFill>
+              </a:rPr>
+              <a:t>SUB</a:t>
+            </a:r>
+            <a:r>
+              <a:rPr lang="en-US" sz="2100" b="1" dirty="0">
+                <a:solidFill>
+                  <a:srgbClr val="FF0000"/>
+                </a:solidFill>
+              </a:rPr>
+              <a:t>S</a:t>
+            </a:r>
+            <a:r>
+              <a:rPr lang="en-US" sz="2100" dirty="0">
+                <a:solidFill>
+                  <a:srgbClr val="0070C0"/>
+                </a:solidFill>
+              </a:rPr>
               <a:t> </a:t>
             </a:r>
             <a:r>
-              <a:rPr lang="en-US" dirty="0">
+              <a:rPr lang="en-US" sz="2100" dirty="0">
                 <a:solidFill>
                   <a:srgbClr val="0070C0"/>
                 </a:solidFill>
-              </a:rPr>
-              <a:t>MUL{</a:t>
-            </a:r>
-            <a:r>
-              <a:rPr lang="en-US" b="1" dirty="0">
-                <a:solidFill>
-                  <a:srgbClr val="FF0000"/>
-                </a:solidFill>
-              </a:rPr>
-              <a:t>S</a:t>
-            </a:r>
-            <a:r>
-              <a:rPr lang="en-US" dirty="0">
-                <a:solidFill>
-                  <a:srgbClr val="0070C0"/>
-                </a:solidFill>
-              </a:rPr>
-              <a:t>}, MLA, MLS</a:t>
-            </a:r>
-          </a:p>
-          <a:p>
-            <a:endParaRPr lang="en-US" dirty="0"/>
-          </a:p>
-          <a:p>
-            <a:r>
-              <a:rPr lang="en-US" b="1" dirty="0">
-                <a:solidFill>
-                  <a:srgbClr val="FF0000"/>
-                </a:solidFill>
-              </a:rPr>
-              <a:t>Signed</a:t>
-            </a:r>
-            <a:r>
-              <a:rPr lang="en-US" dirty="0"/>
-              <a:t> </a:t>
-            </a:r>
-            <a:r>
-              <a:rPr lang="en-US" dirty="0">
-                <a:solidFill>
-                  <a:schemeClr val="tx1"/>
-                </a:solidFill>
-              </a:rPr>
-              <a:t>vs.</a:t>
-            </a:r>
-            <a:r>
-              <a:rPr lang="en-US" dirty="0"/>
-              <a:t> </a:t>
-            </a:r>
-            <a:r>
-              <a:rPr lang="en-US" b="1" dirty="0">
-                <a:solidFill>
-                  <a:srgbClr val="92D050"/>
-                </a:solidFill>
-              </a:rPr>
-              <a:t>Unsigned</a:t>
-            </a:r>
-            <a:r>
-              <a:rPr lang="en-US" dirty="0">
-                <a:solidFill>
-                  <a:schemeClr val="tx1"/>
-                </a:solidFill>
-              </a:rPr>
-              <a:t>:</a:t>
-            </a:r>
-            <a:r>
-              <a:rPr lang="en-US" dirty="0"/>
-              <a:t> </a:t>
-            </a:r>
-            <a:r>
-              <a:rPr lang="en-US" dirty="0">
-                <a:solidFill>
-                  <a:srgbClr val="0070C0"/>
-                </a:solidFill>
-              </a:rPr>
-              <a:t>Use </a:t>
-            </a:r>
-            <a:r>
-              <a:rPr lang="en-US" b="1" dirty="0">
-                <a:solidFill>
-                  <a:srgbClr val="0070C0"/>
-                </a:solidFill>
-              </a:rPr>
-              <a:t>same</a:t>
-            </a:r>
-            <a:r>
-              <a:rPr lang="en-US" dirty="0">
-                <a:solidFill>
-                  <a:srgbClr val="0070C0"/>
-                </a:solidFill>
-              </a:rPr>
-              <a:t> instruction</a:t>
-            </a:r>
-          </a:p>
-          <a:p>
-            <a:endParaRPr lang="en-US" dirty="0"/>
-          </a:p>
-          <a:p>
-            <a:r>
-              <a:rPr lang="en-US" dirty="0">
-                <a:solidFill>
-                  <a:schemeClr val="tx1"/>
-                </a:solidFill>
-              </a:rPr>
-              <a:t>Format Examples:</a:t>
-            </a:r>
-          </a:p>
-          <a:p>
-            <a:pPr lvl="1"/>
-            <a:r>
-              <a:rPr lang="en-US" dirty="0">
-                <a:solidFill>
-                  <a:schemeClr val="tx1"/>
-                </a:solidFill>
-              </a:rPr>
-              <a:t>MUL	R0,</a:t>
-            </a:r>
-            <a:r>
-              <a:rPr lang="en-US" b="1" dirty="0">
-                <a:solidFill>
-                  <a:srgbClr val="0000FF"/>
-                </a:solidFill>
-              </a:rPr>
-              <a:t>R1,R2</a:t>
-            </a:r>
-            <a:r>
-              <a:rPr lang="en-US" dirty="0">
-                <a:solidFill>
-                  <a:schemeClr val="tx1"/>
-                </a:solidFill>
-              </a:rPr>
-              <a:t>		// R0 </a:t>
-            </a:r>
-            <a:r>
-              <a:rPr lang="en-US" dirty="0">
-                <a:solidFill>
-                  <a:schemeClr val="tx1"/>
-                </a:solidFill>
                 <a:sym typeface="Wingdings" panose="05000000000000000000" pitchFamily="2" charset="2"/>
               </a:rPr>
-              <a:t>= </a:t>
-            </a:r>
-            <a:r>
-              <a:rPr lang="en-US" b="1" dirty="0">
-                <a:solidFill>
-                  <a:srgbClr val="0000FF"/>
-                </a:solidFill>
-                <a:sym typeface="Wingdings" panose="05000000000000000000" pitchFamily="2" charset="2"/>
-              </a:rPr>
-              <a:t>R1 × R2</a:t>
-            </a:r>
-          </a:p>
-          <a:p>
-            <a:pPr lvl="1"/>
-            <a:r>
-              <a:rPr lang="en-US" dirty="0">
-                <a:solidFill>
-                  <a:schemeClr val="tx1"/>
-                </a:solidFill>
-              </a:rPr>
-              <a:t>MLA	R0,</a:t>
-            </a:r>
-            <a:r>
-              <a:rPr lang="en-US" b="1" dirty="0">
-                <a:solidFill>
-                  <a:srgbClr val="0000FF"/>
-                </a:solidFill>
-              </a:rPr>
-              <a:t>R1,R2</a:t>
-            </a:r>
-            <a:r>
-              <a:rPr lang="en-US" dirty="0">
-                <a:solidFill>
-                  <a:schemeClr val="tx1"/>
-                </a:solidFill>
-              </a:rPr>
-              <a:t>,R3		// R0 </a:t>
-            </a:r>
-            <a:r>
-              <a:rPr lang="en-US" dirty="0">
-                <a:solidFill>
-                  <a:schemeClr val="tx1"/>
-                </a:solidFill>
-                <a:sym typeface="Wingdings" panose="05000000000000000000" pitchFamily="2" charset="2"/>
-              </a:rPr>
-              <a:t>= R3 + </a:t>
-            </a:r>
-            <a:r>
-              <a:rPr lang="en-US" b="1" dirty="0">
-                <a:solidFill>
-                  <a:srgbClr val="0000FF"/>
-                </a:solidFill>
-                <a:sym typeface="Wingdings" panose="05000000000000000000" pitchFamily="2" charset="2"/>
-              </a:rPr>
-              <a:t>R1 × R2</a:t>
-            </a:r>
-          </a:p>
-          <a:p>
-            <a:pPr lvl="1"/>
-            <a:r>
-              <a:rPr lang="en-US" dirty="0">
-                <a:solidFill>
-                  <a:schemeClr val="tx1"/>
-                </a:solidFill>
-              </a:rPr>
-              <a:t>MLS	R0,</a:t>
-            </a:r>
-            <a:r>
-              <a:rPr lang="en-US" b="1" dirty="0">
-                <a:solidFill>
-                  <a:srgbClr val="0000FF"/>
-                </a:solidFill>
-              </a:rPr>
-              <a:t>R1,R2</a:t>
-            </a:r>
-            <a:r>
-              <a:rPr lang="en-US" dirty="0">
-                <a:solidFill>
-                  <a:schemeClr val="tx1"/>
-                </a:solidFill>
-              </a:rPr>
-              <a:t>,R3		// R0 </a:t>
-            </a:r>
-            <a:r>
-              <a:rPr lang="en-US" dirty="0">
-                <a:solidFill>
-                  <a:schemeClr val="tx1"/>
-                </a:solidFill>
-                <a:sym typeface="Wingdings" panose="05000000000000000000" pitchFamily="2" charset="2"/>
-              </a:rPr>
-              <a:t>= R3 -  </a:t>
-            </a:r>
-            <a:r>
-              <a:rPr lang="en-US" b="1" dirty="0">
-                <a:solidFill>
-                  <a:srgbClr val="0000FF"/>
-                </a:solidFill>
-                <a:sym typeface="Wingdings" panose="05000000000000000000" pitchFamily="2" charset="2"/>
-              </a:rPr>
-              <a:t>R1 × R2</a:t>
-            </a:r>
-          </a:p>
-          <a:p>
-            <a:endParaRPr lang="en-US" dirty="0"/>
-          </a:p>
-          <a:p>
-            <a:r>
-              <a:rPr lang="en-US" dirty="0">
-                <a:solidFill>
-                  <a:schemeClr val="tx1"/>
-                </a:solidFill>
-              </a:rPr>
-              <a:t>Flags:</a:t>
-            </a:r>
-            <a:r>
-              <a:rPr lang="en-US" dirty="0"/>
-              <a:t> </a:t>
-            </a:r>
-            <a:r>
-              <a:rPr lang="en-US" dirty="0">
-                <a:solidFill>
-                  <a:srgbClr val="0070C0"/>
-                </a:solidFill>
-              </a:rPr>
-              <a:t>Append “S” (only MUL) to capture result characteristics in N and Z flags</a:t>
-            </a:r>
-          </a:p>
-          <a:p>
-            <a:endParaRPr lang="en-US" dirty="0"/>
-          </a:p>
-          <a:p>
-            <a:r>
-              <a:rPr lang="en-US" dirty="0">
-                <a:solidFill>
-                  <a:schemeClr val="tx1"/>
-                </a:solidFill>
-              </a:rPr>
-              <a:t>Overflow: </a:t>
-            </a:r>
-            <a:r>
-              <a:rPr lang="en-US" b="1" dirty="0">
-                <a:solidFill>
-                  <a:srgbClr val="FF0000"/>
-                </a:solidFill>
-              </a:rPr>
-              <a:t>May happen but impossible to detect!</a:t>
-            </a:r>
+              <a:t> SBC</a:t>
+            </a:r>
+            <a:endParaRPr lang="en-US" sz="2100" dirty="0">
+              <a:solidFill>
+                <a:srgbClr val="0070C0"/>
+              </a:solidFill>
+            </a:endParaRPr>
+          </a:p>
+          <a:p>
+            <a:endParaRPr lang="en-US" sz="2100" dirty="0"/>
+          </a:p>
+          <a:p>
+            <a:endParaRPr lang="en-US" sz="2100" dirty="0"/>
           </a:p>
         </p:txBody>
       </p:sp>
     </p:spTree>
     <p:extLst>
       <p:ext uri="{BB962C8B-B14F-4D97-AF65-F5344CB8AC3E}">
-        <p14:creationId xmlns:p14="http://schemas.microsoft.com/office/powerpoint/2010/main" val="3196419567"/>
+        <p14:creationId xmlns:p14="http://schemas.microsoft.com/office/powerpoint/2010/main" val="2046813644"/>
       </p:ext>
     </p:extLst>
   </p:cSld>
@@ -41537,8 +42923,8 @@
         </p:nvSpPr>
         <p:spPr>
           <a:xfrm>
-            <a:off x="936516" y="741171"/>
-            <a:ext cx="9643252" cy="734703"/>
+            <a:off x="936516" y="745181"/>
+            <a:ext cx="9466789" cy="686577"/>
           </a:xfrm>
         </p:spPr>
         <p:txBody>
@@ -41549,7 +42935,7 @@
           <a:p>
             <a:r>
               <a:rPr lang="en-US" dirty="0"/>
-              <a:t>Double-Length 32x32 Integer Multiplication</a:t>
+              <a:t>Single-Length 32x32 Integer Multiplication</a:t>
             </a:r>
           </a:p>
         </p:txBody>
@@ -41566,13 +42952,13 @@
         </p:nvSpPr>
         <p:spPr>
           <a:xfrm>
-            <a:off x="936515" y="1795670"/>
-            <a:ext cx="10425305" cy="4833730"/>
+            <a:off x="936515" y="1807701"/>
+            <a:ext cx="10441347" cy="4841752"/>
           </a:xfrm>
         </p:spPr>
         <p:txBody>
           <a:bodyPr>
-            <a:normAutofit fontScale="92500" lnSpcReduction="10000"/>
+            <a:normAutofit lnSpcReduction="10000"/>
           </a:bodyPr>
           <a:lstStyle/>
           <a:p>
@@ -41594,7 +42980,23 @@
                   <a:srgbClr val="0070C0"/>
                 </a:solidFill>
               </a:rPr>
-              <a:t>UMULL, SMULL, UMLAL, SMLAL</a:t>
+              <a:t>MUL{</a:t>
+            </a:r>
+            <a:r>
+              <a:rPr lang="en-US" b="1" dirty="0">
+                <a:solidFill>
+                  <a:srgbClr val="FF0000"/>
+                </a:solidFill>
+              </a:rPr>
+              <a:t>S</a:t>
+            </a:r>
+            <a:r>
+              <a:rPr lang="en-US" dirty="0">
+                <a:solidFill>
+                  <a:srgbClr val="0070C0"/>
+                </a:solidFill>
+              </a:rPr>
+              <a:t>}, MLA, MLS</a:t>
             </a:r>
           </a:p>
           <a:p>
@@ -41619,184 +43021,27 @@
                   <a:schemeClr val="tx1"/>
                 </a:solidFill>
               </a:rPr>
-              <a:t>vs. </a:t>
-            </a:r>
-            <a:r>
-              <a:rPr lang="en-US" b="1" dirty="0">
-                <a:solidFill>
-                  <a:srgbClr val="92D050"/>
-                </a:solidFill>
-              </a:rPr>
-              <a:t>Unsigned</a:t>
-            </a:r>
-            <a:r>
-              <a:rPr lang="en-US" dirty="0"/>
-              <a:t>: </a:t>
-            </a:r>
-            <a:r>
-              <a:rPr lang="en-US" dirty="0">
-                <a:solidFill>
-                  <a:srgbClr val="0070C0"/>
-                </a:solidFill>
-              </a:rPr>
-              <a:t>Use </a:t>
-            </a:r>
-            <a:r>
-              <a:rPr lang="en-US" b="1" dirty="0">
-                <a:solidFill>
-                  <a:srgbClr val="0070C0"/>
-                </a:solidFill>
-              </a:rPr>
-              <a:t>different</a:t>
-            </a:r>
-            <a:r>
-              <a:rPr lang="en-US" dirty="0">
-                <a:solidFill>
-                  <a:srgbClr val="0070C0"/>
-                </a:solidFill>
-              </a:rPr>
-              <a:t> instructions!</a:t>
-            </a:r>
-          </a:p>
-          <a:p>
-            <a:endParaRPr lang="en-US" dirty="0"/>
-          </a:p>
-          <a:p>
-            <a:r>
-              <a:rPr lang="en-US" b="1" dirty="0">
-                <a:solidFill>
-                  <a:srgbClr val="FF0000"/>
-                </a:solidFill>
-              </a:rPr>
-              <a:t>Signed</a:t>
+              <a:t>vs.</a:t>
             </a:r>
             <a:r>
               <a:rPr lang="en-US" dirty="0"/>
               <a:t> </a:t>
             </a:r>
             <a:r>
+              <a:rPr lang="en-US" b="1" dirty="0">
+                <a:solidFill>
+                  <a:srgbClr val="92D050"/>
+                </a:solidFill>
+              </a:rPr>
+              <a:t>Unsigned</a:t>
+            </a:r>
+            <a:r>
               <a:rPr lang="en-US" dirty="0">
                 <a:solidFill>
                   <a:schemeClr val="tx1"/>
                 </a:solidFill>
               </a:rPr>
-              <a:t>Instruction Formats:</a:t>
-            </a:r>
-          </a:p>
-          <a:p>
-            <a:pPr lvl="1"/>
-            <a:r>
-              <a:rPr lang="en-US" b="1" dirty="0">
-                <a:solidFill>
-                  <a:srgbClr val="FF0000"/>
-                </a:solidFill>
-              </a:rPr>
-              <a:t>S</a:t>
-            </a:r>
-            <a:r>
-              <a:rPr lang="en-US" dirty="0">
-                <a:solidFill>
-                  <a:schemeClr val="tx1"/>
-                </a:solidFill>
-              </a:rPr>
-              <a:t>MULL	R0,R1,</a:t>
-            </a:r>
-            <a:r>
-              <a:rPr lang="en-US" b="1" dirty="0">
-                <a:solidFill>
-                  <a:srgbClr val="0000FF"/>
-                </a:solidFill>
-              </a:rPr>
-              <a:t>R2,R3</a:t>
-            </a:r>
-            <a:r>
-              <a:rPr lang="en-US" dirty="0">
-                <a:solidFill>
-                  <a:schemeClr val="tx1"/>
-                </a:solidFill>
-              </a:rPr>
-              <a:t>		// R0.R1 </a:t>
-            </a:r>
-            <a:r>
-              <a:rPr lang="en-US" dirty="0">
-                <a:solidFill>
-                  <a:schemeClr val="tx1"/>
-                </a:solidFill>
-                <a:sym typeface="Wingdings" panose="05000000000000000000" pitchFamily="2" charset="2"/>
-              </a:rPr>
-              <a:t>=               </a:t>
-            </a:r>
-            <a:r>
-              <a:rPr lang="en-US" b="1" dirty="0">
-                <a:solidFill>
-                  <a:srgbClr val="0000FF"/>
-                </a:solidFill>
-                <a:sym typeface="Wingdings" panose="05000000000000000000" pitchFamily="2" charset="2"/>
-              </a:rPr>
-              <a:t>R2 × R3</a:t>
-            </a:r>
-          </a:p>
-          <a:p>
-            <a:pPr lvl="1"/>
-            <a:r>
-              <a:rPr lang="en-US" b="1" dirty="0">
-                <a:solidFill>
-                  <a:srgbClr val="FF0000"/>
-                </a:solidFill>
-              </a:rPr>
-              <a:t>S</a:t>
-            </a:r>
-            <a:r>
-              <a:rPr lang="en-US" dirty="0">
-                <a:solidFill>
-                  <a:schemeClr val="tx1"/>
-                </a:solidFill>
-              </a:rPr>
-              <a:t>MLAL	R0,R1,</a:t>
-            </a:r>
-            <a:r>
-              <a:rPr lang="en-US" b="1" dirty="0">
-                <a:solidFill>
-                  <a:srgbClr val="0000FF"/>
-                </a:solidFill>
-              </a:rPr>
-              <a:t>R2,R3</a:t>
-            </a:r>
-            <a:r>
-              <a:rPr lang="en-US" dirty="0">
-                <a:solidFill>
-                  <a:schemeClr val="tx1"/>
-                </a:solidFill>
-              </a:rPr>
-              <a:t>		// R0.R1 </a:t>
-            </a:r>
-            <a:r>
-              <a:rPr lang="en-US" dirty="0">
-                <a:solidFill>
-                  <a:schemeClr val="tx1"/>
-                </a:solidFill>
-                <a:sym typeface="Wingdings" panose="05000000000000000000" pitchFamily="2" charset="2"/>
-              </a:rPr>
-              <a:t>= R0.R1 + </a:t>
-            </a:r>
-            <a:r>
-              <a:rPr lang="en-US" b="1" dirty="0">
-                <a:solidFill>
-                  <a:srgbClr val="0000FF"/>
-                </a:solidFill>
-                <a:sym typeface="Wingdings" panose="05000000000000000000" pitchFamily="2" charset="2"/>
-              </a:rPr>
-              <a:t>R2 × R3</a:t>
-            </a:r>
-          </a:p>
-          <a:p>
-            <a:r>
-              <a:rPr lang="en-US" b="1" dirty="0">
-                <a:solidFill>
-                  <a:srgbClr val="92D050"/>
-                </a:solidFill>
-              </a:rPr>
-              <a:t>Unsigned</a:t>
+              <a:t>:</a:t>
             </a:r>
             <a:r>
               <a:rPr lang="en-US" dirty="0"/>
@@ -41805,21 +43050,58 @@
             <a:r>
               <a:rPr lang="en-US" dirty="0">
                 <a:solidFill>
+                  <a:srgbClr val="0070C0"/>
+                </a:solidFill>
+              </a:rPr>
+              <a:t>Use </a:t>
+            </a:r>
+            <a:r>
+              <a:rPr lang="en-US" b="1" dirty="0">
+                <a:solidFill>
+                  <a:srgbClr val="0070C0"/>
+                </a:solidFill>
+              </a:rPr>
+              <a:t>same</a:t>
+            </a:r>
+            <a:r>
+              <a:rPr lang="en-US" dirty="0">
+                <a:solidFill>
+                  <a:srgbClr val="0070C0"/>
+                </a:solidFill>
+              </a:rPr>
+              <a:t> instruction</a:t>
+            </a:r>
+          </a:p>
+          <a:p>
+            <a:endParaRPr lang="en-US" dirty="0"/>
+          </a:p>
+          <a:p>
+            <a:r>
+              <a:rPr lang="en-US" dirty="0">
+                <a:solidFill>
                   <a:schemeClr val="tx1"/>
                 </a:solidFill>
               </a:rPr>
-              <a:t>Instruction Formats:</a:t>
+              <a:t>Format Examples:</a:t>
             </a:r>
           </a:p>
           <a:p>
             <a:pPr lvl="1"/>
             <a:r>
+              <a:rPr lang="en-US" dirty="0">
+                <a:solidFill>
+                  <a:schemeClr val="tx1"/>
+                </a:solidFill>
+              </a:rPr>
+              <a:t>MUL	R0,</a:t>
+            </a:r>
+            <a:r>
               <a:rPr lang="en-US" b="1" dirty="0">
                 <a:solidFill>
-                  <a:srgbClr val="92D050"/>
-                </a:solidFill>
-              </a:rPr>
-              <a:t>U</a:t>
+                  <a:srgbClr val="0000FF"/>
+                </a:solidFill>
+              </a:rPr>
+              <a:t>R1,R2</a:t>
             </a:r>
             <a:r>
               <a:rPr lang="en-US" dirty="0">
@@ -41827,32 +43109,61 @@
                   <a:schemeClr val="tx1"/>
                 </a:solidFill>
               </a:rPr>
-              <a:t>MULL	R0,R1,</a:t>
+              <a:t>		// R0 </a:t>
+            </a:r>
+            <a:r>
+              <a:rPr lang="en-US" dirty="0">
+                <a:solidFill>
+                  <a:schemeClr val="tx1"/>
+                </a:solidFill>
+                <a:sym typeface="Wingdings" panose="05000000000000000000" pitchFamily="2" charset="2"/>
+              </a:rPr>
+              <a:t>= </a:t>
             </a:r>
             <a:r>
               <a:rPr lang="en-US" b="1" dirty="0">
                 <a:solidFill>
                   <a:srgbClr val="0000FF"/>
                 </a:solidFill>
-              </a:rPr>
-              <a:t>R2,R3</a:t>
-            </a:r>
+                <a:sym typeface="Wingdings" panose="05000000000000000000" pitchFamily="2" charset="2"/>
+              </a:rPr>
+              <a:t>R1 × R2</a:t>
+            </a:r>
+          </a:p>
+          <a:p>
+            <a:pPr lvl="1"/>
             <a:r>
               <a:rPr lang="en-US" dirty="0">
                 <a:solidFill>
                   <a:schemeClr val="tx1"/>
                 </a:solidFill>
               </a:rPr>
-              <a:t>		// R0.R1 </a:t>
+              <a:t>MLA	R0,</a:t>
+            </a:r>
+            <a:r>
+              <a:rPr lang="en-US" b="1" dirty="0">
+                <a:solidFill>
+                  <a:srgbClr val="0000FF"/>
+                </a:solidFill>
+              </a:rPr>
+              <a:t>R1,R2</a:t>
             </a:r>
             <a:r>
               <a:rPr lang="en-US" dirty="0">
                 <a:solidFill>
                   <a:schemeClr val="tx1"/>
                 </a:solidFill>
+              </a:rPr>
+              <a:t>,R3		// R0 </a:t>
+            </a:r>
+            <a:r>
+              <a:rPr lang="en-US" dirty="0">
+                <a:solidFill>
+                  <a:schemeClr val="tx1"/>
+                </a:solidFill>
                 <a:sym typeface="Wingdings" panose="05000000000000000000" pitchFamily="2" charset="2"/>
               </a:rPr>
-              <a:t>=               </a:t>
+              <a:t>= R3 + </a:t>
             </a:r>
             <a:r>
               <a:rPr lang="en-US" b="1" dirty="0">
@@ -41861,18 +43172,26 @@
                 </a:solidFill>
                 <a:sym typeface="Wingdings" panose="05000000000000000000" pitchFamily="2" charset="2"/>
               </a:rPr>
-              <a:t>R2 × R3</a:t>
+              <a:t>R1 × R2</a:t>
             </a:r>
           </a:p>
           <a:p>
             <a:pPr lvl="1"/>
             <a:r>
+              <a:rPr lang="en-US" dirty="0">
+                <a:solidFill>
+                  <a:schemeClr val="tx1"/>
+                </a:solidFill>
+              </a:rPr>
+              <a:t>MLS	R0,</a:t>
+            </a:r>
+            <a:r>
               <a:rPr lang="en-US" b="1" dirty="0">
                 <a:solidFill>
-                  <a:srgbClr val="92D050"/>
-                </a:solidFill>
-              </a:rPr>
-              <a:t>U</a:t>
+                  <a:srgbClr val="0000FF"/>
+                </a:solidFill>
+              </a:rPr>
+              <a:t>R1,R2</a:t>
             </a:r>
             <a:r>
               <a:rPr lang="en-US" dirty="0">
@@ -41880,84 +43199,71 @@
                   <a:schemeClr val="tx1"/>
                 </a:solidFill>
               </a:rPr>
-              <a:t>MLAL	R0,R1,</a:t>
+              <a:t>,R3		// R0 </a:t>
+            </a:r>
+            <a:r>
+              <a:rPr lang="en-US" dirty="0">
+                <a:solidFill>
+                  <a:schemeClr val="tx1"/>
+                </a:solidFill>
+                <a:sym typeface="Wingdings" panose="05000000000000000000" pitchFamily="2" charset="2"/>
+              </a:rPr>
+              <a:t>= R3 -  </a:t>
             </a:r>
             <a:r>
               <a:rPr lang="en-US" b="1" dirty="0">
                 <a:solidFill>
                   <a:srgbClr val="0000FF"/>
                 </a:solidFill>
-              </a:rPr>
-              <a:t>R2,R3</a:t>
-            </a:r>
+                <a:sym typeface="Wingdings" panose="05000000000000000000" pitchFamily="2" charset="2"/>
+              </a:rPr>
+              <a:t>R1 × R2</a:t>
+            </a:r>
+          </a:p>
+          <a:p>
+            <a:endParaRPr lang="en-US" dirty="0"/>
+          </a:p>
+          <a:p>
             <a:r>
               <a:rPr lang="en-US" dirty="0">
                 <a:solidFill>
                   <a:schemeClr val="tx1"/>
                 </a:solidFill>
               </a:rPr>
-              <a:t>		// R0.R1 </a:t>
+              <a:t>Flags:</a:t>
+            </a:r>
+            <a:r>
+              <a:rPr lang="en-US" dirty="0"/>
+              <a:t> </a:t>
             </a:r>
             <a:r>
               <a:rPr lang="en-US" dirty="0">
                 <a:solidFill>
+                  <a:srgbClr val="0070C0"/>
+                </a:solidFill>
+              </a:rPr>
+              <a:t>Append “S” (only MUL) to capture result characteristics in N and Z flags</a:t>
+            </a:r>
+          </a:p>
+          <a:p>
+            <a:endParaRPr lang="en-US" dirty="0"/>
+          </a:p>
+          <a:p>
+            <a:r>
+              <a:rPr lang="en-US" dirty="0">
+                <a:solidFill>
                   <a:schemeClr val="tx1"/>
                 </a:solidFill>
-                <a:sym typeface="Wingdings" panose="05000000000000000000" pitchFamily="2" charset="2"/>
-              </a:rPr>
-              <a:t>= R0.R1 + </a:t>
+              </a:rPr>
+              <a:t>Overflow: </a:t>
             </a:r>
             <a:r>
               <a:rPr lang="en-US" b="1" dirty="0">
                 <a:solidFill>
-                  <a:srgbClr val="0000FF"/>
-                </a:solidFill>
-                <a:sym typeface="Wingdings" panose="05000000000000000000" pitchFamily="2" charset="2"/>
-              </a:rPr>
-              <a:t>R2 × R3</a:t>
-            </a:r>
-          </a:p>
-          <a:p>
-            <a:endParaRPr lang="en-US" dirty="0"/>
-          </a:p>
-          <a:p>
-            <a:r>
-              <a:rPr lang="en-US" dirty="0">
-                <a:solidFill>
-                  <a:schemeClr val="tx1"/>
-                </a:solidFill>
-              </a:rPr>
-              <a:t>Flags:</a:t>
-            </a:r>
-            <a:r>
-              <a:rPr lang="en-US" dirty="0"/>
-              <a:t>      </a:t>
-            </a:r>
-            <a:r>
-              <a:rPr lang="en-US" b="1" dirty="0">
-                <a:solidFill>
                   <a:srgbClr val="FF0000"/>
                 </a:solidFill>
               </a:rPr>
-              <a:t>Unaffected!</a:t>
-            </a:r>
-          </a:p>
-          <a:p>
-            <a:r>
-              <a:rPr lang="en-US" dirty="0">
-                <a:solidFill>
-                  <a:schemeClr val="tx1"/>
-                </a:solidFill>
-              </a:rPr>
-              <a:t>Overflow: </a:t>
-            </a:r>
-            <a:r>
-              <a:rPr lang="en-US" b="1" dirty="0">
-                <a:solidFill>
-                  <a:srgbClr val="FF0000"/>
-                </a:solidFill>
-              </a:rPr>
-              <a:t>Can’t happen</a:t>
+              <a:t>May happen but impossible to detect!</a:t>
             </a:r>
           </a:p>
         </p:txBody>
@@ -41965,7 +43271,7 @@
     </p:spTree>
     <p:extLst>
       <p:ext uri="{BB962C8B-B14F-4D97-AF65-F5344CB8AC3E}">
-        <p14:creationId xmlns:p14="http://schemas.microsoft.com/office/powerpoint/2010/main" val="228742505"/>
+        <p14:creationId xmlns:p14="http://schemas.microsoft.com/office/powerpoint/2010/main" val="3196419567"/>
       </p:ext>
     </p:extLst>
   </p:cSld>
@@ -42004,8 +43310,8 @@
         </p:nvSpPr>
         <p:spPr>
           <a:xfrm>
-            <a:off x="940526" y="745181"/>
-            <a:ext cx="8315769" cy="746735"/>
+            <a:off x="936516" y="741171"/>
+            <a:ext cx="9643252" cy="734703"/>
           </a:xfrm>
         </p:spPr>
         <p:txBody>
@@ -42016,7 +43322,7 @@
           <a:p>
             <a:r>
               <a:rPr lang="en-US" dirty="0"/>
-              <a:t>Single-Length 32÷32 Integer Division</a:t>
+              <a:t>Double-Length 32x32 Integer Multiplication</a:t>
             </a:r>
           </a:p>
         </p:txBody>
@@ -42033,8 +43339,8 @@
         </p:nvSpPr>
         <p:spPr>
           <a:xfrm>
-            <a:off x="940525" y="1806366"/>
-            <a:ext cx="10409263" cy="4835066"/>
+            <a:off x="936515" y="1795670"/>
+            <a:ext cx="10425305" cy="4833730"/>
           </a:xfrm>
         </p:spPr>
         <p:txBody>
@@ -42049,65 +43355,7 @@
                   <a:schemeClr val="tx1"/>
                 </a:solidFill>
               </a:rPr>
-              <a:t>Instructions: </a:t>
-            </a:r>
-            <a:r>
-              <a:rPr lang="en-US" b="1" dirty="0">
-                <a:solidFill>
-                  <a:srgbClr val="FF0000"/>
-                </a:solidFill>
-              </a:rPr>
-              <a:t>S</a:t>
-            </a:r>
-            <a:r>
-              <a:rPr lang="en-US" dirty="0">
-                <a:solidFill>
-                  <a:srgbClr val="0070C0"/>
-                </a:solidFill>
-              </a:rPr>
-              <a:t>DIV</a:t>
-            </a:r>
-            <a:r>
-              <a:rPr lang="en-US" dirty="0">
-                <a:solidFill>
-                  <a:schemeClr val="tx1"/>
-                </a:solidFill>
-              </a:rPr>
-              <a:t>,</a:t>
-            </a:r>
-            <a:r>
-              <a:rPr lang="en-US" dirty="0">
-                <a:solidFill>
-                  <a:srgbClr val="0070C0"/>
-                </a:solidFill>
-              </a:rPr>
-              <a:t> </a:t>
-            </a:r>
-            <a:r>
-              <a:rPr lang="en-US" b="1" dirty="0">
-                <a:solidFill>
-                  <a:srgbClr val="92D050"/>
-                </a:solidFill>
-              </a:rPr>
-              <a:t>U</a:t>
-            </a:r>
-            <a:r>
-              <a:rPr lang="en-US" dirty="0">
-                <a:solidFill>
-                  <a:srgbClr val="0070C0"/>
-                </a:solidFill>
-              </a:rPr>
-              <a:t>DIV</a:t>
-            </a:r>
-          </a:p>
-          <a:p>
-            <a:r>
-              <a:rPr lang="en-US" b="1" dirty="0">
-                <a:solidFill>
-                  <a:srgbClr val="FF0000"/>
-                </a:solidFill>
-              </a:rPr>
-              <a:t>Signed</a:t>
+              <a:t>Instructions:</a:t>
             </a:r>
             <a:r>
               <a:rPr lang="en-US" dirty="0"/>
@@ -42116,16 +43364,37 @@
             <a:r>
               <a:rPr lang="en-US" dirty="0">
                 <a:solidFill>
-                  <a:schemeClr val="tx1"/>
-                </a:solidFill>
-              </a:rPr>
-              <a:t>vs.</a:t>
+                  <a:srgbClr val="0070C0"/>
+                </a:solidFill>
+              </a:rPr>
+              <a:t>UMULL, SMULL, UMLAL, SMLAL</a:t>
+            </a:r>
+          </a:p>
+          <a:p>
+            <a:endParaRPr lang="en-US" dirty="0"/>
+          </a:p>
+          <a:p>
+            <a:r>
+              <a:rPr lang="en-US" b="1" dirty="0">
+                <a:solidFill>
+                  <a:srgbClr val="FF0000"/>
+                </a:solidFill>
+              </a:rPr>
+              <a:t>Signed</a:t>
             </a:r>
             <a:r>
               <a:rPr lang="en-US" dirty="0"/>
               <a:t> </a:t>
             </a:r>
             <a:r>
+              <a:rPr lang="en-US" dirty="0">
+                <a:solidFill>
+                  <a:schemeClr val="tx1"/>
+                </a:solidFill>
+              </a:rPr>
+              <a:t>vs. </a:t>
+            </a:r>
+            <a:r>
               <a:rPr lang="en-US" b="1" dirty="0">
                 <a:solidFill>
                   <a:srgbClr val="92D050"/>
@@ -42146,9 +43415,9 @@
               <a:t>Use </a:t>
             </a:r>
             <a:r>
-              <a:rPr lang="en-US" dirty="0">
-                <a:solidFill>
-                  <a:srgbClr val="FF0000"/>
+              <a:rPr lang="en-US" b="1" dirty="0">
+                <a:solidFill>
+                  <a:srgbClr val="0070C0"/>
                 </a:solidFill>
               </a:rPr>
               <a:t>different</a:t>
@@ -42184,7 +43453,7 @@
                   <a:schemeClr val="tx1"/>
                 </a:solidFill>
               </a:rPr>
-              <a:t>Instruction Format:</a:t>
+              <a:t>Instruction Formats:</a:t>
             </a:r>
           </a:p>
           <a:p>
@@ -42200,19 +43469,97 @@
             <a:r>
               <a:rPr lang="en-US" dirty="0">
                 <a:solidFill>
-                  <a:srgbClr val="0070C0"/>
-                </a:solidFill>
-              </a:rPr>
-              <a:t>DIV	R0,R1,R2		// R0 </a:t>
+                  <a:schemeClr val="tx1"/>
+                </a:solidFill>
+              </a:rPr>
+              <a:t>MULL	R0,R1,</a:t>
+            </a:r>
+            <a:r>
+              <a:rPr lang="en-US" b="1" dirty="0">
+                <a:solidFill>
+                  <a:srgbClr val="0000FF"/>
+                </a:solidFill>
+              </a:rPr>
+              <a:t>R2,R3</a:t>
             </a:r>
             <a:r>
               <a:rPr lang="en-US" dirty="0">
                 <a:solidFill>
-                  <a:srgbClr val="0070C0"/>
+                  <a:schemeClr val="tx1"/>
+                </a:solidFill>
+              </a:rPr>
+              <a:t>		// R0.R1 </a:t>
+            </a:r>
+            <a:r>
+              <a:rPr lang="en-US" dirty="0">
+                <a:solidFill>
+                  <a:schemeClr val="tx1"/>
                 </a:solidFill>
                 <a:sym typeface="Wingdings" panose="05000000000000000000" pitchFamily="2" charset="2"/>
               </a:rPr>
-              <a:t>= R1 ÷ R2</a:t>
+              <a:t>=               </a:t>
+            </a:r>
+            <a:r>
+              <a:rPr lang="en-US" b="1" dirty="0">
+                <a:solidFill>
+                  <a:srgbClr val="0000FF"/>
+                </a:solidFill>
+                <a:sym typeface="Wingdings" panose="05000000000000000000" pitchFamily="2" charset="2"/>
+              </a:rPr>
+              <a:t>R2 × R3</a:t>
+            </a:r>
+          </a:p>
+          <a:p>
+            <a:pPr lvl="1"/>
+            <a:r>
+              <a:rPr lang="en-US" b="1" dirty="0">
+                <a:solidFill>
+                  <a:srgbClr val="FF0000"/>
+                </a:solidFill>
+              </a:rPr>
+              <a:t>S</a:t>
+            </a:r>
+            <a:r>
+              <a:rPr lang="en-US" dirty="0">
+                <a:solidFill>
+                  <a:schemeClr val="tx1"/>
+                </a:solidFill>
+              </a:rPr>
+              <a:t>MLAL	R0,R1,</a:t>
+            </a:r>
+            <a:r>
+              <a:rPr lang="en-US" b="1" dirty="0">
+                <a:solidFill>
+                  <a:srgbClr val="0000FF"/>
+                </a:solidFill>
+              </a:rPr>
+              <a:t>R2,R3</a:t>
+            </a:r>
+            <a:r>
+              <a:rPr lang="en-US" dirty="0">
+                <a:solidFill>
+                  <a:schemeClr val="tx1"/>
+                </a:solidFill>
+              </a:rPr>
+              <a:t>		// R0.R1 </a:t>
+            </a:r>
+            <a:r>
+              <a:rPr lang="en-US" dirty="0">
+                <a:solidFill>
+                  <a:schemeClr val="tx1"/>
+                </a:solidFill>
+                <a:sym typeface="Wingdings" panose="05000000000000000000" pitchFamily="2" charset="2"/>
+              </a:rPr>
+              <a:t>= R0.R1 + </a:t>
+            </a:r>
+            <a:r>
+              <a:rPr lang="en-US" b="1" dirty="0">
+                <a:solidFill>
+                  <a:srgbClr val="0000FF"/>
+                </a:solidFill>
+                <a:sym typeface="Wingdings" panose="05000000000000000000" pitchFamily="2" charset="2"/>
+              </a:rPr>
+              <a:t>R2 × R3</a:t>
             </a:r>
           </a:p>
           <a:p>
@@ -42234,7 +43581,7 @@
                   <a:schemeClr val="tx1"/>
                 </a:solidFill>
               </a:rPr>
-              <a:t>Instruction Format:</a:t>
+              <a:t>Instruction Formats:</a:t>
             </a:r>
           </a:p>
           <a:p>
@@ -42250,19 +43597,97 @@
             <a:r>
               <a:rPr lang="en-US" dirty="0">
                 <a:solidFill>
-                  <a:srgbClr val="0070C0"/>
-                </a:solidFill>
-              </a:rPr>
-              <a:t>DIV	R0,R1,R2		// R0 </a:t>
+                  <a:schemeClr val="tx1"/>
+                </a:solidFill>
+              </a:rPr>
+              <a:t>MULL	R0,R1,</a:t>
+            </a:r>
+            <a:r>
+              <a:rPr lang="en-US" b="1" dirty="0">
+                <a:solidFill>
+                  <a:srgbClr val="0000FF"/>
+                </a:solidFill>
+              </a:rPr>
+              <a:t>R2,R3</a:t>
             </a:r>
             <a:r>
               <a:rPr lang="en-US" dirty="0">
                 <a:solidFill>
-                  <a:srgbClr val="0070C0"/>
+                  <a:schemeClr val="tx1"/>
+                </a:solidFill>
+              </a:rPr>
+              <a:t>		// R0.R1 </a:t>
+            </a:r>
+            <a:r>
+              <a:rPr lang="en-US" dirty="0">
+                <a:solidFill>
+                  <a:schemeClr val="tx1"/>
                 </a:solidFill>
                 <a:sym typeface="Wingdings" panose="05000000000000000000" pitchFamily="2" charset="2"/>
               </a:rPr>
-              <a:t>= R1 ÷ R2</a:t>
+              <a:t>=               </a:t>
+            </a:r>
+            <a:r>
+              <a:rPr lang="en-US" b="1" dirty="0">
+                <a:solidFill>
+                  <a:srgbClr val="0000FF"/>
+                </a:solidFill>
+                <a:sym typeface="Wingdings" panose="05000000000000000000" pitchFamily="2" charset="2"/>
+              </a:rPr>
+              <a:t>R2 × R3</a:t>
+            </a:r>
+          </a:p>
+          <a:p>
+            <a:pPr lvl="1"/>
+            <a:r>
+              <a:rPr lang="en-US" b="1" dirty="0">
+                <a:solidFill>
+                  <a:srgbClr val="92D050"/>
+                </a:solidFill>
+              </a:rPr>
+              <a:t>U</a:t>
+            </a:r>
+            <a:r>
+              <a:rPr lang="en-US" dirty="0">
+                <a:solidFill>
+                  <a:schemeClr val="tx1"/>
+                </a:solidFill>
+              </a:rPr>
+              <a:t>MLAL	R0,R1,</a:t>
+            </a:r>
+            <a:r>
+              <a:rPr lang="en-US" b="1" dirty="0">
+                <a:solidFill>
+                  <a:srgbClr val="0000FF"/>
+                </a:solidFill>
+              </a:rPr>
+              <a:t>R2,R3</a:t>
+            </a:r>
+            <a:r>
+              <a:rPr lang="en-US" dirty="0">
+                <a:solidFill>
+                  <a:schemeClr val="tx1"/>
+                </a:solidFill>
+              </a:rPr>
+              <a:t>		// R0.R1 </a:t>
+            </a:r>
+            <a:r>
+              <a:rPr lang="en-US" dirty="0">
+                <a:solidFill>
+                  <a:schemeClr val="tx1"/>
+                </a:solidFill>
+                <a:sym typeface="Wingdings" panose="05000000000000000000" pitchFamily="2" charset="2"/>
+              </a:rPr>
+              <a:t>= R0.R1 + </a:t>
+            </a:r>
+            <a:r>
+              <a:rPr lang="en-US" b="1" dirty="0">
+                <a:solidFill>
+                  <a:srgbClr val="0000FF"/>
+                </a:solidFill>
+                <a:sym typeface="Wingdings" panose="05000000000000000000" pitchFamily="2" charset="2"/>
+              </a:rPr>
+              <a:t>R2 × R3</a:t>
             </a:r>
           </a:p>
           <a:p>
@@ -42279,7 +43704,7 @@
             </a:r>
             <a:r>
               <a:rPr lang="en-US" dirty="0"/>
-              <a:t> </a:t>
+              <a:t>      </a:t>
             </a:r>
             <a:r>
               <a:rPr lang="en-US" b="1" dirty="0">
@@ -42287,11 +43712,8 @@
                   <a:srgbClr val="FF0000"/>
                 </a:solidFill>
               </a:rPr>
-              <a:t>Unaffected</a:t>
-            </a:r>
-          </a:p>
-          <a:p>
-            <a:endParaRPr lang="en-US" dirty="0"/>
+              <a:t>Unaffected!</a:t>
+            </a:r>
           </a:p>
           <a:p>
             <a:r>
@@ -42300,29 +43722,15 @@
                   <a:schemeClr val="tx1"/>
                 </a:solidFill>
               </a:rPr>
-              <a:t>Overflow:</a:t>
-            </a:r>
-          </a:p>
-          <a:p>
-            <a:pPr lvl="1"/>
-            <a:r>
-              <a:rPr lang="en-US" dirty="0">
-                <a:solidFill>
-                  <a:srgbClr val="0070C0"/>
-                </a:solidFill>
-              </a:rPr>
-              <a:t>Division by zero</a:t>
-            </a:r>
-          </a:p>
-          <a:p>
-            <a:pPr lvl="1"/>
-            <a:r>
-              <a:rPr lang="en-US" dirty="0">
-                <a:solidFill>
-                  <a:srgbClr val="0070C0"/>
-                </a:solidFill>
-              </a:rPr>
-              <a:t>Full-scale negative divided by -1</a:t>
+              <a:t>Overflow: </a:t>
+            </a:r>
+            <a:r>
+              <a:rPr lang="en-US" b="1" dirty="0">
+                <a:solidFill>
+                  <a:srgbClr val="FF0000"/>
+                </a:solidFill>
+              </a:rPr>
+              <a:t>Can’t happen</a:t>
             </a:r>
           </a:p>
         </p:txBody>
@@ -42330,7 +43738,7 @@
     </p:spTree>
     <p:extLst>
       <p:ext uri="{BB962C8B-B14F-4D97-AF65-F5344CB8AC3E}">
-        <p14:creationId xmlns:p14="http://schemas.microsoft.com/office/powerpoint/2010/main" val="3769027795"/>
+        <p14:creationId xmlns:p14="http://schemas.microsoft.com/office/powerpoint/2010/main" val="228742505"/>
       </p:ext>
     </p:extLst>
   </p:cSld>
@@ -42367,6 +43775,371 @@
             <p:ph type="title"/>
           </p:nvPr>
         </p:nvSpPr>
+        <p:spPr>
+          <a:xfrm>
+            <a:off x="940526" y="745181"/>
+            <a:ext cx="8315769" cy="746735"/>
+          </a:xfrm>
+        </p:spPr>
+        <p:txBody>
+          <a:bodyPr>
+            <a:normAutofit/>
+          </a:bodyPr>
+          <a:lstStyle/>
+          <a:p>
+            <a:r>
+              <a:rPr lang="en-US" dirty="0"/>
+              <a:t>Single-Length 32÷32 Integer Division</a:t>
+            </a:r>
+          </a:p>
+        </p:txBody>
+      </p:sp>
+      <p:sp>
+        <p:nvSpPr>
+          <p:cNvPr id="3" name="Content Placeholder 2"/>
+          <p:cNvSpPr>
+            <a:spLocks noGrp="1"/>
+          </p:cNvSpPr>
+          <p:nvPr>
+            <p:ph idx="1"/>
+          </p:nvPr>
+        </p:nvSpPr>
+        <p:spPr>
+          <a:xfrm>
+            <a:off x="940525" y="1806366"/>
+            <a:ext cx="10409263" cy="4835066"/>
+          </a:xfrm>
+        </p:spPr>
+        <p:txBody>
+          <a:bodyPr>
+            <a:normAutofit fontScale="92500" lnSpcReduction="10000"/>
+          </a:bodyPr>
+          <a:lstStyle/>
+          <a:p>
+            <a:r>
+              <a:rPr lang="en-US" dirty="0">
+                <a:solidFill>
+                  <a:schemeClr val="tx1"/>
+                </a:solidFill>
+              </a:rPr>
+              <a:t>Instructions: </a:t>
+            </a:r>
+            <a:r>
+              <a:rPr lang="en-US" b="1" dirty="0">
+                <a:solidFill>
+                  <a:srgbClr val="FF0000"/>
+                </a:solidFill>
+              </a:rPr>
+              <a:t>S</a:t>
+            </a:r>
+            <a:r>
+              <a:rPr lang="en-US" dirty="0">
+                <a:solidFill>
+                  <a:srgbClr val="0070C0"/>
+                </a:solidFill>
+              </a:rPr>
+              <a:t>DIV</a:t>
+            </a:r>
+            <a:r>
+              <a:rPr lang="en-US" dirty="0">
+                <a:solidFill>
+                  <a:schemeClr val="tx1"/>
+                </a:solidFill>
+              </a:rPr>
+              <a:t>,</a:t>
+            </a:r>
+            <a:r>
+              <a:rPr lang="en-US" dirty="0">
+                <a:solidFill>
+                  <a:srgbClr val="0070C0"/>
+                </a:solidFill>
+              </a:rPr>
+              <a:t> </a:t>
+            </a:r>
+            <a:r>
+              <a:rPr lang="en-US" b="1" dirty="0">
+                <a:solidFill>
+                  <a:srgbClr val="92D050"/>
+                </a:solidFill>
+              </a:rPr>
+              <a:t>U</a:t>
+            </a:r>
+            <a:r>
+              <a:rPr lang="en-US" dirty="0">
+                <a:solidFill>
+                  <a:srgbClr val="0070C0"/>
+                </a:solidFill>
+              </a:rPr>
+              <a:t>DIV</a:t>
+            </a:r>
+          </a:p>
+          <a:p>
+            <a:r>
+              <a:rPr lang="en-US" b="1" dirty="0">
+                <a:solidFill>
+                  <a:srgbClr val="FF0000"/>
+                </a:solidFill>
+              </a:rPr>
+              <a:t>Signed</a:t>
+            </a:r>
+            <a:r>
+              <a:rPr lang="en-US" dirty="0"/>
+              <a:t> </a:t>
+            </a:r>
+            <a:r>
+              <a:rPr lang="en-US" dirty="0">
+                <a:solidFill>
+                  <a:schemeClr val="tx1"/>
+                </a:solidFill>
+              </a:rPr>
+              <a:t>vs.</a:t>
+            </a:r>
+            <a:r>
+              <a:rPr lang="en-US" dirty="0"/>
+              <a:t> </a:t>
+            </a:r>
+            <a:r>
+              <a:rPr lang="en-US" b="1" dirty="0">
+                <a:solidFill>
+                  <a:srgbClr val="92D050"/>
+                </a:solidFill>
+              </a:rPr>
+              <a:t>Unsigned</a:t>
+            </a:r>
+            <a:r>
+              <a:rPr lang="en-US" dirty="0"/>
+              <a:t>: </a:t>
+            </a:r>
+            <a:r>
+              <a:rPr lang="en-US" dirty="0">
+                <a:solidFill>
+                  <a:srgbClr val="0070C0"/>
+                </a:solidFill>
+              </a:rPr>
+              <a:t>Use </a:t>
+            </a:r>
+            <a:r>
+              <a:rPr lang="en-US" dirty="0">
+                <a:solidFill>
+                  <a:srgbClr val="FF0000"/>
+                </a:solidFill>
+              </a:rPr>
+              <a:t>different</a:t>
+            </a:r>
+            <a:r>
+              <a:rPr lang="en-US" dirty="0">
+                <a:solidFill>
+                  <a:srgbClr val="0070C0"/>
+                </a:solidFill>
+              </a:rPr>
+              <a:t> instructions!</a:t>
+            </a:r>
+          </a:p>
+          <a:p>
+            <a:endParaRPr lang="en-US" dirty="0"/>
+          </a:p>
+          <a:p>
+            <a:r>
+              <a:rPr lang="en-US" b="1" dirty="0">
+                <a:solidFill>
+                  <a:srgbClr val="FF0000"/>
+                </a:solidFill>
+              </a:rPr>
+              <a:t>Signed</a:t>
+            </a:r>
+            <a:r>
+              <a:rPr lang="en-US" dirty="0"/>
+              <a:t> </a:t>
+            </a:r>
+            <a:r>
+              <a:rPr lang="en-US" dirty="0">
+                <a:solidFill>
+                  <a:schemeClr val="tx1"/>
+                </a:solidFill>
+              </a:rPr>
+              <a:t>Instruction Format:</a:t>
+            </a:r>
+          </a:p>
+          <a:p>
+            <a:pPr lvl="1"/>
+            <a:r>
+              <a:rPr lang="en-US" b="1" dirty="0">
+                <a:solidFill>
+                  <a:srgbClr val="FF0000"/>
+                </a:solidFill>
+              </a:rPr>
+              <a:t>S</a:t>
+            </a:r>
+            <a:r>
+              <a:rPr lang="en-US" dirty="0">
+                <a:solidFill>
+                  <a:srgbClr val="0070C0"/>
+                </a:solidFill>
+              </a:rPr>
+              <a:t>DIV	R0,R1,R2		// R0 </a:t>
+            </a:r>
+            <a:r>
+              <a:rPr lang="en-US" dirty="0">
+                <a:solidFill>
+                  <a:srgbClr val="0070C0"/>
+                </a:solidFill>
+                <a:sym typeface="Wingdings" panose="05000000000000000000" pitchFamily="2" charset="2"/>
+              </a:rPr>
+              <a:t>= R1 ÷ R2</a:t>
+            </a:r>
+          </a:p>
+          <a:p>
+            <a:r>
+              <a:rPr lang="en-US" b="1" dirty="0">
+                <a:solidFill>
+                  <a:srgbClr val="92D050"/>
+                </a:solidFill>
+              </a:rPr>
+              <a:t>Unsigned</a:t>
+            </a:r>
+            <a:r>
+              <a:rPr lang="en-US" dirty="0"/>
+              <a:t> </a:t>
+            </a:r>
+            <a:r>
+              <a:rPr lang="en-US" dirty="0">
+                <a:solidFill>
+                  <a:schemeClr val="tx1"/>
+                </a:solidFill>
+              </a:rPr>
+              <a:t>Instruction Format:</a:t>
+            </a:r>
+          </a:p>
+          <a:p>
+            <a:pPr lvl="1"/>
+            <a:r>
+              <a:rPr lang="en-US" b="1" dirty="0">
+                <a:solidFill>
+                  <a:srgbClr val="92D050"/>
+                </a:solidFill>
+              </a:rPr>
+              <a:t>U</a:t>
+            </a:r>
+            <a:r>
+              <a:rPr lang="en-US" dirty="0">
+                <a:solidFill>
+                  <a:srgbClr val="0070C0"/>
+                </a:solidFill>
+              </a:rPr>
+              <a:t>DIV	R0,R1,R2		// R0 </a:t>
+            </a:r>
+            <a:r>
+              <a:rPr lang="en-US" dirty="0">
+                <a:solidFill>
+                  <a:srgbClr val="0070C0"/>
+                </a:solidFill>
+                <a:sym typeface="Wingdings" panose="05000000000000000000" pitchFamily="2" charset="2"/>
+              </a:rPr>
+              <a:t>= R1 ÷ R2</a:t>
+            </a:r>
+          </a:p>
+          <a:p>
+            <a:endParaRPr lang="en-US" dirty="0"/>
+          </a:p>
+          <a:p>
+            <a:r>
+              <a:rPr lang="en-US" dirty="0">
+                <a:solidFill>
+                  <a:schemeClr val="tx1"/>
+                </a:solidFill>
+              </a:rPr>
+              <a:t>Flags:</a:t>
+            </a:r>
+            <a:r>
+              <a:rPr lang="en-US" dirty="0"/>
+              <a:t> </a:t>
+            </a:r>
+            <a:r>
+              <a:rPr lang="en-US" b="1" dirty="0">
+                <a:solidFill>
+                  <a:srgbClr val="FF0000"/>
+                </a:solidFill>
+              </a:rPr>
+              <a:t>Unaffected</a:t>
+            </a:r>
+          </a:p>
+          <a:p>
+            <a:endParaRPr lang="en-US" dirty="0"/>
+          </a:p>
+          <a:p>
+            <a:r>
+              <a:rPr lang="en-US" dirty="0">
+                <a:solidFill>
+                  <a:schemeClr val="tx1"/>
+                </a:solidFill>
+              </a:rPr>
+              <a:t>Overflow:</a:t>
+            </a:r>
+          </a:p>
+          <a:p>
+            <a:pPr lvl="1"/>
+            <a:r>
+              <a:rPr lang="en-US" dirty="0">
+                <a:solidFill>
+                  <a:srgbClr val="0070C0"/>
+                </a:solidFill>
+              </a:rPr>
+              <a:t>Division by zero</a:t>
+            </a:r>
+          </a:p>
+          <a:p>
+            <a:pPr lvl="1"/>
+            <a:r>
+              <a:rPr lang="en-US" dirty="0">
+                <a:solidFill>
+                  <a:srgbClr val="0070C0"/>
+                </a:solidFill>
+              </a:rPr>
+              <a:t>Full-scale negative divided by -1</a:t>
+            </a:r>
+          </a:p>
+        </p:txBody>
+      </p:sp>
+    </p:spTree>
+    <p:extLst>
+      <p:ext uri="{BB962C8B-B14F-4D97-AF65-F5344CB8AC3E}">
+        <p14:creationId xmlns:p14="http://schemas.microsoft.com/office/powerpoint/2010/main" val="3769027795"/>
+      </p:ext>
+    </p:extLst>
+  </p:cSld>
+  <p:clrMapOvr>
+    <a:masterClrMapping/>
+  </p:clrMapOvr>
+</p:sld>
+</file>
+
+<file path=ppt/slides/slide37.xml><?xml version="1.0" encoding="utf-8"?>
+<p:sld xmlns:a="http://schemas.openxmlformats.org/drawingml/2006/main" xmlns:r="http://schemas.openxmlformats.org/officeDocument/2006/relationships" xmlns:p="http://schemas.openxmlformats.org/presentationml/2006/main">
+  <p:cSld>
+    <p:spTree>
+      <p:nvGrpSpPr>
+        <p:cNvPr id="1" name=""/>
+        <p:cNvGrpSpPr/>
+        <p:nvPr/>
+      </p:nvGrpSpPr>
+      <p:grpSpPr>
+        <a:xfrm>
+          <a:off x="0" y="0"/>
+          <a:ext cx="0" cy="0"/>
+          <a:chOff x="0" y="0"/>
+          <a:chExt cx="0" cy="0"/>
+        </a:xfrm>
+      </p:grpSpPr>
+      <p:sp>
+        <p:nvSpPr>
+          <p:cNvPr id="2" name="Title 1"/>
+          <p:cNvSpPr>
+            <a:spLocks noGrp="1"/>
+          </p:cNvSpPr>
+          <p:nvPr>
+            <p:ph type="title"/>
+          </p:nvPr>
+        </p:nvSpPr>
         <p:spPr/>
         <p:txBody>
           <a:bodyPr rtlCol="0">
@@ -42600,7 +44373,7 @@
 </p:sld>
 </file>
 
-<file path=ppt/slides/slide37.xml><?xml version="1.0" encoding="utf-8"?>
+<file path=ppt/slides/slide38.xml><?xml version="1.0" encoding="utf-8"?>
 <p:sld xmlns:a="http://schemas.openxmlformats.org/drawingml/2006/main" xmlns:r="http://schemas.openxmlformats.org/officeDocument/2006/relationships" xmlns:p="http://schemas.openxmlformats.org/presentationml/2006/main">
   <p:cSld>
     <p:spTree>
@@ -44202,7 +45975,7 @@
           <p:nvPr>
             <p:extLst>
               <p:ext uri="{D42A27DB-BD31-4B8C-83A1-F6EECF244321}">
-                <p14:modId xmlns:p14="http://schemas.microsoft.com/office/powerpoint/2010/main" val="3966631314"/>
+                <p14:modId xmlns:p14="http://schemas.microsoft.com/office/powerpoint/2010/main" val="2721603967"/>
               </p:ext>
             </p:extLst>
           </p:nvPr>
@@ -44684,11 +46457,47 @@
                           <a:ea typeface="Calibri"/>
                           <a:cs typeface="Calibri"/>
                         </a:rPr>
-                        <a:t>ADD{S}	Rd,Rn,Op2</a:t>
+                        <a:t>ADD{</a:t>
                       </a:r>
-                      <a:endParaRPr lang="en-US" sz="1800" dirty="0">
+                      <a:r>
+                        <a:rPr lang="en-US" sz="1800" b="1" dirty="0">
+                          <a:solidFill>
+                            <a:srgbClr val="FF0000"/>
+                          </a:solidFill>
+                          <a:effectLst/>
+                          <a:latin typeface="Calibri"/>
+                          <a:ea typeface="Calibri"/>
+                          <a:cs typeface="Calibri"/>
+                        </a:rPr>
+                        <a:t>S</a:t>
+                      </a:r>
+                      <a:r>
+                        <a:rPr lang="en-US" sz="1800" dirty="0">
+                          <a:solidFill>
+                            <a:schemeClr val="tx1"/>
+                          </a:solidFill>
+                          <a:effectLst/>
+                          <a:latin typeface="Calibri"/>
+                          <a:ea typeface="Calibri"/>
+                          <a:cs typeface="Calibri"/>
+                        </a:rPr>
+                        <a:t>}	Rd,Rn,</a:t>
+                      </a:r>
+                      <a:r>
+                        <a:rPr lang="en-US" sz="1800" b="1" dirty="0">
+                          <a:solidFill>
+                            <a:srgbClr val="0000FF"/>
+                          </a:solidFill>
+                          <a:effectLst/>
+                          <a:latin typeface="Calibri"/>
+                          <a:ea typeface="Calibri"/>
+                          <a:cs typeface="Calibri"/>
+                        </a:rPr>
+                        <a:t>Op2</a:t>
+                      </a:r>
+                      <a:endParaRPr lang="en-US" sz="1800" b="1" dirty="0">
                         <a:solidFill>
-                          <a:schemeClr val="tx1"/>
+                          <a:srgbClr val="0000FF"/>
                         </a:solidFill>
                         <a:effectLst/>
                         <a:latin typeface="Arial"/>
@@ -45031,11 +46840,47 @@
                           <a:ea typeface="Calibri"/>
                           <a:cs typeface="Calibri"/>
                         </a:rPr>
-                        <a:t>ADC{S}	Rd,Rn,Op2</a:t>
+                        <a:t>ADC{</a:t>
                       </a:r>
-                      <a:endParaRPr lang="en-US" sz="1800" dirty="0">
+                      <a:r>
+                        <a:rPr lang="en-US" sz="1800" b="1" dirty="0">
+                          <a:solidFill>
+                            <a:srgbClr val="FF0000"/>
+                          </a:solidFill>
+                          <a:effectLst/>
+                          <a:latin typeface="Calibri"/>
+                          <a:ea typeface="Calibri"/>
+                          <a:cs typeface="Calibri"/>
+                        </a:rPr>
+                        <a:t>S</a:t>
+                      </a:r>
+                      <a:r>
+                        <a:rPr lang="en-US" sz="1800" dirty="0">
+                          <a:solidFill>
+                            <a:schemeClr val="tx1"/>
+                          </a:solidFill>
+                          <a:effectLst/>
+                          <a:latin typeface="Calibri"/>
+                          <a:ea typeface="Calibri"/>
+                          <a:cs typeface="Calibri"/>
+                        </a:rPr>
+                        <a:t>}	Rd,Rn,</a:t>
+                      </a:r>
+                      <a:r>
+                        <a:rPr lang="en-US" sz="1800" b="1" dirty="0">
+                          <a:solidFill>
+                            <a:srgbClr val="0000FF"/>
+                          </a:solidFill>
+                          <a:effectLst/>
+                          <a:latin typeface="Calibri"/>
+                          <a:ea typeface="Calibri"/>
+                          <a:cs typeface="Calibri"/>
+                        </a:rPr>
+                        <a:t>Op2</a:t>
+                      </a:r>
+                      <a:endParaRPr lang="en-US" sz="1800" b="1" dirty="0">
                         <a:solidFill>
-                          <a:schemeClr val="tx1"/>
+                          <a:srgbClr val="0000FF"/>
                         </a:solidFill>
                         <a:effectLst/>
                         <a:latin typeface="Arial"/>
@@ -45378,11 +47223,47 @@
                           <a:ea typeface="Calibri"/>
                           <a:cs typeface="Calibri"/>
                         </a:rPr>
-                        <a:t>SUB{S}	Rd,Rn,Op2</a:t>
+                        <a:t>SUB{</a:t>
                       </a:r>
-                      <a:endParaRPr lang="en-US" sz="1800" dirty="0">
+                      <a:r>
+                        <a:rPr lang="en-US" sz="1800" b="1" dirty="0">
+                          <a:solidFill>
+                            <a:srgbClr val="FF0000"/>
+                          </a:solidFill>
+                          <a:effectLst/>
+                          <a:latin typeface="Calibri"/>
+                          <a:ea typeface="Calibri"/>
+                          <a:cs typeface="Calibri"/>
+                        </a:rPr>
+                        <a:t>S</a:t>
+                      </a:r>
+                      <a:r>
+                        <a:rPr lang="en-US" sz="1800" dirty="0">
+                          <a:solidFill>
+                            <a:schemeClr val="tx1"/>
+                          </a:solidFill>
+                          <a:effectLst/>
+                          <a:latin typeface="Calibri"/>
+                          <a:ea typeface="Calibri"/>
+                          <a:cs typeface="Calibri"/>
+                        </a:rPr>
+                        <a:t>}	Rd,Rn,</a:t>
+                      </a:r>
+                      <a:r>
+                        <a:rPr lang="en-US" sz="1800" b="1" dirty="0">
+                          <a:solidFill>
+                            <a:srgbClr val="0000FF"/>
+                          </a:solidFill>
+                          <a:effectLst/>
+                          <a:latin typeface="Calibri"/>
+                          <a:ea typeface="Calibri"/>
+                          <a:cs typeface="Calibri"/>
+                        </a:rPr>
+                        <a:t>Op2</a:t>
+                      </a:r>
+                      <a:endParaRPr lang="en-US" sz="1800" b="1" dirty="0">
                         <a:solidFill>
-                          <a:schemeClr val="tx1"/>
+                          <a:srgbClr val="0000FF"/>
                         </a:solidFill>
                         <a:effectLst/>
                         <a:latin typeface="Arial"/>
@@ -45725,11 +47606,47 @@
                           <a:ea typeface="Calibri"/>
                           <a:cs typeface="Calibri"/>
                         </a:rPr>
-                        <a:t>SBC{S}	Rd,Rn,Op2</a:t>
+                        <a:t>SBC{</a:t>
                       </a:r>
-                      <a:endParaRPr lang="en-US" sz="1800" dirty="0">
+                      <a:r>
+                        <a:rPr lang="en-US" sz="1800" b="1" dirty="0">
+                          <a:solidFill>
+                            <a:srgbClr val="FF0000"/>
+                          </a:solidFill>
+                          <a:effectLst/>
+                          <a:latin typeface="Calibri"/>
+                          <a:ea typeface="Calibri"/>
+                          <a:cs typeface="Calibri"/>
+                        </a:rPr>
+                        <a:t>S</a:t>
+                      </a:r>
+                      <a:r>
+                        <a:rPr lang="en-US" sz="1800" dirty="0">
+                          <a:solidFill>
+                            <a:schemeClr val="tx1"/>
+                          </a:solidFill>
+                          <a:effectLst/>
+                          <a:latin typeface="Calibri"/>
+                          <a:ea typeface="Calibri"/>
+                          <a:cs typeface="Calibri"/>
+                        </a:rPr>
+                        <a:t>}	Rd,Rn,</a:t>
+                      </a:r>
+                      <a:r>
+                        <a:rPr lang="en-US" sz="1800" b="1" dirty="0">
+                          <a:solidFill>
+                            <a:srgbClr val="0000FF"/>
+                          </a:solidFill>
+                          <a:effectLst/>
+                          <a:latin typeface="Calibri"/>
+                          <a:ea typeface="Calibri"/>
+                          <a:cs typeface="Calibri"/>
+                        </a:rPr>
+                        <a:t>Op2</a:t>
+                      </a:r>
+                      <a:endParaRPr lang="en-US" sz="1800" b="1" dirty="0">
                         <a:solidFill>
-                          <a:schemeClr val="tx1"/>
+                          <a:srgbClr val="0000FF"/>
                         </a:solidFill>
                         <a:effectLst/>
                         <a:latin typeface="Arial"/>
@@ -46072,11 +47989,47 @@
                           <a:ea typeface="Calibri"/>
                           <a:cs typeface="Calibri"/>
                         </a:rPr>
-                        <a:t>RSB{S}	Rd,Rn,Op2</a:t>
+                        <a:t>RSB{</a:t>
                       </a:r>
-                      <a:endParaRPr lang="en-US" sz="1800" dirty="0">
+                      <a:r>
+                        <a:rPr lang="en-US" sz="1800" b="1" dirty="0">
+                          <a:solidFill>
+                            <a:srgbClr val="FF0000"/>
+                          </a:solidFill>
+                          <a:effectLst/>
+                          <a:latin typeface="Calibri"/>
+                          <a:ea typeface="Calibri"/>
+                          <a:cs typeface="Calibri"/>
+                        </a:rPr>
+                        <a:t>S</a:t>
+                      </a:r>
+                      <a:r>
+                        <a:rPr lang="en-US" sz="1800" dirty="0">
+                          <a:solidFill>
+                            <a:schemeClr val="tx1"/>
+                          </a:solidFill>
+                          <a:effectLst/>
+                          <a:latin typeface="Calibri"/>
+                          <a:ea typeface="Calibri"/>
+                          <a:cs typeface="Calibri"/>
+                        </a:rPr>
+                        <a:t>}	Rd,Rn,</a:t>
+                      </a:r>
+                      <a:r>
+                        <a:rPr lang="en-US" sz="1800" b="1" dirty="0">
+                          <a:solidFill>
+                            <a:srgbClr val="0000FF"/>
+                          </a:solidFill>
+                          <a:effectLst/>
+                          <a:latin typeface="Calibri"/>
+                          <a:ea typeface="Calibri"/>
+                          <a:cs typeface="Calibri"/>
+                        </a:rPr>
+                        <a:t>Op2</a:t>
+                      </a:r>
+                      <a:endParaRPr lang="en-US" sz="1800" b="1" dirty="0">
                         <a:solidFill>
-                          <a:schemeClr val="tx1"/>
+                          <a:srgbClr val="0000FF"/>
                         </a:solidFill>
                         <a:effectLst/>
                         <a:latin typeface="Arial"/>
@@ -46369,10 +48322,10 @@
         </p:nvGrpSpPr>
         <p:grpSpPr>
           <a:xfrm>
-            <a:off x="7010402" y="5590655"/>
-            <a:ext cx="3396914" cy="1015663"/>
+            <a:off x="2205496" y="5616533"/>
+            <a:ext cx="3396914" cy="1107996"/>
             <a:chOff x="5486401" y="5385137"/>
-            <a:chExt cx="3396914" cy="1015663"/>
+            <a:chExt cx="3396914" cy="1107996"/>
           </a:xfrm>
         </p:grpSpPr>
         <p:sp>
@@ -46384,7 +48337,7 @@
           <p:spPr>
             <a:xfrm>
               <a:off x="5486401" y="5385137"/>
-              <a:ext cx="3396914" cy="1015663"/>
+              <a:ext cx="3396914" cy="1107996"/>
             </a:xfrm>
             <a:prstGeom prst="rect">
               <a:avLst/>
@@ -46419,8 +48372,20 @@
             <a:p>
               <a:pPr marL="1027113" lvl="1"/>
               <a:r>
-                <a:rPr lang="en-US" dirty="0"/>
-                <a:t>"S" must be appended to affect the flags!</a:t>
+                <a:rPr lang="en-US" sz="2000" dirty="0"/>
+                <a:t>"</a:t>
+              </a:r>
+              <a:r>
+                <a:rPr lang="en-US" sz="2000" b="1" dirty="0">
+                  <a:solidFill>
+                    <a:srgbClr val="FF0000"/>
+                  </a:solidFill>
+                </a:rPr>
+                <a:t>S</a:t>
+              </a:r>
+              <a:r>
+                <a:rPr lang="en-US" sz="2000" dirty="0"/>
+                <a:t>" must be appended to affect the flags!</a:t>
               </a:r>
             </a:p>
           </p:txBody>
@@ -46475,7 +48440,7 @@
         </p:nvGrpSpPr>
         <p:grpSpPr>
           <a:xfrm>
-            <a:off x="2209801" y="5574117"/>
+            <a:off x="6238328" y="5625873"/>
             <a:ext cx="3729788" cy="1015663"/>
             <a:chOff x="5486401" y="5385137"/>
             <a:chExt cx="3729788" cy="1015663"/>
@@ -46526,7 +48491,19 @@
               <a:pPr marL="1027113" lvl="1"/>
               <a:r>
                 <a:rPr lang="en-US" dirty="0"/>
-                <a:t>"Op2" may only be a constant, a register, or a shifted register.</a:t>
+                <a:t>"</a:t>
+              </a:r>
+              <a:r>
+                <a:rPr lang="en-US" b="1" dirty="0">
+                  <a:solidFill>
+                    <a:srgbClr val="0000FF"/>
+                  </a:solidFill>
+                </a:rPr>
+                <a:t>Op2</a:t>
+              </a:r>
+              <a:r>
+                <a:rPr lang="en-US" dirty="0"/>
+                <a:t>" may only be a constant, a register, or a shifted register.</a:t>
               </a:r>
             </a:p>
           </p:txBody>
@@ -46581,7 +48558,7 @@
         </p:nvGrpSpPr>
         <p:grpSpPr>
           <a:xfrm>
-            <a:off x="5763126" y="2219630"/>
+            <a:off x="5768727" y="2219630"/>
             <a:ext cx="468630" cy="3190672"/>
             <a:chOff x="4267200" y="2187776"/>
             <a:chExt cx="468630" cy="3190672"/>
@@ -46602,7 +48579,7 @@
               <a:avLst/>
             </a:prstGeom>
             <a:solidFill>
-              <a:srgbClr val="FF0000">
+              <a:srgbClr val="0070C0">
                 <a:alpha val="25000"/>
               </a:srgbClr>
             </a:solidFill>
@@ -46650,7 +48627,7 @@
               <a:avLst/>
             </a:prstGeom>
             <a:solidFill>
-              <a:srgbClr val="FF0000">
+              <a:srgbClr val="00B0F0">
                 <a:alpha val="25000"/>
               </a:srgbClr>
             </a:solidFill>
@@ -46698,7 +48675,7 @@
               <a:avLst/>
             </a:prstGeom>
             <a:solidFill>
-              <a:srgbClr val="FF0000">
+              <a:srgbClr val="00B0F0">
                 <a:alpha val="25000"/>
               </a:srgbClr>
             </a:solidFill>
@@ -46746,7 +48723,7 @@
               <a:avLst/>
             </a:prstGeom>
             <a:solidFill>
-              <a:srgbClr val="FF0000">
+              <a:srgbClr val="00B0F0">
                 <a:alpha val="25000"/>
               </a:srgbClr>
             </a:solidFill>
@@ -46794,7 +48771,7 @@
               <a:avLst/>
             </a:prstGeom>
             <a:solidFill>
-              <a:srgbClr val="FF0000">
+              <a:srgbClr val="00B0F0">
                 <a:alpha val="25000"/>
               </a:srgbClr>
             </a:solidFill>
@@ -46836,7 +48813,7 @@
         </p:nvGrpSpPr>
         <p:grpSpPr>
           <a:xfrm>
-            <a:off x="4656221" y="2225058"/>
+            <a:off x="4633147" y="2219630"/>
             <a:ext cx="304800" cy="3190672"/>
             <a:chOff x="4267200" y="2187776"/>
             <a:chExt cx="304800" cy="3190672"/>
@@ -49298,8 +51275,8 @@
           </a:p>
         </p:txBody>
       </p:sp>
-      <mc:AlternateContent xmlns:mc="http://schemas.openxmlformats.org/markup-compatibility/2006" xmlns:a14="http://schemas.microsoft.com/office/drawing/2010/main">
-        <mc:Choice Requires="a14">
+      <mc:AlternateContent xmlns:mc="http://schemas.openxmlformats.org/markup-compatibility/2006">
+        <mc:Choice xmlns:a14="http://schemas.microsoft.com/office/drawing/2010/main" Requires="a14">
           <p:sp>
             <p:nvSpPr>
               <p:cNvPr id="3" name="Rectangle 2">
@@ -49384,9 +51361,9 @@
                 <a14:m>
                   <m:oMath xmlns:m="http://schemas.openxmlformats.org/officeDocument/2006/math">
                     <m:r>
-                      <a:rPr lang="en-US" i="1">
+                      <a:rPr lang="en-US" b="1" i="1" smtClean="0">
                         <a:solidFill>
-                          <a:schemeClr val="tx1"/>
+                          <a:srgbClr val="FF0000"/>
                         </a:solidFill>
                         <a:latin typeface="Cambria Math" panose="02040503050406030204" pitchFamily="18" charset="0"/>
                         <a:ea typeface="Cambria Math" panose="02040503050406030204" pitchFamily="18" charset="0"/>
@@ -49460,9 +51437,9 @@
                   <a:t>” is an </a:t>
                 </a:r>
                 <a:r>
-                  <a:rPr lang="en-US" i="1" dirty="0">
+                  <a:rPr lang="en-US" b="1" i="1" dirty="0">
                     <a:solidFill>
-                      <a:schemeClr val="tx1"/>
+                      <a:srgbClr val="FF0000"/>
                     </a:solidFill>
                     <a:latin typeface="Times New Roman" panose="02020603050405020304" pitchFamily="18" charset="0"/>
                     <a:cs typeface="Times New Roman" panose="02020603050405020304" pitchFamily="18" charset="0"/>
@@ -49477,33 +51454,13 @@
                     <a:latin typeface="Times New Roman" panose="02020603050405020304" pitchFamily="18" charset="0"/>
                     <a:cs typeface="Times New Roman" panose="02020603050405020304" pitchFamily="18" charset="0"/>
                   </a:rPr>
-                  <a:t> expression evaluated at time of assembly; its value is a constant and does </a:t>
-                </a:r>
-                <a:r>
-                  <a:rPr lang="en-US" u="sng" dirty="0">
-                    <a:solidFill>
-                      <a:schemeClr val="tx1"/>
-                    </a:solidFill>
-                    <a:latin typeface="Times New Roman" panose="02020603050405020304" pitchFamily="18" charset="0"/>
-                    <a:cs typeface="Times New Roman" panose="02020603050405020304" pitchFamily="18" charset="0"/>
-                  </a:rPr>
-                  <a:t>not</a:t>
-                </a:r>
-                <a:r>
-                  <a:rPr lang="en-US" dirty="0">
-                    <a:solidFill>
-                      <a:schemeClr val="tx1"/>
-                    </a:solidFill>
-                    <a:latin typeface="Times New Roman" panose="02020603050405020304" pitchFamily="18" charset="0"/>
-                    <a:cs typeface="Times New Roman" panose="02020603050405020304" pitchFamily="18" charset="0"/>
-                  </a:rPr>
-                  <a:t> depend on the content of variable x.</a:t>
+                  <a:t> expression evaluated at time of assembly.</a:t>
                 </a:r>
               </a:p>
             </p:txBody>
           </p:sp>
         </mc:Choice>
-        <mc:Fallback xmlns="">
+        <mc:Fallback>
           <p:sp>
             <p:nvSpPr>
               <p:cNvPr id="3" name="Rectangle 2">
@@ -49529,7 +51486,7 @@
               <a:blipFill>
                 <a:blip r:embed="rId2"/>
                 <a:stretch>
-                  <a:fillRect l="-1012" r="-225" b="-1299"/>
+                  <a:fillRect l="-1012"/>
                 </a:stretch>
               </a:blipFill>
               <a:ln w="3175"/>
@@ -49762,20 +51719,21 @@
       </p:grpSpPr>
       <p:sp>
         <p:nvSpPr>
-          <p:cNvPr id="2" name="Title 1"/>
+          <p:cNvPr id="2" name="Title 1">
+            <a:extLst>
+              <a:ext uri="{FF2B5EF4-FFF2-40B4-BE49-F238E27FC236}">
+                <a16:creationId xmlns:a16="http://schemas.microsoft.com/office/drawing/2014/main" id="{65EA0FE0-C12B-4B4A-993E-7C314D1F5F28}"/>
+              </a:ext>
+            </a:extLst>
+          </p:cNvPr>
           <p:cNvSpPr>
             <a:spLocks noGrp="1"/>
           </p:cNvSpPr>
           <p:nvPr>
-            <p:ph type="title"/>
+            <p:ph type="ctrTitle"/>
           </p:nvPr>
         </p:nvSpPr>
-        <p:spPr>
-          <a:xfrm>
-            <a:off x="936516" y="761223"/>
-            <a:ext cx="8311758" cy="626419"/>
-          </a:xfrm>
-        </p:spPr>
+        <p:spPr/>
         <p:txBody>
           <a:bodyPr>
             <a:normAutofit/>
@@ -49783,106 +51741,8 @@
           <a:lstStyle/>
           <a:p>
             <a:r>
-              <a:rPr lang="en-US" b="1" dirty="0"/>
-              <a:t>ARM Thumb-2 Instruction Encodings</a:t>
-            </a:r>
-          </a:p>
-        </p:txBody>
-      </p:sp>
-      <p:sp>
-        <p:nvSpPr>
-          <p:cNvPr id="3" name="Content Placeholder 2"/>
-          <p:cNvSpPr>
-            <a:spLocks noGrp="1"/>
-          </p:cNvSpPr>
-          <p:nvPr>
-            <p:ph idx="1"/>
-          </p:nvPr>
-        </p:nvSpPr>
-        <p:spPr>
-          <a:xfrm>
-            <a:off x="936516" y="1663321"/>
-            <a:ext cx="10393221" cy="4970089"/>
-          </a:xfrm>
-        </p:spPr>
-        <p:txBody>
-          <a:bodyPr/>
-          <a:lstStyle/>
-          <a:p>
-            <a:pPr>
-              <a:spcBef>
-                <a:spcPts val="1350"/>
-              </a:spcBef>
-            </a:pPr>
-            <a:endParaRPr lang="en-US" dirty="0"/>
-          </a:p>
-          <a:p>
-            <a:pPr>
-              <a:spcBef>
-                <a:spcPts val="1350"/>
-              </a:spcBef>
-            </a:pPr>
-            <a:r>
-              <a:rPr lang="en-US" dirty="0">
-                <a:solidFill>
-                  <a:schemeClr val="tx1"/>
-                </a:solidFill>
-              </a:rPr>
-              <a:t>Two instruction sizes: 16-bits and 32-bits</a:t>
-            </a:r>
-          </a:p>
-          <a:p>
-            <a:pPr>
-              <a:spcBef>
-                <a:spcPts val="1350"/>
-              </a:spcBef>
-            </a:pPr>
-            <a:endParaRPr lang="en-US" dirty="0">
-              <a:solidFill>
-                <a:schemeClr val="tx1"/>
-              </a:solidFill>
-            </a:endParaRPr>
-          </a:p>
-          <a:p>
-            <a:pPr>
-              <a:spcBef>
-                <a:spcPts val="1350"/>
-              </a:spcBef>
-            </a:pPr>
-            <a:r>
-              <a:rPr lang="en-US" dirty="0">
-                <a:solidFill>
-                  <a:schemeClr val="tx1"/>
-                </a:solidFill>
-              </a:rPr>
-              <a:t>Some operations are available in both versions</a:t>
-            </a:r>
-          </a:p>
-          <a:p>
-            <a:pPr>
-              <a:spcBef>
-                <a:spcPts val="1350"/>
-              </a:spcBef>
-            </a:pPr>
-            <a:endParaRPr lang="en-US" dirty="0">
-              <a:solidFill>
-                <a:schemeClr val="tx1"/>
-              </a:solidFill>
-            </a:endParaRPr>
-          </a:p>
-          <a:p>
-            <a:pPr>
-              <a:spcBef>
-                <a:spcPts val="1350"/>
-              </a:spcBef>
-            </a:pPr>
-            <a:r>
-              <a:rPr lang="en-US" dirty="0">
-                <a:solidFill>
-                  <a:schemeClr val="tx1"/>
-                </a:solidFill>
-              </a:rPr>
-              <a:t>The assembler always uses a 16-bit version if available</a:t>
+              <a:rPr lang="en-US" dirty="0"/>
+              <a:t>ARM Thumb-2</a:t>
             </a:r>
           </a:p>
         </p:txBody>
@@ -49890,7 +51750,7 @@
     </p:spTree>
     <p:extLst>
       <p:ext uri="{BB962C8B-B14F-4D97-AF65-F5344CB8AC3E}">
-        <p14:creationId xmlns:p14="http://schemas.microsoft.com/office/powerpoint/2010/main" val="3846002784"/>
+        <p14:creationId xmlns:p14="http://schemas.microsoft.com/office/powerpoint/2010/main" val="661231473"/>
       </p:ext>
     </p:extLst>
   </p:cSld>
@@ -49917,215 +51777,9 @@
           <a:chExt cx="0" cy="0"/>
         </a:xfrm>
       </p:grpSpPr>
-      <p:grpSp>
-        <p:nvGrpSpPr>
-          <p:cNvPr id="42" name="Group 41"/>
-          <p:cNvGrpSpPr/>
-          <p:nvPr/>
-        </p:nvGrpSpPr>
-        <p:grpSpPr>
-          <a:xfrm>
-            <a:off x="1796795" y="2446575"/>
-            <a:ext cx="4308046" cy="1134884"/>
-            <a:chOff x="453188" y="1044890"/>
-            <a:chExt cx="5744061" cy="764294"/>
-          </a:xfrm>
-        </p:grpSpPr>
-        <p:grpSp>
-          <p:nvGrpSpPr>
-            <p:cNvPr id="30" name="Group 29"/>
-            <p:cNvGrpSpPr/>
-            <p:nvPr/>
-          </p:nvGrpSpPr>
-          <p:grpSpPr>
-            <a:xfrm>
-              <a:off x="453188" y="1178564"/>
-              <a:ext cx="5744061" cy="630620"/>
-              <a:chOff x="145012" y="809298"/>
-              <a:chExt cx="5744061" cy="630620"/>
-            </a:xfrm>
-          </p:grpSpPr>
-          <p:pic>
-            <p:nvPicPr>
-              <p:cNvPr id="5" name="Picture 4"/>
-              <p:cNvPicPr>
-                <a:picLocks noChangeAspect="1"/>
-              </p:cNvPicPr>
-              <p:nvPr/>
-            </p:nvPicPr>
-            <p:blipFill rotWithShape="1">
-              <a:blip r:embed="rId2"/>
-              <a:srcRect t="8189" r="47406" b="82112"/>
-              <a:stretch/>
-            </p:blipFill>
-            <p:spPr>
-              <a:xfrm>
-                <a:off x="145012" y="809298"/>
-                <a:ext cx="5744061" cy="630620"/>
-              </a:xfrm>
-              <a:prstGeom prst="rect">
-                <a:avLst/>
-              </a:prstGeom>
-            </p:spPr>
-          </p:pic>
-          <p:sp>
-            <p:nvSpPr>
-              <p:cNvPr id="6" name="Rectangle 5"/>
-              <p:cNvSpPr/>
-              <p:nvPr/>
-            </p:nvSpPr>
-            <p:spPr>
-              <a:xfrm>
-                <a:off x="3616083" y="1091247"/>
-                <a:ext cx="1942602" cy="260463"/>
-              </a:xfrm>
-              <a:prstGeom prst="rect">
-                <a:avLst/>
-              </a:prstGeom>
-              <a:solidFill>
-                <a:srgbClr val="FF0000">
-                  <a:alpha val="25000"/>
-                </a:srgbClr>
-              </a:solidFill>
-            </p:spPr>
-            <p:style>
-              <a:lnRef idx="2">
-                <a:schemeClr val="accent1">
-                  <a:shade val="50000"/>
-                </a:schemeClr>
-              </a:lnRef>
-              <a:fillRef idx="1">
-                <a:schemeClr val="accent1"/>
-              </a:fillRef>
-              <a:effectRef idx="0">
-                <a:schemeClr val="accent1"/>
-              </a:effectRef>
-              <a:fontRef idx="minor">
-                <a:schemeClr val="lt1"/>
-              </a:fontRef>
-            </p:style>
-            <p:txBody>
-              <a:bodyPr rtlCol="0" anchor="ctr"/>
-              <a:lstStyle/>
-              <a:p>
-                <a:pPr algn="ctr"/>
-                <a:endParaRPr lang="en-US" sz="1350"/>
-              </a:p>
-            </p:txBody>
-          </p:sp>
-          <p:sp>
-            <p:nvSpPr>
-              <p:cNvPr id="12" name="Rectangle 11"/>
-              <p:cNvSpPr/>
-              <p:nvPr/>
-            </p:nvSpPr>
-            <p:spPr>
-              <a:xfrm>
-                <a:off x="2680662" y="1087533"/>
-                <a:ext cx="935421" cy="257622"/>
-              </a:xfrm>
-              <a:prstGeom prst="rect">
-                <a:avLst/>
-              </a:prstGeom>
-              <a:solidFill>
-                <a:srgbClr val="0070C0">
-                  <a:alpha val="25000"/>
-                </a:srgbClr>
-              </a:solidFill>
-            </p:spPr>
-            <p:style>
-              <a:lnRef idx="2">
-                <a:schemeClr val="accent1">
-                  <a:shade val="50000"/>
-                </a:schemeClr>
-              </a:lnRef>
-              <a:fillRef idx="1">
-                <a:schemeClr val="accent1"/>
-              </a:fillRef>
-              <a:effectRef idx="0">
-                <a:schemeClr val="accent1"/>
-              </a:effectRef>
-              <a:fontRef idx="minor">
-                <a:schemeClr val="lt1"/>
-              </a:fontRef>
-            </p:style>
-            <p:txBody>
-              <a:bodyPr rtlCol="0" anchor="ctr"/>
-              <a:lstStyle/>
-              <a:p>
-                <a:pPr algn="ctr"/>
-                <a:endParaRPr lang="en-US" sz="1350"/>
-              </a:p>
-            </p:txBody>
-          </p:sp>
-        </p:grpSp>
-        <p:sp>
-          <p:nvSpPr>
-            <p:cNvPr id="20" name="TextBox 19"/>
-            <p:cNvSpPr txBox="1"/>
-            <p:nvPr/>
-          </p:nvSpPr>
-          <p:spPr>
-            <a:xfrm>
-              <a:off x="656551" y="1044890"/>
-              <a:ext cx="3527818" cy="279819"/>
-            </a:xfrm>
-            <a:prstGeom prst="rect">
-              <a:avLst/>
-            </a:prstGeom>
-            <a:noFill/>
-          </p:spPr>
-          <p:txBody>
-            <a:bodyPr wrap="square" rtlCol="0">
-              <a:spAutoFit/>
-            </a:bodyPr>
-            <a:lstStyle/>
-            <a:p>
-              <a:r>
-                <a:rPr lang="en-US" sz="2100" b="1" dirty="0"/>
-                <a:t>ADDS </a:t>
-              </a:r>
-              <a:r>
-                <a:rPr lang="en-US" sz="2100" b="1" dirty="0">
-                  <a:solidFill>
-                    <a:srgbClr val="FF0000"/>
-                  </a:solidFill>
-                </a:rPr>
-                <a:t>Rd</a:t>
-              </a:r>
-              <a:r>
-                <a:rPr lang="en-US" sz="2100" b="1" dirty="0"/>
-                <a:t>,</a:t>
-              </a:r>
-              <a:r>
-                <a:rPr lang="en-US" sz="2100" b="1" dirty="0">
-                  <a:solidFill>
-                    <a:srgbClr val="FF0000"/>
-                  </a:solidFill>
-                </a:rPr>
-                <a:t>Rn</a:t>
-              </a:r>
-              <a:r>
-                <a:rPr lang="en-US" sz="2100" b="1" dirty="0"/>
-                <a:t>,</a:t>
-              </a:r>
-              <a:r>
-                <a:rPr lang="en-US" sz="2100" b="1" i="1" dirty="0">
-                  <a:solidFill>
-                    <a:srgbClr val="0070C0"/>
-                  </a:solidFill>
-                  <a:latin typeface="Times New Roman" panose="02020603050405020304" pitchFamily="18" charset="0"/>
-                  <a:cs typeface="Times New Roman" panose="02020603050405020304" pitchFamily="18" charset="0"/>
-                </a:rPr>
-                <a:t>imm3</a:t>
-              </a:r>
-            </a:p>
-          </p:txBody>
-        </p:sp>
-      </p:grpSp>
       <p:sp>
         <p:nvSpPr>
-          <p:cNvPr id="43" name="Title 42"/>
+          <p:cNvPr id="2" name="Title 1"/>
           <p:cNvSpPr>
             <a:spLocks noGrp="1"/>
           </p:cNvSpPr>
@@ -50135,8 +51789,8 @@
         </p:nvSpPr>
         <p:spPr>
           <a:xfrm>
-            <a:off x="960370" y="739547"/>
-            <a:ext cx="4120967" cy="724296"/>
+            <a:off x="936516" y="761223"/>
+            <a:ext cx="8311758" cy="626419"/>
           </a:xfrm>
         </p:spPr>
         <p:txBody>
@@ -50146,784 +51800,114 @@
           <a:lstStyle/>
           <a:p>
             <a:r>
-              <a:rPr lang="en-US" sz="4050" dirty="0"/>
-              <a:t>ADD Immediate</a:t>
+              <a:rPr lang="en-US" b="1" dirty="0"/>
+              <a:t>ARM Thumb-2 Instruction Encodings</a:t>
             </a:r>
           </a:p>
         </p:txBody>
       </p:sp>
-      <p:grpSp>
-        <p:nvGrpSpPr>
-          <p:cNvPr id="3" name="Group 2"/>
-          <p:cNvGrpSpPr/>
-          <p:nvPr/>
-        </p:nvGrpSpPr>
-        <p:grpSpPr>
+      <p:sp>
+        <p:nvSpPr>
+          <p:cNvPr id="3" name="Content Placeholder 2"/>
+          <p:cNvSpPr>
+            <a:spLocks noGrp="1"/>
+          </p:cNvSpPr>
+          <p:nvPr>
+            <p:ph idx="1"/>
+          </p:nvPr>
+        </p:nvSpPr>
+        <p:spPr>
           <a:xfrm>
-            <a:off x="1816141" y="4017256"/>
-            <a:ext cx="8081819" cy="1245818"/>
-            <a:chOff x="449288" y="5107571"/>
-            <a:chExt cx="10775759" cy="1661090"/>
+            <a:off x="936516" y="1663321"/>
+            <a:ext cx="10393221" cy="4970089"/>
           </a:xfrm>
-        </p:grpSpPr>
-        <p:grpSp>
-          <p:nvGrpSpPr>
-            <p:cNvPr id="38" name="Group 37"/>
-            <p:cNvGrpSpPr/>
-            <p:nvPr/>
-          </p:nvGrpSpPr>
-          <p:grpSpPr>
-            <a:xfrm>
-              <a:off x="449288" y="5107571"/>
-              <a:ext cx="10775759" cy="1661090"/>
-              <a:chOff x="453189" y="3734882"/>
-              <a:chExt cx="6119154" cy="799392"/>
-            </a:xfrm>
-          </p:grpSpPr>
-          <p:grpSp>
-            <p:nvGrpSpPr>
-              <p:cNvPr id="32" name="Group 31"/>
-              <p:cNvGrpSpPr/>
-              <p:nvPr/>
-            </p:nvGrpSpPr>
-            <p:grpSpPr>
-              <a:xfrm>
-                <a:off x="453189" y="3882633"/>
-                <a:ext cx="6119154" cy="651641"/>
-                <a:chOff x="145013" y="3584028"/>
-                <a:chExt cx="6119154" cy="651641"/>
-              </a:xfrm>
-            </p:grpSpPr>
-            <p:pic>
-              <p:nvPicPr>
-                <p:cNvPr id="28" name="Picture 27"/>
-                <p:cNvPicPr>
-                  <a:picLocks noChangeAspect="1"/>
-                </p:cNvPicPr>
-                <p:nvPr/>
-              </p:nvPicPr>
-              <p:blipFill rotWithShape="1">
-                <a:blip r:embed="rId2"/>
-                <a:srcRect t="50902" b="39076"/>
-                <a:stretch/>
-              </p:blipFill>
-              <p:spPr>
-                <a:xfrm>
-                  <a:off x="145013" y="3584028"/>
-                  <a:ext cx="6119154" cy="651641"/>
-                </a:xfrm>
-                <a:prstGeom prst="rect">
-                  <a:avLst/>
-                </a:prstGeom>
-              </p:spPr>
-            </p:pic>
-            <p:sp>
-              <p:nvSpPr>
-                <p:cNvPr id="8" name="Rectangle 7"/>
-                <p:cNvSpPr/>
-                <p:nvPr/>
-              </p:nvSpPr>
-              <p:spPr>
-                <a:xfrm>
-                  <a:off x="2488324" y="3859925"/>
-                  <a:ext cx="713201" cy="276646"/>
-                </a:xfrm>
-                <a:prstGeom prst="rect">
-                  <a:avLst/>
-                </a:prstGeom>
-                <a:solidFill>
-                  <a:srgbClr val="FF0000">
-                    <a:alpha val="25000"/>
-                  </a:srgbClr>
-                </a:solidFill>
-              </p:spPr>
-              <p:style>
-                <a:lnRef idx="2">
-                  <a:schemeClr val="accent1">
-                    <a:shade val="50000"/>
-                  </a:schemeClr>
-                </a:lnRef>
-                <a:fillRef idx="1">
-                  <a:schemeClr val="accent1"/>
-                </a:fillRef>
-                <a:effectRef idx="0">
-                  <a:schemeClr val="accent1"/>
-                </a:effectRef>
-                <a:fontRef idx="minor">
-                  <a:schemeClr val="lt1"/>
-                </a:fontRef>
-              </p:style>
-              <p:txBody>
-                <a:bodyPr rtlCol="0" anchor="ctr"/>
-                <a:lstStyle/>
-                <a:p>
-                  <a:pPr algn="ctr"/>
-                  <a:endParaRPr lang="en-US" sz="1350"/>
-                </a:p>
-              </p:txBody>
-            </p:sp>
-            <p:sp>
-              <p:nvSpPr>
-                <p:cNvPr id="9" name="Rectangle 8"/>
-                <p:cNvSpPr/>
-                <p:nvPr/>
-              </p:nvSpPr>
-              <p:spPr>
-                <a:xfrm>
-                  <a:off x="3936124" y="3859925"/>
-                  <a:ext cx="717331" cy="276646"/>
-                </a:xfrm>
-                <a:prstGeom prst="rect">
-                  <a:avLst/>
-                </a:prstGeom>
-                <a:solidFill>
-                  <a:srgbClr val="FF0000">
-                    <a:alpha val="25000"/>
-                  </a:srgbClr>
-                </a:solidFill>
-              </p:spPr>
-              <p:style>
-                <a:lnRef idx="2">
-                  <a:schemeClr val="accent1">
-                    <a:shade val="50000"/>
-                  </a:schemeClr>
-                </a:lnRef>
-                <a:fillRef idx="1">
-                  <a:schemeClr val="accent1"/>
-                </a:fillRef>
-                <a:effectRef idx="0">
-                  <a:schemeClr val="accent1"/>
-                </a:effectRef>
-                <a:fontRef idx="minor">
-                  <a:schemeClr val="lt1"/>
-                </a:fontRef>
-              </p:style>
-              <p:txBody>
-                <a:bodyPr rtlCol="0" anchor="ctr"/>
-                <a:lstStyle/>
-                <a:p>
-                  <a:pPr algn="ctr"/>
-                  <a:endParaRPr lang="en-US" sz="1350"/>
-                </a:p>
-              </p:txBody>
-            </p:sp>
-            <p:sp>
-              <p:nvSpPr>
-                <p:cNvPr id="14" name="Rectangle 13"/>
-                <p:cNvSpPr/>
-                <p:nvPr/>
-              </p:nvSpPr>
-              <p:spPr>
-                <a:xfrm>
-                  <a:off x="1202120" y="3859925"/>
-                  <a:ext cx="164037" cy="276646"/>
-                </a:xfrm>
-                <a:prstGeom prst="rect">
-                  <a:avLst/>
-                </a:prstGeom>
-                <a:solidFill>
-                  <a:srgbClr val="0070C0">
-                    <a:alpha val="25000"/>
-                  </a:srgbClr>
-                </a:solidFill>
-              </p:spPr>
-              <p:style>
-                <a:lnRef idx="2">
-                  <a:schemeClr val="accent1">
-                    <a:shade val="50000"/>
-                  </a:schemeClr>
-                </a:lnRef>
-                <a:fillRef idx="1">
-                  <a:schemeClr val="accent1"/>
-                </a:fillRef>
-                <a:effectRef idx="0">
-                  <a:schemeClr val="accent1"/>
-                </a:effectRef>
-                <a:fontRef idx="minor">
-                  <a:schemeClr val="lt1"/>
-                </a:fontRef>
-              </p:style>
-              <p:txBody>
-                <a:bodyPr rtlCol="0" anchor="ctr"/>
-                <a:lstStyle/>
-                <a:p>
-                  <a:pPr algn="ctr"/>
-                  <a:endParaRPr lang="en-US" sz="1350"/>
-                </a:p>
-              </p:txBody>
-            </p:sp>
-            <p:sp>
-              <p:nvSpPr>
-                <p:cNvPr id="15" name="Rectangle 14"/>
-                <p:cNvSpPr/>
-                <p:nvPr/>
-              </p:nvSpPr>
-              <p:spPr>
-                <a:xfrm>
-                  <a:off x="3406852" y="3859925"/>
-                  <a:ext cx="529271" cy="276646"/>
-                </a:xfrm>
-                <a:prstGeom prst="rect">
-                  <a:avLst/>
-                </a:prstGeom>
-                <a:solidFill>
-                  <a:srgbClr val="0070C0">
-                    <a:alpha val="25000"/>
-                  </a:srgbClr>
-                </a:solidFill>
-              </p:spPr>
-              <p:style>
-                <a:lnRef idx="2">
-                  <a:schemeClr val="accent1">
-                    <a:shade val="50000"/>
-                  </a:schemeClr>
-                </a:lnRef>
-                <a:fillRef idx="1">
-                  <a:schemeClr val="accent1"/>
-                </a:fillRef>
-                <a:effectRef idx="0">
-                  <a:schemeClr val="accent1"/>
-                </a:effectRef>
-                <a:fontRef idx="minor">
-                  <a:schemeClr val="lt1"/>
-                </a:fontRef>
-              </p:style>
-              <p:txBody>
-                <a:bodyPr rtlCol="0" anchor="ctr"/>
-                <a:lstStyle/>
-                <a:p>
-                  <a:pPr algn="ctr"/>
-                  <a:endParaRPr lang="en-US" sz="1350"/>
-                </a:p>
-              </p:txBody>
-            </p:sp>
-            <p:sp>
-              <p:nvSpPr>
-                <p:cNvPr id="16" name="Rectangle 15"/>
-                <p:cNvSpPr/>
-                <p:nvPr/>
-              </p:nvSpPr>
-              <p:spPr>
-                <a:xfrm>
-                  <a:off x="4653454" y="3859925"/>
-                  <a:ext cx="1451930" cy="276646"/>
-                </a:xfrm>
-                <a:prstGeom prst="rect">
-                  <a:avLst/>
-                </a:prstGeom>
-                <a:solidFill>
-                  <a:srgbClr val="0070C0">
-                    <a:alpha val="25000"/>
-                  </a:srgbClr>
-                </a:solidFill>
-              </p:spPr>
-              <p:style>
-                <a:lnRef idx="2">
-                  <a:schemeClr val="accent1">
-                    <a:shade val="50000"/>
-                  </a:schemeClr>
-                </a:lnRef>
-                <a:fillRef idx="1">
-                  <a:schemeClr val="accent1"/>
-                </a:fillRef>
-                <a:effectRef idx="0">
-                  <a:schemeClr val="accent1"/>
-                </a:effectRef>
-                <a:fontRef idx="minor">
-                  <a:schemeClr val="lt1"/>
-                </a:fontRef>
-              </p:style>
-              <p:txBody>
-                <a:bodyPr rtlCol="0" anchor="ctr"/>
-                <a:lstStyle/>
-                <a:p>
-                  <a:pPr algn="ctr"/>
-                  <a:endParaRPr lang="en-US" sz="1350"/>
-                </a:p>
-              </p:txBody>
-            </p:sp>
-          </p:grpSp>
-          <p:sp>
-            <p:nvSpPr>
-              <p:cNvPr id="37" name="TextBox 36"/>
-              <p:cNvSpPr txBox="1"/>
-              <p:nvPr/>
-            </p:nvSpPr>
-            <p:spPr>
-              <a:xfrm>
-                <a:off x="568671" y="3734882"/>
-                <a:ext cx="4161147" cy="266609"/>
-              </a:xfrm>
-              <a:prstGeom prst="rect">
-                <a:avLst/>
-              </a:prstGeom>
-              <a:noFill/>
-            </p:spPr>
-            <p:txBody>
-              <a:bodyPr wrap="square" rtlCol="0">
-                <a:spAutoFit/>
-              </a:bodyPr>
-              <a:lstStyle/>
-              <a:p>
-                <a:r>
-                  <a:rPr lang="en-US" sz="2100" b="1" dirty="0"/>
-                  <a:t>ADD{</a:t>
-                </a:r>
-                <a:r>
-                  <a:rPr lang="en-US" sz="2100" b="1" dirty="0">
-                    <a:solidFill>
-                      <a:srgbClr val="00B050"/>
-                    </a:solidFill>
-                  </a:rPr>
-                  <a:t>S</a:t>
-                </a:r>
-                <a:r>
-                  <a:rPr lang="en-US" sz="2100" b="1" dirty="0"/>
-                  <a:t>} </a:t>
-                </a:r>
-                <a:r>
-                  <a:rPr lang="en-US" sz="2100" b="1" dirty="0">
-                    <a:solidFill>
-                      <a:srgbClr val="FF0000"/>
-                    </a:solidFill>
-                  </a:rPr>
-                  <a:t>Rd</a:t>
-                </a:r>
-                <a:r>
-                  <a:rPr lang="en-US" sz="2100" b="1" dirty="0"/>
-                  <a:t>,</a:t>
-                </a:r>
-                <a:r>
-                  <a:rPr lang="en-US" sz="2100" b="1" dirty="0">
-                    <a:solidFill>
-                      <a:srgbClr val="FF0000"/>
-                    </a:solidFill>
-                  </a:rPr>
-                  <a:t>Rn</a:t>
-                </a:r>
-                <a:r>
-                  <a:rPr lang="en-US" sz="2100" b="1" dirty="0"/>
-                  <a:t>,</a:t>
-                </a:r>
-                <a:r>
-                  <a:rPr lang="en-US" sz="2100" b="1" i="1" dirty="0">
-                    <a:solidFill>
-                      <a:srgbClr val="0070C0"/>
-                    </a:solidFill>
-                    <a:latin typeface="Times New Roman" panose="02020603050405020304" pitchFamily="18" charset="0"/>
-                    <a:cs typeface="Times New Roman" panose="02020603050405020304" pitchFamily="18" charset="0"/>
-                  </a:rPr>
-                  <a:t>imm12</a:t>
-                </a:r>
-              </a:p>
-            </p:txBody>
-          </p:sp>
-        </p:grpSp>
-        <p:sp>
-          <p:nvSpPr>
-            <p:cNvPr id="29" name="Rectangle 28"/>
-            <p:cNvSpPr/>
-            <p:nvPr/>
-          </p:nvSpPr>
-          <p:spPr>
-            <a:xfrm>
-              <a:off x="4221525" y="5962859"/>
-              <a:ext cx="347035" cy="596037"/>
-            </a:xfrm>
-            <a:prstGeom prst="rect">
-              <a:avLst/>
-            </a:prstGeom>
-            <a:solidFill>
-              <a:srgbClr val="00B050">
-                <a:alpha val="25000"/>
-              </a:srgbClr>
-            </a:solidFill>
-          </p:spPr>
-          <p:style>
-            <a:lnRef idx="2">
-              <a:schemeClr val="accent1">
-                <a:shade val="50000"/>
-              </a:schemeClr>
-            </a:lnRef>
-            <a:fillRef idx="1">
-              <a:schemeClr val="accent1"/>
-            </a:fillRef>
-            <a:effectRef idx="0">
-              <a:schemeClr val="accent1"/>
-            </a:effectRef>
-            <a:fontRef idx="minor">
-              <a:schemeClr val="lt1"/>
-            </a:fontRef>
-          </p:style>
-          <p:txBody>
-            <a:bodyPr rtlCol="0" anchor="ctr"/>
-            <a:lstStyle/>
-            <a:p>
-              <a:pPr algn="ctr"/>
-              <a:endParaRPr lang="en-US" sz="1350"/>
-            </a:p>
-          </p:txBody>
-        </p:sp>
-      </p:grpSp>
-      <p:graphicFrame>
-        <p:nvGraphicFramePr>
-          <p:cNvPr id="4" name="Table 3"/>
-          <p:cNvGraphicFramePr>
-            <a:graphicFrameLocks noGrp="1"/>
-          </p:cNvGraphicFramePr>
-          <p:nvPr/>
-        </p:nvGraphicFramePr>
-        <p:xfrm>
-          <a:off x="6202843" y="2584326"/>
-          <a:ext cx="4286306" cy="1234440"/>
-        </p:xfrm>
-        <a:graphic>
-          <a:graphicData uri="http://schemas.openxmlformats.org/drawingml/2006/table">
-            <a:tbl>
-              <a:tblPr firstRow="1" bandRow="1">
-                <a:tableStyleId>{073A0DAA-6AF3-43AB-8588-CEC1D06C72B9}</a:tableStyleId>
-              </a:tblPr>
-              <a:tblGrid>
-                <a:gridCol w="2143153">
-                  <a:extLst>
-                    <a:ext uri="{9D8B030D-6E8A-4147-A177-3AD203B41FA5}">
-                      <a16:colId xmlns:a16="http://schemas.microsoft.com/office/drawing/2014/main" val="3572006396"/>
-                    </a:ext>
-                  </a:extLst>
-                </a:gridCol>
-                <a:gridCol w="2143153">
-                  <a:extLst>
-                    <a:ext uri="{9D8B030D-6E8A-4147-A177-3AD203B41FA5}">
-                      <a16:colId xmlns:a16="http://schemas.microsoft.com/office/drawing/2014/main" val="1502081145"/>
-                    </a:ext>
-                  </a:extLst>
-                </a:gridCol>
-              </a:tblGrid>
-              <a:tr h="342900">
-                <a:tc>
-                  <a:txBody>
-                    <a:bodyPr/>
-                    <a:lstStyle/>
-                    <a:p>
-                      <a:pPr algn="ctr"/>
-                      <a:r>
-                        <a:rPr lang="en-US" sz="1800" dirty="0"/>
-                        <a:t>16-bit</a:t>
-                      </a:r>
-                    </a:p>
-                  </a:txBody>
-                  <a:tcPr marL="68580" marR="68580" marT="34290" marB="34290">
-                    <a:lnL w="12700" cap="flat" cmpd="sng" algn="ctr">
-                      <a:solidFill>
-                        <a:schemeClr val="tx1"/>
-                      </a:solidFill>
-                      <a:prstDash val="solid"/>
-                      <a:round/>
-                      <a:headEnd type="none" w="med" len="med"/>
-                      <a:tailEnd type="none" w="med" len="med"/>
-                    </a:lnL>
-                    <a:lnR w="12700" cap="flat" cmpd="sng" algn="ctr">
-                      <a:solidFill>
-                        <a:schemeClr val="tx1"/>
-                      </a:solidFill>
-                      <a:prstDash val="solid"/>
-                      <a:round/>
-                      <a:headEnd type="none" w="med" len="med"/>
-                      <a:tailEnd type="none" w="med" len="med"/>
-                    </a:lnR>
-                    <a:lnT w="12700" cap="flat" cmpd="sng" algn="ctr">
-                      <a:solidFill>
-                        <a:schemeClr val="tx1"/>
-                      </a:solidFill>
-                      <a:prstDash val="solid"/>
-                      <a:round/>
-                      <a:headEnd type="none" w="med" len="med"/>
-                      <a:tailEnd type="none" w="med" len="med"/>
-                    </a:lnT>
-                    <a:lnB w="12700" cap="flat" cmpd="sng" algn="ctr">
-                      <a:solidFill>
-                        <a:schemeClr val="tx1"/>
-                      </a:solidFill>
-                      <a:prstDash val="solid"/>
-                      <a:round/>
-                      <a:headEnd type="none" w="med" len="med"/>
-                      <a:tailEnd type="none" w="med" len="med"/>
-                    </a:lnB>
-                  </a:tcPr>
-                </a:tc>
-                <a:tc>
-                  <a:txBody>
-                    <a:bodyPr/>
-                    <a:lstStyle/>
-                    <a:p>
-                      <a:pPr algn="ctr"/>
-                      <a:r>
-                        <a:rPr lang="en-US" sz="1800" dirty="0"/>
-                        <a:t>32-bit</a:t>
-                      </a:r>
-                    </a:p>
-                  </a:txBody>
-                  <a:tcPr marL="68580" marR="68580" marT="34290" marB="34290">
-                    <a:lnL w="12700" cap="flat" cmpd="sng" algn="ctr">
-                      <a:solidFill>
-                        <a:schemeClr val="tx1"/>
-                      </a:solidFill>
-                      <a:prstDash val="solid"/>
-                      <a:round/>
-                      <a:headEnd type="none" w="med" len="med"/>
-                      <a:tailEnd type="none" w="med" len="med"/>
-                    </a:lnL>
-                    <a:lnR w="12700" cap="flat" cmpd="sng" algn="ctr">
-                      <a:solidFill>
-                        <a:schemeClr val="tx1"/>
-                      </a:solidFill>
-                      <a:prstDash val="solid"/>
-                      <a:round/>
-                      <a:headEnd type="none" w="med" len="med"/>
-                      <a:tailEnd type="none" w="med" len="med"/>
-                    </a:lnR>
-                    <a:lnT w="12700" cap="flat" cmpd="sng" algn="ctr">
-                      <a:solidFill>
-                        <a:schemeClr val="tx1"/>
-                      </a:solidFill>
-                      <a:prstDash val="solid"/>
-                      <a:round/>
-                      <a:headEnd type="none" w="med" len="med"/>
-                      <a:tailEnd type="none" w="med" len="med"/>
-                    </a:lnT>
-                    <a:lnB w="12700" cap="flat" cmpd="sng" algn="ctr">
-                      <a:solidFill>
-                        <a:schemeClr val="tx1"/>
-                      </a:solidFill>
-                      <a:prstDash val="solid"/>
-                      <a:round/>
-                      <a:headEnd type="none" w="med" len="med"/>
-                      <a:tailEnd type="none" w="med" len="med"/>
-                    </a:lnB>
-                  </a:tcPr>
-                </a:tc>
-                <a:extLst>
-                  <a:ext uri="{0D108BD9-81ED-4DB2-BD59-A6C34878D82A}">
-                    <a16:rowId xmlns:a16="http://schemas.microsoft.com/office/drawing/2014/main" val="4090351082"/>
-                  </a:ext>
-                </a:extLst>
-              </a:tr>
-              <a:tr h="891540">
-                <a:tc>
-                  <a:txBody>
-                    <a:bodyPr/>
-                    <a:lstStyle/>
-                    <a:p>
-                      <a:r>
-                        <a:rPr lang="en-US" sz="1800" dirty="0"/>
-                        <a:t>Registers R0-R7</a:t>
-                      </a:r>
-                    </a:p>
-                    <a:p>
-                      <a:r>
-                        <a:rPr lang="en-US" sz="1800" dirty="0"/>
-                        <a:t>3-bit constants</a:t>
-                      </a:r>
-                      <a:endParaRPr lang="en-US" sz="1800" baseline="0" dirty="0"/>
-                    </a:p>
-                    <a:p>
-                      <a:r>
-                        <a:rPr lang="en-US" sz="1800" dirty="0"/>
-                        <a:t>"S" required</a:t>
-                      </a:r>
-                    </a:p>
-                  </a:txBody>
-                  <a:tcPr marL="68580" marR="68580" marT="34290" marB="34290">
-                    <a:lnL w="12700" cap="flat" cmpd="sng" algn="ctr">
-                      <a:solidFill>
-                        <a:schemeClr val="tx1"/>
-                      </a:solidFill>
-                      <a:prstDash val="solid"/>
-                      <a:round/>
-                      <a:headEnd type="none" w="med" len="med"/>
-                      <a:tailEnd type="none" w="med" len="med"/>
-                    </a:lnL>
-                    <a:lnR w="12700" cap="flat" cmpd="sng" algn="ctr">
-                      <a:solidFill>
-                        <a:schemeClr val="tx1"/>
-                      </a:solidFill>
-                      <a:prstDash val="solid"/>
-                      <a:round/>
-                      <a:headEnd type="none" w="med" len="med"/>
-                      <a:tailEnd type="none" w="med" len="med"/>
-                    </a:lnR>
-                    <a:lnT w="12700" cap="flat" cmpd="sng" algn="ctr">
-                      <a:solidFill>
-                        <a:schemeClr val="tx1"/>
-                      </a:solidFill>
-                      <a:prstDash val="solid"/>
-                      <a:round/>
-                      <a:headEnd type="none" w="med" len="med"/>
-                      <a:tailEnd type="none" w="med" len="med"/>
-                    </a:lnT>
-                    <a:lnB w="12700" cap="flat" cmpd="sng" algn="ctr">
-                      <a:solidFill>
-                        <a:schemeClr val="tx1"/>
-                      </a:solidFill>
-                      <a:prstDash val="solid"/>
-                      <a:round/>
-                      <a:headEnd type="none" w="med" len="med"/>
-                      <a:tailEnd type="none" w="med" len="med"/>
-                    </a:lnB>
-                    <a:solidFill>
-                      <a:schemeClr val="bg1">
-                        <a:lumMod val="95000"/>
-                      </a:schemeClr>
-                    </a:solidFill>
-                  </a:tcPr>
-                </a:tc>
-                <a:tc>
-                  <a:txBody>
-                    <a:bodyPr/>
-                    <a:lstStyle/>
-                    <a:p>
-                      <a:r>
-                        <a:rPr lang="en-US" sz="1800" dirty="0"/>
-                        <a:t>Registers R0-R15</a:t>
-                      </a:r>
-                    </a:p>
-                    <a:p>
-                      <a:r>
-                        <a:rPr lang="en-US" sz="1800" dirty="0"/>
-                        <a:t>12-bit constants</a:t>
-                      </a:r>
-                    </a:p>
-                    <a:p>
-                      <a:r>
-                        <a:rPr lang="en-US" sz="1800" dirty="0"/>
-                        <a:t>"S" optional</a:t>
-                      </a:r>
-                    </a:p>
-                  </a:txBody>
-                  <a:tcPr marL="68580" marR="68580" marT="34290" marB="34290">
-                    <a:lnL w="12700" cap="flat" cmpd="sng" algn="ctr">
-                      <a:solidFill>
-                        <a:schemeClr val="tx1"/>
-                      </a:solidFill>
-                      <a:prstDash val="solid"/>
-                      <a:round/>
-                      <a:headEnd type="none" w="med" len="med"/>
-                      <a:tailEnd type="none" w="med" len="med"/>
-                    </a:lnL>
-                    <a:lnR w="12700" cap="flat" cmpd="sng" algn="ctr">
-                      <a:solidFill>
-                        <a:schemeClr val="tx1"/>
-                      </a:solidFill>
-                      <a:prstDash val="solid"/>
-                      <a:round/>
-                      <a:headEnd type="none" w="med" len="med"/>
-                      <a:tailEnd type="none" w="med" len="med"/>
-                    </a:lnR>
-                    <a:lnT w="12700" cap="flat" cmpd="sng" algn="ctr">
-                      <a:solidFill>
-                        <a:schemeClr val="tx1"/>
-                      </a:solidFill>
-                      <a:prstDash val="solid"/>
-                      <a:round/>
-                      <a:headEnd type="none" w="med" len="med"/>
-                      <a:tailEnd type="none" w="med" len="med"/>
-                    </a:lnT>
-                    <a:lnB w="12700" cap="flat" cmpd="sng" algn="ctr">
-                      <a:solidFill>
-                        <a:schemeClr val="tx1"/>
-                      </a:solidFill>
-                      <a:prstDash val="solid"/>
-                      <a:round/>
-                      <a:headEnd type="none" w="med" len="med"/>
-                      <a:tailEnd type="none" w="med" len="med"/>
-                    </a:lnB>
-                    <a:solidFill>
-                      <a:schemeClr val="bg1">
-                        <a:lumMod val="95000"/>
-                      </a:schemeClr>
-                    </a:solidFill>
-                  </a:tcPr>
-                </a:tc>
-                <a:extLst>
-                  <a:ext uri="{0D108BD9-81ED-4DB2-BD59-A6C34878D82A}">
-                    <a16:rowId xmlns:a16="http://schemas.microsoft.com/office/drawing/2014/main" val="1516577694"/>
-                  </a:ext>
-                </a:extLst>
-              </a:tr>
-            </a:tbl>
-          </a:graphicData>
-        </a:graphic>
-      </p:graphicFrame>
-      <p:cxnSp>
-        <p:nvCxnSpPr>
-          <p:cNvPr id="7" name="Straight Arrow Connector 6"/>
-          <p:cNvCxnSpPr/>
-          <p:nvPr/>
-        </p:nvCxnSpPr>
-        <p:spPr>
-          <a:xfrm flipH="1" flipV="1">
-            <a:off x="5924707" y="3204179"/>
-            <a:ext cx="332656" cy="7557"/>
-          </a:xfrm>
-          <a:prstGeom prst="straightConnector1">
-            <a:avLst/>
-          </a:prstGeom>
-          <a:ln>
-            <a:tailEnd type="triangle"/>
-          </a:ln>
         </p:spPr>
-        <p:style>
-          <a:lnRef idx="1">
-            <a:schemeClr val="accent1"/>
-          </a:lnRef>
-          <a:fillRef idx="0">
-            <a:schemeClr val="accent1"/>
-          </a:fillRef>
-          <a:effectRef idx="0">
-            <a:schemeClr val="accent1"/>
-          </a:effectRef>
-          <a:fontRef idx="minor">
-            <a:schemeClr val="tx1"/>
-          </a:fontRef>
-        </p:style>
-      </p:cxnSp>
-      <p:cxnSp>
-        <p:nvCxnSpPr>
-          <p:cNvPr id="11" name="Straight Arrow Connector 10"/>
-          <p:cNvCxnSpPr/>
-          <p:nvPr/>
-        </p:nvCxnSpPr>
-        <p:spPr>
-          <a:xfrm flipH="1">
-            <a:off x="5335260" y="3818766"/>
-            <a:ext cx="3952323" cy="534080"/>
-          </a:xfrm>
-          <a:prstGeom prst="straightConnector1">
-            <a:avLst/>
-          </a:prstGeom>
-          <a:ln>
-            <a:tailEnd type="triangle"/>
-          </a:ln>
-        </p:spPr>
-        <p:style>
-          <a:lnRef idx="1">
-            <a:schemeClr val="accent1"/>
-          </a:lnRef>
-          <a:fillRef idx="0">
-            <a:schemeClr val="accent1"/>
-          </a:fillRef>
-          <a:effectRef idx="0">
-            <a:schemeClr val="accent1"/>
-          </a:effectRef>
-          <a:fontRef idx="minor">
-            <a:schemeClr val="tx1"/>
-          </a:fontRef>
-        </p:style>
-      </p:cxnSp>
+        <p:txBody>
+          <a:bodyPr/>
+          <a:lstStyle/>
+          <a:p>
+            <a:pPr>
+              <a:spcBef>
+                <a:spcPts val="1350"/>
+              </a:spcBef>
+            </a:pPr>
+            <a:endParaRPr lang="en-US" dirty="0"/>
+          </a:p>
+          <a:p>
+            <a:pPr>
+              <a:spcBef>
+                <a:spcPts val="1350"/>
+              </a:spcBef>
+            </a:pPr>
+            <a:r>
+              <a:rPr lang="en-US" dirty="0">
+                <a:solidFill>
+                  <a:schemeClr val="tx1"/>
+                </a:solidFill>
+              </a:rPr>
+              <a:t>Two instruction sizes: 16-bits and 32-bits</a:t>
+            </a:r>
+          </a:p>
+          <a:p>
+            <a:pPr>
+              <a:spcBef>
+                <a:spcPts val="1350"/>
+              </a:spcBef>
+            </a:pPr>
+            <a:endParaRPr lang="en-US" dirty="0">
+              <a:solidFill>
+                <a:schemeClr val="tx1"/>
+              </a:solidFill>
+            </a:endParaRPr>
+          </a:p>
+          <a:p>
+            <a:pPr>
+              <a:spcBef>
+                <a:spcPts val="1350"/>
+              </a:spcBef>
+            </a:pPr>
+            <a:r>
+              <a:rPr lang="en-US" dirty="0">
+                <a:solidFill>
+                  <a:schemeClr val="tx1"/>
+                </a:solidFill>
+              </a:rPr>
+              <a:t>Some operations are available in both versions</a:t>
+            </a:r>
+          </a:p>
+          <a:p>
+            <a:pPr>
+              <a:spcBef>
+                <a:spcPts val="1350"/>
+              </a:spcBef>
+            </a:pPr>
+            <a:endParaRPr lang="en-US" dirty="0">
+              <a:solidFill>
+                <a:schemeClr val="tx1"/>
+              </a:solidFill>
+            </a:endParaRPr>
+          </a:p>
+          <a:p>
+            <a:pPr>
+              <a:spcBef>
+                <a:spcPts val="1350"/>
+              </a:spcBef>
+            </a:pPr>
+            <a:r>
+              <a:rPr lang="en-US" dirty="0">
+                <a:solidFill>
+                  <a:schemeClr val="tx1"/>
+                </a:solidFill>
+              </a:rPr>
+              <a:t>The assembler always uses a 16-bit version if available</a:t>
+            </a:r>
+          </a:p>
+        </p:txBody>
+      </p:sp>
     </p:spTree>
     <p:extLst>
       <p:ext uri="{BB962C8B-B14F-4D97-AF65-F5344CB8AC3E}">
-        <p14:creationId xmlns:p14="http://schemas.microsoft.com/office/powerpoint/2010/main" val="2573631357"/>
+        <p14:creationId xmlns:p14="http://schemas.microsoft.com/office/powerpoint/2010/main" val="3846002784"/>
       </p:ext>
     </p:extLst>
   </p:cSld>

--- a/Week04_IntegerArithmetic/Ch05_Integer Arithmetic_V4.pptx
+++ b/Week04_IntegerArithmetic/Ch05_Integer Arithmetic_V4.pptx
@@ -38,19 +38,19 @@
     <p:sldId id="378" r:id="rId26"/>
     <p:sldId id="358" r:id="rId27"/>
     <p:sldId id="362" r:id="rId28"/>
-    <p:sldId id="363" r:id="rId29"/>
-    <p:sldId id="364" r:id="rId30"/>
-    <p:sldId id="365" r:id="rId31"/>
-    <p:sldId id="379" r:id="rId32"/>
-    <p:sldId id="380" r:id="rId33"/>
-    <p:sldId id="368" r:id="rId34"/>
-    <p:sldId id="369" r:id="rId35"/>
-    <p:sldId id="370" r:id="rId36"/>
-    <p:sldId id="371" r:id="rId37"/>
-    <p:sldId id="372" r:id="rId38"/>
-    <p:sldId id="373" r:id="rId39"/>
-    <p:sldId id="336" r:id="rId40"/>
-    <p:sldId id="509" r:id="rId41"/>
+    <p:sldId id="509" r:id="rId29"/>
+    <p:sldId id="363" r:id="rId30"/>
+    <p:sldId id="364" r:id="rId31"/>
+    <p:sldId id="365" r:id="rId32"/>
+    <p:sldId id="379" r:id="rId33"/>
+    <p:sldId id="380" r:id="rId34"/>
+    <p:sldId id="368" r:id="rId35"/>
+    <p:sldId id="369" r:id="rId36"/>
+    <p:sldId id="370" r:id="rId37"/>
+    <p:sldId id="371" r:id="rId38"/>
+    <p:sldId id="372" r:id="rId39"/>
+    <p:sldId id="373" r:id="rId40"/>
+    <p:sldId id="336" r:id="rId41"/>
   </p:sldIdLst>
   <p:sldSz cx="12192000" cy="6858000"/>
   <p:notesSz cx="7010400" cy="9296400"/>
@@ -30714,8 +30714,8 @@
           </a:p>
         </p:txBody>
       </p:sp>
-      <mc:AlternateContent xmlns:mc="http://schemas.openxmlformats.org/markup-compatibility/2006">
-        <mc:Choice xmlns:a14="http://schemas.microsoft.com/office/drawing/2010/main" Requires="a14">
+      <mc:AlternateContent xmlns:mc="http://schemas.openxmlformats.org/markup-compatibility/2006" xmlns:a14="http://schemas.microsoft.com/office/drawing/2010/main">
+        <mc:Choice Requires="a14">
           <p:graphicFrame>
             <p:nvGraphicFramePr>
               <p:cNvPr id="3" name="Table 2"/>
@@ -31927,7 +31927,7 @@
             </a:graphic>
           </p:graphicFrame>
         </mc:Choice>
-        <mc:Fallback>
+        <mc:Fallback xmlns="">
           <p:graphicFrame>
             <p:nvGraphicFramePr>
               <p:cNvPr id="3" name="Table 2"/>
@@ -32619,6 +32619,70 @@
   <p:cSld>
     <p:spTree>
       <p:nvGrpSpPr>
+        <p:cNvPr id="1" name="">
+          <a:extLst>
+            <a:ext uri="{FF2B5EF4-FFF2-40B4-BE49-F238E27FC236}">
+              <a16:creationId xmlns:a16="http://schemas.microsoft.com/office/drawing/2014/main" id="{84DA25F2-3AE0-BDCF-0880-EDD5EEF55E54}"/>
+            </a:ext>
+          </a:extLst>
+        </p:cNvPr>
+        <p:cNvGrpSpPr/>
+        <p:nvPr/>
+      </p:nvGrpSpPr>
+      <p:grpSpPr>
+        <a:xfrm>
+          <a:off x="0" y="0"/>
+          <a:ext cx="0" cy="0"/>
+          <a:chOff x="0" y="0"/>
+          <a:chExt cx="0" cy="0"/>
+        </a:xfrm>
+      </p:grpSpPr>
+      <p:sp>
+        <p:nvSpPr>
+          <p:cNvPr id="2" name="Title 1">
+            <a:extLst>
+              <a:ext uri="{FF2B5EF4-FFF2-40B4-BE49-F238E27FC236}">
+                <a16:creationId xmlns:a16="http://schemas.microsoft.com/office/drawing/2014/main" id="{6EAE57A2-3A61-C5F8-EEFD-EA2961784338}"/>
+              </a:ext>
+            </a:extLst>
+          </p:cNvPr>
+          <p:cNvSpPr>
+            <a:spLocks noGrp="1"/>
+          </p:cNvSpPr>
+          <p:nvPr>
+            <p:ph type="ctrTitle"/>
+          </p:nvPr>
+        </p:nvSpPr>
+        <p:spPr/>
+        <p:txBody>
+          <a:bodyPr/>
+          <a:lstStyle/>
+          <a:p>
+            <a:r>
+              <a:rPr lang="en-US" dirty="0"/>
+              <a:t>… to here …</a:t>
+            </a:r>
+          </a:p>
+        </p:txBody>
+      </p:sp>
+    </p:spTree>
+    <p:extLst>
+      <p:ext uri="{BB962C8B-B14F-4D97-AF65-F5344CB8AC3E}">
+        <p14:creationId xmlns:p14="http://schemas.microsoft.com/office/powerpoint/2010/main" val="2815624037"/>
+      </p:ext>
+    </p:extLst>
+  </p:cSld>
+  <p:clrMapOvr>
+    <a:masterClrMapping/>
+  </p:clrMapOvr>
+</p:sld>
+</file>
+
+<file path=ppt/slides/slide27.xml><?xml version="1.0" encoding="utf-8"?>
+<p:sld xmlns:a="http://schemas.openxmlformats.org/drawingml/2006/main" xmlns:r="http://schemas.openxmlformats.org/officeDocument/2006/relationships" xmlns:p="http://schemas.openxmlformats.org/presentationml/2006/main">
+  <p:cSld>
+    <p:spTree>
+      <p:nvGrpSpPr>
         <p:cNvPr id="1" name=""/>
         <p:cNvGrpSpPr/>
         <p:nvPr/>
@@ -32707,7 +32771,7 @@
 </p:sld>
 </file>
 
-<file path=ppt/slides/slide27.xml><?xml version="1.0" encoding="utf-8"?>
+<file path=ppt/slides/slide28.xml><?xml version="1.0" encoding="utf-8"?>
 <p:sld xmlns:a="http://schemas.openxmlformats.org/drawingml/2006/main" xmlns:r="http://schemas.openxmlformats.org/officeDocument/2006/relationships" xmlns:p="http://schemas.openxmlformats.org/presentationml/2006/main">
   <p:cSld>
     <p:spTree>
@@ -33241,7 +33305,7 @@
 </p:sld>
 </file>
 
-<file path=ppt/slides/slide28.xml><?xml version="1.0" encoding="utf-8"?>
+<file path=ppt/slides/slide29.xml><?xml version="1.0" encoding="utf-8"?>
 <p:sld xmlns:a="http://schemas.openxmlformats.org/drawingml/2006/main" xmlns:r="http://schemas.openxmlformats.org/officeDocument/2006/relationships" xmlns:p="http://schemas.openxmlformats.org/presentationml/2006/main">
   <p:cSld>
     <p:spTree>
@@ -35329,7 +35393,564 @@
 </p:sld>
 </file>
 
-<file path=ppt/slides/slide29.xml><?xml version="1.0" encoding="utf-8"?>
+<file path=ppt/slides/slide3.xml><?xml version="1.0" encoding="utf-8"?>
+<p:sld xmlns:a="http://schemas.openxmlformats.org/drawingml/2006/main" xmlns:r="http://schemas.openxmlformats.org/officeDocument/2006/relationships" xmlns:p="http://schemas.openxmlformats.org/presentationml/2006/main">
+  <p:cSld>
+    <p:spTree>
+      <p:nvGrpSpPr>
+        <p:cNvPr id="1" name=""/>
+        <p:cNvGrpSpPr/>
+        <p:nvPr/>
+      </p:nvGrpSpPr>
+      <p:grpSpPr>
+        <a:xfrm>
+          <a:off x="0" y="0"/>
+          <a:ext cx="0" cy="0"/>
+          <a:chOff x="0" y="0"/>
+          <a:chExt cx="0" cy="0"/>
+        </a:xfrm>
+      </p:grpSpPr>
+      <p:sp>
+        <p:nvSpPr>
+          <p:cNvPr id="2" name="Title 1"/>
+          <p:cNvSpPr>
+            <a:spLocks noGrp="1"/>
+          </p:cNvSpPr>
+          <p:nvPr>
+            <p:ph type="title"/>
+          </p:nvPr>
+        </p:nvSpPr>
+        <p:spPr>
+          <a:xfrm>
+            <a:off x="940527" y="726230"/>
+            <a:ext cx="7136673" cy="666899"/>
+          </a:xfrm>
+        </p:spPr>
+        <p:txBody>
+          <a:bodyPr/>
+          <a:lstStyle/>
+          <a:p>
+            <a:r>
+              <a:rPr lang="en-US" dirty="0"/>
+              <a:t>ADDITION AND SUBTRACTION</a:t>
+            </a:r>
+          </a:p>
+        </p:txBody>
+      </p:sp>
+      <p:sp>
+        <p:nvSpPr>
+          <p:cNvPr id="5" name="TextBox 4"/>
+          <p:cNvSpPr txBox="1"/>
+          <p:nvPr/>
+        </p:nvSpPr>
+        <p:spPr>
+          <a:xfrm>
+            <a:off x="5390583" y="2101586"/>
+            <a:ext cx="1283576" cy="2246769"/>
+          </a:xfrm>
+          <a:prstGeom prst="rect">
+            <a:avLst/>
+          </a:prstGeom>
+          <a:noFill/>
+        </p:spPr>
+        <p:txBody>
+          <a:bodyPr wrap="square" rtlCol="0">
+            <a:spAutoFit/>
+          </a:bodyPr>
+          <a:lstStyle/>
+          <a:p>
+            <a:pPr algn="ctr">
+              <a:tabLst>
+                <a:tab pos="3086100" algn="l"/>
+                <a:tab pos="5715000" algn="l"/>
+              </a:tabLst>
+            </a:pPr>
+            <a:r>
+              <a:rPr lang="en-US" sz="2800" i="1" dirty="0"/>
+              <a:t>Binary</a:t>
+            </a:r>
+          </a:p>
+          <a:p>
+            <a:pPr>
+              <a:tabLst>
+                <a:tab pos="3086100" algn="l"/>
+                <a:tab pos="5715000" algn="l"/>
+              </a:tabLst>
+            </a:pPr>
+            <a:endParaRPr lang="en-US" sz="2800" i="1" dirty="0"/>
+          </a:p>
+          <a:p>
+            <a:pPr>
+              <a:tabLst>
+                <a:tab pos="571500" algn="r"/>
+                <a:tab pos="3886200" algn="r"/>
+                <a:tab pos="6686550" algn="r"/>
+              </a:tabLst>
+            </a:pPr>
+            <a:r>
+              <a:rPr lang="en-US" sz="2800" dirty="0"/>
+              <a:t>  	0011</a:t>
+            </a:r>
+          </a:p>
+          <a:p>
+            <a:pPr>
+              <a:tabLst>
+                <a:tab pos="571500" algn="r"/>
+                <a:tab pos="3886200" algn="r"/>
+                <a:tab pos="6686550" algn="r"/>
+              </a:tabLst>
+            </a:pPr>
+            <a:r>
+              <a:rPr lang="en-US" sz="2800" dirty="0"/>
+              <a:t>+</a:t>
+            </a:r>
+            <a:r>
+              <a:rPr lang="en-US" sz="2800" u="sng" dirty="0"/>
+              <a:t>1010</a:t>
+            </a:r>
+          </a:p>
+          <a:p>
+            <a:pPr>
+              <a:tabLst>
+                <a:tab pos="857250" algn="r"/>
+                <a:tab pos="4000500" algn="r"/>
+                <a:tab pos="6858000" algn="r"/>
+              </a:tabLst>
+            </a:pPr>
+            <a:r>
+              <a:rPr lang="en-US" sz="2800" dirty="0"/>
+              <a:t>	  1101</a:t>
+            </a:r>
+            <a:r>
+              <a:rPr lang="en-US" sz="2800" baseline="-25000" dirty="0"/>
+              <a:t>2</a:t>
+            </a:r>
+            <a:endParaRPr lang="en-US" sz="2800" dirty="0"/>
+          </a:p>
+        </p:txBody>
+      </p:sp>
+      <p:grpSp>
+        <p:nvGrpSpPr>
+          <p:cNvPr id="12" name="Group 11"/>
+          <p:cNvGrpSpPr/>
+          <p:nvPr/>
+        </p:nvGrpSpPr>
+        <p:grpSpPr>
+          <a:xfrm>
+            <a:off x="4438569" y="5026231"/>
+            <a:ext cx="3794760" cy="1015663"/>
+            <a:chOff x="1620391" y="4175686"/>
+            <a:chExt cx="3794760" cy="1015663"/>
+          </a:xfrm>
+          <a:solidFill>
+            <a:schemeClr val="accent4">
+              <a:lumMod val="20000"/>
+              <a:lumOff val="80000"/>
+            </a:schemeClr>
+          </a:solidFill>
+        </p:grpSpPr>
+        <p:sp>
+          <p:nvSpPr>
+            <p:cNvPr id="10" name="TextBox 9"/>
+            <p:cNvSpPr txBox="1"/>
+            <p:nvPr/>
+          </p:nvSpPr>
+          <p:spPr>
+            <a:xfrm>
+              <a:off x="1620391" y="4175686"/>
+              <a:ext cx="3794760" cy="1015663"/>
+            </a:xfrm>
+            <a:prstGeom prst="rect">
+              <a:avLst/>
+            </a:prstGeom>
+            <a:grpFill/>
+            <a:ln/>
+          </p:spPr>
+          <p:style>
+            <a:lnRef idx="1">
+              <a:schemeClr val="accent2"/>
+            </a:lnRef>
+            <a:fillRef idx="2">
+              <a:schemeClr val="accent2"/>
+            </a:fillRef>
+            <a:effectRef idx="1">
+              <a:schemeClr val="accent2"/>
+            </a:effectRef>
+            <a:fontRef idx="minor">
+              <a:schemeClr val="dk1"/>
+            </a:fontRef>
+          </p:style>
+          <p:txBody>
+            <a:bodyPr wrap="square" tIns="91440" bIns="91440" rtlCol="0">
+              <a:spAutoFit/>
+            </a:bodyPr>
+            <a:lstStyle/>
+            <a:p>
+              <a:pPr marL="1027113" lvl="1"/>
+              <a:r>
+                <a:rPr lang="en-US" dirty="0"/>
+                <a:t>A single ADD (or SUB) instruction works for both </a:t>
+              </a:r>
+              <a:r>
+                <a:rPr lang="en-US" b="1" dirty="0">
+                  <a:solidFill>
+                    <a:srgbClr val="92D050"/>
+                  </a:solidFill>
+                </a:rPr>
+                <a:t>unsigned</a:t>
+              </a:r>
+              <a:r>
+                <a:rPr lang="en-US" dirty="0"/>
+                <a:t> and </a:t>
+              </a:r>
+              <a:r>
+                <a:rPr lang="en-US" b="1" dirty="0">
+                  <a:solidFill>
+                    <a:srgbClr val="FF0000"/>
+                  </a:solidFill>
+                </a:rPr>
+                <a:t>2’s comp</a:t>
+              </a:r>
+              <a:r>
+                <a:rPr lang="en-US" dirty="0"/>
+                <a:t>.</a:t>
+              </a:r>
+            </a:p>
+          </p:txBody>
+        </p:sp>
+        <p:pic>
+          <p:nvPicPr>
+            <p:cNvPr id="11" name="Picture 10" descr="http://www.aamu.edu/campuslife/living-on-campus/residentialLife/SiteAssets/pages/default/Warning_sign.png"/>
+            <p:cNvPicPr>
+              <a:picLocks noChangeAspect="1" noChangeArrowheads="1"/>
+            </p:cNvPicPr>
+            <p:nvPr/>
+          </p:nvPicPr>
+          <p:blipFill>
+            <a:blip r:embed="rId2" cstate="print">
+              <a:extLst>
+                <a:ext uri="{28A0092B-C50C-407E-A947-70E740481C1C}">
+                  <a14:useLocalDpi xmlns:a14="http://schemas.microsoft.com/office/drawing/2010/main" val="0"/>
+                </a:ext>
+              </a:extLst>
+            </a:blip>
+            <a:srcRect/>
+            <a:stretch>
+              <a:fillRect/>
+            </a:stretch>
+          </p:blipFill>
+          <p:spPr bwMode="auto">
+            <a:xfrm flipH="1">
+              <a:off x="1620391" y="4264417"/>
+              <a:ext cx="971826" cy="838200"/>
+            </a:xfrm>
+            <a:prstGeom prst="rect">
+              <a:avLst/>
+            </a:prstGeom>
+            <a:grpFill/>
+          </p:spPr>
+        </p:pic>
+      </p:grpSp>
+      <p:sp>
+        <p:nvSpPr>
+          <p:cNvPr id="22" name="TextBox 21"/>
+          <p:cNvSpPr txBox="1"/>
+          <p:nvPr/>
+        </p:nvSpPr>
+        <p:spPr>
+          <a:xfrm>
+            <a:off x="2057400" y="2101585"/>
+            <a:ext cx="1905000" cy="2246769"/>
+          </a:xfrm>
+          <a:prstGeom prst="rect">
+            <a:avLst/>
+          </a:prstGeom>
+          <a:noFill/>
+        </p:spPr>
+        <p:txBody>
+          <a:bodyPr wrap="square" rtlCol="0">
+            <a:spAutoFit/>
+          </a:bodyPr>
+          <a:lstStyle/>
+          <a:p>
+            <a:r>
+              <a:rPr lang="en-US" sz="2800" b="1" dirty="0">
+                <a:solidFill>
+                  <a:srgbClr val="92D050"/>
+                </a:solidFill>
+              </a:rPr>
+              <a:t>Unsigned</a:t>
+            </a:r>
+          </a:p>
+          <a:p>
+            <a:r>
+              <a:rPr lang="en-US" sz="2800" i="1" dirty="0"/>
+              <a:t> </a:t>
+            </a:r>
+          </a:p>
+          <a:p>
+            <a:r>
+              <a:rPr lang="en-US" sz="2800" dirty="0">
+                <a:latin typeface="Consolas" panose="020B0609020204030204" pitchFamily="49" charset="0"/>
+              </a:rPr>
+              <a:t>   3</a:t>
+            </a:r>
+          </a:p>
+          <a:p>
+            <a:r>
+              <a:rPr lang="en-US" sz="2800" dirty="0">
+                <a:latin typeface="Consolas" panose="020B0609020204030204" pitchFamily="49" charset="0"/>
+              </a:rPr>
+              <a:t> </a:t>
+            </a:r>
+            <a:r>
+              <a:rPr lang="en-US" sz="2800" u="sng" dirty="0">
+                <a:latin typeface="Consolas" panose="020B0609020204030204" pitchFamily="49" charset="0"/>
+              </a:rPr>
+              <a:t>+10</a:t>
+            </a:r>
+          </a:p>
+          <a:p>
+            <a:r>
+              <a:rPr lang="en-US" sz="2800" dirty="0">
+                <a:latin typeface="Consolas" panose="020B0609020204030204" pitchFamily="49" charset="0"/>
+              </a:rPr>
+              <a:t>  13</a:t>
+            </a:r>
+            <a:r>
+              <a:rPr lang="en-US" sz="2800" baseline="-25000" dirty="0">
+                <a:latin typeface="Consolas" panose="020B0609020204030204" pitchFamily="49" charset="0"/>
+              </a:rPr>
+              <a:t>10</a:t>
+            </a:r>
+          </a:p>
+        </p:txBody>
+      </p:sp>
+      <p:sp>
+        <p:nvSpPr>
+          <p:cNvPr id="23" name="TextBox 22"/>
+          <p:cNvSpPr txBox="1"/>
+          <p:nvPr/>
+        </p:nvSpPr>
+        <p:spPr>
+          <a:xfrm>
+            <a:off x="7821856" y="2108310"/>
+            <a:ext cx="3166986" cy="2246769"/>
+          </a:xfrm>
+          <a:prstGeom prst="rect">
+            <a:avLst/>
+          </a:prstGeom>
+          <a:noFill/>
+        </p:spPr>
+        <p:txBody>
+          <a:bodyPr wrap="square" rtlCol="0">
+            <a:spAutoFit/>
+          </a:bodyPr>
+          <a:lstStyle/>
+          <a:p>
+            <a:r>
+              <a:rPr lang="en-US" sz="2800" i="1" dirty="0"/>
+              <a:t>  </a:t>
+            </a:r>
+            <a:r>
+              <a:rPr lang="en-US" sz="2800" b="1" dirty="0">
+                <a:solidFill>
+                  <a:srgbClr val="FF0000"/>
+                </a:solidFill>
+              </a:rPr>
+              <a:t>2’s Complement </a:t>
+            </a:r>
+          </a:p>
+          <a:p>
+            <a:r>
+              <a:rPr lang="en-US" sz="2800" i="1" dirty="0"/>
+              <a:t> </a:t>
+            </a:r>
+          </a:p>
+          <a:p>
+            <a:r>
+              <a:rPr lang="en-US" sz="2800" dirty="0">
+                <a:latin typeface="Consolas" panose="020B0609020204030204" pitchFamily="49" charset="0"/>
+              </a:rPr>
+              <a:t>   (+3)</a:t>
+            </a:r>
+          </a:p>
+          <a:p>
+            <a:r>
+              <a:rPr lang="en-US" sz="2800" dirty="0">
+                <a:latin typeface="Consolas" panose="020B0609020204030204" pitchFamily="49" charset="0"/>
+              </a:rPr>
+              <a:t>  </a:t>
+            </a:r>
+            <a:r>
+              <a:rPr lang="en-US" sz="2800" u="sng" dirty="0">
+                <a:latin typeface="Consolas" panose="020B0609020204030204" pitchFamily="49" charset="0"/>
+              </a:rPr>
+              <a:t>+(-6)</a:t>
+            </a:r>
+          </a:p>
+          <a:p>
+            <a:r>
+              <a:rPr lang="en-US" sz="2800" dirty="0">
+                <a:latin typeface="Consolas" panose="020B0609020204030204" pitchFamily="49" charset="0"/>
+              </a:rPr>
+              <a:t>    -3</a:t>
+            </a:r>
+            <a:r>
+              <a:rPr lang="en-US" sz="2800" baseline="-25000" dirty="0">
+                <a:latin typeface="Consolas" panose="020B0609020204030204" pitchFamily="49" charset="0"/>
+              </a:rPr>
+              <a:t>10</a:t>
+            </a:r>
+          </a:p>
+        </p:txBody>
+      </p:sp>
+      <p:cxnSp>
+        <p:nvCxnSpPr>
+          <p:cNvPr id="34" name="Straight Arrow Connector 33"/>
+          <p:cNvCxnSpPr/>
+          <p:nvPr/>
+        </p:nvCxnSpPr>
+        <p:spPr>
+          <a:xfrm>
+            <a:off x="6915150" y="3503268"/>
+            <a:ext cx="906706" cy="0"/>
+          </a:xfrm>
+          <a:prstGeom prst="straightConnector1">
+            <a:avLst/>
+          </a:prstGeom>
+          <a:ln w="76200">
+            <a:solidFill>
+              <a:srgbClr val="FF0000"/>
+            </a:solidFill>
+            <a:tailEnd type="triangle"/>
+          </a:ln>
+        </p:spPr>
+        <p:style>
+          <a:lnRef idx="1">
+            <a:schemeClr val="accent1"/>
+          </a:lnRef>
+          <a:fillRef idx="0">
+            <a:schemeClr val="accent1"/>
+          </a:fillRef>
+          <a:effectRef idx="0">
+            <a:schemeClr val="accent1"/>
+          </a:effectRef>
+          <a:fontRef idx="minor">
+            <a:schemeClr val="tx1"/>
+          </a:fontRef>
+        </p:style>
+      </p:cxnSp>
+      <p:cxnSp>
+        <p:nvCxnSpPr>
+          <p:cNvPr id="35" name="Straight Arrow Connector 34"/>
+          <p:cNvCxnSpPr/>
+          <p:nvPr/>
+        </p:nvCxnSpPr>
+        <p:spPr>
+          <a:xfrm flipH="1" flipV="1">
+            <a:off x="3967547" y="3457930"/>
+            <a:ext cx="942045" cy="11332"/>
+          </a:xfrm>
+          <a:prstGeom prst="straightConnector1">
+            <a:avLst/>
+          </a:prstGeom>
+          <a:ln w="76200">
+            <a:solidFill>
+              <a:srgbClr val="FF0000"/>
+            </a:solidFill>
+            <a:tailEnd type="triangle"/>
+          </a:ln>
+        </p:spPr>
+        <p:style>
+          <a:lnRef idx="1">
+            <a:schemeClr val="accent1"/>
+          </a:lnRef>
+          <a:fillRef idx="0">
+            <a:schemeClr val="accent1"/>
+          </a:fillRef>
+          <a:effectRef idx="0">
+            <a:schemeClr val="accent1"/>
+          </a:effectRef>
+          <a:fontRef idx="minor">
+            <a:schemeClr val="tx1"/>
+          </a:fontRef>
+        </p:style>
+      </p:cxnSp>
+      <p:pic>
+        <p:nvPicPr>
+          <p:cNvPr id="13" name="Picture 12"/>
+          <p:cNvPicPr>
+            <a:picLocks noChangeAspect="1"/>
+          </p:cNvPicPr>
+          <p:nvPr/>
+        </p:nvPicPr>
+        <p:blipFill>
+          <a:blip r:embed="rId3" cstate="print">
+            <a:extLst>
+              <a:ext uri="{28A0092B-C50C-407E-A947-70E740481C1C}">
+                <a14:useLocalDpi xmlns:a14="http://schemas.microsoft.com/office/drawing/2010/main" val="0"/>
+              </a:ext>
+            </a:extLst>
+          </a:blip>
+          <a:stretch>
+            <a:fillRect/>
+          </a:stretch>
+        </p:blipFill>
+        <p:spPr>
+          <a:xfrm>
+            <a:off x="3413280" y="3765302"/>
+            <a:ext cx="533399" cy="523398"/>
+          </a:xfrm>
+          <a:prstGeom prst="rect">
+            <a:avLst/>
+          </a:prstGeom>
+        </p:spPr>
+      </p:pic>
+      <p:pic>
+        <p:nvPicPr>
+          <p:cNvPr id="14" name="Picture 13"/>
+          <p:cNvPicPr>
+            <a:picLocks noChangeAspect="1"/>
+          </p:cNvPicPr>
+          <p:nvPr/>
+        </p:nvPicPr>
+        <p:blipFill>
+          <a:blip r:embed="rId3" cstate="print">
+            <a:extLst>
+              <a:ext uri="{28A0092B-C50C-407E-A947-70E740481C1C}">
+                <a14:useLocalDpi xmlns:a14="http://schemas.microsoft.com/office/drawing/2010/main" val="0"/>
+              </a:ext>
+            </a:extLst>
+          </a:blip>
+          <a:stretch>
+            <a:fillRect/>
+          </a:stretch>
+        </p:blipFill>
+        <p:spPr>
+          <a:xfrm>
+            <a:off x="9533148" y="3766324"/>
+            <a:ext cx="533399" cy="523398"/>
+          </a:xfrm>
+          <a:prstGeom prst="rect">
+            <a:avLst/>
+          </a:prstGeom>
+        </p:spPr>
+      </p:pic>
+    </p:spTree>
+    <p:extLst>
+      <p:ext uri="{BB962C8B-B14F-4D97-AF65-F5344CB8AC3E}">
+        <p14:creationId xmlns:p14="http://schemas.microsoft.com/office/powerpoint/2010/main" val="1403904733"/>
+      </p:ext>
+    </p:extLst>
+  </p:cSld>
+  <p:clrMapOvr>
+    <a:masterClrMapping/>
+  </p:clrMapOvr>
+</p:sld>
+</file>
+
+<file path=ppt/slides/slide30.xml><?xml version="1.0" encoding="utf-8"?>
 <p:sld xmlns:a="http://schemas.openxmlformats.org/drawingml/2006/main" xmlns:r="http://schemas.openxmlformats.org/officeDocument/2006/relationships" xmlns:p="http://schemas.openxmlformats.org/presentationml/2006/main">
   <p:cSld>
     <p:spTree>
@@ -36261,564 +36882,7 @@
 </p:sld>
 </file>
 
-<file path=ppt/slides/slide3.xml><?xml version="1.0" encoding="utf-8"?>
-<p:sld xmlns:a="http://schemas.openxmlformats.org/drawingml/2006/main" xmlns:r="http://schemas.openxmlformats.org/officeDocument/2006/relationships" xmlns:p="http://schemas.openxmlformats.org/presentationml/2006/main">
-  <p:cSld>
-    <p:spTree>
-      <p:nvGrpSpPr>
-        <p:cNvPr id="1" name=""/>
-        <p:cNvGrpSpPr/>
-        <p:nvPr/>
-      </p:nvGrpSpPr>
-      <p:grpSpPr>
-        <a:xfrm>
-          <a:off x="0" y="0"/>
-          <a:ext cx="0" cy="0"/>
-          <a:chOff x="0" y="0"/>
-          <a:chExt cx="0" cy="0"/>
-        </a:xfrm>
-      </p:grpSpPr>
-      <p:sp>
-        <p:nvSpPr>
-          <p:cNvPr id="2" name="Title 1"/>
-          <p:cNvSpPr>
-            <a:spLocks noGrp="1"/>
-          </p:cNvSpPr>
-          <p:nvPr>
-            <p:ph type="title"/>
-          </p:nvPr>
-        </p:nvSpPr>
-        <p:spPr>
-          <a:xfrm>
-            <a:off x="940527" y="726230"/>
-            <a:ext cx="7136673" cy="666899"/>
-          </a:xfrm>
-        </p:spPr>
-        <p:txBody>
-          <a:bodyPr/>
-          <a:lstStyle/>
-          <a:p>
-            <a:r>
-              <a:rPr lang="en-US" dirty="0"/>
-              <a:t>ADDITION AND SUBTRACTION</a:t>
-            </a:r>
-          </a:p>
-        </p:txBody>
-      </p:sp>
-      <p:sp>
-        <p:nvSpPr>
-          <p:cNvPr id="5" name="TextBox 4"/>
-          <p:cNvSpPr txBox="1"/>
-          <p:nvPr/>
-        </p:nvSpPr>
-        <p:spPr>
-          <a:xfrm>
-            <a:off x="5390583" y="2101586"/>
-            <a:ext cx="1283576" cy="2246769"/>
-          </a:xfrm>
-          <a:prstGeom prst="rect">
-            <a:avLst/>
-          </a:prstGeom>
-          <a:noFill/>
-        </p:spPr>
-        <p:txBody>
-          <a:bodyPr wrap="square" rtlCol="0">
-            <a:spAutoFit/>
-          </a:bodyPr>
-          <a:lstStyle/>
-          <a:p>
-            <a:pPr algn="ctr">
-              <a:tabLst>
-                <a:tab pos="3086100" algn="l"/>
-                <a:tab pos="5715000" algn="l"/>
-              </a:tabLst>
-            </a:pPr>
-            <a:r>
-              <a:rPr lang="en-US" sz="2800" i="1" dirty="0"/>
-              <a:t>Binary</a:t>
-            </a:r>
-          </a:p>
-          <a:p>
-            <a:pPr>
-              <a:tabLst>
-                <a:tab pos="3086100" algn="l"/>
-                <a:tab pos="5715000" algn="l"/>
-              </a:tabLst>
-            </a:pPr>
-            <a:endParaRPr lang="en-US" sz="2800" i="1" dirty="0"/>
-          </a:p>
-          <a:p>
-            <a:pPr>
-              <a:tabLst>
-                <a:tab pos="571500" algn="r"/>
-                <a:tab pos="3886200" algn="r"/>
-                <a:tab pos="6686550" algn="r"/>
-              </a:tabLst>
-            </a:pPr>
-            <a:r>
-              <a:rPr lang="en-US" sz="2800" dirty="0"/>
-              <a:t>  	0011</a:t>
-            </a:r>
-          </a:p>
-          <a:p>
-            <a:pPr>
-              <a:tabLst>
-                <a:tab pos="571500" algn="r"/>
-                <a:tab pos="3886200" algn="r"/>
-                <a:tab pos="6686550" algn="r"/>
-              </a:tabLst>
-            </a:pPr>
-            <a:r>
-              <a:rPr lang="en-US" sz="2800" dirty="0"/>
-              <a:t>+</a:t>
-            </a:r>
-            <a:r>
-              <a:rPr lang="en-US" sz="2800" u="sng" dirty="0"/>
-              <a:t>1010</a:t>
-            </a:r>
-          </a:p>
-          <a:p>
-            <a:pPr>
-              <a:tabLst>
-                <a:tab pos="857250" algn="r"/>
-                <a:tab pos="4000500" algn="r"/>
-                <a:tab pos="6858000" algn="r"/>
-              </a:tabLst>
-            </a:pPr>
-            <a:r>
-              <a:rPr lang="en-US" sz="2800" dirty="0"/>
-              <a:t>	  1101</a:t>
-            </a:r>
-            <a:r>
-              <a:rPr lang="en-US" sz="2800" baseline="-25000" dirty="0"/>
-              <a:t>2</a:t>
-            </a:r>
-            <a:endParaRPr lang="en-US" sz="2800" dirty="0"/>
-          </a:p>
-        </p:txBody>
-      </p:sp>
-      <p:grpSp>
-        <p:nvGrpSpPr>
-          <p:cNvPr id="12" name="Group 11"/>
-          <p:cNvGrpSpPr/>
-          <p:nvPr/>
-        </p:nvGrpSpPr>
-        <p:grpSpPr>
-          <a:xfrm>
-            <a:off x="4438569" y="5026231"/>
-            <a:ext cx="3794760" cy="1015663"/>
-            <a:chOff x="1620391" y="4175686"/>
-            <a:chExt cx="3794760" cy="1015663"/>
-          </a:xfrm>
-          <a:solidFill>
-            <a:schemeClr val="accent4">
-              <a:lumMod val="20000"/>
-              <a:lumOff val="80000"/>
-            </a:schemeClr>
-          </a:solidFill>
-        </p:grpSpPr>
-        <p:sp>
-          <p:nvSpPr>
-            <p:cNvPr id="10" name="TextBox 9"/>
-            <p:cNvSpPr txBox="1"/>
-            <p:nvPr/>
-          </p:nvSpPr>
-          <p:spPr>
-            <a:xfrm>
-              <a:off x="1620391" y="4175686"/>
-              <a:ext cx="3794760" cy="1015663"/>
-            </a:xfrm>
-            <a:prstGeom prst="rect">
-              <a:avLst/>
-            </a:prstGeom>
-            <a:grpFill/>
-            <a:ln/>
-          </p:spPr>
-          <p:style>
-            <a:lnRef idx="1">
-              <a:schemeClr val="accent2"/>
-            </a:lnRef>
-            <a:fillRef idx="2">
-              <a:schemeClr val="accent2"/>
-            </a:fillRef>
-            <a:effectRef idx="1">
-              <a:schemeClr val="accent2"/>
-            </a:effectRef>
-            <a:fontRef idx="minor">
-              <a:schemeClr val="dk1"/>
-            </a:fontRef>
-          </p:style>
-          <p:txBody>
-            <a:bodyPr wrap="square" tIns="91440" bIns="91440" rtlCol="0">
-              <a:spAutoFit/>
-            </a:bodyPr>
-            <a:lstStyle/>
-            <a:p>
-              <a:pPr marL="1027113" lvl="1"/>
-              <a:r>
-                <a:rPr lang="en-US" dirty="0"/>
-                <a:t>A single ADD (or SUB) instruction works for both </a:t>
-              </a:r>
-              <a:r>
-                <a:rPr lang="en-US" b="1" dirty="0">
-                  <a:solidFill>
-                    <a:srgbClr val="92D050"/>
-                  </a:solidFill>
-                </a:rPr>
-                <a:t>unsigned</a:t>
-              </a:r>
-              <a:r>
-                <a:rPr lang="en-US" dirty="0"/>
-                <a:t> and </a:t>
-              </a:r>
-              <a:r>
-                <a:rPr lang="en-US" b="1" dirty="0">
-                  <a:solidFill>
-                    <a:srgbClr val="FF0000"/>
-                  </a:solidFill>
-                </a:rPr>
-                <a:t>2’s comp</a:t>
-              </a:r>
-              <a:r>
-                <a:rPr lang="en-US" dirty="0"/>
-                <a:t>.</a:t>
-              </a:r>
-            </a:p>
-          </p:txBody>
-        </p:sp>
-        <p:pic>
-          <p:nvPicPr>
-            <p:cNvPr id="11" name="Picture 10" descr="http://www.aamu.edu/campuslife/living-on-campus/residentialLife/SiteAssets/pages/default/Warning_sign.png"/>
-            <p:cNvPicPr>
-              <a:picLocks noChangeAspect="1" noChangeArrowheads="1"/>
-            </p:cNvPicPr>
-            <p:nvPr/>
-          </p:nvPicPr>
-          <p:blipFill>
-            <a:blip r:embed="rId2" cstate="print">
-              <a:extLst>
-                <a:ext uri="{28A0092B-C50C-407E-A947-70E740481C1C}">
-                  <a14:useLocalDpi xmlns:a14="http://schemas.microsoft.com/office/drawing/2010/main" val="0"/>
-                </a:ext>
-              </a:extLst>
-            </a:blip>
-            <a:srcRect/>
-            <a:stretch>
-              <a:fillRect/>
-            </a:stretch>
-          </p:blipFill>
-          <p:spPr bwMode="auto">
-            <a:xfrm flipH="1">
-              <a:off x="1620391" y="4264417"/>
-              <a:ext cx="971826" cy="838200"/>
-            </a:xfrm>
-            <a:prstGeom prst="rect">
-              <a:avLst/>
-            </a:prstGeom>
-            <a:grpFill/>
-          </p:spPr>
-        </p:pic>
-      </p:grpSp>
-      <p:sp>
-        <p:nvSpPr>
-          <p:cNvPr id="22" name="TextBox 21"/>
-          <p:cNvSpPr txBox="1"/>
-          <p:nvPr/>
-        </p:nvSpPr>
-        <p:spPr>
-          <a:xfrm>
-            <a:off x="2057400" y="2101585"/>
-            <a:ext cx="1905000" cy="2246769"/>
-          </a:xfrm>
-          <a:prstGeom prst="rect">
-            <a:avLst/>
-          </a:prstGeom>
-          <a:noFill/>
-        </p:spPr>
-        <p:txBody>
-          <a:bodyPr wrap="square" rtlCol="0">
-            <a:spAutoFit/>
-          </a:bodyPr>
-          <a:lstStyle/>
-          <a:p>
-            <a:r>
-              <a:rPr lang="en-US" sz="2800" b="1" dirty="0">
-                <a:solidFill>
-                  <a:srgbClr val="92D050"/>
-                </a:solidFill>
-              </a:rPr>
-              <a:t>Unsigned</a:t>
-            </a:r>
-          </a:p>
-          <a:p>
-            <a:r>
-              <a:rPr lang="en-US" sz="2800" i="1" dirty="0"/>
-              <a:t> </a:t>
-            </a:r>
-          </a:p>
-          <a:p>
-            <a:r>
-              <a:rPr lang="en-US" sz="2800" dirty="0">
-                <a:latin typeface="Consolas" panose="020B0609020204030204" pitchFamily="49" charset="0"/>
-              </a:rPr>
-              <a:t>   3</a:t>
-            </a:r>
-          </a:p>
-          <a:p>
-            <a:r>
-              <a:rPr lang="en-US" sz="2800" dirty="0">
-                <a:latin typeface="Consolas" panose="020B0609020204030204" pitchFamily="49" charset="0"/>
-              </a:rPr>
-              <a:t> </a:t>
-            </a:r>
-            <a:r>
-              <a:rPr lang="en-US" sz="2800" u="sng" dirty="0">
-                <a:latin typeface="Consolas" panose="020B0609020204030204" pitchFamily="49" charset="0"/>
-              </a:rPr>
-              <a:t>+10</a:t>
-            </a:r>
-          </a:p>
-          <a:p>
-            <a:r>
-              <a:rPr lang="en-US" sz="2800" dirty="0">
-                <a:latin typeface="Consolas" panose="020B0609020204030204" pitchFamily="49" charset="0"/>
-              </a:rPr>
-              <a:t>  13</a:t>
-            </a:r>
-            <a:r>
-              <a:rPr lang="en-US" sz="2800" baseline="-25000" dirty="0">
-                <a:latin typeface="Consolas" panose="020B0609020204030204" pitchFamily="49" charset="0"/>
-              </a:rPr>
-              <a:t>10</a:t>
-            </a:r>
-          </a:p>
-        </p:txBody>
-      </p:sp>
-      <p:sp>
-        <p:nvSpPr>
-          <p:cNvPr id="23" name="TextBox 22"/>
-          <p:cNvSpPr txBox="1"/>
-          <p:nvPr/>
-        </p:nvSpPr>
-        <p:spPr>
-          <a:xfrm>
-            <a:off x="7821856" y="2108310"/>
-            <a:ext cx="3166986" cy="2246769"/>
-          </a:xfrm>
-          <a:prstGeom prst="rect">
-            <a:avLst/>
-          </a:prstGeom>
-          <a:noFill/>
-        </p:spPr>
-        <p:txBody>
-          <a:bodyPr wrap="square" rtlCol="0">
-            <a:spAutoFit/>
-          </a:bodyPr>
-          <a:lstStyle/>
-          <a:p>
-            <a:r>
-              <a:rPr lang="en-US" sz="2800" i="1" dirty="0"/>
-              <a:t>  </a:t>
-            </a:r>
-            <a:r>
-              <a:rPr lang="en-US" sz="2800" b="1" dirty="0">
-                <a:solidFill>
-                  <a:srgbClr val="FF0000"/>
-                </a:solidFill>
-              </a:rPr>
-              <a:t>2’s Complement </a:t>
-            </a:r>
-          </a:p>
-          <a:p>
-            <a:r>
-              <a:rPr lang="en-US" sz="2800" i="1" dirty="0"/>
-              <a:t> </a:t>
-            </a:r>
-          </a:p>
-          <a:p>
-            <a:r>
-              <a:rPr lang="en-US" sz="2800" dirty="0">
-                <a:latin typeface="Consolas" panose="020B0609020204030204" pitchFamily="49" charset="0"/>
-              </a:rPr>
-              <a:t>   (+3)</a:t>
-            </a:r>
-          </a:p>
-          <a:p>
-            <a:r>
-              <a:rPr lang="en-US" sz="2800" dirty="0">
-                <a:latin typeface="Consolas" panose="020B0609020204030204" pitchFamily="49" charset="0"/>
-              </a:rPr>
-              <a:t>  </a:t>
-            </a:r>
-            <a:r>
-              <a:rPr lang="en-US" sz="2800" u="sng" dirty="0">
-                <a:latin typeface="Consolas" panose="020B0609020204030204" pitchFamily="49" charset="0"/>
-              </a:rPr>
-              <a:t>+(-6)</a:t>
-            </a:r>
-          </a:p>
-          <a:p>
-            <a:r>
-              <a:rPr lang="en-US" sz="2800" dirty="0">
-                <a:latin typeface="Consolas" panose="020B0609020204030204" pitchFamily="49" charset="0"/>
-              </a:rPr>
-              <a:t>    -3</a:t>
-            </a:r>
-            <a:r>
-              <a:rPr lang="en-US" sz="2800" baseline="-25000" dirty="0">
-                <a:latin typeface="Consolas" panose="020B0609020204030204" pitchFamily="49" charset="0"/>
-              </a:rPr>
-              <a:t>10</a:t>
-            </a:r>
-          </a:p>
-        </p:txBody>
-      </p:sp>
-      <p:cxnSp>
-        <p:nvCxnSpPr>
-          <p:cNvPr id="34" name="Straight Arrow Connector 33"/>
-          <p:cNvCxnSpPr/>
-          <p:nvPr/>
-        </p:nvCxnSpPr>
-        <p:spPr>
-          <a:xfrm>
-            <a:off x="6915150" y="3503268"/>
-            <a:ext cx="906706" cy="0"/>
-          </a:xfrm>
-          <a:prstGeom prst="straightConnector1">
-            <a:avLst/>
-          </a:prstGeom>
-          <a:ln w="76200">
-            <a:solidFill>
-              <a:srgbClr val="FF0000"/>
-            </a:solidFill>
-            <a:tailEnd type="triangle"/>
-          </a:ln>
-        </p:spPr>
-        <p:style>
-          <a:lnRef idx="1">
-            <a:schemeClr val="accent1"/>
-          </a:lnRef>
-          <a:fillRef idx="0">
-            <a:schemeClr val="accent1"/>
-          </a:fillRef>
-          <a:effectRef idx="0">
-            <a:schemeClr val="accent1"/>
-          </a:effectRef>
-          <a:fontRef idx="minor">
-            <a:schemeClr val="tx1"/>
-          </a:fontRef>
-        </p:style>
-      </p:cxnSp>
-      <p:cxnSp>
-        <p:nvCxnSpPr>
-          <p:cNvPr id="35" name="Straight Arrow Connector 34"/>
-          <p:cNvCxnSpPr/>
-          <p:nvPr/>
-        </p:nvCxnSpPr>
-        <p:spPr>
-          <a:xfrm flipH="1" flipV="1">
-            <a:off x="3967547" y="3457930"/>
-            <a:ext cx="942045" cy="11332"/>
-          </a:xfrm>
-          <a:prstGeom prst="straightConnector1">
-            <a:avLst/>
-          </a:prstGeom>
-          <a:ln w="76200">
-            <a:solidFill>
-              <a:srgbClr val="FF0000"/>
-            </a:solidFill>
-            <a:tailEnd type="triangle"/>
-          </a:ln>
-        </p:spPr>
-        <p:style>
-          <a:lnRef idx="1">
-            <a:schemeClr val="accent1"/>
-          </a:lnRef>
-          <a:fillRef idx="0">
-            <a:schemeClr val="accent1"/>
-          </a:fillRef>
-          <a:effectRef idx="0">
-            <a:schemeClr val="accent1"/>
-          </a:effectRef>
-          <a:fontRef idx="minor">
-            <a:schemeClr val="tx1"/>
-          </a:fontRef>
-        </p:style>
-      </p:cxnSp>
-      <p:pic>
-        <p:nvPicPr>
-          <p:cNvPr id="13" name="Picture 12"/>
-          <p:cNvPicPr>
-            <a:picLocks noChangeAspect="1"/>
-          </p:cNvPicPr>
-          <p:nvPr/>
-        </p:nvPicPr>
-        <p:blipFill>
-          <a:blip r:embed="rId3" cstate="print">
-            <a:extLst>
-              <a:ext uri="{28A0092B-C50C-407E-A947-70E740481C1C}">
-                <a14:useLocalDpi xmlns:a14="http://schemas.microsoft.com/office/drawing/2010/main" val="0"/>
-              </a:ext>
-            </a:extLst>
-          </a:blip>
-          <a:stretch>
-            <a:fillRect/>
-          </a:stretch>
-        </p:blipFill>
-        <p:spPr>
-          <a:xfrm>
-            <a:off x="3413280" y="3765302"/>
-            <a:ext cx="533399" cy="523398"/>
-          </a:xfrm>
-          <a:prstGeom prst="rect">
-            <a:avLst/>
-          </a:prstGeom>
-        </p:spPr>
-      </p:pic>
-      <p:pic>
-        <p:nvPicPr>
-          <p:cNvPr id="14" name="Picture 13"/>
-          <p:cNvPicPr>
-            <a:picLocks noChangeAspect="1"/>
-          </p:cNvPicPr>
-          <p:nvPr/>
-        </p:nvPicPr>
-        <p:blipFill>
-          <a:blip r:embed="rId3" cstate="print">
-            <a:extLst>
-              <a:ext uri="{28A0092B-C50C-407E-A947-70E740481C1C}">
-                <a14:useLocalDpi xmlns:a14="http://schemas.microsoft.com/office/drawing/2010/main" val="0"/>
-              </a:ext>
-            </a:extLst>
-          </a:blip>
-          <a:stretch>
-            <a:fillRect/>
-          </a:stretch>
-        </p:blipFill>
-        <p:spPr>
-          <a:xfrm>
-            <a:off x="9533148" y="3766324"/>
-            <a:ext cx="533399" cy="523398"/>
-          </a:xfrm>
-          <a:prstGeom prst="rect">
-            <a:avLst/>
-          </a:prstGeom>
-        </p:spPr>
-      </p:pic>
-    </p:spTree>
-    <p:extLst>
-      <p:ext uri="{BB962C8B-B14F-4D97-AF65-F5344CB8AC3E}">
-        <p14:creationId xmlns:p14="http://schemas.microsoft.com/office/powerpoint/2010/main" val="1403904733"/>
-      </p:ext>
-    </p:extLst>
-  </p:cSld>
-  <p:clrMapOvr>
-    <a:masterClrMapping/>
-  </p:clrMapOvr>
-</p:sld>
-</file>
-
-<file path=ppt/slides/slide30.xml><?xml version="1.0" encoding="utf-8"?>
+<file path=ppt/slides/slide31.xml><?xml version="1.0" encoding="utf-8"?>
 <p:sld xmlns:a="http://schemas.openxmlformats.org/drawingml/2006/main" xmlns:r="http://schemas.openxmlformats.org/officeDocument/2006/relationships" xmlns:p="http://schemas.openxmlformats.org/presentationml/2006/main">
   <p:cSld>
     <p:spTree>
@@ -41861,7 +41925,7 @@
 </p:sld>
 </file>
 
-<file path=ppt/slides/slide31.xml><?xml version="1.0" encoding="utf-8"?>
+<file path=ppt/slides/slide32.xml><?xml version="1.0" encoding="utf-8"?>
 <p:sld xmlns:a="http://schemas.openxmlformats.org/drawingml/2006/main" xmlns:r="http://schemas.openxmlformats.org/officeDocument/2006/relationships" xmlns:p="http://schemas.openxmlformats.org/presentationml/2006/main">
   <p:cSld>
     <p:spTree>
@@ -41938,444 +42002,6 @@
     <p:extLst>
       <p:ext uri="{BB962C8B-B14F-4D97-AF65-F5344CB8AC3E}">
         <p14:creationId xmlns:p14="http://schemas.microsoft.com/office/powerpoint/2010/main" val="338773540"/>
-      </p:ext>
-    </p:extLst>
-  </p:cSld>
-  <p:clrMapOvr>
-    <a:masterClrMapping/>
-  </p:clrMapOvr>
-</p:sld>
-</file>
-
-<file path=ppt/slides/slide32.xml><?xml version="1.0" encoding="utf-8"?>
-<p:sld xmlns:a="http://schemas.openxmlformats.org/drawingml/2006/main" xmlns:r="http://schemas.openxmlformats.org/officeDocument/2006/relationships" xmlns:p="http://schemas.openxmlformats.org/presentationml/2006/main">
-  <p:cSld>
-    <p:spTree>
-      <p:nvGrpSpPr>
-        <p:cNvPr id="1" name=""/>
-        <p:cNvGrpSpPr/>
-        <p:nvPr/>
-      </p:nvGrpSpPr>
-      <p:grpSpPr>
-        <a:xfrm>
-          <a:off x="0" y="0"/>
-          <a:ext cx="0" cy="0"/>
-          <a:chOff x="0" y="0"/>
-          <a:chExt cx="0" cy="0"/>
-        </a:xfrm>
-      </p:grpSpPr>
-      <p:sp>
-        <p:nvSpPr>
-          <p:cNvPr id="2" name="Title 1"/>
-          <p:cNvSpPr>
-            <a:spLocks noGrp="1"/>
-          </p:cNvSpPr>
-          <p:nvPr>
-            <p:ph type="title"/>
-          </p:nvPr>
-        </p:nvSpPr>
-        <p:spPr>
-          <a:xfrm>
-            <a:off x="936516" y="749193"/>
-            <a:ext cx="4112737" cy="654492"/>
-          </a:xfrm>
-        </p:spPr>
-        <p:txBody>
-          <a:bodyPr/>
-          <a:lstStyle/>
-          <a:p>
-            <a:r>
-              <a:rPr lang="en-US" dirty="0"/>
-              <a:t>Integer Addition</a:t>
-            </a:r>
-          </a:p>
-        </p:txBody>
-      </p:sp>
-      <p:sp>
-        <p:nvSpPr>
-          <p:cNvPr id="5" name="Content Placeholder 4"/>
-          <p:cNvSpPr>
-            <a:spLocks noGrp="1"/>
-          </p:cNvSpPr>
-          <p:nvPr>
-            <p:ph idx="1"/>
-          </p:nvPr>
-        </p:nvSpPr>
-        <p:spPr>
-          <a:xfrm>
-            <a:off x="936516" y="1643270"/>
-            <a:ext cx="10433326" cy="4974098"/>
-          </a:xfrm>
-        </p:spPr>
-        <p:txBody>
-          <a:bodyPr>
-            <a:normAutofit/>
-          </a:bodyPr>
-          <a:lstStyle/>
-          <a:p>
-            <a:r>
-              <a:rPr lang="en-US" dirty="0">
-                <a:solidFill>
-                  <a:schemeClr val="tx1"/>
-                </a:solidFill>
-              </a:rPr>
-              <a:t>Instructions: </a:t>
-            </a:r>
-            <a:r>
-              <a:rPr lang="en-US" dirty="0">
-                <a:solidFill>
-                  <a:srgbClr val="0070C0"/>
-                </a:solidFill>
-              </a:rPr>
-              <a:t>ADD{</a:t>
-            </a:r>
-            <a:r>
-              <a:rPr lang="en-US" b="1" dirty="0">
-                <a:solidFill>
-                  <a:srgbClr val="FF0000"/>
-                </a:solidFill>
-              </a:rPr>
-              <a:t>S</a:t>
-            </a:r>
-            <a:r>
-              <a:rPr lang="en-US" dirty="0">
-                <a:solidFill>
-                  <a:srgbClr val="0070C0"/>
-                </a:solidFill>
-              </a:rPr>
-              <a:t>}</a:t>
-            </a:r>
-            <a:r>
-              <a:rPr lang="en-US" dirty="0">
-                <a:solidFill>
-                  <a:schemeClr val="tx1"/>
-                </a:solidFill>
-              </a:rPr>
-              <a:t>,</a:t>
-            </a:r>
-            <a:r>
-              <a:rPr lang="en-US" dirty="0">
-                <a:solidFill>
-                  <a:srgbClr val="0070C0"/>
-                </a:solidFill>
-              </a:rPr>
-              <a:t> ADC{</a:t>
-            </a:r>
-            <a:r>
-              <a:rPr lang="en-US" b="1" dirty="0">
-                <a:solidFill>
-                  <a:srgbClr val="FF0000"/>
-                </a:solidFill>
-              </a:rPr>
-              <a:t>S</a:t>
-            </a:r>
-            <a:r>
-              <a:rPr lang="en-US" dirty="0">
-                <a:solidFill>
-                  <a:srgbClr val="0070C0"/>
-                </a:solidFill>
-              </a:rPr>
-              <a:t>}</a:t>
-            </a:r>
-          </a:p>
-          <a:p>
-            <a:r>
-              <a:rPr lang="en-US" dirty="0">
-                <a:solidFill>
-                  <a:schemeClr val="tx1"/>
-                </a:solidFill>
-              </a:rPr>
-              <a:t>Format Examples:</a:t>
-            </a:r>
-          </a:p>
-          <a:p>
-            <a:pPr lvl="1"/>
-            <a:r>
-              <a:rPr lang="en-US" dirty="0">
-                <a:solidFill>
-                  <a:schemeClr val="tx1"/>
-                </a:solidFill>
-              </a:rPr>
-              <a:t>ADD	R0,R1,</a:t>
-            </a:r>
-            <a:r>
-              <a:rPr lang="en-US" b="1" dirty="0">
-                <a:solidFill>
-                  <a:srgbClr val="0000FF"/>
-                </a:solidFill>
-              </a:rPr>
-              <a:t>#5</a:t>
-            </a:r>
-            <a:r>
-              <a:rPr lang="en-US" dirty="0">
-                <a:solidFill>
-                  <a:schemeClr val="tx1"/>
-                </a:solidFill>
-              </a:rPr>
-              <a:t>			// R0 </a:t>
-            </a:r>
-            <a:r>
-              <a:rPr lang="en-US" dirty="0">
-                <a:solidFill>
-                  <a:schemeClr val="tx1"/>
-                </a:solidFill>
-                <a:sym typeface="Wingdings" panose="05000000000000000000" pitchFamily="2" charset="2"/>
-              </a:rPr>
-              <a:t>= R1 + 5</a:t>
-            </a:r>
-            <a:endParaRPr lang="en-US" dirty="0">
-              <a:solidFill>
-                <a:schemeClr val="tx1"/>
-              </a:solidFill>
-            </a:endParaRPr>
-          </a:p>
-          <a:p>
-            <a:pPr lvl="1"/>
-            <a:r>
-              <a:rPr lang="en-US" dirty="0">
-                <a:solidFill>
-                  <a:schemeClr val="tx1"/>
-                </a:solidFill>
-              </a:rPr>
-              <a:t>ADD	R0,R1,R2		// R0 </a:t>
-            </a:r>
-            <a:r>
-              <a:rPr lang="en-US" dirty="0">
-                <a:solidFill>
-                  <a:schemeClr val="tx1"/>
-                </a:solidFill>
-                <a:sym typeface="Wingdings" panose="05000000000000000000" pitchFamily="2" charset="2"/>
-              </a:rPr>
-              <a:t>= R1 + R2</a:t>
-            </a:r>
-            <a:endParaRPr lang="en-US" dirty="0">
-              <a:solidFill>
-                <a:schemeClr val="tx1"/>
-              </a:solidFill>
-            </a:endParaRPr>
-          </a:p>
-          <a:p>
-            <a:pPr lvl="1"/>
-            <a:r>
-              <a:rPr lang="en-US" dirty="0">
-                <a:solidFill>
-                  <a:schemeClr val="tx1"/>
-                </a:solidFill>
-              </a:rPr>
-              <a:t>ADD	R0,R1,</a:t>
-            </a:r>
-            <a:r>
-              <a:rPr lang="en-US" b="1" dirty="0">
-                <a:solidFill>
-                  <a:srgbClr val="0000FF"/>
-                </a:solidFill>
-              </a:rPr>
-              <a:t>R2,LSL #2</a:t>
-            </a:r>
-            <a:r>
-              <a:rPr lang="en-US" dirty="0">
-                <a:solidFill>
-                  <a:schemeClr val="tx1"/>
-                </a:solidFill>
-              </a:rPr>
-              <a:t>		// R0 </a:t>
-            </a:r>
-            <a:r>
-              <a:rPr lang="en-US" dirty="0">
-                <a:solidFill>
-                  <a:schemeClr val="tx1"/>
-                </a:solidFill>
-                <a:sym typeface="Wingdings" panose="05000000000000000000" pitchFamily="2" charset="2"/>
-              </a:rPr>
-              <a:t>= R1 + </a:t>
-            </a:r>
-            <a:r>
-              <a:rPr lang="en-US" b="1" dirty="0">
-                <a:solidFill>
-                  <a:srgbClr val="0000FF"/>
-                </a:solidFill>
-                <a:sym typeface="Wingdings" panose="05000000000000000000" pitchFamily="2" charset="2"/>
-              </a:rPr>
-              <a:t>(R2 &lt;&lt; 2)</a:t>
-            </a:r>
-            <a:endParaRPr lang="en-US" b="1" dirty="0">
-              <a:solidFill>
-                <a:srgbClr val="0000FF"/>
-              </a:solidFill>
-            </a:endParaRPr>
-          </a:p>
-          <a:p>
-            <a:r>
-              <a:rPr lang="en-US" dirty="0">
-                <a:solidFill>
-                  <a:schemeClr val="tx1"/>
-                </a:solidFill>
-              </a:rPr>
-              <a:t>Flags: </a:t>
-            </a:r>
-            <a:r>
-              <a:rPr lang="en-US" dirty="0">
-                <a:solidFill>
-                  <a:srgbClr val="0070C0"/>
-                </a:solidFill>
-              </a:rPr>
-              <a:t>Append “S” to capture result characteristics in NCVZ</a:t>
-            </a:r>
-          </a:p>
-          <a:p>
-            <a:endParaRPr lang="en-US" dirty="0"/>
-          </a:p>
-          <a:p>
-            <a:r>
-              <a:rPr lang="en-US" dirty="0">
-                <a:solidFill>
-                  <a:schemeClr val="tx1"/>
-                </a:solidFill>
-              </a:rPr>
-              <a:t>Overflow:</a:t>
-            </a:r>
-          </a:p>
-          <a:p>
-            <a:pPr lvl="1"/>
-            <a:r>
-              <a:rPr lang="en-US" b="1" dirty="0">
-                <a:solidFill>
-                  <a:srgbClr val="92D050"/>
-                </a:solidFill>
-              </a:rPr>
-              <a:t>Unsigned</a:t>
-            </a:r>
-            <a:r>
-              <a:rPr lang="en-US" dirty="0">
-                <a:solidFill>
-                  <a:srgbClr val="0070C0"/>
-                </a:solidFill>
-              </a:rPr>
-              <a:t>: Carry Flag (C) = 1</a:t>
-            </a:r>
-          </a:p>
-          <a:p>
-            <a:pPr lvl="1"/>
-            <a:r>
-              <a:rPr lang="en-US" dirty="0">
-                <a:solidFill>
-                  <a:srgbClr val="0070C0"/>
-                </a:solidFill>
-              </a:rPr>
-              <a:t>     </a:t>
-            </a:r>
-            <a:r>
-              <a:rPr lang="en-US" b="1" dirty="0">
-                <a:solidFill>
-                  <a:srgbClr val="FF0000"/>
-                </a:solidFill>
-              </a:rPr>
-              <a:t>Signed</a:t>
-            </a:r>
-            <a:r>
-              <a:rPr lang="en-US" dirty="0">
-                <a:solidFill>
-                  <a:srgbClr val="0070C0"/>
-                </a:solidFill>
-              </a:rPr>
-              <a:t>: Overflow Flag (V) = 1 (Set when C</a:t>
-            </a:r>
-            <a:r>
-              <a:rPr lang="en-US" baseline="-25000" dirty="0">
-                <a:solidFill>
-                  <a:srgbClr val="0070C0"/>
-                </a:solidFill>
-              </a:rPr>
-              <a:t>N</a:t>
-            </a:r>
-            <a:r>
-              <a:rPr lang="en-US" dirty="0">
-                <a:solidFill>
-                  <a:srgbClr val="0070C0"/>
-                </a:solidFill>
-              </a:rPr>
-              <a:t>≠C</a:t>
-            </a:r>
-            <a:r>
-              <a:rPr lang="en-US" baseline="-25000" dirty="0">
-                <a:solidFill>
-                  <a:srgbClr val="0070C0"/>
-                </a:solidFill>
-              </a:rPr>
-              <a:t>N-1</a:t>
-            </a:r>
-            <a:r>
-              <a:rPr lang="en-US" dirty="0">
-                <a:solidFill>
-                  <a:srgbClr val="0070C0"/>
-                </a:solidFill>
-              </a:rPr>
-              <a:t>)</a:t>
-            </a:r>
-          </a:p>
-          <a:p>
-            <a:endParaRPr lang="en-US" dirty="0"/>
-          </a:p>
-          <a:p>
-            <a:r>
-              <a:rPr lang="en-US" dirty="0">
-                <a:solidFill>
-                  <a:schemeClr val="tx1"/>
-                </a:solidFill>
-              </a:rPr>
-              <a:t>Multiple precision addition: </a:t>
-            </a:r>
-            <a:r>
-              <a:rPr lang="en-US" dirty="0">
-                <a:solidFill>
-                  <a:srgbClr val="0070C0"/>
-                </a:solidFill>
-              </a:rPr>
-              <a:t>ADD</a:t>
-            </a:r>
-            <a:r>
-              <a:rPr lang="en-US" b="1" dirty="0">
-                <a:solidFill>
-                  <a:srgbClr val="FF0000"/>
-                </a:solidFill>
-              </a:rPr>
-              <a:t>S</a:t>
-            </a:r>
-            <a:r>
-              <a:rPr lang="en-US" dirty="0">
-                <a:solidFill>
-                  <a:srgbClr val="0070C0"/>
-                </a:solidFill>
-              </a:rPr>
-              <a:t> </a:t>
-            </a:r>
-            <a:r>
-              <a:rPr lang="en-US" dirty="0">
-                <a:solidFill>
-                  <a:srgbClr val="0070C0"/>
-                </a:solidFill>
-                <a:sym typeface="Wingdings" panose="05000000000000000000" pitchFamily="2" charset="2"/>
-              </a:rPr>
-              <a:t> ADC</a:t>
-            </a:r>
-            <a:endParaRPr lang="en-US" dirty="0">
-              <a:solidFill>
-                <a:srgbClr val="0070C0"/>
-              </a:solidFill>
-            </a:endParaRPr>
-          </a:p>
-          <a:p>
-            <a:endParaRPr lang="en-US" dirty="0"/>
-          </a:p>
-          <a:p>
-            <a:endParaRPr lang="en-US" dirty="0"/>
-          </a:p>
-        </p:txBody>
-      </p:sp>
-    </p:spTree>
-    <p:extLst>
-      <p:ext uri="{BB962C8B-B14F-4D97-AF65-F5344CB8AC3E}">
-        <p14:creationId xmlns:p14="http://schemas.microsoft.com/office/powerpoint/2010/main" val="385189333"/>
       </p:ext>
     </p:extLst>
   </p:cSld>
@@ -42414,8 +42040,8 @@
         </p:nvSpPr>
         <p:spPr>
           <a:xfrm>
-            <a:off x="936516" y="749192"/>
-            <a:ext cx="4606031" cy="662513"/>
+            <a:off x="936516" y="749193"/>
+            <a:ext cx="4112737" cy="654492"/>
           </a:xfrm>
         </p:spPr>
         <p:txBody>
@@ -42424,467 +42050,396 @@
           <a:p>
             <a:r>
               <a:rPr lang="en-US" dirty="0"/>
-              <a:t>Integer Subtraction</a:t>
+              <a:t>Integer Addition</a:t>
             </a:r>
           </a:p>
         </p:txBody>
       </p:sp>
       <p:sp>
         <p:nvSpPr>
-          <p:cNvPr id="6" name="Content Placeholder 4"/>
-          <p:cNvSpPr txBox="1">
-            <a:spLocks/>
+          <p:cNvPr id="5" name="Content Placeholder 4"/>
+          <p:cNvSpPr>
+            <a:spLocks noGrp="1"/>
           </p:cNvSpPr>
-          <p:nvPr/>
+          <p:nvPr>
+            <p:ph idx="1"/>
+          </p:nvPr>
         </p:nvSpPr>
         <p:spPr>
           <a:xfrm>
-            <a:off x="936515" y="1708172"/>
-            <a:ext cx="10425305" cy="4953311"/>
+            <a:off x="936516" y="1643270"/>
+            <a:ext cx="10433326" cy="4974098"/>
           </a:xfrm>
-          <a:prstGeom prst="rect">
-            <a:avLst/>
-          </a:prstGeom>
         </p:spPr>
         <p:txBody>
-          <a:bodyPr vert="horz" lIns="68580" tIns="34290" rIns="68580" bIns="34290" rtlCol="0">
+          <a:bodyPr>
             <a:normAutofit/>
           </a:bodyPr>
-          <a:lstStyle>
-            <a:lvl1pPr marL="228600" indent="-228600" algn="l" defTabSz="914400" rtl="0" eaLnBrk="1" latinLnBrk="0" hangingPunct="1">
-              <a:lnSpc>
-                <a:spcPct val="90000"/>
-              </a:lnSpc>
-              <a:spcBef>
-                <a:spcPts val="1000"/>
-              </a:spcBef>
-              <a:buFont typeface="Arial" panose="020B0604020202020204" pitchFamily="34" charset="0"/>
-              <a:buChar char="•"/>
-              <a:defRPr sz="2800" kern="1200">
+          <a:lstStyle/>
+          <a:p>
+            <a:r>
+              <a:rPr lang="en-US" dirty="0">
                 <a:solidFill>
                   <a:schemeClr val="tx1"/>
                 </a:solidFill>
-                <a:latin typeface="+mn-lt"/>
-                <a:ea typeface="+mn-ea"/>
-                <a:cs typeface="+mn-cs"/>
-              </a:defRPr>
-            </a:lvl1pPr>
-            <a:lvl2pPr marL="685800" indent="-228600" algn="l" defTabSz="914400" rtl="0" eaLnBrk="1" latinLnBrk="0" hangingPunct="1">
-              <a:lnSpc>
-                <a:spcPct val="90000"/>
-              </a:lnSpc>
-              <a:spcBef>
-                <a:spcPts val="500"/>
-              </a:spcBef>
-              <a:buFont typeface="Arial" panose="020B0604020202020204" pitchFamily="34" charset="0"/>
-              <a:buChar char="•"/>
-              <a:defRPr sz="2400" kern="1200">
+              </a:rPr>
+              <a:t>Instructions: </a:t>
+            </a:r>
+            <a:r>
+              <a:rPr lang="en-US" dirty="0">
+                <a:solidFill>
+                  <a:srgbClr val="0070C0"/>
+                </a:solidFill>
+              </a:rPr>
+              <a:t>ADD{</a:t>
+            </a:r>
+            <a:r>
+              <a:rPr lang="en-US" b="1" dirty="0">
+                <a:solidFill>
+                  <a:srgbClr val="FF0000"/>
+                </a:solidFill>
+              </a:rPr>
+              <a:t>S</a:t>
+            </a:r>
+            <a:r>
+              <a:rPr lang="en-US" dirty="0">
+                <a:solidFill>
+                  <a:srgbClr val="0070C0"/>
+                </a:solidFill>
+              </a:rPr>
+              <a:t>}</a:t>
+            </a:r>
+            <a:r>
+              <a:rPr lang="en-US" dirty="0">
                 <a:solidFill>
                   <a:schemeClr val="tx1"/>
                 </a:solidFill>
-                <a:latin typeface="+mn-lt"/>
-                <a:ea typeface="+mn-ea"/>
-                <a:cs typeface="+mn-cs"/>
-              </a:defRPr>
-            </a:lvl2pPr>
-            <a:lvl3pPr marL="1143000" indent="-228600" algn="l" defTabSz="914400" rtl="0" eaLnBrk="1" latinLnBrk="0" hangingPunct="1">
-              <a:lnSpc>
-                <a:spcPct val="90000"/>
-              </a:lnSpc>
-              <a:spcBef>
-                <a:spcPts val="500"/>
-              </a:spcBef>
-              <a:buFont typeface="Arial" panose="020B0604020202020204" pitchFamily="34" charset="0"/>
-              <a:buChar char="•"/>
-              <a:defRPr sz="2000" kern="1200">
+              </a:rPr>
+              <a:t>,</a:t>
+            </a:r>
+            <a:r>
+              <a:rPr lang="en-US" dirty="0">
+                <a:solidFill>
+                  <a:srgbClr val="0070C0"/>
+                </a:solidFill>
+              </a:rPr>
+              <a:t> ADC{</a:t>
+            </a:r>
+            <a:r>
+              <a:rPr lang="en-US" b="1" dirty="0">
+                <a:solidFill>
+                  <a:srgbClr val="FF0000"/>
+                </a:solidFill>
+              </a:rPr>
+              <a:t>S</a:t>
+            </a:r>
+            <a:r>
+              <a:rPr lang="en-US" dirty="0">
+                <a:solidFill>
+                  <a:srgbClr val="0070C0"/>
+                </a:solidFill>
+              </a:rPr>
+              <a:t>}</a:t>
+            </a:r>
+          </a:p>
+          <a:p>
+            <a:r>
+              <a:rPr lang="en-US" dirty="0">
                 <a:solidFill>
                   <a:schemeClr val="tx1"/>
                 </a:solidFill>
-                <a:latin typeface="+mn-lt"/>
-                <a:ea typeface="+mn-ea"/>
-                <a:cs typeface="+mn-cs"/>
-              </a:defRPr>
-            </a:lvl3pPr>
-            <a:lvl4pPr marL="1600200" indent="-228600" algn="l" defTabSz="914400" rtl="0" eaLnBrk="1" latinLnBrk="0" hangingPunct="1">
-              <a:lnSpc>
-                <a:spcPct val="90000"/>
-              </a:lnSpc>
-              <a:spcBef>
-                <a:spcPts val="500"/>
-              </a:spcBef>
-              <a:buFont typeface="Arial" panose="020B0604020202020204" pitchFamily="34" charset="0"/>
-              <a:buChar char="•"/>
-              <a:defRPr sz="1800" kern="1200">
+              </a:rPr>
+              <a:t>Format Examples:</a:t>
+            </a:r>
+          </a:p>
+          <a:p>
+            <a:pPr lvl="1"/>
+            <a:r>
+              <a:rPr lang="en-US" dirty="0">
                 <a:solidFill>
                   <a:schemeClr val="tx1"/>
                 </a:solidFill>
-                <a:latin typeface="+mn-lt"/>
-                <a:ea typeface="+mn-ea"/>
-                <a:cs typeface="+mn-cs"/>
-              </a:defRPr>
-            </a:lvl4pPr>
-            <a:lvl5pPr marL="2057400" indent="-228600" algn="l" defTabSz="914400" rtl="0" eaLnBrk="1" latinLnBrk="0" hangingPunct="1">
-              <a:lnSpc>
-                <a:spcPct val="90000"/>
-              </a:lnSpc>
-              <a:spcBef>
-                <a:spcPts val="500"/>
-              </a:spcBef>
-              <a:buFont typeface="Arial" panose="020B0604020202020204" pitchFamily="34" charset="0"/>
-              <a:buChar char="•"/>
-              <a:defRPr sz="1800" kern="1200">
+              </a:rPr>
+              <a:t>ADD	R0,R1,</a:t>
+            </a:r>
+            <a:r>
+              <a:rPr lang="en-US" b="1" dirty="0">
+                <a:solidFill>
+                  <a:srgbClr val="0000FF"/>
+                </a:solidFill>
+              </a:rPr>
+              <a:t>#5</a:t>
+            </a:r>
+            <a:r>
+              <a:rPr lang="en-US" dirty="0">
                 <a:solidFill>
                   <a:schemeClr val="tx1"/>
                 </a:solidFill>
-                <a:latin typeface="+mn-lt"/>
-                <a:ea typeface="+mn-ea"/>
-                <a:cs typeface="+mn-cs"/>
-              </a:defRPr>
-            </a:lvl5pPr>
-            <a:lvl6pPr marL="2514600" indent="-228600" algn="l" defTabSz="914400" rtl="0" eaLnBrk="1" latinLnBrk="0" hangingPunct="1">
-              <a:lnSpc>
-                <a:spcPct val="90000"/>
-              </a:lnSpc>
-              <a:spcBef>
-                <a:spcPts val="500"/>
-              </a:spcBef>
-              <a:buFont typeface="Arial" panose="020B0604020202020204" pitchFamily="34" charset="0"/>
-              <a:buChar char="•"/>
-              <a:defRPr sz="1800" kern="1200">
+              </a:rPr>
+              <a:t>			// R0 </a:t>
+            </a:r>
+            <a:r>
+              <a:rPr lang="en-US" dirty="0">
                 <a:solidFill>
                   <a:schemeClr val="tx1"/>
                 </a:solidFill>
-                <a:latin typeface="+mn-lt"/>
-                <a:ea typeface="+mn-ea"/>
-                <a:cs typeface="+mn-cs"/>
-              </a:defRPr>
-            </a:lvl6pPr>
-            <a:lvl7pPr marL="2971800" indent="-228600" algn="l" defTabSz="914400" rtl="0" eaLnBrk="1" latinLnBrk="0" hangingPunct="1">
-              <a:lnSpc>
-                <a:spcPct val="90000"/>
-              </a:lnSpc>
-              <a:spcBef>
-                <a:spcPts val="500"/>
-              </a:spcBef>
-              <a:buFont typeface="Arial" panose="020B0604020202020204" pitchFamily="34" charset="0"/>
-              <a:buChar char="•"/>
-              <a:defRPr sz="1800" kern="1200">
+                <a:sym typeface="Wingdings" panose="05000000000000000000" pitchFamily="2" charset="2"/>
+              </a:rPr>
+              <a:t>= R1 + 5</a:t>
+            </a:r>
+            <a:endParaRPr lang="en-US" dirty="0">
+              <a:solidFill>
+                <a:schemeClr val="tx1"/>
+              </a:solidFill>
+            </a:endParaRPr>
+          </a:p>
+          <a:p>
+            <a:pPr lvl="1"/>
+            <a:r>
+              <a:rPr lang="en-US" dirty="0">
                 <a:solidFill>
                   <a:schemeClr val="tx1"/>
                 </a:solidFill>
-                <a:latin typeface="+mn-lt"/>
-                <a:ea typeface="+mn-ea"/>
-                <a:cs typeface="+mn-cs"/>
-              </a:defRPr>
-            </a:lvl7pPr>
-            <a:lvl8pPr marL="3429000" indent="-228600" algn="l" defTabSz="914400" rtl="0" eaLnBrk="1" latinLnBrk="0" hangingPunct="1">
-              <a:lnSpc>
-                <a:spcPct val="90000"/>
-              </a:lnSpc>
-              <a:spcBef>
-                <a:spcPts val="500"/>
-              </a:spcBef>
-              <a:buFont typeface="Arial" panose="020B0604020202020204" pitchFamily="34" charset="0"/>
-              <a:buChar char="•"/>
-              <a:defRPr sz="1800" kern="1200">
+              </a:rPr>
+              <a:t>ADD	R0,R1,R2		// R0 </a:t>
+            </a:r>
+            <a:r>
+              <a:rPr lang="en-US" dirty="0">
                 <a:solidFill>
                   <a:schemeClr val="tx1"/>
                 </a:solidFill>
-                <a:latin typeface="+mn-lt"/>
-                <a:ea typeface="+mn-ea"/>
-                <a:cs typeface="+mn-cs"/>
-              </a:defRPr>
-            </a:lvl8pPr>
-            <a:lvl9pPr marL="3886200" indent="-228600" algn="l" defTabSz="914400" rtl="0" eaLnBrk="1" latinLnBrk="0" hangingPunct="1">
-              <a:lnSpc>
-                <a:spcPct val="90000"/>
-              </a:lnSpc>
-              <a:spcBef>
-                <a:spcPts val="500"/>
-              </a:spcBef>
-              <a:buFont typeface="Arial" panose="020B0604020202020204" pitchFamily="34" charset="0"/>
-              <a:buChar char="•"/>
-              <a:defRPr sz="1800" kern="1200">
+                <a:sym typeface="Wingdings" panose="05000000000000000000" pitchFamily="2" charset="2"/>
+              </a:rPr>
+              <a:t>= R1 + R2</a:t>
+            </a:r>
+            <a:endParaRPr lang="en-US" dirty="0">
+              <a:solidFill>
+                <a:schemeClr val="tx1"/>
+              </a:solidFill>
+            </a:endParaRPr>
+          </a:p>
+          <a:p>
+            <a:pPr lvl="1"/>
+            <a:r>
+              <a:rPr lang="en-US" dirty="0">
                 <a:solidFill>
                   <a:schemeClr val="tx1"/>
                 </a:solidFill>
-                <a:latin typeface="+mn-lt"/>
-                <a:ea typeface="+mn-ea"/>
-                <a:cs typeface="+mn-cs"/>
-              </a:defRPr>
-            </a:lvl9pPr>
-          </a:lstStyle>
-          <a:p>
-            <a:r>
-              <a:rPr lang="en-US" sz="2100" dirty="0"/>
-              <a:t>Instructions: </a:t>
-            </a:r>
-            <a:r>
-              <a:rPr lang="en-US" sz="2100" dirty="0">
+              </a:rPr>
+              <a:t>ADD	R0,R1,</a:t>
+            </a:r>
+            <a:r>
+              <a:rPr lang="en-US" b="1" dirty="0">
+                <a:solidFill>
+                  <a:srgbClr val="0000FF"/>
+                </a:solidFill>
+              </a:rPr>
+              <a:t>R2,LSL #2</a:t>
+            </a:r>
+            <a:r>
+              <a:rPr lang="en-US" dirty="0">
+                <a:solidFill>
+                  <a:schemeClr val="tx1"/>
+                </a:solidFill>
+              </a:rPr>
+              <a:t>		// R0 </a:t>
+            </a:r>
+            <a:r>
+              <a:rPr lang="en-US" dirty="0">
+                <a:solidFill>
+                  <a:schemeClr val="tx1"/>
+                </a:solidFill>
+                <a:sym typeface="Wingdings" panose="05000000000000000000" pitchFamily="2" charset="2"/>
+              </a:rPr>
+              <a:t>= R1 + </a:t>
+            </a:r>
+            <a:r>
+              <a:rPr lang="en-US" b="1" dirty="0">
+                <a:solidFill>
+                  <a:srgbClr val="0000FF"/>
+                </a:solidFill>
+                <a:sym typeface="Wingdings" panose="05000000000000000000" pitchFamily="2" charset="2"/>
+              </a:rPr>
+              <a:t>(R2 &lt;&lt; 2)</a:t>
+            </a:r>
+            <a:endParaRPr lang="en-US" b="1" dirty="0">
+              <a:solidFill>
+                <a:srgbClr val="0000FF"/>
+              </a:solidFill>
+            </a:endParaRPr>
+          </a:p>
+          <a:p>
+            <a:r>
+              <a:rPr lang="en-US" dirty="0">
+                <a:solidFill>
+                  <a:schemeClr val="tx1"/>
+                </a:solidFill>
+              </a:rPr>
+              <a:t>Flags: </a:t>
+            </a:r>
+            <a:r>
+              <a:rPr lang="en-US" dirty="0">
                 <a:solidFill>
                   <a:srgbClr val="0070C0"/>
                 </a:solidFill>
               </a:rPr>
-              <a:t>SUB{S}, SBC{S}, RSB{S}</a:t>
-            </a:r>
-          </a:p>
-          <a:p>
-            <a:r>
-              <a:rPr lang="en-US" sz="2100" dirty="0"/>
-              <a:t>Format Examples:</a:t>
+              <a:t>Append “S” to capture result characteristics in NCVZ</a:t>
+            </a:r>
+          </a:p>
+          <a:p>
+            <a:endParaRPr lang="en-US" dirty="0"/>
+          </a:p>
+          <a:p>
+            <a:r>
+              <a:rPr lang="en-US" dirty="0">
+                <a:solidFill>
+                  <a:schemeClr val="tx1"/>
+                </a:solidFill>
+              </a:rPr>
+              <a:t>Overflow:</a:t>
             </a:r>
           </a:p>
           <a:p>
             <a:pPr lvl="1"/>
             <a:r>
-              <a:rPr lang="en-US" sz="1800" dirty="0"/>
-              <a:t>SUB	R0,R1,</a:t>
-            </a:r>
-            <a:r>
-              <a:rPr lang="en-US" sz="1800" b="1" dirty="0">
-                <a:solidFill>
-                  <a:srgbClr val="0000FF"/>
-                </a:solidFill>
-              </a:rPr>
-              <a:t>#5</a:t>
-            </a:r>
-            <a:r>
-              <a:rPr lang="en-US" sz="1800" dirty="0"/>
-              <a:t>		// R0 </a:t>
-            </a:r>
-            <a:r>
-              <a:rPr lang="en-US" sz="1800" dirty="0">
+              <a:rPr lang="en-US" b="1" dirty="0">
+                <a:solidFill>
+                  <a:srgbClr val="92D050"/>
+                </a:solidFill>
+              </a:rPr>
+              <a:t>Unsigned</a:t>
+            </a:r>
+            <a:r>
+              <a:rPr lang="en-US" dirty="0">
+                <a:solidFill>
+                  <a:srgbClr val="0070C0"/>
+                </a:solidFill>
+              </a:rPr>
+              <a:t>: Carry Flag (C) = 1</a:t>
+            </a:r>
+          </a:p>
+          <a:p>
+            <a:pPr lvl="1"/>
+            <a:r>
+              <a:rPr lang="en-US" dirty="0">
+                <a:solidFill>
+                  <a:srgbClr val="0070C0"/>
+                </a:solidFill>
+              </a:rPr>
+              <a:t>     </a:t>
+            </a:r>
+            <a:r>
+              <a:rPr lang="en-US" b="1" dirty="0">
+                <a:solidFill>
+                  <a:srgbClr val="FF0000"/>
+                </a:solidFill>
+              </a:rPr>
+              <a:t>Signed</a:t>
+            </a:r>
+            <a:r>
+              <a:rPr lang="en-US" dirty="0">
+                <a:solidFill>
+                  <a:srgbClr val="0070C0"/>
+                </a:solidFill>
+              </a:rPr>
+              <a:t>: Overflow Flag (V) = 1 (Set when C</a:t>
+            </a:r>
+            <a:r>
+              <a:rPr lang="en-US" baseline="-25000" dirty="0">
+                <a:solidFill>
+                  <a:srgbClr val="0070C0"/>
+                </a:solidFill>
+              </a:rPr>
+              <a:t>N</a:t>
+            </a:r>
+            <a:r>
+              <a:rPr lang="en-US" dirty="0">
+                <a:solidFill>
+                  <a:srgbClr val="0070C0"/>
+                </a:solidFill>
+              </a:rPr>
+              <a:t>≠C</a:t>
+            </a:r>
+            <a:r>
+              <a:rPr lang="en-US" baseline="-25000" dirty="0">
+                <a:solidFill>
+                  <a:srgbClr val="0070C0"/>
+                </a:solidFill>
+              </a:rPr>
+              <a:t>N-1</a:t>
+            </a:r>
+            <a:r>
+              <a:rPr lang="en-US" dirty="0">
+                <a:solidFill>
+                  <a:srgbClr val="0070C0"/>
+                </a:solidFill>
+              </a:rPr>
+              <a:t>)</a:t>
+            </a:r>
+          </a:p>
+          <a:p>
+            <a:endParaRPr lang="en-US" dirty="0"/>
+          </a:p>
+          <a:p>
+            <a:r>
+              <a:rPr lang="en-US" dirty="0">
+                <a:solidFill>
+                  <a:schemeClr val="tx1"/>
+                </a:solidFill>
+              </a:rPr>
+              <a:t>Multiple precision addition: </a:t>
+            </a:r>
+            <a:r>
+              <a:rPr lang="en-US" dirty="0">
+                <a:solidFill>
+                  <a:srgbClr val="0070C0"/>
+                </a:solidFill>
+              </a:rPr>
+              <a:t>ADD</a:t>
+            </a:r>
+            <a:r>
+              <a:rPr lang="en-US" b="1" dirty="0">
+                <a:solidFill>
+                  <a:srgbClr val="FF0000"/>
+                </a:solidFill>
+              </a:rPr>
+              <a:t>S</a:t>
+            </a:r>
+            <a:r>
+              <a:rPr lang="en-US" dirty="0">
+                <a:solidFill>
+                  <a:srgbClr val="0070C0"/>
+                </a:solidFill>
+              </a:rPr>
+              <a:t> </a:t>
+            </a:r>
+            <a:r>
+              <a:rPr lang="en-US" dirty="0">
+                <a:solidFill>
+                  <a:srgbClr val="0070C0"/>
+                </a:solidFill>
                 <a:sym typeface="Wingdings" panose="05000000000000000000" pitchFamily="2" charset="2"/>
               </a:rPr>
-              <a:t>= R1 - 5</a:t>
-            </a:r>
-            <a:endParaRPr lang="en-US" sz="1800" dirty="0"/>
-          </a:p>
-          <a:p>
-            <a:pPr lvl="1"/>
-            <a:r>
-              <a:rPr lang="en-US" sz="1800" dirty="0"/>
-              <a:t>SUB	R0,R1,R2		// R0 </a:t>
-            </a:r>
-            <a:r>
-              <a:rPr lang="en-US" sz="1800" dirty="0">
-                <a:sym typeface="Wingdings" panose="05000000000000000000" pitchFamily="2" charset="2"/>
-              </a:rPr>
-              <a:t>= R1 - R2</a:t>
-            </a:r>
-            <a:endParaRPr lang="en-US" sz="1800" dirty="0"/>
-          </a:p>
-          <a:p>
-            <a:pPr lvl="1"/>
-            <a:r>
-              <a:rPr lang="en-US" sz="1800" dirty="0"/>
-              <a:t>SUB	R0,R1,</a:t>
-            </a:r>
-            <a:r>
-              <a:rPr lang="en-US" sz="1800" b="1" dirty="0">
-                <a:solidFill>
-                  <a:srgbClr val="0000FF"/>
-                </a:solidFill>
-              </a:rPr>
-              <a:t>R2,LSL #2</a:t>
-            </a:r>
-            <a:r>
-              <a:rPr lang="en-US" sz="1800" dirty="0"/>
-              <a:t>		// R0 </a:t>
-            </a:r>
-            <a:r>
-              <a:rPr lang="en-US" sz="1800" dirty="0">
-                <a:sym typeface="Wingdings" panose="05000000000000000000" pitchFamily="2" charset="2"/>
-              </a:rPr>
-              <a:t>= R1 - </a:t>
-            </a:r>
-            <a:r>
-              <a:rPr lang="en-US" sz="1800" b="1" dirty="0">
-                <a:solidFill>
-                  <a:srgbClr val="0000FF"/>
-                </a:solidFill>
-                <a:sym typeface="Wingdings" panose="05000000000000000000" pitchFamily="2" charset="2"/>
-              </a:rPr>
-              <a:t>(R2 &lt;&lt; 2)</a:t>
-            </a:r>
-            <a:r>
-              <a:rPr lang="en-US" sz="1800" dirty="0">
-                <a:solidFill>
-                  <a:srgbClr val="0070C0"/>
-                </a:solidFill>
-                <a:sym typeface="Wingdings" panose="05000000000000000000" pitchFamily="2" charset="2"/>
-              </a:rPr>
-              <a:t>	</a:t>
-            </a:r>
-            <a:endParaRPr lang="en-US" sz="1800" dirty="0">
+              <a:t> ADC</a:t>
+            </a:r>
+            <a:endParaRPr lang="en-US" dirty="0">
               <a:solidFill>
                 <a:srgbClr val="0070C0"/>
               </a:solidFill>
             </a:endParaRPr>
           </a:p>
           <a:p>
-            <a:endParaRPr lang="en-US" sz="2100" dirty="0"/>
-          </a:p>
-          <a:p>
-            <a:r>
-              <a:rPr lang="en-US" sz="2100" dirty="0"/>
-              <a:t>Flags: </a:t>
-            </a:r>
-            <a:r>
-              <a:rPr lang="en-US" sz="2100" dirty="0">
-                <a:solidFill>
-                  <a:srgbClr val="0070C0"/>
-                </a:solidFill>
-              </a:rPr>
-              <a:t>Append “S” to capture result characteristics in NCVZ</a:t>
-            </a:r>
-          </a:p>
-          <a:p>
-            <a:endParaRPr lang="en-US" sz="2100" dirty="0"/>
-          </a:p>
-          <a:p>
-            <a:r>
-              <a:rPr lang="en-US" sz="2100" dirty="0"/>
-              <a:t>Overflow:</a:t>
-            </a:r>
-          </a:p>
-          <a:p>
-            <a:pPr lvl="1"/>
-            <a:r>
-              <a:rPr lang="en-US" sz="1800" b="1" dirty="0">
-                <a:solidFill>
-                  <a:srgbClr val="92D050"/>
-                </a:solidFill>
-              </a:rPr>
-              <a:t>Unsigned</a:t>
-            </a:r>
-            <a:r>
-              <a:rPr lang="en-US" sz="1800" dirty="0">
-                <a:solidFill>
-                  <a:srgbClr val="0070C0"/>
-                </a:solidFill>
-              </a:rPr>
-              <a:t>: Carry Flag       (C) = 0</a:t>
-            </a:r>
-          </a:p>
-          <a:p>
-            <a:pPr lvl="1"/>
-            <a:r>
-              <a:rPr lang="en-US" sz="1800" dirty="0">
-                <a:solidFill>
-                  <a:srgbClr val="0070C0"/>
-                </a:solidFill>
-              </a:rPr>
-              <a:t>     </a:t>
-            </a:r>
-            <a:r>
-              <a:rPr lang="en-US" sz="1800" b="1" dirty="0">
-                <a:solidFill>
-                  <a:srgbClr val="FF0000"/>
-                </a:solidFill>
-              </a:rPr>
-              <a:t>Signed</a:t>
-            </a:r>
-            <a:r>
-              <a:rPr lang="en-US" sz="1800" dirty="0">
-                <a:solidFill>
-                  <a:srgbClr val="0070C0"/>
-                </a:solidFill>
-              </a:rPr>
-              <a:t>: Overflow Flag (V) = 1 (Set when C</a:t>
-            </a:r>
-            <a:r>
-              <a:rPr lang="en-US" sz="1800" baseline="-25000" dirty="0">
-                <a:solidFill>
-                  <a:srgbClr val="0070C0"/>
-                </a:solidFill>
-              </a:rPr>
-              <a:t>N</a:t>
-            </a:r>
-            <a:r>
-              <a:rPr lang="en-US" sz="1800" dirty="0">
-                <a:solidFill>
-                  <a:srgbClr val="0070C0"/>
-                </a:solidFill>
-              </a:rPr>
-              <a:t>≠C</a:t>
-            </a:r>
-            <a:r>
-              <a:rPr lang="en-US" sz="1800" baseline="-25000" dirty="0">
-                <a:solidFill>
-                  <a:srgbClr val="0070C0"/>
-                </a:solidFill>
-              </a:rPr>
-              <a:t>N-1</a:t>
-            </a:r>
-            <a:r>
-              <a:rPr lang="en-US" sz="1800" dirty="0">
-                <a:solidFill>
-                  <a:srgbClr val="0070C0"/>
-                </a:solidFill>
-              </a:rPr>
-              <a:t>)</a:t>
-            </a:r>
-          </a:p>
-          <a:p>
-            <a:endParaRPr lang="en-US" sz="2100" dirty="0"/>
-          </a:p>
-          <a:p>
-            <a:r>
-              <a:rPr lang="en-US" sz="2100" dirty="0"/>
-              <a:t>Multiple precision subtraction: </a:t>
-            </a:r>
-            <a:r>
-              <a:rPr lang="en-US" sz="2100" dirty="0">
-                <a:solidFill>
-                  <a:srgbClr val="0070C0"/>
-                </a:solidFill>
-              </a:rPr>
-              <a:t>SUB</a:t>
-            </a:r>
-            <a:r>
-              <a:rPr lang="en-US" sz="2100" b="1" dirty="0">
-                <a:solidFill>
-                  <a:srgbClr val="FF0000"/>
-                </a:solidFill>
-              </a:rPr>
-              <a:t>S</a:t>
-            </a:r>
-            <a:r>
-              <a:rPr lang="en-US" sz="2100" dirty="0">
-                <a:solidFill>
-                  <a:srgbClr val="0070C0"/>
-                </a:solidFill>
-              </a:rPr>
-              <a:t> </a:t>
-            </a:r>
-            <a:r>
-              <a:rPr lang="en-US" sz="2100" dirty="0">
-                <a:solidFill>
-                  <a:srgbClr val="0070C0"/>
-                </a:solidFill>
-                <a:sym typeface="Wingdings" panose="05000000000000000000" pitchFamily="2" charset="2"/>
-              </a:rPr>
-              <a:t> SBC</a:t>
-            </a:r>
-            <a:endParaRPr lang="en-US" sz="2100" dirty="0">
-              <a:solidFill>
-                <a:srgbClr val="0070C0"/>
-              </a:solidFill>
-            </a:endParaRPr>
-          </a:p>
-          <a:p>
-            <a:endParaRPr lang="en-US" sz="2100" dirty="0"/>
-          </a:p>
-          <a:p>
-            <a:endParaRPr lang="en-US" sz="2100" dirty="0"/>
+            <a:endParaRPr lang="en-US" dirty="0"/>
+          </a:p>
+          <a:p>
+            <a:endParaRPr lang="en-US" dirty="0"/>
           </a:p>
         </p:txBody>
       </p:sp>
     </p:spTree>
     <p:extLst>
       <p:ext uri="{BB962C8B-B14F-4D97-AF65-F5344CB8AC3E}">
-        <p14:creationId xmlns:p14="http://schemas.microsoft.com/office/powerpoint/2010/main" val="2046813644"/>
+        <p14:creationId xmlns:p14="http://schemas.microsoft.com/office/powerpoint/2010/main" val="385189333"/>
       </p:ext>
     </p:extLst>
   </p:cSld>
@@ -42923,355 +42478,477 @@
         </p:nvSpPr>
         <p:spPr>
           <a:xfrm>
-            <a:off x="936516" y="745181"/>
-            <a:ext cx="9466789" cy="686577"/>
+            <a:off x="936516" y="749192"/>
+            <a:ext cx="4606031" cy="662513"/>
           </a:xfrm>
         </p:spPr>
         <p:txBody>
-          <a:bodyPr>
-            <a:normAutofit/>
-          </a:bodyPr>
+          <a:bodyPr/>
           <a:lstStyle/>
           <a:p>
             <a:r>
               <a:rPr lang="en-US" dirty="0"/>
-              <a:t>Single-Length 32x32 Integer Multiplication</a:t>
+              <a:t>Integer Subtraction</a:t>
             </a:r>
           </a:p>
         </p:txBody>
       </p:sp>
       <p:sp>
         <p:nvSpPr>
-          <p:cNvPr id="3" name="Content Placeholder 2"/>
-          <p:cNvSpPr>
-            <a:spLocks noGrp="1"/>
+          <p:cNvPr id="6" name="Content Placeholder 4"/>
+          <p:cNvSpPr txBox="1">
+            <a:spLocks/>
           </p:cNvSpPr>
-          <p:nvPr>
-            <p:ph idx="1"/>
-          </p:nvPr>
+          <p:nvPr/>
         </p:nvSpPr>
         <p:spPr>
           <a:xfrm>
-            <a:off x="936515" y="1807701"/>
-            <a:ext cx="10441347" cy="4841752"/>
+            <a:off x="936515" y="1708172"/>
+            <a:ext cx="10425305" cy="4953311"/>
           </a:xfrm>
+          <a:prstGeom prst="rect">
+            <a:avLst/>
+          </a:prstGeom>
         </p:spPr>
         <p:txBody>
-          <a:bodyPr>
-            <a:normAutofit lnSpcReduction="10000"/>
+          <a:bodyPr vert="horz" lIns="68580" tIns="34290" rIns="68580" bIns="34290" rtlCol="0">
+            <a:normAutofit/>
           </a:bodyPr>
-          <a:lstStyle/>
-          <a:p>
-            <a:r>
-              <a:rPr lang="en-US" dirty="0">
+          <a:lstStyle>
+            <a:lvl1pPr marL="228600" indent="-228600" algn="l" defTabSz="914400" rtl="0" eaLnBrk="1" latinLnBrk="0" hangingPunct="1">
+              <a:lnSpc>
+                <a:spcPct val="90000"/>
+              </a:lnSpc>
+              <a:spcBef>
+                <a:spcPts val="1000"/>
+              </a:spcBef>
+              <a:buFont typeface="Arial" panose="020B0604020202020204" pitchFamily="34" charset="0"/>
+              <a:buChar char="•"/>
+              <a:defRPr sz="2800" kern="1200">
                 <a:solidFill>
                   <a:schemeClr val="tx1"/>
                 </a:solidFill>
-              </a:rPr>
-              <a:t>Instructions:</a:t>
-            </a:r>
-            <a:r>
-              <a:rPr lang="en-US" dirty="0"/>
+                <a:latin typeface="+mn-lt"/>
+                <a:ea typeface="+mn-ea"/>
+                <a:cs typeface="+mn-cs"/>
+              </a:defRPr>
+            </a:lvl1pPr>
+            <a:lvl2pPr marL="685800" indent="-228600" algn="l" defTabSz="914400" rtl="0" eaLnBrk="1" latinLnBrk="0" hangingPunct="1">
+              <a:lnSpc>
+                <a:spcPct val="90000"/>
+              </a:lnSpc>
+              <a:spcBef>
+                <a:spcPts val="500"/>
+              </a:spcBef>
+              <a:buFont typeface="Arial" panose="020B0604020202020204" pitchFamily="34" charset="0"/>
+              <a:buChar char="•"/>
+              <a:defRPr sz="2400" kern="1200">
+                <a:solidFill>
+                  <a:schemeClr val="tx1"/>
+                </a:solidFill>
+                <a:latin typeface="+mn-lt"/>
+                <a:ea typeface="+mn-ea"/>
+                <a:cs typeface="+mn-cs"/>
+              </a:defRPr>
+            </a:lvl2pPr>
+            <a:lvl3pPr marL="1143000" indent="-228600" algn="l" defTabSz="914400" rtl="0" eaLnBrk="1" latinLnBrk="0" hangingPunct="1">
+              <a:lnSpc>
+                <a:spcPct val="90000"/>
+              </a:lnSpc>
+              <a:spcBef>
+                <a:spcPts val="500"/>
+              </a:spcBef>
+              <a:buFont typeface="Arial" panose="020B0604020202020204" pitchFamily="34" charset="0"/>
+              <a:buChar char="•"/>
+              <a:defRPr sz="2000" kern="1200">
+                <a:solidFill>
+                  <a:schemeClr val="tx1"/>
+                </a:solidFill>
+                <a:latin typeface="+mn-lt"/>
+                <a:ea typeface="+mn-ea"/>
+                <a:cs typeface="+mn-cs"/>
+              </a:defRPr>
+            </a:lvl3pPr>
+            <a:lvl4pPr marL="1600200" indent="-228600" algn="l" defTabSz="914400" rtl="0" eaLnBrk="1" latinLnBrk="0" hangingPunct="1">
+              <a:lnSpc>
+                <a:spcPct val="90000"/>
+              </a:lnSpc>
+              <a:spcBef>
+                <a:spcPts val="500"/>
+              </a:spcBef>
+              <a:buFont typeface="Arial" panose="020B0604020202020204" pitchFamily="34" charset="0"/>
+              <a:buChar char="•"/>
+              <a:defRPr sz="1800" kern="1200">
+                <a:solidFill>
+                  <a:schemeClr val="tx1"/>
+                </a:solidFill>
+                <a:latin typeface="+mn-lt"/>
+                <a:ea typeface="+mn-ea"/>
+                <a:cs typeface="+mn-cs"/>
+              </a:defRPr>
+            </a:lvl4pPr>
+            <a:lvl5pPr marL="2057400" indent="-228600" algn="l" defTabSz="914400" rtl="0" eaLnBrk="1" latinLnBrk="0" hangingPunct="1">
+              <a:lnSpc>
+                <a:spcPct val="90000"/>
+              </a:lnSpc>
+              <a:spcBef>
+                <a:spcPts val="500"/>
+              </a:spcBef>
+              <a:buFont typeface="Arial" panose="020B0604020202020204" pitchFamily="34" charset="0"/>
+              <a:buChar char="•"/>
+              <a:defRPr sz="1800" kern="1200">
+                <a:solidFill>
+                  <a:schemeClr val="tx1"/>
+                </a:solidFill>
+                <a:latin typeface="+mn-lt"/>
+                <a:ea typeface="+mn-ea"/>
+                <a:cs typeface="+mn-cs"/>
+              </a:defRPr>
+            </a:lvl5pPr>
+            <a:lvl6pPr marL="2514600" indent="-228600" algn="l" defTabSz="914400" rtl="0" eaLnBrk="1" latinLnBrk="0" hangingPunct="1">
+              <a:lnSpc>
+                <a:spcPct val="90000"/>
+              </a:lnSpc>
+              <a:spcBef>
+                <a:spcPts val="500"/>
+              </a:spcBef>
+              <a:buFont typeface="Arial" panose="020B0604020202020204" pitchFamily="34" charset="0"/>
+              <a:buChar char="•"/>
+              <a:defRPr sz="1800" kern="1200">
+                <a:solidFill>
+                  <a:schemeClr val="tx1"/>
+                </a:solidFill>
+                <a:latin typeface="+mn-lt"/>
+                <a:ea typeface="+mn-ea"/>
+                <a:cs typeface="+mn-cs"/>
+              </a:defRPr>
+            </a:lvl6pPr>
+            <a:lvl7pPr marL="2971800" indent="-228600" algn="l" defTabSz="914400" rtl="0" eaLnBrk="1" latinLnBrk="0" hangingPunct="1">
+              <a:lnSpc>
+                <a:spcPct val="90000"/>
+              </a:lnSpc>
+              <a:spcBef>
+                <a:spcPts val="500"/>
+              </a:spcBef>
+              <a:buFont typeface="Arial" panose="020B0604020202020204" pitchFamily="34" charset="0"/>
+              <a:buChar char="•"/>
+              <a:defRPr sz="1800" kern="1200">
+                <a:solidFill>
+                  <a:schemeClr val="tx1"/>
+                </a:solidFill>
+                <a:latin typeface="+mn-lt"/>
+                <a:ea typeface="+mn-ea"/>
+                <a:cs typeface="+mn-cs"/>
+              </a:defRPr>
+            </a:lvl7pPr>
+            <a:lvl8pPr marL="3429000" indent="-228600" algn="l" defTabSz="914400" rtl="0" eaLnBrk="1" latinLnBrk="0" hangingPunct="1">
+              <a:lnSpc>
+                <a:spcPct val="90000"/>
+              </a:lnSpc>
+              <a:spcBef>
+                <a:spcPts val="500"/>
+              </a:spcBef>
+              <a:buFont typeface="Arial" panose="020B0604020202020204" pitchFamily="34" charset="0"/>
+              <a:buChar char="•"/>
+              <a:defRPr sz="1800" kern="1200">
+                <a:solidFill>
+                  <a:schemeClr val="tx1"/>
+                </a:solidFill>
+                <a:latin typeface="+mn-lt"/>
+                <a:ea typeface="+mn-ea"/>
+                <a:cs typeface="+mn-cs"/>
+              </a:defRPr>
+            </a:lvl8pPr>
+            <a:lvl9pPr marL="3886200" indent="-228600" algn="l" defTabSz="914400" rtl="0" eaLnBrk="1" latinLnBrk="0" hangingPunct="1">
+              <a:lnSpc>
+                <a:spcPct val="90000"/>
+              </a:lnSpc>
+              <a:spcBef>
+                <a:spcPts val="500"/>
+              </a:spcBef>
+              <a:buFont typeface="Arial" panose="020B0604020202020204" pitchFamily="34" charset="0"/>
+              <a:buChar char="•"/>
+              <a:defRPr sz="1800" kern="1200">
+                <a:solidFill>
+                  <a:schemeClr val="tx1"/>
+                </a:solidFill>
+                <a:latin typeface="+mn-lt"/>
+                <a:ea typeface="+mn-ea"/>
+                <a:cs typeface="+mn-cs"/>
+              </a:defRPr>
+            </a:lvl9pPr>
+          </a:lstStyle>
+          <a:p>
+            <a:r>
+              <a:rPr lang="en-US" sz="2100" dirty="0"/>
+              <a:t>Instructions: </a:t>
+            </a:r>
+            <a:r>
+              <a:rPr lang="en-US" sz="2100" dirty="0">
+                <a:solidFill>
+                  <a:srgbClr val="0070C0"/>
+                </a:solidFill>
+              </a:rPr>
+              <a:t>SUB{S}, SBC{S}, RSB{S}</a:t>
+            </a:r>
+          </a:p>
+          <a:p>
+            <a:r>
+              <a:rPr lang="en-US" sz="2100" dirty="0"/>
+              <a:t>Format Examples:</a:t>
+            </a:r>
+          </a:p>
+          <a:p>
+            <a:pPr lvl="1"/>
+            <a:r>
+              <a:rPr lang="en-US" sz="1800" dirty="0"/>
+              <a:t>SUB	R0,R1,</a:t>
+            </a:r>
+            <a:r>
+              <a:rPr lang="en-US" sz="1800" b="1" dirty="0">
+                <a:solidFill>
+                  <a:srgbClr val="0000FF"/>
+                </a:solidFill>
+              </a:rPr>
+              <a:t>#5</a:t>
+            </a:r>
+            <a:r>
+              <a:rPr lang="en-US" sz="1800" dirty="0"/>
+              <a:t>		// R0 </a:t>
+            </a:r>
+            <a:r>
+              <a:rPr lang="en-US" sz="1800" dirty="0">
+                <a:sym typeface="Wingdings" panose="05000000000000000000" pitchFamily="2" charset="2"/>
+              </a:rPr>
+              <a:t>= R1 - 5</a:t>
+            </a:r>
+            <a:endParaRPr lang="en-US" sz="1800" dirty="0"/>
+          </a:p>
+          <a:p>
+            <a:pPr lvl="1"/>
+            <a:r>
+              <a:rPr lang="en-US" sz="1800" dirty="0"/>
+              <a:t>SUB	R0,R1,R2		// R0 </a:t>
+            </a:r>
+            <a:r>
+              <a:rPr lang="en-US" sz="1800" dirty="0">
+                <a:sym typeface="Wingdings" panose="05000000000000000000" pitchFamily="2" charset="2"/>
+              </a:rPr>
+              <a:t>= R1 - R2</a:t>
+            </a:r>
+            <a:endParaRPr lang="en-US" sz="1800" dirty="0"/>
+          </a:p>
+          <a:p>
+            <a:pPr lvl="1"/>
+            <a:r>
+              <a:rPr lang="en-US" sz="1800" dirty="0"/>
+              <a:t>SUB	R0,R1,</a:t>
+            </a:r>
+            <a:r>
+              <a:rPr lang="en-US" sz="1800" b="1" dirty="0">
+                <a:solidFill>
+                  <a:srgbClr val="0000FF"/>
+                </a:solidFill>
+              </a:rPr>
+              <a:t>R2,LSL #2</a:t>
+            </a:r>
+            <a:r>
+              <a:rPr lang="en-US" sz="1800" dirty="0"/>
+              <a:t>		// R0 </a:t>
+            </a:r>
+            <a:r>
+              <a:rPr lang="en-US" sz="1800" dirty="0">
+                <a:sym typeface="Wingdings" panose="05000000000000000000" pitchFamily="2" charset="2"/>
+              </a:rPr>
+              <a:t>= R1 - </a:t>
+            </a:r>
+            <a:r>
+              <a:rPr lang="en-US" sz="1800" b="1" dirty="0">
+                <a:solidFill>
+                  <a:srgbClr val="0000FF"/>
+                </a:solidFill>
+                <a:sym typeface="Wingdings" panose="05000000000000000000" pitchFamily="2" charset="2"/>
+              </a:rPr>
+              <a:t>(R2 &lt;&lt; 2)</a:t>
+            </a:r>
+            <a:r>
+              <a:rPr lang="en-US" sz="1800" dirty="0">
+                <a:solidFill>
+                  <a:srgbClr val="0070C0"/>
+                </a:solidFill>
+                <a:sym typeface="Wingdings" panose="05000000000000000000" pitchFamily="2" charset="2"/>
+              </a:rPr>
+              <a:t>	</a:t>
+            </a:r>
+            <a:endParaRPr lang="en-US" sz="1800" dirty="0">
+              <a:solidFill>
+                <a:srgbClr val="0070C0"/>
+              </a:solidFill>
+            </a:endParaRPr>
+          </a:p>
+          <a:p>
+            <a:endParaRPr lang="en-US" sz="2100" dirty="0"/>
+          </a:p>
+          <a:p>
+            <a:r>
+              <a:rPr lang="en-US" sz="2100" dirty="0"/>
+              <a:t>Flags: </a:t>
+            </a:r>
+            <a:r>
+              <a:rPr lang="en-US" sz="2100" dirty="0">
+                <a:solidFill>
+                  <a:srgbClr val="0070C0"/>
+                </a:solidFill>
+              </a:rPr>
+              <a:t>Append “S” to capture result characteristics in NCVZ</a:t>
+            </a:r>
+          </a:p>
+          <a:p>
+            <a:endParaRPr lang="en-US" sz="2100" dirty="0"/>
+          </a:p>
+          <a:p>
+            <a:r>
+              <a:rPr lang="en-US" sz="2100" dirty="0"/>
+              <a:t>Overflow:</a:t>
+            </a:r>
+          </a:p>
+          <a:p>
+            <a:pPr lvl="1"/>
+            <a:r>
+              <a:rPr lang="en-US" sz="1800" b="1" dirty="0">
+                <a:solidFill>
+                  <a:srgbClr val="92D050"/>
+                </a:solidFill>
+              </a:rPr>
+              <a:t>Unsigned</a:t>
+            </a:r>
+            <a:r>
+              <a:rPr lang="en-US" sz="1800" dirty="0">
+                <a:solidFill>
+                  <a:srgbClr val="0070C0"/>
+                </a:solidFill>
+              </a:rPr>
+              <a:t>: Carry Flag       (C) = 0</a:t>
+            </a:r>
+          </a:p>
+          <a:p>
+            <a:pPr lvl="1"/>
+            <a:r>
+              <a:rPr lang="en-US" sz="1800" dirty="0">
+                <a:solidFill>
+                  <a:srgbClr val="0070C0"/>
+                </a:solidFill>
+              </a:rPr>
+              <a:t>     </a:t>
+            </a:r>
+            <a:r>
+              <a:rPr lang="en-US" sz="1800" b="1" dirty="0">
+                <a:solidFill>
+                  <a:srgbClr val="FF0000"/>
+                </a:solidFill>
+              </a:rPr>
+              <a:t>Signed</a:t>
+            </a:r>
+            <a:r>
+              <a:rPr lang="en-US" sz="1800" dirty="0">
+                <a:solidFill>
+                  <a:srgbClr val="0070C0"/>
+                </a:solidFill>
+              </a:rPr>
+              <a:t>: Overflow Flag (V) = 1 (Set when C</a:t>
+            </a:r>
+            <a:r>
+              <a:rPr lang="en-US" sz="1800" baseline="-25000" dirty="0">
+                <a:solidFill>
+                  <a:srgbClr val="0070C0"/>
+                </a:solidFill>
+              </a:rPr>
+              <a:t>N</a:t>
+            </a:r>
+            <a:r>
+              <a:rPr lang="en-US" sz="1800" dirty="0">
+                <a:solidFill>
+                  <a:srgbClr val="0070C0"/>
+                </a:solidFill>
+              </a:rPr>
+              <a:t>≠C</a:t>
+            </a:r>
+            <a:r>
+              <a:rPr lang="en-US" sz="1800" baseline="-25000" dirty="0">
+                <a:solidFill>
+                  <a:srgbClr val="0070C0"/>
+                </a:solidFill>
+              </a:rPr>
+              <a:t>N-1</a:t>
+            </a:r>
+            <a:r>
+              <a:rPr lang="en-US" sz="1800" dirty="0">
+                <a:solidFill>
+                  <a:srgbClr val="0070C0"/>
+                </a:solidFill>
+              </a:rPr>
+              <a:t>)</a:t>
+            </a:r>
+          </a:p>
+          <a:p>
+            <a:endParaRPr lang="en-US" sz="2100" dirty="0"/>
+          </a:p>
+          <a:p>
+            <a:r>
+              <a:rPr lang="en-US" sz="2100" dirty="0"/>
+              <a:t>Multiple precision subtraction: </a:t>
+            </a:r>
+            <a:r>
+              <a:rPr lang="en-US" sz="2100" dirty="0">
+                <a:solidFill>
+                  <a:srgbClr val="0070C0"/>
+                </a:solidFill>
+              </a:rPr>
+              <a:t>SUB</a:t>
+            </a:r>
+            <a:r>
+              <a:rPr lang="en-US" sz="2100" b="1" dirty="0">
+                <a:solidFill>
+                  <a:srgbClr val="FF0000"/>
+                </a:solidFill>
+              </a:rPr>
+              <a:t>S</a:t>
+            </a:r>
+            <a:r>
+              <a:rPr lang="en-US" sz="2100" dirty="0">
+                <a:solidFill>
+                  <a:srgbClr val="0070C0"/>
+                </a:solidFill>
+              </a:rPr>
               <a:t> </a:t>
             </a:r>
             <a:r>
-              <a:rPr lang="en-US" dirty="0">
+              <a:rPr lang="en-US" sz="2100" dirty="0">
                 <a:solidFill>
                   <a:srgbClr val="0070C0"/>
                 </a:solidFill>
-              </a:rPr>
-              <a:t>MUL{</a:t>
-            </a:r>
-            <a:r>
-              <a:rPr lang="en-US" b="1" dirty="0">
-                <a:solidFill>
-                  <a:srgbClr val="FF0000"/>
-                </a:solidFill>
-              </a:rPr>
-              <a:t>S</a:t>
-            </a:r>
-            <a:r>
-              <a:rPr lang="en-US" dirty="0">
-                <a:solidFill>
-                  <a:srgbClr val="0070C0"/>
-                </a:solidFill>
-              </a:rPr>
-              <a:t>}, MLA, MLS</a:t>
-            </a:r>
-          </a:p>
-          <a:p>
-            <a:endParaRPr lang="en-US" dirty="0"/>
-          </a:p>
-          <a:p>
-            <a:r>
-              <a:rPr lang="en-US" b="1" dirty="0">
-                <a:solidFill>
-                  <a:srgbClr val="FF0000"/>
-                </a:solidFill>
-              </a:rPr>
-              <a:t>Signed</a:t>
-            </a:r>
-            <a:r>
-              <a:rPr lang="en-US" dirty="0"/>
-              <a:t> </a:t>
-            </a:r>
-            <a:r>
-              <a:rPr lang="en-US" dirty="0">
-                <a:solidFill>
-                  <a:schemeClr val="tx1"/>
-                </a:solidFill>
-              </a:rPr>
-              <a:t>vs.</a:t>
-            </a:r>
-            <a:r>
-              <a:rPr lang="en-US" dirty="0"/>
-              <a:t> </a:t>
-            </a:r>
-            <a:r>
-              <a:rPr lang="en-US" b="1" dirty="0">
-                <a:solidFill>
-                  <a:srgbClr val="92D050"/>
-                </a:solidFill>
-              </a:rPr>
-              <a:t>Unsigned</a:t>
-            </a:r>
-            <a:r>
-              <a:rPr lang="en-US" dirty="0">
-                <a:solidFill>
-                  <a:schemeClr val="tx1"/>
-                </a:solidFill>
-              </a:rPr>
-              <a:t>:</a:t>
-            </a:r>
-            <a:r>
-              <a:rPr lang="en-US" dirty="0"/>
-              <a:t> </a:t>
-            </a:r>
-            <a:r>
-              <a:rPr lang="en-US" dirty="0">
-                <a:solidFill>
-                  <a:srgbClr val="0070C0"/>
-                </a:solidFill>
-              </a:rPr>
-              <a:t>Use </a:t>
-            </a:r>
-            <a:r>
-              <a:rPr lang="en-US" b="1" dirty="0">
-                <a:solidFill>
-                  <a:srgbClr val="0070C0"/>
-                </a:solidFill>
-              </a:rPr>
-              <a:t>same</a:t>
-            </a:r>
-            <a:r>
-              <a:rPr lang="en-US" dirty="0">
-                <a:solidFill>
-                  <a:srgbClr val="0070C0"/>
-                </a:solidFill>
-              </a:rPr>
-              <a:t> instruction</a:t>
-            </a:r>
-          </a:p>
-          <a:p>
-            <a:endParaRPr lang="en-US" dirty="0"/>
-          </a:p>
-          <a:p>
-            <a:r>
-              <a:rPr lang="en-US" dirty="0">
-                <a:solidFill>
-                  <a:schemeClr val="tx1"/>
-                </a:solidFill>
-              </a:rPr>
-              <a:t>Format Examples:</a:t>
-            </a:r>
-          </a:p>
-          <a:p>
-            <a:pPr lvl="1"/>
-            <a:r>
-              <a:rPr lang="en-US" dirty="0">
-                <a:solidFill>
-                  <a:schemeClr val="tx1"/>
-                </a:solidFill>
-              </a:rPr>
-              <a:t>MUL	R0,</a:t>
-            </a:r>
-            <a:r>
-              <a:rPr lang="en-US" b="1" dirty="0">
-                <a:solidFill>
-                  <a:srgbClr val="0000FF"/>
-                </a:solidFill>
-              </a:rPr>
-              <a:t>R1,R2</a:t>
-            </a:r>
-            <a:r>
-              <a:rPr lang="en-US" dirty="0">
-                <a:solidFill>
-                  <a:schemeClr val="tx1"/>
-                </a:solidFill>
-              </a:rPr>
-              <a:t>		// R0 </a:t>
-            </a:r>
-            <a:r>
-              <a:rPr lang="en-US" dirty="0">
-                <a:solidFill>
-                  <a:schemeClr val="tx1"/>
-                </a:solidFill>
                 <a:sym typeface="Wingdings" panose="05000000000000000000" pitchFamily="2" charset="2"/>
               </a:rPr>
-              <a:t>= </a:t>
-            </a:r>
-            <a:r>
-              <a:rPr lang="en-US" b="1" dirty="0">
-                <a:solidFill>
-                  <a:srgbClr val="0000FF"/>
-                </a:solidFill>
-                <a:sym typeface="Wingdings" panose="05000000000000000000" pitchFamily="2" charset="2"/>
-              </a:rPr>
-              <a:t>R1 × R2</a:t>
-            </a:r>
-          </a:p>
-          <a:p>
-            <a:pPr lvl="1"/>
-            <a:r>
-              <a:rPr lang="en-US" dirty="0">
-                <a:solidFill>
-                  <a:schemeClr val="tx1"/>
-                </a:solidFill>
-              </a:rPr>
-              <a:t>MLA	R0,</a:t>
-            </a:r>
-            <a:r>
-              <a:rPr lang="en-US" b="1" dirty="0">
-                <a:solidFill>
-                  <a:srgbClr val="0000FF"/>
-                </a:solidFill>
-              </a:rPr>
-              <a:t>R1,R2</a:t>
-            </a:r>
-            <a:r>
-              <a:rPr lang="en-US" dirty="0">
-                <a:solidFill>
-                  <a:schemeClr val="tx1"/>
-                </a:solidFill>
-              </a:rPr>
-              <a:t>,R3		// R0 </a:t>
-            </a:r>
-            <a:r>
-              <a:rPr lang="en-US" dirty="0">
-                <a:solidFill>
-                  <a:schemeClr val="tx1"/>
-                </a:solidFill>
-                <a:sym typeface="Wingdings" panose="05000000000000000000" pitchFamily="2" charset="2"/>
-              </a:rPr>
-              <a:t>= R3 + </a:t>
-            </a:r>
-            <a:r>
-              <a:rPr lang="en-US" b="1" dirty="0">
-                <a:solidFill>
-                  <a:srgbClr val="0000FF"/>
-                </a:solidFill>
-                <a:sym typeface="Wingdings" panose="05000000000000000000" pitchFamily="2" charset="2"/>
-              </a:rPr>
-              <a:t>R1 × R2</a:t>
-            </a:r>
-          </a:p>
-          <a:p>
-            <a:pPr lvl="1"/>
-            <a:r>
-              <a:rPr lang="en-US" dirty="0">
-                <a:solidFill>
-                  <a:schemeClr val="tx1"/>
-                </a:solidFill>
-              </a:rPr>
-              <a:t>MLS	R0,</a:t>
-            </a:r>
-            <a:r>
-              <a:rPr lang="en-US" b="1" dirty="0">
-                <a:solidFill>
-                  <a:srgbClr val="0000FF"/>
-                </a:solidFill>
-              </a:rPr>
-              <a:t>R1,R2</a:t>
-            </a:r>
-            <a:r>
-              <a:rPr lang="en-US" dirty="0">
-                <a:solidFill>
-                  <a:schemeClr val="tx1"/>
-                </a:solidFill>
-              </a:rPr>
-              <a:t>,R3		// R0 </a:t>
-            </a:r>
-            <a:r>
-              <a:rPr lang="en-US" dirty="0">
-                <a:solidFill>
-                  <a:schemeClr val="tx1"/>
-                </a:solidFill>
-                <a:sym typeface="Wingdings" panose="05000000000000000000" pitchFamily="2" charset="2"/>
-              </a:rPr>
-              <a:t>= R3 -  </a:t>
-            </a:r>
-            <a:r>
-              <a:rPr lang="en-US" b="1" dirty="0">
-                <a:solidFill>
-                  <a:srgbClr val="0000FF"/>
-                </a:solidFill>
-                <a:sym typeface="Wingdings" panose="05000000000000000000" pitchFamily="2" charset="2"/>
-              </a:rPr>
-              <a:t>R1 × R2</a:t>
-            </a:r>
-          </a:p>
-          <a:p>
-            <a:endParaRPr lang="en-US" dirty="0"/>
-          </a:p>
-          <a:p>
-            <a:r>
-              <a:rPr lang="en-US" dirty="0">
-                <a:solidFill>
-                  <a:schemeClr val="tx1"/>
-                </a:solidFill>
-              </a:rPr>
-              <a:t>Flags:</a:t>
-            </a:r>
-            <a:r>
-              <a:rPr lang="en-US" dirty="0"/>
-              <a:t> </a:t>
-            </a:r>
-            <a:r>
-              <a:rPr lang="en-US" dirty="0">
-                <a:solidFill>
-                  <a:srgbClr val="0070C0"/>
-                </a:solidFill>
-              </a:rPr>
-              <a:t>Append “S” (only MUL) to capture result characteristics in N and Z flags</a:t>
-            </a:r>
-          </a:p>
-          <a:p>
-            <a:endParaRPr lang="en-US" dirty="0"/>
-          </a:p>
-          <a:p>
-            <a:r>
-              <a:rPr lang="en-US" dirty="0">
-                <a:solidFill>
-                  <a:schemeClr val="tx1"/>
-                </a:solidFill>
-              </a:rPr>
-              <a:t>Overflow: </a:t>
-            </a:r>
-            <a:r>
-              <a:rPr lang="en-US" b="1" dirty="0">
-                <a:solidFill>
-                  <a:srgbClr val="FF0000"/>
-                </a:solidFill>
-              </a:rPr>
-              <a:t>May happen but impossible to detect!</a:t>
-            </a:r>
+              <a:t> SBC</a:t>
+            </a:r>
+            <a:endParaRPr lang="en-US" sz="2100" dirty="0">
+              <a:solidFill>
+                <a:srgbClr val="0070C0"/>
+              </a:solidFill>
+            </a:endParaRPr>
+          </a:p>
+          <a:p>
+            <a:endParaRPr lang="en-US" sz="2100" dirty="0"/>
+          </a:p>
+          <a:p>
+            <a:endParaRPr lang="en-US" sz="2100" dirty="0"/>
           </a:p>
         </p:txBody>
       </p:sp>
     </p:spTree>
     <p:extLst>
       <p:ext uri="{BB962C8B-B14F-4D97-AF65-F5344CB8AC3E}">
-        <p14:creationId xmlns:p14="http://schemas.microsoft.com/office/powerpoint/2010/main" val="3196419567"/>
+        <p14:creationId xmlns:p14="http://schemas.microsoft.com/office/powerpoint/2010/main" val="2046813644"/>
       </p:ext>
     </p:extLst>
   </p:cSld>
@@ -43310,8 +42987,8 @@
         </p:nvSpPr>
         <p:spPr>
           <a:xfrm>
-            <a:off x="936516" y="741171"/>
-            <a:ext cx="9643252" cy="734703"/>
+            <a:off x="936516" y="745181"/>
+            <a:ext cx="9466789" cy="686577"/>
           </a:xfrm>
         </p:spPr>
         <p:txBody>
@@ -43322,7 +42999,7 @@
           <a:p>
             <a:r>
               <a:rPr lang="en-US" dirty="0"/>
-              <a:t>Double-Length 32x32 Integer Multiplication</a:t>
+              <a:t>Single-Length 32x32 Integer Multiplication</a:t>
             </a:r>
           </a:p>
         </p:txBody>
@@ -43339,13 +43016,13 @@
         </p:nvSpPr>
         <p:spPr>
           <a:xfrm>
-            <a:off x="936515" y="1795670"/>
-            <a:ext cx="10425305" cy="4833730"/>
+            <a:off x="936515" y="1807701"/>
+            <a:ext cx="10441347" cy="4841752"/>
           </a:xfrm>
         </p:spPr>
         <p:txBody>
           <a:bodyPr>
-            <a:normAutofit fontScale="92500" lnSpcReduction="10000"/>
+            <a:normAutofit lnSpcReduction="10000"/>
           </a:bodyPr>
           <a:lstStyle/>
           <a:p>
@@ -43367,7 +43044,23 @@
                   <a:srgbClr val="0070C0"/>
                 </a:solidFill>
               </a:rPr>
-              <a:t>UMULL, SMULL, UMLAL, SMLAL</a:t>
+              <a:t>MUL{</a:t>
+            </a:r>
+            <a:r>
+              <a:rPr lang="en-US" b="1" dirty="0">
+                <a:solidFill>
+                  <a:srgbClr val="FF0000"/>
+                </a:solidFill>
+              </a:rPr>
+              <a:t>S</a:t>
+            </a:r>
+            <a:r>
+              <a:rPr lang="en-US" dirty="0">
+                <a:solidFill>
+                  <a:srgbClr val="0070C0"/>
+                </a:solidFill>
+              </a:rPr>
+              <a:t>}, MLA, MLS</a:t>
             </a:r>
           </a:p>
           <a:p>
@@ -43392,184 +43085,27 @@
                   <a:schemeClr val="tx1"/>
                 </a:solidFill>
               </a:rPr>
-              <a:t>vs. </a:t>
-            </a:r>
-            <a:r>
-              <a:rPr lang="en-US" b="1" dirty="0">
-                <a:solidFill>
-                  <a:srgbClr val="92D050"/>
-                </a:solidFill>
-              </a:rPr>
-              <a:t>Unsigned</a:t>
-            </a:r>
-            <a:r>
-              <a:rPr lang="en-US" dirty="0"/>
-              <a:t>: </a:t>
-            </a:r>
-            <a:r>
-              <a:rPr lang="en-US" dirty="0">
-                <a:solidFill>
-                  <a:srgbClr val="0070C0"/>
-                </a:solidFill>
-              </a:rPr>
-              <a:t>Use </a:t>
-            </a:r>
-            <a:r>
-              <a:rPr lang="en-US" b="1" dirty="0">
-                <a:solidFill>
-                  <a:srgbClr val="0070C0"/>
-                </a:solidFill>
-              </a:rPr>
-              <a:t>different</a:t>
-            </a:r>
-            <a:r>
-              <a:rPr lang="en-US" dirty="0">
-                <a:solidFill>
-                  <a:srgbClr val="0070C0"/>
-                </a:solidFill>
-              </a:rPr>
-              <a:t> instructions!</a:t>
-            </a:r>
-          </a:p>
-          <a:p>
-            <a:endParaRPr lang="en-US" dirty="0"/>
-          </a:p>
-          <a:p>
-            <a:r>
-              <a:rPr lang="en-US" b="1" dirty="0">
-                <a:solidFill>
-                  <a:srgbClr val="FF0000"/>
-                </a:solidFill>
-              </a:rPr>
-              <a:t>Signed</a:t>
+              <a:t>vs.</a:t>
             </a:r>
             <a:r>
               <a:rPr lang="en-US" dirty="0"/>
               <a:t> </a:t>
             </a:r>
             <a:r>
+              <a:rPr lang="en-US" b="1" dirty="0">
+                <a:solidFill>
+                  <a:srgbClr val="92D050"/>
+                </a:solidFill>
+              </a:rPr>
+              <a:t>Unsigned</a:t>
+            </a:r>
+            <a:r>
               <a:rPr lang="en-US" dirty="0">
                 <a:solidFill>
                   <a:schemeClr val="tx1"/>
                 </a:solidFill>
               </a:rPr>
-              <a:t>Instruction Formats:</a:t>
-            </a:r>
-          </a:p>
-          <a:p>
-            <a:pPr lvl="1"/>
-            <a:r>
-              <a:rPr lang="en-US" b="1" dirty="0">
-                <a:solidFill>
-                  <a:srgbClr val="FF0000"/>
-                </a:solidFill>
-              </a:rPr>
-              <a:t>S</a:t>
-            </a:r>
-            <a:r>
-              <a:rPr lang="en-US" dirty="0">
-                <a:solidFill>
-                  <a:schemeClr val="tx1"/>
-                </a:solidFill>
-              </a:rPr>
-              <a:t>MULL	R0,R1,</a:t>
-            </a:r>
-            <a:r>
-              <a:rPr lang="en-US" b="1" dirty="0">
-                <a:solidFill>
-                  <a:srgbClr val="0000FF"/>
-                </a:solidFill>
-              </a:rPr>
-              <a:t>R2,R3</a:t>
-            </a:r>
-            <a:r>
-              <a:rPr lang="en-US" dirty="0">
-                <a:solidFill>
-                  <a:schemeClr val="tx1"/>
-                </a:solidFill>
-              </a:rPr>
-              <a:t>		// R0.R1 </a:t>
-            </a:r>
-            <a:r>
-              <a:rPr lang="en-US" dirty="0">
-                <a:solidFill>
-                  <a:schemeClr val="tx1"/>
-                </a:solidFill>
-                <a:sym typeface="Wingdings" panose="05000000000000000000" pitchFamily="2" charset="2"/>
-              </a:rPr>
-              <a:t>=               </a:t>
-            </a:r>
-            <a:r>
-              <a:rPr lang="en-US" b="1" dirty="0">
-                <a:solidFill>
-                  <a:srgbClr val="0000FF"/>
-                </a:solidFill>
-                <a:sym typeface="Wingdings" panose="05000000000000000000" pitchFamily="2" charset="2"/>
-              </a:rPr>
-              <a:t>R2 × R3</a:t>
-            </a:r>
-          </a:p>
-          <a:p>
-            <a:pPr lvl="1"/>
-            <a:r>
-              <a:rPr lang="en-US" b="1" dirty="0">
-                <a:solidFill>
-                  <a:srgbClr val="FF0000"/>
-                </a:solidFill>
-              </a:rPr>
-              <a:t>S</a:t>
-            </a:r>
-            <a:r>
-              <a:rPr lang="en-US" dirty="0">
-                <a:solidFill>
-                  <a:schemeClr val="tx1"/>
-                </a:solidFill>
-              </a:rPr>
-              <a:t>MLAL	R0,R1,</a:t>
-            </a:r>
-            <a:r>
-              <a:rPr lang="en-US" b="1" dirty="0">
-                <a:solidFill>
-                  <a:srgbClr val="0000FF"/>
-                </a:solidFill>
-              </a:rPr>
-              <a:t>R2,R3</a:t>
-            </a:r>
-            <a:r>
-              <a:rPr lang="en-US" dirty="0">
-                <a:solidFill>
-                  <a:schemeClr val="tx1"/>
-                </a:solidFill>
-              </a:rPr>
-              <a:t>		// R0.R1 </a:t>
-            </a:r>
-            <a:r>
-              <a:rPr lang="en-US" dirty="0">
-                <a:solidFill>
-                  <a:schemeClr val="tx1"/>
-                </a:solidFill>
-                <a:sym typeface="Wingdings" panose="05000000000000000000" pitchFamily="2" charset="2"/>
-              </a:rPr>
-              <a:t>= R0.R1 + </a:t>
-            </a:r>
-            <a:r>
-              <a:rPr lang="en-US" b="1" dirty="0">
-                <a:solidFill>
-                  <a:srgbClr val="0000FF"/>
-                </a:solidFill>
-                <a:sym typeface="Wingdings" panose="05000000000000000000" pitchFamily="2" charset="2"/>
-              </a:rPr>
-              <a:t>R2 × R3</a:t>
-            </a:r>
-          </a:p>
-          <a:p>
-            <a:r>
-              <a:rPr lang="en-US" b="1" dirty="0">
-                <a:solidFill>
-                  <a:srgbClr val="92D050"/>
-                </a:solidFill>
-              </a:rPr>
-              <a:t>Unsigned</a:t>
+              <a:t>:</a:t>
             </a:r>
             <a:r>
               <a:rPr lang="en-US" dirty="0"/>
@@ -43578,21 +43114,58 @@
             <a:r>
               <a:rPr lang="en-US" dirty="0">
                 <a:solidFill>
+                  <a:srgbClr val="0070C0"/>
+                </a:solidFill>
+              </a:rPr>
+              <a:t>Use </a:t>
+            </a:r>
+            <a:r>
+              <a:rPr lang="en-US" b="1" dirty="0">
+                <a:solidFill>
+                  <a:srgbClr val="0070C0"/>
+                </a:solidFill>
+              </a:rPr>
+              <a:t>same</a:t>
+            </a:r>
+            <a:r>
+              <a:rPr lang="en-US" dirty="0">
+                <a:solidFill>
+                  <a:srgbClr val="0070C0"/>
+                </a:solidFill>
+              </a:rPr>
+              <a:t> instruction</a:t>
+            </a:r>
+          </a:p>
+          <a:p>
+            <a:endParaRPr lang="en-US" dirty="0"/>
+          </a:p>
+          <a:p>
+            <a:r>
+              <a:rPr lang="en-US" dirty="0">
+                <a:solidFill>
                   <a:schemeClr val="tx1"/>
                 </a:solidFill>
               </a:rPr>
-              <a:t>Instruction Formats:</a:t>
+              <a:t>Format Examples:</a:t>
             </a:r>
           </a:p>
           <a:p>
             <a:pPr lvl="1"/>
             <a:r>
+              <a:rPr lang="en-US" dirty="0">
+                <a:solidFill>
+                  <a:schemeClr val="tx1"/>
+                </a:solidFill>
+              </a:rPr>
+              <a:t>MUL	R0,</a:t>
+            </a:r>
+            <a:r>
               <a:rPr lang="en-US" b="1" dirty="0">
                 <a:solidFill>
-                  <a:srgbClr val="92D050"/>
-                </a:solidFill>
-              </a:rPr>
-              <a:t>U</a:t>
+                  <a:srgbClr val="0000FF"/>
+                </a:solidFill>
+              </a:rPr>
+              <a:t>R1,R2</a:t>
             </a:r>
             <a:r>
               <a:rPr lang="en-US" dirty="0">
@@ -43600,32 +43173,61 @@
                   <a:schemeClr val="tx1"/>
                 </a:solidFill>
               </a:rPr>
-              <a:t>MULL	R0,R1,</a:t>
+              <a:t>		// R0 </a:t>
+            </a:r>
+            <a:r>
+              <a:rPr lang="en-US" dirty="0">
+                <a:solidFill>
+                  <a:schemeClr val="tx1"/>
+                </a:solidFill>
+                <a:sym typeface="Wingdings" panose="05000000000000000000" pitchFamily="2" charset="2"/>
+              </a:rPr>
+              <a:t>= </a:t>
             </a:r>
             <a:r>
               <a:rPr lang="en-US" b="1" dirty="0">
                 <a:solidFill>
                   <a:srgbClr val="0000FF"/>
                 </a:solidFill>
-              </a:rPr>
-              <a:t>R2,R3</a:t>
-            </a:r>
+                <a:sym typeface="Wingdings" panose="05000000000000000000" pitchFamily="2" charset="2"/>
+              </a:rPr>
+              <a:t>R1 × R2</a:t>
+            </a:r>
+          </a:p>
+          <a:p>
+            <a:pPr lvl="1"/>
             <a:r>
               <a:rPr lang="en-US" dirty="0">
                 <a:solidFill>
                   <a:schemeClr val="tx1"/>
                 </a:solidFill>
               </a:rPr>
-              <a:t>		// R0.R1 </a:t>
+              <a:t>MLA	R0,</a:t>
+            </a:r>
+            <a:r>
+              <a:rPr lang="en-US" b="1" dirty="0">
+                <a:solidFill>
+                  <a:srgbClr val="0000FF"/>
+                </a:solidFill>
+              </a:rPr>
+              <a:t>R1,R2</a:t>
             </a:r>
             <a:r>
               <a:rPr lang="en-US" dirty="0">
                 <a:solidFill>
                   <a:schemeClr val="tx1"/>
                 </a:solidFill>
+              </a:rPr>
+              <a:t>,R3		// R0 </a:t>
+            </a:r>
+            <a:r>
+              <a:rPr lang="en-US" dirty="0">
+                <a:solidFill>
+                  <a:schemeClr val="tx1"/>
+                </a:solidFill>
                 <a:sym typeface="Wingdings" panose="05000000000000000000" pitchFamily="2" charset="2"/>
               </a:rPr>
-              <a:t>=               </a:t>
+              <a:t>= R3 + </a:t>
             </a:r>
             <a:r>
               <a:rPr lang="en-US" b="1" dirty="0">
@@ -43634,18 +43236,26 @@
                 </a:solidFill>
                 <a:sym typeface="Wingdings" panose="05000000000000000000" pitchFamily="2" charset="2"/>
               </a:rPr>
-              <a:t>R2 × R3</a:t>
+              <a:t>R1 × R2</a:t>
             </a:r>
           </a:p>
           <a:p>
             <a:pPr lvl="1"/>
             <a:r>
+              <a:rPr lang="en-US" dirty="0">
+                <a:solidFill>
+                  <a:schemeClr val="tx1"/>
+                </a:solidFill>
+              </a:rPr>
+              <a:t>MLS	R0,</a:t>
+            </a:r>
+            <a:r>
               <a:rPr lang="en-US" b="1" dirty="0">
                 <a:solidFill>
-                  <a:srgbClr val="92D050"/>
-                </a:solidFill>
-              </a:rPr>
-              <a:t>U</a:t>
+                  <a:srgbClr val="0000FF"/>
+                </a:solidFill>
+              </a:rPr>
+              <a:t>R1,R2</a:t>
             </a:r>
             <a:r>
               <a:rPr lang="en-US" dirty="0">
@@ -43653,84 +43263,71 @@
                   <a:schemeClr val="tx1"/>
                 </a:solidFill>
               </a:rPr>
-              <a:t>MLAL	R0,R1,</a:t>
+              <a:t>,R3		// R0 </a:t>
+            </a:r>
+            <a:r>
+              <a:rPr lang="en-US" dirty="0">
+                <a:solidFill>
+                  <a:schemeClr val="tx1"/>
+                </a:solidFill>
+                <a:sym typeface="Wingdings" panose="05000000000000000000" pitchFamily="2" charset="2"/>
+              </a:rPr>
+              <a:t>= R3 -  </a:t>
             </a:r>
             <a:r>
               <a:rPr lang="en-US" b="1" dirty="0">
                 <a:solidFill>
                   <a:srgbClr val="0000FF"/>
                 </a:solidFill>
-              </a:rPr>
-              <a:t>R2,R3</a:t>
-            </a:r>
+                <a:sym typeface="Wingdings" panose="05000000000000000000" pitchFamily="2" charset="2"/>
+              </a:rPr>
+              <a:t>R1 × R2</a:t>
+            </a:r>
+          </a:p>
+          <a:p>
+            <a:endParaRPr lang="en-US" dirty="0"/>
+          </a:p>
+          <a:p>
             <a:r>
               <a:rPr lang="en-US" dirty="0">
                 <a:solidFill>
                   <a:schemeClr val="tx1"/>
                 </a:solidFill>
               </a:rPr>
-              <a:t>		// R0.R1 </a:t>
+              <a:t>Flags:</a:t>
+            </a:r>
+            <a:r>
+              <a:rPr lang="en-US" dirty="0"/>
+              <a:t> </a:t>
             </a:r>
             <a:r>
               <a:rPr lang="en-US" dirty="0">
                 <a:solidFill>
+                  <a:srgbClr val="0070C0"/>
+                </a:solidFill>
+              </a:rPr>
+              <a:t>Append “S” (only MUL) to capture result characteristics in N and Z flags</a:t>
+            </a:r>
+          </a:p>
+          <a:p>
+            <a:endParaRPr lang="en-US" dirty="0"/>
+          </a:p>
+          <a:p>
+            <a:r>
+              <a:rPr lang="en-US" dirty="0">
+                <a:solidFill>
                   <a:schemeClr val="tx1"/>
                 </a:solidFill>
-                <a:sym typeface="Wingdings" panose="05000000000000000000" pitchFamily="2" charset="2"/>
-              </a:rPr>
-              <a:t>= R0.R1 + </a:t>
+              </a:rPr>
+              <a:t>Overflow: </a:t>
             </a:r>
             <a:r>
               <a:rPr lang="en-US" b="1" dirty="0">
                 <a:solidFill>
-                  <a:srgbClr val="0000FF"/>
-                </a:solidFill>
-                <a:sym typeface="Wingdings" panose="05000000000000000000" pitchFamily="2" charset="2"/>
-              </a:rPr>
-              <a:t>R2 × R3</a:t>
-            </a:r>
-          </a:p>
-          <a:p>
-            <a:endParaRPr lang="en-US" dirty="0"/>
-          </a:p>
-          <a:p>
-            <a:r>
-              <a:rPr lang="en-US" dirty="0">
-                <a:solidFill>
-                  <a:schemeClr val="tx1"/>
-                </a:solidFill>
-              </a:rPr>
-              <a:t>Flags:</a:t>
-            </a:r>
-            <a:r>
-              <a:rPr lang="en-US" dirty="0"/>
-              <a:t>      </a:t>
-            </a:r>
-            <a:r>
-              <a:rPr lang="en-US" b="1" dirty="0">
-                <a:solidFill>
                   <a:srgbClr val="FF0000"/>
                 </a:solidFill>
               </a:rPr>
-              <a:t>Unaffected!</a:t>
-            </a:r>
-          </a:p>
-          <a:p>
-            <a:r>
-              <a:rPr lang="en-US" dirty="0">
-                <a:solidFill>
-                  <a:schemeClr val="tx1"/>
-                </a:solidFill>
-              </a:rPr>
-              <a:t>Overflow: </a:t>
-            </a:r>
-            <a:r>
-              <a:rPr lang="en-US" b="1" dirty="0">
-                <a:solidFill>
-                  <a:srgbClr val="FF0000"/>
-                </a:solidFill>
-              </a:rPr>
-              <a:t>Can’t happen</a:t>
+              <a:t>May happen but impossible to detect!</a:t>
             </a:r>
           </a:p>
         </p:txBody>
@@ -43738,7 +43335,7 @@
     </p:spTree>
     <p:extLst>
       <p:ext uri="{BB962C8B-B14F-4D97-AF65-F5344CB8AC3E}">
-        <p14:creationId xmlns:p14="http://schemas.microsoft.com/office/powerpoint/2010/main" val="228742505"/>
+        <p14:creationId xmlns:p14="http://schemas.microsoft.com/office/powerpoint/2010/main" val="3196419567"/>
       </p:ext>
     </p:extLst>
   </p:cSld>
@@ -43777,8 +43374,8 @@
         </p:nvSpPr>
         <p:spPr>
           <a:xfrm>
-            <a:off x="940526" y="745181"/>
-            <a:ext cx="8315769" cy="746735"/>
+            <a:off x="936516" y="741171"/>
+            <a:ext cx="9643252" cy="734703"/>
           </a:xfrm>
         </p:spPr>
         <p:txBody>
@@ -43789,7 +43386,7 @@
           <a:p>
             <a:r>
               <a:rPr lang="en-US" dirty="0"/>
-              <a:t>Single-Length 32÷32 Integer Division</a:t>
+              <a:t>Double-Length 32x32 Integer Multiplication</a:t>
             </a:r>
           </a:p>
         </p:txBody>
@@ -43806,8 +43403,8 @@
         </p:nvSpPr>
         <p:spPr>
           <a:xfrm>
-            <a:off x="940525" y="1806366"/>
-            <a:ext cx="10409263" cy="4835066"/>
+            <a:off x="936515" y="1795670"/>
+            <a:ext cx="10425305" cy="4833730"/>
           </a:xfrm>
         </p:spPr>
         <p:txBody>
@@ -43822,65 +43419,7 @@
                   <a:schemeClr val="tx1"/>
                 </a:solidFill>
               </a:rPr>
-              <a:t>Instructions: </a:t>
-            </a:r>
-            <a:r>
-              <a:rPr lang="en-US" b="1" dirty="0">
-                <a:solidFill>
-                  <a:srgbClr val="FF0000"/>
-                </a:solidFill>
-              </a:rPr>
-              <a:t>S</a:t>
-            </a:r>
-            <a:r>
-              <a:rPr lang="en-US" dirty="0">
-                <a:solidFill>
-                  <a:srgbClr val="0070C0"/>
-                </a:solidFill>
-              </a:rPr>
-              <a:t>DIV</a:t>
-            </a:r>
-            <a:r>
-              <a:rPr lang="en-US" dirty="0">
-                <a:solidFill>
-                  <a:schemeClr val="tx1"/>
-                </a:solidFill>
-              </a:rPr>
-              <a:t>,</a:t>
-            </a:r>
-            <a:r>
-              <a:rPr lang="en-US" dirty="0">
-                <a:solidFill>
-                  <a:srgbClr val="0070C0"/>
-                </a:solidFill>
-              </a:rPr>
-              <a:t> </a:t>
-            </a:r>
-            <a:r>
-              <a:rPr lang="en-US" b="1" dirty="0">
-                <a:solidFill>
-                  <a:srgbClr val="92D050"/>
-                </a:solidFill>
-              </a:rPr>
-              <a:t>U</a:t>
-            </a:r>
-            <a:r>
-              <a:rPr lang="en-US" dirty="0">
-                <a:solidFill>
-                  <a:srgbClr val="0070C0"/>
-                </a:solidFill>
-              </a:rPr>
-              <a:t>DIV</a:t>
-            </a:r>
-          </a:p>
-          <a:p>
-            <a:r>
-              <a:rPr lang="en-US" b="1" dirty="0">
-                <a:solidFill>
-                  <a:srgbClr val="FF0000"/>
-                </a:solidFill>
-              </a:rPr>
-              <a:t>Signed</a:t>
+              <a:t>Instructions:</a:t>
             </a:r>
             <a:r>
               <a:rPr lang="en-US" dirty="0"/>
@@ -43889,16 +43428,37 @@
             <a:r>
               <a:rPr lang="en-US" dirty="0">
                 <a:solidFill>
-                  <a:schemeClr val="tx1"/>
-                </a:solidFill>
-              </a:rPr>
-              <a:t>vs.</a:t>
+                  <a:srgbClr val="0070C0"/>
+                </a:solidFill>
+              </a:rPr>
+              <a:t>UMULL, SMULL, UMLAL, SMLAL</a:t>
+            </a:r>
+          </a:p>
+          <a:p>
+            <a:endParaRPr lang="en-US" dirty="0"/>
+          </a:p>
+          <a:p>
+            <a:r>
+              <a:rPr lang="en-US" b="1" dirty="0">
+                <a:solidFill>
+                  <a:srgbClr val="FF0000"/>
+                </a:solidFill>
+              </a:rPr>
+              <a:t>Signed</a:t>
             </a:r>
             <a:r>
               <a:rPr lang="en-US" dirty="0"/>
               <a:t> </a:t>
             </a:r>
             <a:r>
+              <a:rPr lang="en-US" dirty="0">
+                <a:solidFill>
+                  <a:schemeClr val="tx1"/>
+                </a:solidFill>
+              </a:rPr>
+              <a:t>vs. </a:t>
+            </a:r>
+            <a:r>
               <a:rPr lang="en-US" b="1" dirty="0">
                 <a:solidFill>
                   <a:srgbClr val="92D050"/>
@@ -43919,9 +43479,9 @@
               <a:t>Use </a:t>
             </a:r>
             <a:r>
-              <a:rPr lang="en-US" dirty="0">
-                <a:solidFill>
-                  <a:srgbClr val="FF0000"/>
+              <a:rPr lang="en-US" b="1" dirty="0">
+                <a:solidFill>
+                  <a:srgbClr val="0070C0"/>
                 </a:solidFill>
               </a:rPr>
               <a:t>different</a:t>
@@ -43957,7 +43517,7 @@
                   <a:schemeClr val="tx1"/>
                 </a:solidFill>
               </a:rPr>
-              <a:t>Instruction Format:</a:t>
+              <a:t>Instruction Formats:</a:t>
             </a:r>
           </a:p>
           <a:p>
@@ -43973,19 +43533,97 @@
             <a:r>
               <a:rPr lang="en-US" dirty="0">
                 <a:solidFill>
-                  <a:srgbClr val="0070C0"/>
-                </a:solidFill>
-              </a:rPr>
-              <a:t>DIV	R0,R1,R2		// R0 </a:t>
+                  <a:schemeClr val="tx1"/>
+                </a:solidFill>
+              </a:rPr>
+              <a:t>MULL	R0,R1,</a:t>
+            </a:r>
+            <a:r>
+              <a:rPr lang="en-US" b="1" dirty="0">
+                <a:solidFill>
+                  <a:srgbClr val="0000FF"/>
+                </a:solidFill>
+              </a:rPr>
+              <a:t>R2,R3</a:t>
             </a:r>
             <a:r>
               <a:rPr lang="en-US" dirty="0">
                 <a:solidFill>
-                  <a:srgbClr val="0070C0"/>
+                  <a:schemeClr val="tx1"/>
+                </a:solidFill>
+              </a:rPr>
+              <a:t>		// R0.R1 </a:t>
+            </a:r>
+            <a:r>
+              <a:rPr lang="en-US" dirty="0">
+                <a:solidFill>
+                  <a:schemeClr val="tx1"/>
                 </a:solidFill>
                 <a:sym typeface="Wingdings" panose="05000000000000000000" pitchFamily="2" charset="2"/>
               </a:rPr>
-              <a:t>= R1 ÷ R2</a:t>
+              <a:t>=               </a:t>
+            </a:r>
+            <a:r>
+              <a:rPr lang="en-US" b="1" dirty="0">
+                <a:solidFill>
+                  <a:srgbClr val="0000FF"/>
+                </a:solidFill>
+                <a:sym typeface="Wingdings" panose="05000000000000000000" pitchFamily="2" charset="2"/>
+              </a:rPr>
+              <a:t>R2 × R3</a:t>
+            </a:r>
+          </a:p>
+          <a:p>
+            <a:pPr lvl="1"/>
+            <a:r>
+              <a:rPr lang="en-US" b="1" dirty="0">
+                <a:solidFill>
+                  <a:srgbClr val="FF0000"/>
+                </a:solidFill>
+              </a:rPr>
+              <a:t>S</a:t>
+            </a:r>
+            <a:r>
+              <a:rPr lang="en-US" dirty="0">
+                <a:solidFill>
+                  <a:schemeClr val="tx1"/>
+                </a:solidFill>
+              </a:rPr>
+              <a:t>MLAL	R0,R1,</a:t>
+            </a:r>
+            <a:r>
+              <a:rPr lang="en-US" b="1" dirty="0">
+                <a:solidFill>
+                  <a:srgbClr val="0000FF"/>
+                </a:solidFill>
+              </a:rPr>
+              <a:t>R2,R3</a:t>
+            </a:r>
+            <a:r>
+              <a:rPr lang="en-US" dirty="0">
+                <a:solidFill>
+                  <a:schemeClr val="tx1"/>
+                </a:solidFill>
+              </a:rPr>
+              <a:t>		// R0.R1 </a:t>
+            </a:r>
+            <a:r>
+              <a:rPr lang="en-US" dirty="0">
+                <a:solidFill>
+                  <a:schemeClr val="tx1"/>
+                </a:solidFill>
+                <a:sym typeface="Wingdings" panose="05000000000000000000" pitchFamily="2" charset="2"/>
+              </a:rPr>
+              <a:t>= R0.R1 + </a:t>
+            </a:r>
+            <a:r>
+              <a:rPr lang="en-US" b="1" dirty="0">
+                <a:solidFill>
+                  <a:srgbClr val="0000FF"/>
+                </a:solidFill>
+                <a:sym typeface="Wingdings" panose="05000000000000000000" pitchFamily="2" charset="2"/>
+              </a:rPr>
+              <a:t>R2 × R3</a:t>
             </a:r>
           </a:p>
           <a:p>
@@ -44007,7 +43645,7 @@
                   <a:schemeClr val="tx1"/>
                 </a:solidFill>
               </a:rPr>
-              <a:t>Instruction Format:</a:t>
+              <a:t>Instruction Formats:</a:t>
             </a:r>
           </a:p>
           <a:p>
@@ -44023,19 +43661,97 @@
             <a:r>
               <a:rPr lang="en-US" dirty="0">
                 <a:solidFill>
-                  <a:srgbClr val="0070C0"/>
-                </a:solidFill>
-              </a:rPr>
-              <a:t>DIV	R0,R1,R2		// R0 </a:t>
+                  <a:schemeClr val="tx1"/>
+                </a:solidFill>
+              </a:rPr>
+              <a:t>MULL	R0,R1,</a:t>
+            </a:r>
+            <a:r>
+              <a:rPr lang="en-US" b="1" dirty="0">
+                <a:solidFill>
+                  <a:srgbClr val="0000FF"/>
+                </a:solidFill>
+              </a:rPr>
+              <a:t>R2,R3</a:t>
             </a:r>
             <a:r>
               <a:rPr lang="en-US" dirty="0">
                 <a:solidFill>
-                  <a:srgbClr val="0070C0"/>
+                  <a:schemeClr val="tx1"/>
+                </a:solidFill>
+              </a:rPr>
+              <a:t>		// R0.R1 </a:t>
+            </a:r>
+            <a:r>
+              <a:rPr lang="en-US" dirty="0">
+                <a:solidFill>
+                  <a:schemeClr val="tx1"/>
                 </a:solidFill>
                 <a:sym typeface="Wingdings" panose="05000000000000000000" pitchFamily="2" charset="2"/>
               </a:rPr>
-              <a:t>= R1 ÷ R2</a:t>
+              <a:t>=               </a:t>
+            </a:r>
+            <a:r>
+              <a:rPr lang="en-US" b="1" dirty="0">
+                <a:solidFill>
+                  <a:srgbClr val="0000FF"/>
+                </a:solidFill>
+                <a:sym typeface="Wingdings" panose="05000000000000000000" pitchFamily="2" charset="2"/>
+              </a:rPr>
+              <a:t>R2 × R3</a:t>
+            </a:r>
+          </a:p>
+          <a:p>
+            <a:pPr lvl="1"/>
+            <a:r>
+              <a:rPr lang="en-US" b="1" dirty="0">
+                <a:solidFill>
+                  <a:srgbClr val="92D050"/>
+                </a:solidFill>
+              </a:rPr>
+              <a:t>U</a:t>
+            </a:r>
+            <a:r>
+              <a:rPr lang="en-US" dirty="0">
+                <a:solidFill>
+                  <a:schemeClr val="tx1"/>
+                </a:solidFill>
+              </a:rPr>
+              <a:t>MLAL	R0,R1,</a:t>
+            </a:r>
+            <a:r>
+              <a:rPr lang="en-US" b="1" dirty="0">
+                <a:solidFill>
+                  <a:srgbClr val="0000FF"/>
+                </a:solidFill>
+              </a:rPr>
+              <a:t>R2,R3</a:t>
+            </a:r>
+            <a:r>
+              <a:rPr lang="en-US" dirty="0">
+                <a:solidFill>
+                  <a:schemeClr val="tx1"/>
+                </a:solidFill>
+              </a:rPr>
+              <a:t>		// R0.R1 </a:t>
+            </a:r>
+            <a:r>
+              <a:rPr lang="en-US" dirty="0">
+                <a:solidFill>
+                  <a:schemeClr val="tx1"/>
+                </a:solidFill>
+                <a:sym typeface="Wingdings" panose="05000000000000000000" pitchFamily="2" charset="2"/>
+              </a:rPr>
+              <a:t>= R0.R1 + </a:t>
+            </a:r>
+            <a:r>
+              <a:rPr lang="en-US" b="1" dirty="0">
+                <a:solidFill>
+                  <a:srgbClr val="0000FF"/>
+                </a:solidFill>
+                <a:sym typeface="Wingdings" panose="05000000000000000000" pitchFamily="2" charset="2"/>
+              </a:rPr>
+              <a:t>R2 × R3</a:t>
             </a:r>
           </a:p>
           <a:p>
@@ -44052,7 +43768,7 @@
             </a:r>
             <a:r>
               <a:rPr lang="en-US" dirty="0"/>
-              <a:t> </a:t>
+              <a:t>      </a:t>
             </a:r>
             <a:r>
               <a:rPr lang="en-US" b="1" dirty="0">
@@ -44060,11 +43776,8 @@
                   <a:srgbClr val="FF0000"/>
                 </a:solidFill>
               </a:rPr>
-              <a:t>Unaffected</a:t>
-            </a:r>
-          </a:p>
-          <a:p>
-            <a:endParaRPr lang="en-US" dirty="0"/>
+              <a:t>Unaffected!</a:t>
+            </a:r>
           </a:p>
           <a:p>
             <a:r>
@@ -44073,29 +43786,15 @@
                   <a:schemeClr val="tx1"/>
                 </a:solidFill>
               </a:rPr>
-              <a:t>Overflow:</a:t>
-            </a:r>
-          </a:p>
-          <a:p>
-            <a:pPr lvl="1"/>
-            <a:r>
-              <a:rPr lang="en-US" dirty="0">
-                <a:solidFill>
-                  <a:srgbClr val="0070C0"/>
-                </a:solidFill>
-              </a:rPr>
-              <a:t>Division by zero</a:t>
-            </a:r>
-          </a:p>
-          <a:p>
-            <a:pPr lvl="1"/>
-            <a:r>
-              <a:rPr lang="en-US" dirty="0">
-                <a:solidFill>
-                  <a:srgbClr val="0070C0"/>
-                </a:solidFill>
-              </a:rPr>
-              <a:t>Full-scale negative divided by -1</a:t>
+              <a:t>Overflow: </a:t>
+            </a:r>
+            <a:r>
+              <a:rPr lang="en-US" b="1" dirty="0">
+                <a:solidFill>
+                  <a:srgbClr val="FF0000"/>
+                </a:solidFill>
+              </a:rPr>
+              <a:t>Can’t happen</a:t>
             </a:r>
           </a:p>
         </p:txBody>
@@ -44103,7 +43802,7 @@
     </p:spTree>
     <p:extLst>
       <p:ext uri="{BB962C8B-B14F-4D97-AF65-F5344CB8AC3E}">
-        <p14:creationId xmlns:p14="http://schemas.microsoft.com/office/powerpoint/2010/main" val="3769027795"/>
+        <p14:creationId xmlns:p14="http://schemas.microsoft.com/office/powerpoint/2010/main" val="228742505"/>
       </p:ext>
     </p:extLst>
   </p:cSld>
@@ -44140,6 +43839,371 @@
             <p:ph type="title"/>
           </p:nvPr>
         </p:nvSpPr>
+        <p:spPr>
+          <a:xfrm>
+            <a:off x="940526" y="745181"/>
+            <a:ext cx="8315769" cy="746735"/>
+          </a:xfrm>
+        </p:spPr>
+        <p:txBody>
+          <a:bodyPr>
+            <a:normAutofit/>
+          </a:bodyPr>
+          <a:lstStyle/>
+          <a:p>
+            <a:r>
+              <a:rPr lang="en-US" dirty="0"/>
+              <a:t>Single-Length 32÷32 Integer Division</a:t>
+            </a:r>
+          </a:p>
+        </p:txBody>
+      </p:sp>
+      <p:sp>
+        <p:nvSpPr>
+          <p:cNvPr id="3" name="Content Placeholder 2"/>
+          <p:cNvSpPr>
+            <a:spLocks noGrp="1"/>
+          </p:cNvSpPr>
+          <p:nvPr>
+            <p:ph idx="1"/>
+          </p:nvPr>
+        </p:nvSpPr>
+        <p:spPr>
+          <a:xfrm>
+            <a:off x="940525" y="1806366"/>
+            <a:ext cx="10409263" cy="4835066"/>
+          </a:xfrm>
+        </p:spPr>
+        <p:txBody>
+          <a:bodyPr>
+            <a:normAutofit fontScale="92500" lnSpcReduction="10000"/>
+          </a:bodyPr>
+          <a:lstStyle/>
+          <a:p>
+            <a:r>
+              <a:rPr lang="en-US" dirty="0">
+                <a:solidFill>
+                  <a:schemeClr val="tx1"/>
+                </a:solidFill>
+              </a:rPr>
+              <a:t>Instructions: </a:t>
+            </a:r>
+            <a:r>
+              <a:rPr lang="en-US" b="1" dirty="0">
+                <a:solidFill>
+                  <a:srgbClr val="FF0000"/>
+                </a:solidFill>
+              </a:rPr>
+              <a:t>S</a:t>
+            </a:r>
+            <a:r>
+              <a:rPr lang="en-US" dirty="0">
+                <a:solidFill>
+                  <a:srgbClr val="0070C0"/>
+                </a:solidFill>
+              </a:rPr>
+              <a:t>DIV</a:t>
+            </a:r>
+            <a:r>
+              <a:rPr lang="en-US" dirty="0">
+                <a:solidFill>
+                  <a:schemeClr val="tx1"/>
+                </a:solidFill>
+              </a:rPr>
+              <a:t>,</a:t>
+            </a:r>
+            <a:r>
+              <a:rPr lang="en-US" dirty="0">
+                <a:solidFill>
+                  <a:srgbClr val="0070C0"/>
+                </a:solidFill>
+              </a:rPr>
+              <a:t> </a:t>
+            </a:r>
+            <a:r>
+              <a:rPr lang="en-US" b="1" dirty="0">
+                <a:solidFill>
+                  <a:srgbClr val="92D050"/>
+                </a:solidFill>
+              </a:rPr>
+              <a:t>U</a:t>
+            </a:r>
+            <a:r>
+              <a:rPr lang="en-US" dirty="0">
+                <a:solidFill>
+                  <a:srgbClr val="0070C0"/>
+                </a:solidFill>
+              </a:rPr>
+              <a:t>DIV</a:t>
+            </a:r>
+          </a:p>
+          <a:p>
+            <a:r>
+              <a:rPr lang="en-US" b="1" dirty="0">
+                <a:solidFill>
+                  <a:srgbClr val="FF0000"/>
+                </a:solidFill>
+              </a:rPr>
+              <a:t>Signed</a:t>
+            </a:r>
+            <a:r>
+              <a:rPr lang="en-US" dirty="0"/>
+              <a:t> </a:t>
+            </a:r>
+            <a:r>
+              <a:rPr lang="en-US" dirty="0">
+                <a:solidFill>
+                  <a:schemeClr val="tx1"/>
+                </a:solidFill>
+              </a:rPr>
+              <a:t>vs.</a:t>
+            </a:r>
+            <a:r>
+              <a:rPr lang="en-US" dirty="0"/>
+              <a:t> </a:t>
+            </a:r>
+            <a:r>
+              <a:rPr lang="en-US" b="1" dirty="0">
+                <a:solidFill>
+                  <a:srgbClr val="92D050"/>
+                </a:solidFill>
+              </a:rPr>
+              <a:t>Unsigned</a:t>
+            </a:r>
+            <a:r>
+              <a:rPr lang="en-US" dirty="0"/>
+              <a:t>: </a:t>
+            </a:r>
+            <a:r>
+              <a:rPr lang="en-US" dirty="0">
+                <a:solidFill>
+                  <a:srgbClr val="0070C0"/>
+                </a:solidFill>
+              </a:rPr>
+              <a:t>Use </a:t>
+            </a:r>
+            <a:r>
+              <a:rPr lang="en-US" dirty="0">
+                <a:solidFill>
+                  <a:srgbClr val="FF0000"/>
+                </a:solidFill>
+              </a:rPr>
+              <a:t>different</a:t>
+            </a:r>
+            <a:r>
+              <a:rPr lang="en-US" dirty="0">
+                <a:solidFill>
+                  <a:srgbClr val="0070C0"/>
+                </a:solidFill>
+              </a:rPr>
+              <a:t> instructions!</a:t>
+            </a:r>
+          </a:p>
+          <a:p>
+            <a:endParaRPr lang="en-US" dirty="0"/>
+          </a:p>
+          <a:p>
+            <a:r>
+              <a:rPr lang="en-US" b="1" dirty="0">
+                <a:solidFill>
+                  <a:srgbClr val="FF0000"/>
+                </a:solidFill>
+              </a:rPr>
+              <a:t>Signed</a:t>
+            </a:r>
+            <a:r>
+              <a:rPr lang="en-US" dirty="0"/>
+              <a:t> </a:t>
+            </a:r>
+            <a:r>
+              <a:rPr lang="en-US" dirty="0">
+                <a:solidFill>
+                  <a:schemeClr val="tx1"/>
+                </a:solidFill>
+              </a:rPr>
+              <a:t>Instruction Format:</a:t>
+            </a:r>
+          </a:p>
+          <a:p>
+            <a:pPr lvl="1"/>
+            <a:r>
+              <a:rPr lang="en-US" b="1" dirty="0">
+                <a:solidFill>
+                  <a:srgbClr val="FF0000"/>
+                </a:solidFill>
+              </a:rPr>
+              <a:t>S</a:t>
+            </a:r>
+            <a:r>
+              <a:rPr lang="en-US" dirty="0">
+                <a:solidFill>
+                  <a:srgbClr val="0070C0"/>
+                </a:solidFill>
+              </a:rPr>
+              <a:t>DIV	R0,R1,R2		// R0 </a:t>
+            </a:r>
+            <a:r>
+              <a:rPr lang="en-US" dirty="0">
+                <a:solidFill>
+                  <a:srgbClr val="0070C0"/>
+                </a:solidFill>
+                <a:sym typeface="Wingdings" panose="05000000000000000000" pitchFamily="2" charset="2"/>
+              </a:rPr>
+              <a:t>= R1 ÷ R2</a:t>
+            </a:r>
+          </a:p>
+          <a:p>
+            <a:r>
+              <a:rPr lang="en-US" b="1" dirty="0">
+                <a:solidFill>
+                  <a:srgbClr val="92D050"/>
+                </a:solidFill>
+              </a:rPr>
+              <a:t>Unsigned</a:t>
+            </a:r>
+            <a:r>
+              <a:rPr lang="en-US" dirty="0"/>
+              <a:t> </a:t>
+            </a:r>
+            <a:r>
+              <a:rPr lang="en-US" dirty="0">
+                <a:solidFill>
+                  <a:schemeClr val="tx1"/>
+                </a:solidFill>
+              </a:rPr>
+              <a:t>Instruction Format:</a:t>
+            </a:r>
+          </a:p>
+          <a:p>
+            <a:pPr lvl="1"/>
+            <a:r>
+              <a:rPr lang="en-US" b="1" dirty="0">
+                <a:solidFill>
+                  <a:srgbClr val="92D050"/>
+                </a:solidFill>
+              </a:rPr>
+              <a:t>U</a:t>
+            </a:r>
+            <a:r>
+              <a:rPr lang="en-US" dirty="0">
+                <a:solidFill>
+                  <a:srgbClr val="0070C0"/>
+                </a:solidFill>
+              </a:rPr>
+              <a:t>DIV	R0,R1,R2		// R0 </a:t>
+            </a:r>
+            <a:r>
+              <a:rPr lang="en-US" dirty="0">
+                <a:solidFill>
+                  <a:srgbClr val="0070C0"/>
+                </a:solidFill>
+                <a:sym typeface="Wingdings" panose="05000000000000000000" pitchFamily="2" charset="2"/>
+              </a:rPr>
+              <a:t>= R1 ÷ R2</a:t>
+            </a:r>
+          </a:p>
+          <a:p>
+            <a:endParaRPr lang="en-US" dirty="0"/>
+          </a:p>
+          <a:p>
+            <a:r>
+              <a:rPr lang="en-US" dirty="0">
+                <a:solidFill>
+                  <a:schemeClr val="tx1"/>
+                </a:solidFill>
+              </a:rPr>
+              <a:t>Flags:</a:t>
+            </a:r>
+            <a:r>
+              <a:rPr lang="en-US" dirty="0"/>
+              <a:t> </a:t>
+            </a:r>
+            <a:r>
+              <a:rPr lang="en-US" b="1" dirty="0">
+                <a:solidFill>
+                  <a:srgbClr val="FF0000"/>
+                </a:solidFill>
+              </a:rPr>
+              <a:t>Unaffected</a:t>
+            </a:r>
+          </a:p>
+          <a:p>
+            <a:endParaRPr lang="en-US" dirty="0"/>
+          </a:p>
+          <a:p>
+            <a:r>
+              <a:rPr lang="en-US" dirty="0">
+                <a:solidFill>
+                  <a:schemeClr val="tx1"/>
+                </a:solidFill>
+              </a:rPr>
+              <a:t>Overflow:</a:t>
+            </a:r>
+          </a:p>
+          <a:p>
+            <a:pPr lvl="1"/>
+            <a:r>
+              <a:rPr lang="en-US" dirty="0">
+                <a:solidFill>
+                  <a:srgbClr val="0070C0"/>
+                </a:solidFill>
+              </a:rPr>
+              <a:t>Division by zero</a:t>
+            </a:r>
+          </a:p>
+          <a:p>
+            <a:pPr lvl="1"/>
+            <a:r>
+              <a:rPr lang="en-US" dirty="0">
+                <a:solidFill>
+                  <a:srgbClr val="0070C0"/>
+                </a:solidFill>
+              </a:rPr>
+              <a:t>Full-scale negative divided by -1</a:t>
+            </a:r>
+          </a:p>
+        </p:txBody>
+      </p:sp>
+    </p:spTree>
+    <p:extLst>
+      <p:ext uri="{BB962C8B-B14F-4D97-AF65-F5344CB8AC3E}">
+        <p14:creationId xmlns:p14="http://schemas.microsoft.com/office/powerpoint/2010/main" val="3769027795"/>
+      </p:ext>
+    </p:extLst>
+  </p:cSld>
+  <p:clrMapOvr>
+    <a:masterClrMapping/>
+  </p:clrMapOvr>
+</p:sld>
+</file>
+
+<file path=ppt/slides/slide38.xml><?xml version="1.0" encoding="utf-8"?>
+<p:sld xmlns:a="http://schemas.openxmlformats.org/drawingml/2006/main" xmlns:r="http://schemas.openxmlformats.org/officeDocument/2006/relationships" xmlns:p="http://schemas.openxmlformats.org/presentationml/2006/main">
+  <p:cSld>
+    <p:spTree>
+      <p:nvGrpSpPr>
+        <p:cNvPr id="1" name=""/>
+        <p:cNvGrpSpPr/>
+        <p:nvPr/>
+      </p:nvGrpSpPr>
+      <p:grpSpPr>
+        <a:xfrm>
+          <a:off x="0" y="0"/>
+          <a:ext cx="0" cy="0"/>
+          <a:chOff x="0" y="0"/>
+          <a:chExt cx="0" cy="0"/>
+        </a:xfrm>
+      </p:grpSpPr>
+      <p:sp>
+        <p:nvSpPr>
+          <p:cNvPr id="2" name="Title 1"/>
+          <p:cNvSpPr>
+            <a:spLocks noGrp="1"/>
+          </p:cNvSpPr>
+          <p:nvPr>
+            <p:ph type="title"/>
+          </p:nvPr>
+        </p:nvSpPr>
         <p:spPr/>
         <p:txBody>
           <a:bodyPr rtlCol="0">
@@ -44364,70 +44428,6 @@
     <p:extLst>
       <p:ext uri="{BB962C8B-B14F-4D97-AF65-F5344CB8AC3E}">
         <p14:creationId xmlns:p14="http://schemas.microsoft.com/office/powerpoint/2010/main" val="2453586173"/>
-      </p:ext>
-    </p:extLst>
-  </p:cSld>
-  <p:clrMapOvr>
-    <a:masterClrMapping/>
-  </p:clrMapOvr>
-</p:sld>
-</file>
-
-<file path=ppt/slides/slide38.xml><?xml version="1.0" encoding="utf-8"?>
-<p:sld xmlns:a="http://schemas.openxmlformats.org/drawingml/2006/main" xmlns:r="http://schemas.openxmlformats.org/officeDocument/2006/relationships" xmlns:p="http://schemas.openxmlformats.org/presentationml/2006/main">
-  <p:cSld>
-    <p:spTree>
-      <p:nvGrpSpPr>
-        <p:cNvPr id="1" name="">
-          <a:extLst>
-            <a:ext uri="{FF2B5EF4-FFF2-40B4-BE49-F238E27FC236}">
-              <a16:creationId xmlns:a16="http://schemas.microsoft.com/office/drawing/2014/main" id="{84DA25F2-3AE0-BDCF-0880-EDD5EEF55E54}"/>
-            </a:ext>
-          </a:extLst>
-        </p:cNvPr>
-        <p:cNvGrpSpPr/>
-        <p:nvPr/>
-      </p:nvGrpSpPr>
-      <p:grpSpPr>
-        <a:xfrm>
-          <a:off x="0" y="0"/>
-          <a:ext cx="0" cy="0"/>
-          <a:chOff x="0" y="0"/>
-          <a:chExt cx="0" cy="0"/>
-        </a:xfrm>
-      </p:grpSpPr>
-      <p:sp>
-        <p:nvSpPr>
-          <p:cNvPr id="2" name="Title 1">
-            <a:extLst>
-              <a:ext uri="{FF2B5EF4-FFF2-40B4-BE49-F238E27FC236}">
-                <a16:creationId xmlns:a16="http://schemas.microsoft.com/office/drawing/2014/main" id="{6EAE57A2-3A61-C5F8-EEFD-EA2961784338}"/>
-              </a:ext>
-            </a:extLst>
-          </p:cNvPr>
-          <p:cNvSpPr>
-            <a:spLocks noGrp="1"/>
-          </p:cNvSpPr>
-          <p:nvPr>
-            <p:ph type="ctrTitle"/>
-          </p:nvPr>
-        </p:nvSpPr>
-        <p:spPr/>
-        <p:txBody>
-          <a:bodyPr/>
-          <a:lstStyle/>
-          <a:p>
-            <a:r>
-              <a:rPr lang="en-US" dirty="0"/>
-              <a:t>… to here …</a:t>
-            </a:r>
-          </a:p>
-        </p:txBody>
-      </p:sp>
-    </p:spTree>
-    <p:extLst>
-      <p:ext uri="{BB962C8B-B14F-4D97-AF65-F5344CB8AC3E}">
-        <p14:creationId xmlns:p14="http://schemas.microsoft.com/office/powerpoint/2010/main" val="2815624037"/>
       </p:ext>
     </p:extLst>
   </p:cSld>
@@ -51275,8 +51275,8 @@
           </a:p>
         </p:txBody>
       </p:sp>
-      <mc:AlternateContent xmlns:mc="http://schemas.openxmlformats.org/markup-compatibility/2006">
-        <mc:Choice xmlns:a14="http://schemas.microsoft.com/office/drawing/2010/main" Requires="a14">
+      <mc:AlternateContent xmlns:mc="http://schemas.openxmlformats.org/markup-compatibility/2006" xmlns:a14="http://schemas.microsoft.com/office/drawing/2010/main">
+        <mc:Choice Requires="a14">
           <p:sp>
             <p:nvSpPr>
               <p:cNvPr id="3" name="Rectangle 2">
@@ -51460,7 +51460,7 @@
             </p:txBody>
           </p:sp>
         </mc:Choice>
-        <mc:Fallback>
+        <mc:Fallback xmlns="">
           <p:sp>
             <p:nvSpPr>
               <p:cNvPr id="3" name="Rectangle 2">

--- a/Week04_IntegerArithmetic/Ch05_Integer Arithmetic_V4.pptx
+++ b/Week04_IntegerArithmetic/Ch05_Integer Arithmetic_V4.pptx
@@ -38,19 +38,19 @@
     <p:sldId id="378" r:id="rId26"/>
     <p:sldId id="358" r:id="rId27"/>
     <p:sldId id="362" r:id="rId28"/>
-    <p:sldId id="509" r:id="rId29"/>
-    <p:sldId id="363" r:id="rId30"/>
-    <p:sldId id="364" r:id="rId31"/>
-    <p:sldId id="365" r:id="rId32"/>
-    <p:sldId id="379" r:id="rId33"/>
-    <p:sldId id="380" r:id="rId34"/>
-    <p:sldId id="368" r:id="rId35"/>
-    <p:sldId id="369" r:id="rId36"/>
-    <p:sldId id="370" r:id="rId37"/>
-    <p:sldId id="371" r:id="rId38"/>
-    <p:sldId id="372" r:id="rId39"/>
-    <p:sldId id="373" r:id="rId40"/>
-    <p:sldId id="336" r:id="rId41"/>
+    <p:sldId id="363" r:id="rId29"/>
+    <p:sldId id="364" r:id="rId30"/>
+    <p:sldId id="365" r:id="rId31"/>
+    <p:sldId id="379" r:id="rId32"/>
+    <p:sldId id="380" r:id="rId33"/>
+    <p:sldId id="368" r:id="rId34"/>
+    <p:sldId id="369" r:id="rId35"/>
+    <p:sldId id="370" r:id="rId36"/>
+    <p:sldId id="371" r:id="rId37"/>
+    <p:sldId id="372" r:id="rId38"/>
+    <p:sldId id="373" r:id="rId39"/>
+    <p:sldId id="336" r:id="rId40"/>
+    <p:sldId id="509" r:id="rId41"/>
   </p:sldIdLst>
   <p:sldSz cx="12192000" cy="6858000"/>
   <p:notesSz cx="7010400" cy="9296400"/>
@@ -239,7 +239,7 @@
           <a:p>
             <a:fld id="{8E938536-29D3-49BD-A567-41CAF057586A}" type="datetimeFigureOut">
               <a:rPr lang="en-US" smtClean="0"/>
-              <a:t>10/21/2026</a:t>
+              <a:t>10/26/2026</a:t>
             </a:fld>
             <a:endParaRPr lang="en-US"/>
           </a:p>
@@ -404,7 +404,7 @@
           <a:p>
             <a:fld id="{71559A16-B3AD-4CE2-9A5E-FAAD3C2C27CA}" type="datetimeFigureOut">
               <a:rPr lang="en-US" smtClean="0"/>
-              <a:t>10/21/2026</a:t>
+              <a:t>10/26/2026</a:t>
             </a:fld>
             <a:endParaRPr lang="en-US"/>
           </a:p>
@@ -6059,7 +6059,7 @@
                 <a:tabLst/>
                 <a:defRPr/>
               </a:pPr>
-              <a:t>10/21/2026</a:t>
+              <a:t>10/26/2026</a:t>
             </a:fld>
             <a:endParaRPr kumimoji="0" lang="en-US" sz="1800" b="0" i="0" u="none" strike="noStrike" kern="1200" cap="none" spc="0" normalizeH="0" baseline="0" noProof="0">
               <a:ln>
@@ -6288,7 +6288,7 @@
             <a:fld id="{1D8BD707-D9CF-40AE-B4C6-C98DA3205C09}" type="datetimeFigureOut">
               <a:rPr lang="en-US" smtClean="0"/>
               <a:pPr/>
-              <a:t>10/21/2026</a:t>
+              <a:t>10/26/2026</a:t>
             </a:fld>
             <a:endParaRPr lang="en-US"/>
           </a:p>
@@ -6385,7 +6385,7 @@
             <a:fld id="{1D8BD707-D9CF-40AE-B4C6-C98DA3205C09}" type="datetimeFigureOut">
               <a:rPr lang="en-US" smtClean="0"/>
               <a:pPr/>
-              <a:t>10/21/2026</a:t>
+              <a:t>10/26/2026</a:t>
             </a:fld>
             <a:endParaRPr lang="en-US"/>
           </a:p>
@@ -32619,70 +32619,6 @@
   <p:cSld>
     <p:spTree>
       <p:nvGrpSpPr>
-        <p:cNvPr id="1" name="">
-          <a:extLst>
-            <a:ext uri="{FF2B5EF4-FFF2-40B4-BE49-F238E27FC236}">
-              <a16:creationId xmlns:a16="http://schemas.microsoft.com/office/drawing/2014/main" id="{84DA25F2-3AE0-BDCF-0880-EDD5EEF55E54}"/>
-            </a:ext>
-          </a:extLst>
-        </p:cNvPr>
-        <p:cNvGrpSpPr/>
-        <p:nvPr/>
-      </p:nvGrpSpPr>
-      <p:grpSpPr>
-        <a:xfrm>
-          <a:off x="0" y="0"/>
-          <a:ext cx="0" cy="0"/>
-          <a:chOff x="0" y="0"/>
-          <a:chExt cx="0" cy="0"/>
-        </a:xfrm>
-      </p:grpSpPr>
-      <p:sp>
-        <p:nvSpPr>
-          <p:cNvPr id="2" name="Title 1">
-            <a:extLst>
-              <a:ext uri="{FF2B5EF4-FFF2-40B4-BE49-F238E27FC236}">
-                <a16:creationId xmlns:a16="http://schemas.microsoft.com/office/drawing/2014/main" id="{6EAE57A2-3A61-C5F8-EEFD-EA2961784338}"/>
-              </a:ext>
-            </a:extLst>
-          </p:cNvPr>
-          <p:cNvSpPr>
-            <a:spLocks noGrp="1"/>
-          </p:cNvSpPr>
-          <p:nvPr>
-            <p:ph type="ctrTitle"/>
-          </p:nvPr>
-        </p:nvSpPr>
-        <p:spPr/>
-        <p:txBody>
-          <a:bodyPr/>
-          <a:lstStyle/>
-          <a:p>
-            <a:r>
-              <a:rPr lang="en-US" dirty="0"/>
-              <a:t>… to here …</a:t>
-            </a:r>
-          </a:p>
-        </p:txBody>
-      </p:sp>
-    </p:spTree>
-    <p:extLst>
-      <p:ext uri="{BB962C8B-B14F-4D97-AF65-F5344CB8AC3E}">
-        <p14:creationId xmlns:p14="http://schemas.microsoft.com/office/powerpoint/2010/main" val="2815624037"/>
-      </p:ext>
-    </p:extLst>
-  </p:cSld>
-  <p:clrMapOvr>
-    <a:masterClrMapping/>
-  </p:clrMapOvr>
-</p:sld>
-</file>
-
-<file path=ppt/slides/slide27.xml><?xml version="1.0" encoding="utf-8"?>
-<p:sld xmlns:a="http://schemas.openxmlformats.org/drawingml/2006/main" xmlns:r="http://schemas.openxmlformats.org/officeDocument/2006/relationships" xmlns:p="http://schemas.openxmlformats.org/presentationml/2006/main">
-  <p:cSld>
-    <p:spTree>
-      <p:nvGrpSpPr>
         <p:cNvPr id="1" name=""/>
         <p:cNvGrpSpPr/>
         <p:nvPr/>
@@ -32771,7 +32707,7 @@
 </p:sld>
 </file>
 
-<file path=ppt/slides/slide28.xml><?xml version="1.0" encoding="utf-8"?>
+<file path=ppt/slides/slide27.xml><?xml version="1.0" encoding="utf-8"?>
 <p:sld xmlns:a="http://schemas.openxmlformats.org/drawingml/2006/main" xmlns:r="http://schemas.openxmlformats.org/officeDocument/2006/relationships" xmlns:p="http://schemas.openxmlformats.org/presentationml/2006/main">
   <p:cSld>
     <p:spTree>
@@ -33305,7 +33241,7 @@
 </p:sld>
 </file>
 
-<file path=ppt/slides/slide29.xml><?xml version="1.0" encoding="utf-8"?>
+<file path=ppt/slides/slide28.xml><?xml version="1.0" encoding="utf-8"?>
 <p:sld xmlns:a="http://schemas.openxmlformats.org/drawingml/2006/main" xmlns:r="http://schemas.openxmlformats.org/officeDocument/2006/relationships" xmlns:p="http://schemas.openxmlformats.org/presentationml/2006/main">
   <p:cSld>
     <p:spTree>
@@ -35393,564 +35329,7 @@
 </p:sld>
 </file>
 
-<file path=ppt/slides/slide3.xml><?xml version="1.0" encoding="utf-8"?>
-<p:sld xmlns:a="http://schemas.openxmlformats.org/drawingml/2006/main" xmlns:r="http://schemas.openxmlformats.org/officeDocument/2006/relationships" xmlns:p="http://schemas.openxmlformats.org/presentationml/2006/main">
-  <p:cSld>
-    <p:spTree>
-      <p:nvGrpSpPr>
-        <p:cNvPr id="1" name=""/>
-        <p:cNvGrpSpPr/>
-        <p:nvPr/>
-      </p:nvGrpSpPr>
-      <p:grpSpPr>
-        <a:xfrm>
-          <a:off x="0" y="0"/>
-          <a:ext cx="0" cy="0"/>
-          <a:chOff x="0" y="0"/>
-          <a:chExt cx="0" cy="0"/>
-        </a:xfrm>
-      </p:grpSpPr>
-      <p:sp>
-        <p:nvSpPr>
-          <p:cNvPr id="2" name="Title 1"/>
-          <p:cNvSpPr>
-            <a:spLocks noGrp="1"/>
-          </p:cNvSpPr>
-          <p:nvPr>
-            <p:ph type="title"/>
-          </p:nvPr>
-        </p:nvSpPr>
-        <p:spPr>
-          <a:xfrm>
-            <a:off x="940527" y="726230"/>
-            <a:ext cx="7136673" cy="666899"/>
-          </a:xfrm>
-        </p:spPr>
-        <p:txBody>
-          <a:bodyPr/>
-          <a:lstStyle/>
-          <a:p>
-            <a:r>
-              <a:rPr lang="en-US" dirty="0"/>
-              <a:t>ADDITION AND SUBTRACTION</a:t>
-            </a:r>
-          </a:p>
-        </p:txBody>
-      </p:sp>
-      <p:sp>
-        <p:nvSpPr>
-          <p:cNvPr id="5" name="TextBox 4"/>
-          <p:cNvSpPr txBox="1"/>
-          <p:nvPr/>
-        </p:nvSpPr>
-        <p:spPr>
-          <a:xfrm>
-            <a:off x="5390583" y="2101586"/>
-            <a:ext cx="1283576" cy="2246769"/>
-          </a:xfrm>
-          <a:prstGeom prst="rect">
-            <a:avLst/>
-          </a:prstGeom>
-          <a:noFill/>
-        </p:spPr>
-        <p:txBody>
-          <a:bodyPr wrap="square" rtlCol="0">
-            <a:spAutoFit/>
-          </a:bodyPr>
-          <a:lstStyle/>
-          <a:p>
-            <a:pPr algn="ctr">
-              <a:tabLst>
-                <a:tab pos="3086100" algn="l"/>
-                <a:tab pos="5715000" algn="l"/>
-              </a:tabLst>
-            </a:pPr>
-            <a:r>
-              <a:rPr lang="en-US" sz="2800" i="1" dirty="0"/>
-              <a:t>Binary</a:t>
-            </a:r>
-          </a:p>
-          <a:p>
-            <a:pPr>
-              <a:tabLst>
-                <a:tab pos="3086100" algn="l"/>
-                <a:tab pos="5715000" algn="l"/>
-              </a:tabLst>
-            </a:pPr>
-            <a:endParaRPr lang="en-US" sz="2800" i="1" dirty="0"/>
-          </a:p>
-          <a:p>
-            <a:pPr>
-              <a:tabLst>
-                <a:tab pos="571500" algn="r"/>
-                <a:tab pos="3886200" algn="r"/>
-                <a:tab pos="6686550" algn="r"/>
-              </a:tabLst>
-            </a:pPr>
-            <a:r>
-              <a:rPr lang="en-US" sz="2800" dirty="0"/>
-              <a:t>  	0011</a:t>
-            </a:r>
-          </a:p>
-          <a:p>
-            <a:pPr>
-              <a:tabLst>
-                <a:tab pos="571500" algn="r"/>
-                <a:tab pos="3886200" algn="r"/>
-                <a:tab pos="6686550" algn="r"/>
-              </a:tabLst>
-            </a:pPr>
-            <a:r>
-              <a:rPr lang="en-US" sz="2800" dirty="0"/>
-              <a:t>+</a:t>
-            </a:r>
-            <a:r>
-              <a:rPr lang="en-US" sz="2800" u="sng" dirty="0"/>
-              <a:t>1010</a:t>
-            </a:r>
-          </a:p>
-          <a:p>
-            <a:pPr>
-              <a:tabLst>
-                <a:tab pos="857250" algn="r"/>
-                <a:tab pos="4000500" algn="r"/>
-                <a:tab pos="6858000" algn="r"/>
-              </a:tabLst>
-            </a:pPr>
-            <a:r>
-              <a:rPr lang="en-US" sz="2800" dirty="0"/>
-              <a:t>	  1101</a:t>
-            </a:r>
-            <a:r>
-              <a:rPr lang="en-US" sz="2800" baseline="-25000" dirty="0"/>
-              <a:t>2</a:t>
-            </a:r>
-            <a:endParaRPr lang="en-US" sz="2800" dirty="0"/>
-          </a:p>
-        </p:txBody>
-      </p:sp>
-      <p:grpSp>
-        <p:nvGrpSpPr>
-          <p:cNvPr id="12" name="Group 11"/>
-          <p:cNvGrpSpPr/>
-          <p:nvPr/>
-        </p:nvGrpSpPr>
-        <p:grpSpPr>
-          <a:xfrm>
-            <a:off x="4438569" y="5026231"/>
-            <a:ext cx="3794760" cy="1015663"/>
-            <a:chOff x="1620391" y="4175686"/>
-            <a:chExt cx="3794760" cy="1015663"/>
-          </a:xfrm>
-          <a:solidFill>
-            <a:schemeClr val="accent4">
-              <a:lumMod val="20000"/>
-              <a:lumOff val="80000"/>
-            </a:schemeClr>
-          </a:solidFill>
-        </p:grpSpPr>
-        <p:sp>
-          <p:nvSpPr>
-            <p:cNvPr id="10" name="TextBox 9"/>
-            <p:cNvSpPr txBox="1"/>
-            <p:nvPr/>
-          </p:nvSpPr>
-          <p:spPr>
-            <a:xfrm>
-              <a:off x="1620391" y="4175686"/>
-              <a:ext cx="3794760" cy="1015663"/>
-            </a:xfrm>
-            <a:prstGeom prst="rect">
-              <a:avLst/>
-            </a:prstGeom>
-            <a:grpFill/>
-            <a:ln/>
-          </p:spPr>
-          <p:style>
-            <a:lnRef idx="1">
-              <a:schemeClr val="accent2"/>
-            </a:lnRef>
-            <a:fillRef idx="2">
-              <a:schemeClr val="accent2"/>
-            </a:fillRef>
-            <a:effectRef idx="1">
-              <a:schemeClr val="accent2"/>
-            </a:effectRef>
-            <a:fontRef idx="minor">
-              <a:schemeClr val="dk1"/>
-            </a:fontRef>
-          </p:style>
-          <p:txBody>
-            <a:bodyPr wrap="square" tIns="91440" bIns="91440" rtlCol="0">
-              <a:spAutoFit/>
-            </a:bodyPr>
-            <a:lstStyle/>
-            <a:p>
-              <a:pPr marL="1027113" lvl="1"/>
-              <a:r>
-                <a:rPr lang="en-US" dirty="0"/>
-                <a:t>A single ADD (or SUB) instruction works for both </a:t>
-              </a:r>
-              <a:r>
-                <a:rPr lang="en-US" b="1" dirty="0">
-                  <a:solidFill>
-                    <a:srgbClr val="92D050"/>
-                  </a:solidFill>
-                </a:rPr>
-                <a:t>unsigned</a:t>
-              </a:r>
-              <a:r>
-                <a:rPr lang="en-US" dirty="0"/>
-                <a:t> and </a:t>
-              </a:r>
-              <a:r>
-                <a:rPr lang="en-US" b="1" dirty="0">
-                  <a:solidFill>
-                    <a:srgbClr val="FF0000"/>
-                  </a:solidFill>
-                </a:rPr>
-                <a:t>2’s comp</a:t>
-              </a:r>
-              <a:r>
-                <a:rPr lang="en-US" dirty="0"/>
-                <a:t>.</a:t>
-              </a:r>
-            </a:p>
-          </p:txBody>
-        </p:sp>
-        <p:pic>
-          <p:nvPicPr>
-            <p:cNvPr id="11" name="Picture 10" descr="http://www.aamu.edu/campuslife/living-on-campus/residentialLife/SiteAssets/pages/default/Warning_sign.png"/>
-            <p:cNvPicPr>
-              <a:picLocks noChangeAspect="1" noChangeArrowheads="1"/>
-            </p:cNvPicPr>
-            <p:nvPr/>
-          </p:nvPicPr>
-          <p:blipFill>
-            <a:blip r:embed="rId2" cstate="print">
-              <a:extLst>
-                <a:ext uri="{28A0092B-C50C-407E-A947-70E740481C1C}">
-                  <a14:useLocalDpi xmlns:a14="http://schemas.microsoft.com/office/drawing/2010/main" val="0"/>
-                </a:ext>
-              </a:extLst>
-            </a:blip>
-            <a:srcRect/>
-            <a:stretch>
-              <a:fillRect/>
-            </a:stretch>
-          </p:blipFill>
-          <p:spPr bwMode="auto">
-            <a:xfrm flipH="1">
-              <a:off x="1620391" y="4264417"/>
-              <a:ext cx="971826" cy="838200"/>
-            </a:xfrm>
-            <a:prstGeom prst="rect">
-              <a:avLst/>
-            </a:prstGeom>
-            <a:grpFill/>
-          </p:spPr>
-        </p:pic>
-      </p:grpSp>
-      <p:sp>
-        <p:nvSpPr>
-          <p:cNvPr id="22" name="TextBox 21"/>
-          <p:cNvSpPr txBox="1"/>
-          <p:nvPr/>
-        </p:nvSpPr>
-        <p:spPr>
-          <a:xfrm>
-            <a:off x="2057400" y="2101585"/>
-            <a:ext cx="1905000" cy="2246769"/>
-          </a:xfrm>
-          <a:prstGeom prst="rect">
-            <a:avLst/>
-          </a:prstGeom>
-          <a:noFill/>
-        </p:spPr>
-        <p:txBody>
-          <a:bodyPr wrap="square" rtlCol="0">
-            <a:spAutoFit/>
-          </a:bodyPr>
-          <a:lstStyle/>
-          <a:p>
-            <a:r>
-              <a:rPr lang="en-US" sz="2800" b="1" dirty="0">
-                <a:solidFill>
-                  <a:srgbClr val="92D050"/>
-                </a:solidFill>
-              </a:rPr>
-              <a:t>Unsigned</a:t>
-            </a:r>
-          </a:p>
-          <a:p>
-            <a:r>
-              <a:rPr lang="en-US" sz="2800" i="1" dirty="0"/>
-              <a:t> </a:t>
-            </a:r>
-          </a:p>
-          <a:p>
-            <a:r>
-              <a:rPr lang="en-US" sz="2800" dirty="0">
-                <a:latin typeface="Consolas" panose="020B0609020204030204" pitchFamily="49" charset="0"/>
-              </a:rPr>
-              <a:t>   3</a:t>
-            </a:r>
-          </a:p>
-          <a:p>
-            <a:r>
-              <a:rPr lang="en-US" sz="2800" dirty="0">
-                <a:latin typeface="Consolas" panose="020B0609020204030204" pitchFamily="49" charset="0"/>
-              </a:rPr>
-              <a:t> </a:t>
-            </a:r>
-            <a:r>
-              <a:rPr lang="en-US" sz="2800" u="sng" dirty="0">
-                <a:latin typeface="Consolas" panose="020B0609020204030204" pitchFamily="49" charset="0"/>
-              </a:rPr>
-              <a:t>+10</a:t>
-            </a:r>
-          </a:p>
-          <a:p>
-            <a:r>
-              <a:rPr lang="en-US" sz="2800" dirty="0">
-                <a:latin typeface="Consolas" panose="020B0609020204030204" pitchFamily="49" charset="0"/>
-              </a:rPr>
-              <a:t>  13</a:t>
-            </a:r>
-            <a:r>
-              <a:rPr lang="en-US" sz="2800" baseline="-25000" dirty="0">
-                <a:latin typeface="Consolas" panose="020B0609020204030204" pitchFamily="49" charset="0"/>
-              </a:rPr>
-              <a:t>10</a:t>
-            </a:r>
-          </a:p>
-        </p:txBody>
-      </p:sp>
-      <p:sp>
-        <p:nvSpPr>
-          <p:cNvPr id="23" name="TextBox 22"/>
-          <p:cNvSpPr txBox="1"/>
-          <p:nvPr/>
-        </p:nvSpPr>
-        <p:spPr>
-          <a:xfrm>
-            <a:off x="7821856" y="2108310"/>
-            <a:ext cx="3166986" cy="2246769"/>
-          </a:xfrm>
-          <a:prstGeom prst="rect">
-            <a:avLst/>
-          </a:prstGeom>
-          <a:noFill/>
-        </p:spPr>
-        <p:txBody>
-          <a:bodyPr wrap="square" rtlCol="0">
-            <a:spAutoFit/>
-          </a:bodyPr>
-          <a:lstStyle/>
-          <a:p>
-            <a:r>
-              <a:rPr lang="en-US" sz="2800" i="1" dirty="0"/>
-              <a:t>  </a:t>
-            </a:r>
-            <a:r>
-              <a:rPr lang="en-US" sz="2800" b="1" dirty="0">
-                <a:solidFill>
-                  <a:srgbClr val="FF0000"/>
-                </a:solidFill>
-              </a:rPr>
-              <a:t>2’s Complement </a:t>
-            </a:r>
-          </a:p>
-          <a:p>
-            <a:r>
-              <a:rPr lang="en-US" sz="2800" i="1" dirty="0"/>
-              <a:t> </a:t>
-            </a:r>
-          </a:p>
-          <a:p>
-            <a:r>
-              <a:rPr lang="en-US" sz="2800" dirty="0">
-                <a:latin typeface="Consolas" panose="020B0609020204030204" pitchFamily="49" charset="0"/>
-              </a:rPr>
-              <a:t>   (+3)</a:t>
-            </a:r>
-          </a:p>
-          <a:p>
-            <a:r>
-              <a:rPr lang="en-US" sz="2800" dirty="0">
-                <a:latin typeface="Consolas" panose="020B0609020204030204" pitchFamily="49" charset="0"/>
-              </a:rPr>
-              <a:t>  </a:t>
-            </a:r>
-            <a:r>
-              <a:rPr lang="en-US" sz="2800" u="sng" dirty="0">
-                <a:latin typeface="Consolas" panose="020B0609020204030204" pitchFamily="49" charset="0"/>
-              </a:rPr>
-              <a:t>+(-6)</a:t>
-            </a:r>
-          </a:p>
-          <a:p>
-            <a:r>
-              <a:rPr lang="en-US" sz="2800" dirty="0">
-                <a:latin typeface="Consolas" panose="020B0609020204030204" pitchFamily="49" charset="0"/>
-              </a:rPr>
-              <a:t>    -3</a:t>
-            </a:r>
-            <a:r>
-              <a:rPr lang="en-US" sz="2800" baseline="-25000" dirty="0">
-                <a:latin typeface="Consolas" panose="020B0609020204030204" pitchFamily="49" charset="0"/>
-              </a:rPr>
-              <a:t>10</a:t>
-            </a:r>
-          </a:p>
-        </p:txBody>
-      </p:sp>
-      <p:cxnSp>
-        <p:nvCxnSpPr>
-          <p:cNvPr id="34" name="Straight Arrow Connector 33"/>
-          <p:cNvCxnSpPr/>
-          <p:nvPr/>
-        </p:nvCxnSpPr>
-        <p:spPr>
-          <a:xfrm>
-            <a:off x="6915150" y="3503268"/>
-            <a:ext cx="906706" cy="0"/>
-          </a:xfrm>
-          <a:prstGeom prst="straightConnector1">
-            <a:avLst/>
-          </a:prstGeom>
-          <a:ln w="76200">
-            <a:solidFill>
-              <a:srgbClr val="FF0000"/>
-            </a:solidFill>
-            <a:tailEnd type="triangle"/>
-          </a:ln>
-        </p:spPr>
-        <p:style>
-          <a:lnRef idx="1">
-            <a:schemeClr val="accent1"/>
-          </a:lnRef>
-          <a:fillRef idx="0">
-            <a:schemeClr val="accent1"/>
-          </a:fillRef>
-          <a:effectRef idx="0">
-            <a:schemeClr val="accent1"/>
-          </a:effectRef>
-          <a:fontRef idx="minor">
-            <a:schemeClr val="tx1"/>
-          </a:fontRef>
-        </p:style>
-      </p:cxnSp>
-      <p:cxnSp>
-        <p:nvCxnSpPr>
-          <p:cNvPr id="35" name="Straight Arrow Connector 34"/>
-          <p:cNvCxnSpPr/>
-          <p:nvPr/>
-        </p:nvCxnSpPr>
-        <p:spPr>
-          <a:xfrm flipH="1" flipV="1">
-            <a:off x="3967547" y="3457930"/>
-            <a:ext cx="942045" cy="11332"/>
-          </a:xfrm>
-          <a:prstGeom prst="straightConnector1">
-            <a:avLst/>
-          </a:prstGeom>
-          <a:ln w="76200">
-            <a:solidFill>
-              <a:srgbClr val="FF0000"/>
-            </a:solidFill>
-            <a:tailEnd type="triangle"/>
-          </a:ln>
-        </p:spPr>
-        <p:style>
-          <a:lnRef idx="1">
-            <a:schemeClr val="accent1"/>
-          </a:lnRef>
-          <a:fillRef idx="0">
-            <a:schemeClr val="accent1"/>
-          </a:fillRef>
-          <a:effectRef idx="0">
-            <a:schemeClr val="accent1"/>
-          </a:effectRef>
-          <a:fontRef idx="minor">
-            <a:schemeClr val="tx1"/>
-          </a:fontRef>
-        </p:style>
-      </p:cxnSp>
-      <p:pic>
-        <p:nvPicPr>
-          <p:cNvPr id="13" name="Picture 12"/>
-          <p:cNvPicPr>
-            <a:picLocks noChangeAspect="1"/>
-          </p:cNvPicPr>
-          <p:nvPr/>
-        </p:nvPicPr>
-        <p:blipFill>
-          <a:blip r:embed="rId3" cstate="print">
-            <a:extLst>
-              <a:ext uri="{28A0092B-C50C-407E-A947-70E740481C1C}">
-                <a14:useLocalDpi xmlns:a14="http://schemas.microsoft.com/office/drawing/2010/main" val="0"/>
-              </a:ext>
-            </a:extLst>
-          </a:blip>
-          <a:stretch>
-            <a:fillRect/>
-          </a:stretch>
-        </p:blipFill>
-        <p:spPr>
-          <a:xfrm>
-            <a:off x="3413280" y="3765302"/>
-            <a:ext cx="533399" cy="523398"/>
-          </a:xfrm>
-          <a:prstGeom prst="rect">
-            <a:avLst/>
-          </a:prstGeom>
-        </p:spPr>
-      </p:pic>
-      <p:pic>
-        <p:nvPicPr>
-          <p:cNvPr id="14" name="Picture 13"/>
-          <p:cNvPicPr>
-            <a:picLocks noChangeAspect="1"/>
-          </p:cNvPicPr>
-          <p:nvPr/>
-        </p:nvPicPr>
-        <p:blipFill>
-          <a:blip r:embed="rId3" cstate="print">
-            <a:extLst>
-              <a:ext uri="{28A0092B-C50C-407E-A947-70E740481C1C}">
-                <a14:useLocalDpi xmlns:a14="http://schemas.microsoft.com/office/drawing/2010/main" val="0"/>
-              </a:ext>
-            </a:extLst>
-          </a:blip>
-          <a:stretch>
-            <a:fillRect/>
-          </a:stretch>
-        </p:blipFill>
-        <p:spPr>
-          <a:xfrm>
-            <a:off x="9533148" y="3766324"/>
-            <a:ext cx="533399" cy="523398"/>
-          </a:xfrm>
-          <a:prstGeom prst="rect">
-            <a:avLst/>
-          </a:prstGeom>
-        </p:spPr>
-      </p:pic>
-    </p:spTree>
-    <p:extLst>
-      <p:ext uri="{BB962C8B-B14F-4D97-AF65-F5344CB8AC3E}">
-        <p14:creationId xmlns:p14="http://schemas.microsoft.com/office/powerpoint/2010/main" val="1403904733"/>
-      </p:ext>
-    </p:extLst>
-  </p:cSld>
-  <p:clrMapOvr>
-    <a:masterClrMapping/>
-  </p:clrMapOvr>
-</p:sld>
-</file>
-
-<file path=ppt/slides/slide30.xml><?xml version="1.0" encoding="utf-8"?>
+<file path=ppt/slides/slide29.xml><?xml version="1.0" encoding="utf-8"?>
 <p:sld xmlns:a="http://schemas.openxmlformats.org/drawingml/2006/main" xmlns:r="http://schemas.openxmlformats.org/officeDocument/2006/relationships" xmlns:p="http://schemas.openxmlformats.org/presentationml/2006/main">
   <p:cSld>
     <p:spTree>
@@ -36882,7 +36261,564 @@
 </p:sld>
 </file>
 
-<file path=ppt/slides/slide31.xml><?xml version="1.0" encoding="utf-8"?>
+<file path=ppt/slides/slide3.xml><?xml version="1.0" encoding="utf-8"?>
+<p:sld xmlns:a="http://schemas.openxmlformats.org/drawingml/2006/main" xmlns:r="http://schemas.openxmlformats.org/officeDocument/2006/relationships" xmlns:p="http://schemas.openxmlformats.org/presentationml/2006/main">
+  <p:cSld>
+    <p:spTree>
+      <p:nvGrpSpPr>
+        <p:cNvPr id="1" name=""/>
+        <p:cNvGrpSpPr/>
+        <p:nvPr/>
+      </p:nvGrpSpPr>
+      <p:grpSpPr>
+        <a:xfrm>
+          <a:off x="0" y="0"/>
+          <a:ext cx="0" cy="0"/>
+          <a:chOff x="0" y="0"/>
+          <a:chExt cx="0" cy="0"/>
+        </a:xfrm>
+      </p:grpSpPr>
+      <p:sp>
+        <p:nvSpPr>
+          <p:cNvPr id="2" name="Title 1"/>
+          <p:cNvSpPr>
+            <a:spLocks noGrp="1"/>
+          </p:cNvSpPr>
+          <p:nvPr>
+            <p:ph type="title"/>
+          </p:nvPr>
+        </p:nvSpPr>
+        <p:spPr>
+          <a:xfrm>
+            <a:off x="940527" y="726230"/>
+            <a:ext cx="7136673" cy="666899"/>
+          </a:xfrm>
+        </p:spPr>
+        <p:txBody>
+          <a:bodyPr/>
+          <a:lstStyle/>
+          <a:p>
+            <a:r>
+              <a:rPr lang="en-US" dirty="0"/>
+              <a:t>ADDITION AND SUBTRACTION</a:t>
+            </a:r>
+          </a:p>
+        </p:txBody>
+      </p:sp>
+      <p:sp>
+        <p:nvSpPr>
+          <p:cNvPr id="5" name="TextBox 4"/>
+          <p:cNvSpPr txBox="1"/>
+          <p:nvPr/>
+        </p:nvSpPr>
+        <p:spPr>
+          <a:xfrm>
+            <a:off x="5390583" y="2101586"/>
+            <a:ext cx="1283576" cy="2246769"/>
+          </a:xfrm>
+          <a:prstGeom prst="rect">
+            <a:avLst/>
+          </a:prstGeom>
+          <a:noFill/>
+        </p:spPr>
+        <p:txBody>
+          <a:bodyPr wrap="square" rtlCol="0">
+            <a:spAutoFit/>
+          </a:bodyPr>
+          <a:lstStyle/>
+          <a:p>
+            <a:pPr algn="ctr">
+              <a:tabLst>
+                <a:tab pos="3086100" algn="l"/>
+                <a:tab pos="5715000" algn="l"/>
+              </a:tabLst>
+            </a:pPr>
+            <a:r>
+              <a:rPr lang="en-US" sz="2800" i="1" dirty="0"/>
+              <a:t>Binary</a:t>
+            </a:r>
+          </a:p>
+          <a:p>
+            <a:pPr>
+              <a:tabLst>
+                <a:tab pos="3086100" algn="l"/>
+                <a:tab pos="5715000" algn="l"/>
+              </a:tabLst>
+            </a:pPr>
+            <a:endParaRPr lang="en-US" sz="2800" i="1" dirty="0"/>
+          </a:p>
+          <a:p>
+            <a:pPr>
+              <a:tabLst>
+                <a:tab pos="571500" algn="r"/>
+                <a:tab pos="3886200" algn="r"/>
+                <a:tab pos="6686550" algn="r"/>
+              </a:tabLst>
+            </a:pPr>
+            <a:r>
+              <a:rPr lang="en-US" sz="2800" dirty="0"/>
+              <a:t>  	0011</a:t>
+            </a:r>
+          </a:p>
+          <a:p>
+            <a:pPr>
+              <a:tabLst>
+                <a:tab pos="571500" algn="r"/>
+                <a:tab pos="3886200" algn="r"/>
+                <a:tab pos="6686550" algn="r"/>
+              </a:tabLst>
+            </a:pPr>
+            <a:r>
+              <a:rPr lang="en-US" sz="2800" dirty="0"/>
+              <a:t>+</a:t>
+            </a:r>
+            <a:r>
+              <a:rPr lang="en-US" sz="2800" u="sng" dirty="0"/>
+              <a:t>1010</a:t>
+            </a:r>
+          </a:p>
+          <a:p>
+            <a:pPr>
+              <a:tabLst>
+                <a:tab pos="857250" algn="r"/>
+                <a:tab pos="4000500" algn="r"/>
+                <a:tab pos="6858000" algn="r"/>
+              </a:tabLst>
+            </a:pPr>
+            <a:r>
+              <a:rPr lang="en-US" sz="2800" dirty="0"/>
+              <a:t>	  1101</a:t>
+            </a:r>
+            <a:r>
+              <a:rPr lang="en-US" sz="2800" baseline="-25000" dirty="0"/>
+              <a:t>2</a:t>
+            </a:r>
+            <a:endParaRPr lang="en-US" sz="2800" dirty="0"/>
+          </a:p>
+        </p:txBody>
+      </p:sp>
+      <p:grpSp>
+        <p:nvGrpSpPr>
+          <p:cNvPr id="12" name="Group 11"/>
+          <p:cNvGrpSpPr/>
+          <p:nvPr/>
+        </p:nvGrpSpPr>
+        <p:grpSpPr>
+          <a:xfrm>
+            <a:off x="4438569" y="5026231"/>
+            <a:ext cx="3794760" cy="1015663"/>
+            <a:chOff x="1620391" y="4175686"/>
+            <a:chExt cx="3794760" cy="1015663"/>
+          </a:xfrm>
+          <a:solidFill>
+            <a:schemeClr val="accent4">
+              <a:lumMod val="20000"/>
+              <a:lumOff val="80000"/>
+            </a:schemeClr>
+          </a:solidFill>
+        </p:grpSpPr>
+        <p:sp>
+          <p:nvSpPr>
+            <p:cNvPr id="10" name="TextBox 9"/>
+            <p:cNvSpPr txBox="1"/>
+            <p:nvPr/>
+          </p:nvSpPr>
+          <p:spPr>
+            <a:xfrm>
+              <a:off x="1620391" y="4175686"/>
+              <a:ext cx="3794760" cy="1015663"/>
+            </a:xfrm>
+            <a:prstGeom prst="rect">
+              <a:avLst/>
+            </a:prstGeom>
+            <a:grpFill/>
+            <a:ln/>
+          </p:spPr>
+          <p:style>
+            <a:lnRef idx="1">
+              <a:schemeClr val="accent2"/>
+            </a:lnRef>
+            <a:fillRef idx="2">
+              <a:schemeClr val="accent2"/>
+            </a:fillRef>
+            <a:effectRef idx="1">
+              <a:schemeClr val="accent2"/>
+            </a:effectRef>
+            <a:fontRef idx="minor">
+              <a:schemeClr val="dk1"/>
+            </a:fontRef>
+          </p:style>
+          <p:txBody>
+            <a:bodyPr wrap="square" tIns="91440" bIns="91440" rtlCol="0">
+              <a:spAutoFit/>
+            </a:bodyPr>
+            <a:lstStyle/>
+            <a:p>
+              <a:pPr marL="1027113" lvl="1"/>
+              <a:r>
+                <a:rPr lang="en-US" dirty="0"/>
+                <a:t>A single ADD (or SUB) instruction works for both </a:t>
+              </a:r>
+              <a:r>
+                <a:rPr lang="en-US" b="1" dirty="0">
+                  <a:solidFill>
+                    <a:srgbClr val="92D050"/>
+                  </a:solidFill>
+                </a:rPr>
+                <a:t>unsigned</a:t>
+              </a:r>
+              <a:r>
+                <a:rPr lang="en-US" dirty="0"/>
+                <a:t> and </a:t>
+              </a:r>
+              <a:r>
+                <a:rPr lang="en-US" b="1" dirty="0">
+                  <a:solidFill>
+                    <a:srgbClr val="FF0000"/>
+                  </a:solidFill>
+                </a:rPr>
+                <a:t>2’s comp</a:t>
+              </a:r>
+              <a:r>
+                <a:rPr lang="en-US" dirty="0"/>
+                <a:t>.</a:t>
+              </a:r>
+            </a:p>
+          </p:txBody>
+        </p:sp>
+        <p:pic>
+          <p:nvPicPr>
+            <p:cNvPr id="11" name="Picture 10" descr="http://www.aamu.edu/campuslife/living-on-campus/residentialLife/SiteAssets/pages/default/Warning_sign.png"/>
+            <p:cNvPicPr>
+              <a:picLocks noChangeAspect="1" noChangeArrowheads="1"/>
+            </p:cNvPicPr>
+            <p:nvPr/>
+          </p:nvPicPr>
+          <p:blipFill>
+            <a:blip r:embed="rId2" cstate="print">
+              <a:extLst>
+                <a:ext uri="{28A0092B-C50C-407E-A947-70E740481C1C}">
+                  <a14:useLocalDpi xmlns:a14="http://schemas.microsoft.com/office/drawing/2010/main" val="0"/>
+                </a:ext>
+              </a:extLst>
+            </a:blip>
+            <a:srcRect/>
+            <a:stretch>
+              <a:fillRect/>
+            </a:stretch>
+          </p:blipFill>
+          <p:spPr bwMode="auto">
+            <a:xfrm flipH="1">
+              <a:off x="1620391" y="4264417"/>
+              <a:ext cx="971826" cy="838200"/>
+            </a:xfrm>
+            <a:prstGeom prst="rect">
+              <a:avLst/>
+            </a:prstGeom>
+            <a:grpFill/>
+          </p:spPr>
+        </p:pic>
+      </p:grpSp>
+      <p:sp>
+        <p:nvSpPr>
+          <p:cNvPr id="22" name="TextBox 21"/>
+          <p:cNvSpPr txBox="1"/>
+          <p:nvPr/>
+        </p:nvSpPr>
+        <p:spPr>
+          <a:xfrm>
+            <a:off x="2057400" y="2101585"/>
+            <a:ext cx="1905000" cy="2246769"/>
+          </a:xfrm>
+          <a:prstGeom prst="rect">
+            <a:avLst/>
+          </a:prstGeom>
+          <a:noFill/>
+        </p:spPr>
+        <p:txBody>
+          <a:bodyPr wrap="square" rtlCol="0">
+            <a:spAutoFit/>
+          </a:bodyPr>
+          <a:lstStyle/>
+          <a:p>
+            <a:r>
+              <a:rPr lang="en-US" sz="2800" b="1" dirty="0">
+                <a:solidFill>
+                  <a:srgbClr val="92D050"/>
+                </a:solidFill>
+              </a:rPr>
+              <a:t>Unsigned</a:t>
+            </a:r>
+          </a:p>
+          <a:p>
+            <a:r>
+              <a:rPr lang="en-US" sz="2800" i="1" dirty="0"/>
+              <a:t> </a:t>
+            </a:r>
+          </a:p>
+          <a:p>
+            <a:r>
+              <a:rPr lang="en-US" sz="2800" dirty="0">
+                <a:latin typeface="Consolas" panose="020B0609020204030204" pitchFamily="49" charset="0"/>
+              </a:rPr>
+              <a:t>   3</a:t>
+            </a:r>
+          </a:p>
+          <a:p>
+            <a:r>
+              <a:rPr lang="en-US" sz="2800" dirty="0">
+                <a:latin typeface="Consolas" panose="020B0609020204030204" pitchFamily="49" charset="0"/>
+              </a:rPr>
+              <a:t> </a:t>
+            </a:r>
+            <a:r>
+              <a:rPr lang="en-US" sz="2800" u="sng" dirty="0">
+                <a:latin typeface="Consolas" panose="020B0609020204030204" pitchFamily="49" charset="0"/>
+              </a:rPr>
+              <a:t>+10</a:t>
+            </a:r>
+          </a:p>
+          <a:p>
+            <a:r>
+              <a:rPr lang="en-US" sz="2800" dirty="0">
+                <a:latin typeface="Consolas" panose="020B0609020204030204" pitchFamily="49" charset="0"/>
+              </a:rPr>
+              <a:t>  13</a:t>
+            </a:r>
+            <a:r>
+              <a:rPr lang="en-US" sz="2800" baseline="-25000" dirty="0">
+                <a:latin typeface="Consolas" panose="020B0609020204030204" pitchFamily="49" charset="0"/>
+              </a:rPr>
+              <a:t>10</a:t>
+            </a:r>
+          </a:p>
+        </p:txBody>
+      </p:sp>
+      <p:sp>
+        <p:nvSpPr>
+          <p:cNvPr id="23" name="TextBox 22"/>
+          <p:cNvSpPr txBox="1"/>
+          <p:nvPr/>
+        </p:nvSpPr>
+        <p:spPr>
+          <a:xfrm>
+            <a:off x="7821856" y="2108310"/>
+            <a:ext cx="3166986" cy="2246769"/>
+          </a:xfrm>
+          <a:prstGeom prst="rect">
+            <a:avLst/>
+          </a:prstGeom>
+          <a:noFill/>
+        </p:spPr>
+        <p:txBody>
+          <a:bodyPr wrap="square" rtlCol="0">
+            <a:spAutoFit/>
+          </a:bodyPr>
+          <a:lstStyle/>
+          <a:p>
+            <a:r>
+              <a:rPr lang="en-US" sz="2800" i="1" dirty="0"/>
+              <a:t>  </a:t>
+            </a:r>
+            <a:r>
+              <a:rPr lang="en-US" sz="2800" b="1" dirty="0">
+                <a:solidFill>
+                  <a:srgbClr val="FF0000"/>
+                </a:solidFill>
+              </a:rPr>
+              <a:t>2’s Complement </a:t>
+            </a:r>
+          </a:p>
+          <a:p>
+            <a:r>
+              <a:rPr lang="en-US" sz="2800" i="1" dirty="0"/>
+              <a:t> </a:t>
+            </a:r>
+          </a:p>
+          <a:p>
+            <a:r>
+              <a:rPr lang="en-US" sz="2800" dirty="0">
+                <a:latin typeface="Consolas" panose="020B0609020204030204" pitchFamily="49" charset="0"/>
+              </a:rPr>
+              <a:t>   (+3)</a:t>
+            </a:r>
+          </a:p>
+          <a:p>
+            <a:r>
+              <a:rPr lang="en-US" sz="2800" dirty="0">
+                <a:latin typeface="Consolas" panose="020B0609020204030204" pitchFamily="49" charset="0"/>
+              </a:rPr>
+              <a:t>  </a:t>
+            </a:r>
+            <a:r>
+              <a:rPr lang="en-US" sz="2800" u="sng" dirty="0">
+                <a:latin typeface="Consolas" panose="020B0609020204030204" pitchFamily="49" charset="0"/>
+              </a:rPr>
+              <a:t>+(-6)</a:t>
+            </a:r>
+          </a:p>
+          <a:p>
+            <a:r>
+              <a:rPr lang="en-US" sz="2800" dirty="0">
+                <a:latin typeface="Consolas" panose="020B0609020204030204" pitchFamily="49" charset="0"/>
+              </a:rPr>
+              <a:t>    -3</a:t>
+            </a:r>
+            <a:r>
+              <a:rPr lang="en-US" sz="2800" baseline="-25000" dirty="0">
+                <a:latin typeface="Consolas" panose="020B0609020204030204" pitchFamily="49" charset="0"/>
+              </a:rPr>
+              <a:t>10</a:t>
+            </a:r>
+          </a:p>
+        </p:txBody>
+      </p:sp>
+      <p:cxnSp>
+        <p:nvCxnSpPr>
+          <p:cNvPr id="34" name="Straight Arrow Connector 33"/>
+          <p:cNvCxnSpPr/>
+          <p:nvPr/>
+        </p:nvCxnSpPr>
+        <p:spPr>
+          <a:xfrm>
+            <a:off x="6915150" y="3503268"/>
+            <a:ext cx="906706" cy="0"/>
+          </a:xfrm>
+          <a:prstGeom prst="straightConnector1">
+            <a:avLst/>
+          </a:prstGeom>
+          <a:ln w="76200">
+            <a:solidFill>
+              <a:srgbClr val="FF0000"/>
+            </a:solidFill>
+            <a:tailEnd type="triangle"/>
+          </a:ln>
+        </p:spPr>
+        <p:style>
+          <a:lnRef idx="1">
+            <a:schemeClr val="accent1"/>
+          </a:lnRef>
+          <a:fillRef idx="0">
+            <a:schemeClr val="accent1"/>
+          </a:fillRef>
+          <a:effectRef idx="0">
+            <a:schemeClr val="accent1"/>
+          </a:effectRef>
+          <a:fontRef idx="minor">
+            <a:schemeClr val="tx1"/>
+          </a:fontRef>
+        </p:style>
+      </p:cxnSp>
+      <p:cxnSp>
+        <p:nvCxnSpPr>
+          <p:cNvPr id="35" name="Straight Arrow Connector 34"/>
+          <p:cNvCxnSpPr/>
+          <p:nvPr/>
+        </p:nvCxnSpPr>
+        <p:spPr>
+          <a:xfrm flipH="1" flipV="1">
+            <a:off x="3967547" y="3457930"/>
+            <a:ext cx="942045" cy="11332"/>
+          </a:xfrm>
+          <a:prstGeom prst="straightConnector1">
+            <a:avLst/>
+          </a:prstGeom>
+          <a:ln w="76200">
+            <a:solidFill>
+              <a:srgbClr val="FF0000"/>
+            </a:solidFill>
+            <a:tailEnd type="triangle"/>
+          </a:ln>
+        </p:spPr>
+        <p:style>
+          <a:lnRef idx="1">
+            <a:schemeClr val="accent1"/>
+          </a:lnRef>
+          <a:fillRef idx="0">
+            <a:schemeClr val="accent1"/>
+          </a:fillRef>
+          <a:effectRef idx="0">
+            <a:schemeClr val="accent1"/>
+          </a:effectRef>
+          <a:fontRef idx="minor">
+            <a:schemeClr val="tx1"/>
+          </a:fontRef>
+        </p:style>
+      </p:cxnSp>
+      <p:pic>
+        <p:nvPicPr>
+          <p:cNvPr id="13" name="Picture 12"/>
+          <p:cNvPicPr>
+            <a:picLocks noChangeAspect="1"/>
+          </p:cNvPicPr>
+          <p:nvPr/>
+        </p:nvPicPr>
+        <p:blipFill>
+          <a:blip r:embed="rId3" cstate="print">
+            <a:extLst>
+              <a:ext uri="{28A0092B-C50C-407E-A947-70E740481C1C}">
+                <a14:useLocalDpi xmlns:a14="http://schemas.microsoft.com/office/drawing/2010/main" val="0"/>
+              </a:ext>
+            </a:extLst>
+          </a:blip>
+          <a:stretch>
+            <a:fillRect/>
+          </a:stretch>
+        </p:blipFill>
+        <p:spPr>
+          <a:xfrm>
+            <a:off x="3413280" y="3765302"/>
+            <a:ext cx="533399" cy="523398"/>
+          </a:xfrm>
+          <a:prstGeom prst="rect">
+            <a:avLst/>
+          </a:prstGeom>
+        </p:spPr>
+      </p:pic>
+      <p:pic>
+        <p:nvPicPr>
+          <p:cNvPr id="14" name="Picture 13"/>
+          <p:cNvPicPr>
+            <a:picLocks noChangeAspect="1"/>
+          </p:cNvPicPr>
+          <p:nvPr/>
+        </p:nvPicPr>
+        <p:blipFill>
+          <a:blip r:embed="rId3" cstate="print">
+            <a:extLst>
+              <a:ext uri="{28A0092B-C50C-407E-A947-70E740481C1C}">
+                <a14:useLocalDpi xmlns:a14="http://schemas.microsoft.com/office/drawing/2010/main" val="0"/>
+              </a:ext>
+            </a:extLst>
+          </a:blip>
+          <a:stretch>
+            <a:fillRect/>
+          </a:stretch>
+        </p:blipFill>
+        <p:spPr>
+          <a:xfrm>
+            <a:off x="9533148" y="3766324"/>
+            <a:ext cx="533399" cy="523398"/>
+          </a:xfrm>
+          <a:prstGeom prst="rect">
+            <a:avLst/>
+          </a:prstGeom>
+        </p:spPr>
+      </p:pic>
+    </p:spTree>
+    <p:extLst>
+      <p:ext uri="{BB962C8B-B14F-4D97-AF65-F5344CB8AC3E}">
+        <p14:creationId xmlns:p14="http://schemas.microsoft.com/office/powerpoint/2010/main" val="1403904733"/>
+      </p:ext>
+    </p:extLst>
+  </p:cSld>
+  <p:clrMapOvr>
+    <a:masterClrMapping/>
+  </p:clrMapOvr>
+</p:sld>
+</file>
+
+<file path=ppt/slides/slide30.xml><?xml version="1.0" encoding="utf-8"?>
 <p:sld xmlns:a="http://schemas.openxmlformats.org/drawingml/2006/main" xmlns:r="http://schemas.openxmlformats.org/officeDocument/2006/relationships" xmlns:p="http://schemas.openxmlformats.org/presentationml/2006/main">
   <p:cSld>
     <p:spTree>
@@ -41925,7 +41861,7 @@
 </p:sld>
 </file>
 
-<file path=ppt/slides/slide32.xml><?xml version="1.0" encoding="utf-8"?>
+<file path=ppt/slides/slide31.xml><?xml version="1.0" encoding="utf-8"?>
 <p:sld xmlns:a="http://schemas.openxmlformats.org/drawingml/2006/main" xmlns:r="http://schemas.openxmlformats.org/officeDocument/2006/relationships" xmlns:p="http://schemas.openxmlformats.org/presentationml/2006/main">
   <p:cSld>
     <p:spTree>
@@ -42002,6 +41938,444 @@
     <p:extLst>
       <p:ext uri="{BB962C8B-B14F-4D97-AF65-F5344CB8AC3E}">
         <p14:creationId xmlns:p14="http://schemas.microsoft.com/office/powerpoint/2010/main" val="338773540"/>
+      </p:ext>
+    </p:extLst>
+  </p:cSld>
+  <p:clrMapOvr>
+    <a:masterClrMapping/>
+  </p:clrMapOvr>
+</p:sld>
+</file>
+
+<file path=ppt/slides/slide32.xml><?xml version="1.0" encoding="utf-8"?>
+<p:sld xmlns:a="http://schemas.openxmlformats.org/drawingml/2006/main" xmlns:r="http://schemas.openxmlformats.org/officeDocument/2006/relationships" xmlns:p="http://schemas.openxmlformats.org/presentationml/2006/main">
+  <p:cSld>
+    <p:spTree>
+      <p:nvGrpSpPr>
+        <p:cNvPr id="1" name=""/>
+        <p:cNvGrpSpPr/>
+        <p:nvPr/>
+      </p:nvGrpSpPr>
+      <p:grpSpPr>
+        <a:xfrm>
+          <a:off x="0" y="0"/>
+          <a:ext cx="0" cy="0"/>
+          <a:chOff x="0" y="0"/>
+          <a:chExt cx="0" cy="0"/>
+        </a:xfrm>
+      </p:grpSpPr>
+      <p:sp>
+        <p:nvSpPr>
+          <p:cNvPr id="2" name="Title 1"/>
+          <p:cNvSpPr>
+            <a:spLocks noGrp="1"/>
+          </p:cNvSpPr>
+          <p:nvPr>
+            <p:ph type="title"/>
+          </p:nvPr>
+        </p:nvSpPr>
+        <p:spPr>
+          <a:xfrm>
+            <a:off x="936516" y="749193"/>
+            <a:ext cx="4112737" cy="654492"/>
+          </a:xfrm>
+        </p:spPr>
+        <p:txBody>
+          <a:bodyPr/>
+          <a:lstStyle/>
+          <a:p>
+            <a:r>
+              <a:rPr lang="en-US" dirty="0"/>
+              <a:t>Integer Addition</a:t>
+            </a:r>
+          </a:p>
+        </p:txBody>
+      </p:sp>
+      <p:sp>
+        <p:nvSpPr>
+          <p:cNvPr id="5" name="Content Placeholder 4"/>
+          <p:cNvSpPr>
+            <a:spLocks noGrp="1"/>
+          </p:cNvSpPr>
+          <p:nvPr>
+            <p:ph idx="1"/>
+          </p:nvPr>
+        </p:nvSpPr>
+        <p:spPr>
+          <a:xfrm>
+            <a:off x="936516" y="1643270"/>
+            <a:ext cx="10433326" cy="4974098"/>
+          </a:xfrm>
+        </p:spPr>
+        <p:txBody>
+          <a:bodyPr>
+            <a:normAutofit/>
+          </a:bodyPr>
+          <a:lstStyle/>
+          <a:p>
+            <a:r>
+              <a:rPr lang="en-US" dirty="0">
+                <a:solidFill>
+                  <a:schemeClr val="tx1"/>
+                </a:solidFill>
+              </a:rPr>
+              <a:t>Instructions: </a:t>
+            </a:r>
+            <a:r>
+              <a:rPr lang="en-US" dirty="0">
+                <a:solidFill>
+                  <a:srgbClr val="0070C0"/>
+                </a:solidFill>
+              </a:rPr>
+              <a:t>ADD{</a:t>
+            </a:r>
+            <a:r>
+              <a:rPr lang="en-US" b="1" dirty="0">
+                <a:solidFill>
+                  <a:srgbClr val="FF0000"/>
+                </a:solidFill>
+              </a:rPr>
+              <a:t>S</a:t>
+            </a:r>
+            <a:r>
+              <a:rPr lang="en-US" dirty="0">
+                <a:solidFill>
+                  <a:srgbClr val="0070C0"/>
+                </a:solidFill>
+              </a:rPr>
+              <a:t>}</a:t>
+            </a:r>
+            <a:r>
+              <a:rPr lang="en-US" dirty="0">
+                <a:solidFill>
+                  <a:schemeClr val="tx1"/>
+                </a:solidFill>
+              </a:rPr>
+              <a:t>,</a:t>
+            </a:r>
+            <a:r>
+              <a:rPr lang="en-US" dirty="0">
+                <a:solidFill>
+                  <a:srgbClr val="0070C0"/>
+                </a:solidFill>
+              </a:rPr>
+              <a:t> ADC{</a:t>
+            </a:r>
+            <a:r>
+              <a:rPr lang="en-US" b="1" dirty="0">
+                <a:solidFill>
+                  <a:srgbClr val="FF0000"/>
+                </a:solidFill>
+              </a:rPr>
+              <a:t>S</a:t>
+            </a:r>
+            <a:r>
+              <a:rPr lang="en-US" dirty="0">
+                <a:solidFill>
+                  <a:srgbClr val="0070C0"/>
+                </a:solidFill>
+              </a:rPr>
+              <a:t>}</a:t>
+            </a:r>
+          </a:p>
+          <a:p>
+            <a:r>
+              <a:rPr lang="en-US" dirty="0">
+                <a:solidFill>
+                  <a:schemeClr val="tx1"/>
+                </a:solidFill>
+              </a:rPr>
+              <a:t>Format Examples:</a:t>
+            </a:r>
+          </a:p>
+          <a:p>
+            <a:pPr lvl="1"/>
+            <a:r>
+              <a:rPr lang="en-US" dirty="0">
+                <a:solidFill>
+                  <a:schemeClr val="tx1"/>
+                </a:solidFill>
+              </a:rPr>
+              <a:t>ADD	R0,R1,</a:t>
+            </a:r>
+            <a:r>
+              <a:rPr lang="en-US" b="1" dirty="0">
+                <a:solidFill>
+                  <a:srgbClr val="0000FF"/>
+                </a:solidFill>
+              </a:rPr>
+              <a:t>#5</a:t>
+            </a:r>
+            <a:r>
+              <a:rPr lang="en-US" dirty="0">
+                <a:solidFill>
+                  <a:schemeClr val="tx1"/>
+                </a:solidFill>
+              </a:rPr>
+              <a:t>			// R0 </a:t>
+            </a:r>
+            <a:r>
+              <a:rPr lang="en-US" dirty="0">
+                <a:solidFill>
+                  <a:schemeClr val="tx1"/>
+                </a:solidFill>
+                <a:sym typeface="Wingdings" panose="05000000000000000000" pitchFamily="2" charset="2"/>
+              </a:rPr>
+              <a:t>= R1 + 5</a:t>
+            </a:r>
+            <a:endParaRPr lang="en-US" dirty="0">
+              <a:solidFill>
+                <a:schemeClr val="tx1"/>
+              </a:solidFill>
+            </a:endParaRPr>
+          </a:p>
+          <a:p>
+            <a:pPr lvl="1"/>
+            <a:r>
+              <a:rPr lang="en-US" dirty="0">
+                <a:solidFill>
+                  <a:schemeClr val="tx1"/>
+                </a:solidFill>
+              </a:rPr>
+              <a:t>ADD	R0,R1,R2		// R0 </a:t>
+            </a:r>
+            <a:r>
+              <a:rPr lang="en-US" dirty="0">
+                <a:solidFill>
+                  <a:schemeClr val="tx1"/>
+                </a:solidFill>
+                <a:sym typeface="Wingdings" panose="05000000000000000000" pitchFamily="2" charset="2"/>
+              </a:rPr>
+              <a:t>= R1 + R2</a:t>
+            </a:r>
+            <a:endParaRPr lang="en-US" dirty="0">
+              <a:solidFill>
+                <a:schemeClr val="tx1"/>
+              </a:solidFill>
+            </a:endParaRPr>
+          </a:p>
+          <a:p>
+            <a:pPr lvl="1"/>
+            <a:r>
+              <a:rPr lang="en-US" dirty="0">
+                <a:solidFill>
+                  <a:schemeClr val="tx1"/>
+                </a:solidFill>
+              </a:rPr>
+              <a:t>ADD	R0,R1,</a:t>
+            </a:r>
+            <a:r>
+              <a:rPr lang="en-US" b="1" dirty="0">
+                <a:solidFill>
+                  <a:srgbClr val="0000FF"/>
+                </a:solidFill>
+              </a:rPr>
+              <a:t>R2,LSL #2</a:t>
+            </a:r>
+            <a:r>
+              <a:rPr lang="en-US" dirty="0">
+                <a:solidFill>
+                  <a:schemeClr val="tx1"/>
+                </a:solidFill>
+              </a:rPr>
+              <a:t>		// R0 </a:t>
+            </a:r>
+            <a:r>
+              <a:rPr lang="en-US" dirty="0">
+                <a:solidFill>
+                  <a:schemeClr val="tx1"/>
+                </a:solidFill>
+                <a:sym typeface="Wingdings" panose="05000000000000000000" pitchFamily="2" charset="2"/>
+              </a:rPr>
+              <a:t>= R1 + </a:t>
+            </a:r>
+            <a:r>
+              <a:rPr lang="en-US" b="1" dirty="0">
+                <a:solidFill>
+                  <a:srgbClr val="0000FF"/>
+                </a:solidFill>
+                <a:sym typeface="Wingdings" panose="05000000000000000000" pitchFamily="2" charset="2"/>
+              </a:rPr>
+              <a:t>(R2 &lt;&lt; 2)</a:t>
+            </a:r>
+            <a:endParaRPr lang="en-US" b="1" dirty="0">
+              <a:solidFill>
+                <a:srgbClr val="0000FF"/>
+              </a:solidFill>
+            </a:endParaRPr>
+          </a:p>
+          <a:p>
+            <a:r>
+              <a:rPr lang="en-US" dirty="0">
+                <a:solidFill>
+                  <a:schemeClr val="tx1"/>
+                </a:solidFill>
+              </a:rPr>
+              <a:t>Flags: </a:t>
+            </a:r>
+            <a:r>
+              <a:rPr lang="en-US" dirty="0">
+                <a:solidFill>
+                  <a:srgbClr val="0070C0"/>
+                </a:solidFill>
+              </a:rPr>
+              <a:t>Append “S” to capture result characteristics in NCVZ</a:t>
+            </a:r>
+          </a:p>
+          <a:p>
+            <a:endParaRPr lang="en-US" dirty="0"/>
+          </a:p>
+          <a:p>
+            <a:r>
+              <a:rPr lang="en-US" dirty="0">
+                <a:solidFill>
+                  <a:schemeClr val="tx1"/>
+                </a:solidFill>
+              </a:rPr>
+              <a:t>Overflow:</a:t>
+            </a:r>
+          </a:p>
+          <a:p>
+            <a:pPr lvl="1"/>
+            <a:r>
+              <a:rPr lang="en-US" b="1" dirty="0">
+                <a:solidFill>
+                  <a:srgbClr val="92D050"/>
+                </a:solidFill>
+              </a:rPr>
+              <a:t>Unsigned</a:t>
+            </a:r>
+            <a:r>
+              <a:rPr lang="en-US" dirty="0">
+                <a:solidFill>
+                  <a:srgbClr val="0070C0"/>
+                </a:solidFill>
+              </a:rPr>
+              <a:t>: Carry Flag (C) = 1</a:t>
+            </a:r>
+          </a:p>
+          <a:p>
+            <a:pPr lvl="1"/>
+            <a:r>
+              <a:rPr lang="en-US" dirty="0">
+                <a:solidFill>
+                  <a:srgbClr val="0070C0"/>
+                </a:solidFill>
+              </a:rPr>
+              <a:t>     </a:t>
+            </a:r>
+            <a:r>
+              <a:rPr lang="en-US" b="1" dirty="0">
+                <a:solidFill>
+                  <a:srgbClr val="FF0000"/>
+                </a:solidFill>
+              </a:rPr>
+              <a:t>Signed</a:t>
+            </a:r>
+            <a:r>
+              <a:rPr lang="en-US" dirty="0">
+                <a:solidFill>
+                  <a:srgbClr val="0070C0"/>
+                </a:solidFill>
+              </a:rPr>
+              <a:t>: Overflow Flag (V) = 1 (Set when C</a:t>
+            </a:r>
+            <a:r>
+              <a:rPr lang="en-US" baseline="-25000" dirty="0">
+                <a:solidFill>
+                  <a:srgbClr val="0070C0"/>
+                </a:solidFill>
+              </a:rPr>
+              <a:t>N</a:t>
+            </a:r>
+            <a:r>
+              <a:rPr lang="en-US" dirty="0">
+                <a:solidFill>
+                  <a:srgbClr val="0070C0"/>
+                </a:solidFill>
+              </a:rPr>
+              <a:t>≠C</a:t>
+            </a:r>
+            <a:r>
+              <a:rPr lang="en-US" baseline="-25000" dirty="0">
+                <a:solidFill>
+                  <a:srgbClr val="0070C0"/>
+                </a:solidFill>
+              </a:rPr>
+              <a:t>N-1</a:t>
+            </a:r>
+            <a:r>
+              <a:rPr lang="en-US" dirty="0">
+                <a:solidFill>
+                  <a:srgbClr val="0070C0"/>
+                </a:solidFill>
+              </a:rPr>
+              <a:t>)</a:t>
+            </a:r>
+          </a:p>
+          <a:p>
+            <a:endParaRPr lang="en-US" dirty="0"/>
+          </a:p>
+          <a:p>
+            <a:r>
+              <a:rPr lang="en-US" dirty="0">
+                <a:solidFill>
+                  <a:schemeClr val="tx1"/>
+                </a:solidFill>
+              </a:rPr>
+              <a:t>Multiple precision addition: </a:t>
+            </a:r>
+            <a:r>
+              <a:rPr lang="en-US" dirty="0">
+                <a:solidFill>
+                  <a:srgbClr val="0070C0"/>
+                </a:solidFill>
+              </a:rPr>
+              <a:t>ADD</a:t>
+            </a:r>
+            <a:r>
+              <a:rPr lang="en-US" b="1" dirty="0">
+                <a:solidFill>
+                  <a:srgbClr val="FF0000"/>
+                </a:solidFill>
+              </a:rPr>
+              <a:t>S</a:t>
+            </a:r>
+            <a:r>
+              <a:rPr lang="en-US" dirty="0">
+                <a:solidFill>
+                  <a:srgbClr val="0070C0"/>
+                </a:solidFill>
+              </a:rPr>
+              <a:t> </a:t>
+            </a:r>
+            <a:r>
+              <a:rPr lang="en-US" dirty="0">
+                <a:solidFill>
+                  <a:srgbClr val="0070C0"/>
+                </a:solidFill>
+                <a:sym typeface="Wingdings" panose="05000000000000000000" pitchFamily="2" charset="2"/>
+              </a:rPr>
+              <a:t> ADC</a:t>
+            </a:r>
+            <a:endParaRPr lang="en-US" dirty="0">
+              <a:solidFill>
+                <a:srgbClr val="0070C0"/>
+              </a:solidFill>
+            </a:endParaRPr>
+          </a:p>
+          <a:p>
+            <a:endParaRPr lang="en-US" dirty="0"/>
+          </a:p>
+          <a:p>
+            <a:endParaRPr lang="en-US" dirty="0"/>
+          </a:p>
+        </p:txBody>
+      </p:sp>
+    </p:spTree>
+    <p:extLst>
+      <p:ext uri="{BB962C8B-B14F-4D97-AF65-F5344CB8AC3E}">
+        <p14:creationId xmlns:p14="http://schemas.microsoft.com/office/powerpoint/2010/main" val="385189333"/>
       </p:ext>
     </p:extLst>
   </p:cSld>
@@ -42040,8 +42414,8 @@
         </p:nvSpPr>
         <p:spPr>
           <a:xfrm>
-            <a:off x="936516" y="749193"/>
-            <a:ext cx="4112737" cy="654492"/>
+            <a:off x="936516" y="749192"/>
+            <a:ext cx="4606031" cy="662513"/>
           </a:xfrm>
         </p:spPr>
         <p:txBody>
@@ -42050,396 +42424,467 @@
           <a:p>
             <a:r>
               <a:rPr lang="en-US" dirty="0"/>
-              <a:t>Integer Addition</a:t>
+              <a:t>Integer Subtraction</a:t>
             </a:r>
           </a:p>
         </p:txBody>
       </p:sp>
       <p:sp>
         <p:nvSpPr>
-          <p:cNvPr id="5" name="Content Placeholder 4"/>
-          <p:cNvSpPr>
-            <a:spLocks noGrp="1"/>
+          <p:cNvPr id="6" name="Content Placeholder 4"/>
+          <p:cNvSpPr txBox="1">
+            <a:spLocks/>
           </p:cNvSpPr>
-          <p:nvPr>
-            <p:ph idx="1"/>
-          </p:nvPr>
+          <p:nvPr/>
         </p:nvSpPr>
         <p:spPr>
           <a:xfrm>
-            <a:off x="936516" y="1643270"/>
-            <a:ext cx="10433326" cy="4974098"/>
+            <a:off x="936515" y="1708172"/>
+            <a:ext cx="10425305" cy="4953311"/>
           </a:xfrm>
+          <a:prstGeom prst="rect">
+            <a:avLst/>
+          </a:prstGeom>
         </p:spPr>
         <p:txBody>
-          <a:bodyPr>
+          <a:bodyPr vert="horz" lIns="68580" tIns="34290" rIns="68580" bIns="34290" rtlCol="0">
             <a:normAutofit/>
           </a:bodyPr>
-          <a:lstStyle/>
-          <a:p>
-            <a:r>
-              <a:rPr lang="en-US" dirty="0">
+          <a:lstStyle>
+            <a:lvl1pPr marL="228600" indent="-228600" algn="l" defTabSz="914400" rtl="0" eaLnBrk="1" latinLnBrk="0" hangingPunct="1">
+              <a:lnSpc>
+                <a:spcPct val="90000"/>
+              </a:lnSpc>
+              <a:spcBef>
+                <a:spcPts val="1000"/>
+              </a:spcBef>
+              <a:buFont typeface="Arial" panose="020B0604020202020204" pitchFamily="34" charset="0"/>
+              <a:buChar char="•"/>
+              <a:defRPr sz="2800" kern="1200">
                 <a:solidFill>
                   <a:schemeClr val="tx1"/>
                 </a:solidFill>
-              </a:rPr>
+                <a:latin typeface="+mn-lt"/>
+                <a:ea typeface="+mn-ea"/>
+                <a:cs typeface="+mn-cs"/>
+              </a:defRPr>
+            </a:lvl1pPr>
+            <a:lvl2pPr marL="685800" indent="-228600" algn="l" defTabSz="914400" rtl="0" eaLnBrk="1" latinLnBrk="0" hangingPunct="1">
+              <a:lnSpc>
+                <a:spcPct val="90000"/>
+              </a:lnSpc>
+              <a:spcBef>
+                <a:spcPts val="500"/>
+              </a:spcBef>
+              <a:buFont typeface="Arial" panose="020B0604020202020204" pitchFamily="34" charset="0"/>
+              <a:buChar char="•"/>
+              <a:defRPr sz="2400" kern="1200">
+                <a:solidFill>
+                  <a:schemeClr val="tx1"/>
+                </a:solidFill>
+                <a:latin typeface="+mn-lt"/>
+                <a:ea typeface="+mn-ea"/>
+                <a:cs typeface="+mn-cs"/>
+              </a:defRPr>
+            </a:lvl2pPr>
+            <a:lvl3pPr marL="1143000" indent="-228600" algn="l" defTabSz="914400" rtl="0" eaLnBrk="1" latinLnBrk="0" hangingPunct="1">
+              <a:lnSpc>
+                <a:spcPct val="90000"/>
+              </a:lnSpc>
+              <a:spcBef>
+                <a:spcPts val="500"/>
+              </a:spcBef>
+              <a:buFont typeface="Arial" panose="020B0604020202020204" pitchFamily="34" charset="0"/>
+              <a:buChar char="•"/>
+              <a:defRPr sz="2000" kern="1200">
+                <a:solidFill>
+                  <a:schemeClr val="tx1"/>
+                </a:solidFill>
+                <a:latin typeface="+mn-lt"/>
+                <a:ea typeface="+mn-ea"/>
+                <a:cs typeface="+mn-cs"/>
+              </a:defRPr>
+            </a:lvl3pPr>
+            <a:lvl4pPr marL="1600200" indent="-228600" algn="l" defTabSz="914400" rtl="0" eaLnBrk="1" latinLnBrk="0" hangingPunct="1">
+              <a:lnSpc>
+                <a:spcPct val="90000"/>
+              </a:lnSpc>
+              <a:spcBef>
+                <a:spcPts val="500"/>
+              </a:spcBef>
+              <a:buFont typeface="Arial" panose="020B0604020202020204" pitchFamily="34" charset="0"/>
+              <a:buChar char="•"/>
+              <a:defRPr sz="1800" kern="1200">
+                <a:solidFill>
+                  <a:schemeClr val="tx1"/>
+                </a:solidFill>
+                <a:latin typeface="+mn-lt"/>
+                <a:ea typeface="+mn-ea"/>
+                <a:cs typeface="+mn-cs"/>
+              </a:defRPr>
+            </a:lvl4pPr>
+            <a:lvl5pPr marL="2057400" indent="-228600" algn="l" defTabSz="914400" rtl="0" eaLnBrk="1" latinLnBrk="0" hangingPunct="1">
+              <a:lnSpc>
+                <a:spcPct val="90000"/>
+              </a:lnSpc>
+              <a:spcBef>
+                <a:spcPts val="500"/>
+              </a:spcBef>
+              <a:buFont typeface="Arial" panose="020B0604020202020204" pitchFamily="34" charset="0"/>
+              <a:buChar char="•"/>
+              <a:defRPr sz="1800" kern="1200">
+                <a:solidFill>
+                  <a:schemeClr val="tx1"/>
+                </a:solidFill>
+                <a:latin typeface="+mn-lt"/>
+                <a:ea typeface="+mn-ea"/>
+                <a:cs typeface="+mn-cs"/>
+              </a:defRPr>
+            </a:lvl5pPr>
+            <a:lvl6pPr marL="2514600" indent="-228600" algn="l" defTabSz="914400" rtl="0" eaLnBrk="1" latinLnBrk="0" hangingPunct="1">
+              <a:lnSpc>
+                <a:spcPct val="90000"/>
+              </a:lnSpc>
+              <a:spcBef>
+                <a:spcPts val="500"/>
+              </a:spcBef>
+              <a:buFont typeface="Arial" panose="020B0604020202020204" pitchFamily="34" charset="0"/>
+              <a:buChar char="•"/>
+              <a:defRPr sz="1800" kern="1200">
+                <a:solidFill>
+                  <a:schemeClr val="tx1"/>
+                </a:solidFill>
+                <a:latin typeface="+mn-lt"/>
+                <a:ea typeface="+mn-ea"/>
+                <a:cs typeface="+mn-cs"/>
+              </a:defRPr>
+            </a:lvl6pPr>
+            <a:lvl7pPr marL="2971800" indent="-228600" algn="l" defTabSz="914400" rtl="0" eaLnBrk="1" latinLnBrk="0" hangingPunct="1">
+              <a:lnSpc>
+                <a:spcPct val="90000"/>
+              </a:lnSpc>
+              <a:spcBef>
+                <a:spcPts val="500"/>
+              </a:spcBef>
+              <a:buFont typeface="Arial" panose="020B0604020202020204" pitchFamily="34" charset="0"/>
+              <a:buChar char="•"/>
+              <a:defRPr sz="1800" kern="1200">
+                <a:solidFill>
+                  <a:schemeClr val="tx1"/>
+                </a:solidFill>
+                <a:latin typeface="+mn-lt"/>
+                <a:ea typeface="+mn-ea"/>
+                <a:cs typeface="+mn-cs"/>
+              </a:defRPr>
+            </a:lvl7pPr>
+            <a:lvl8pPr marL="3429000" indent="-228600" algn="l" defTabSz="914400" rtl="0" eaLnBrk="1" latinLnBrk="0" hangingPunct="1">
+              <a:lnSpc>
+                <a:spcPct val="90000"/>
+              </a:lnSpc>
+              <a:spcBef>
+                <a:spcPts val="500"/>
+              </a:spcBef>
+              <a:buFont typeface="Arial" panose="020B0604020202020204" pitchFamily="34" charset="0"/>
+              <a:buChar char="•"/>
+              <a:defRPr sz="1800" kern="1200">
+                <a:solidFill>
+                  <a:schemeClr val="tx1"/>
+                </a:solidFill>
+                <a:latin typeface="+mn-lt"/>
+                <a:ea typeface="+mn-ea"/>
+                <a:cs typeface="+mn-cs"/>
+              </a:defRPr>
+            </a:lvl8pPr>
+            <a:lvl9pPr marL="3886200" indent="-228600" algn="l" defTabSz="914400" rtl="0" eaLnBrk="1" latinLnBrk="0" hangingPunct="1">
+              <a:lnSpc>
+                <a:spcPct val="90000"/>
+              </a:lnSpc>
+              <a:spcBef>
+                <a:spcPts val="500"/>
+              </a:spcBef>
+              <a:buFont typeface="Arial" panose="020B0604020202020204" pitchFamily="34" charset="0"/>
+              <a:buChar char="•"/>
+              <a:defRPr sz="1800" kern="1200">
+                <a:solidFill>
+                  <a:schemeClr val="tx1"/>
+                </a:solidFill>
+                <a:latin typeface="+mn-lt"/>
+                <a:ea typeface="+mn-ea"/>
+                <a:cs typeface="+mn-cs"/>
+              </a:defRPr>
+            </a:lvl9pPr>
+          </a:lstStyle>
+          <a:p>
+            <a:r>
+              <a:rPr lang="en-US" sz="2100" dirty="0"/>
               <a:t>Instructions: </a:t>
             </a:r>
             <a:r>
-              <a:rPr lang="en-US" dirty="0">
+              <a:rPr lang="en-US" sz="2100" dirty="0">
                 <a:solidFill>
                   <a:srgbClr val="0070C0"/>
                 </a:solidFill>
               </a:rPr>
-              <a:t>ADD{</a:t>
-            </a:r>
-            <a:r>
-              <a:rPr lang="en-US" b="1" dirty="0">
-                <a:solidFill>
-                  <a:srgbClr val="FF0000"/>
-                </a:solidFill>
-              </a:rPr>
-              <a:t>S</a:t>
-            </a:r>
-            <a:r>
-              <a:rPr lang="en-US" dirty="0">
+              <a:t>SUB{S}, SBC{S}, RSB{S}</a:t>
+            </a:r>
+          </a:p>
+          <a:p>
+            <a:r>
+              <a:rPr lang="en-US" sz="2100" dirty="0"/>
+              <a:t>Format Examples:</a:t>
+            </a:r>
+          </a:p>
+          <a:p>
+            <a:pPr lvl="1"/>
+            <a:r>
+              <a:rPr lang="en-US" sz="1800" dirty="0"/>
+              <a:t>SUB	R0,R1,</a:t>
+            </a:r>
+            <a:r>
+              <a:rPr lang="en-US" sz="1800" b="1" dirty="0">
+                <a:solidFill>
+                  <a:srgbClr val="0000FF"/>
+                </a:solidFill>
+              </a:rPr>
+              <a:t>#5</a:t>
+            </a:r>
+            <a:r>
+              <a:rPr lang="en-US" sz="1800" dirty="0"/>
+              <a:t>		// R0 </a:t>
+            </a:r>
+            <a:r>
+              <a:rPr lang="en-US" sz="1800" dirty="0">
+                <a:sym typeface="Wingdings" panose="05000000000000000000" pitchFamily="2" charset="2"/>
+              </a:rPr>
+              <a:t>= R1 - 5</a:t>
+            </a:r>
+            <a:endParaRPr lang="en-US" sz="1800" dirty="0"/>
+          </a:p>
+          <a:p>
+            <a:pPr lvl="1"/>
+            <a:r>
+              <a:rPr lang="en-US" sz="1800" dirty="0"/>
+              <a:t>SUB	R0,R1,R2		// R0 </a:t>
+            </a:r>
+            <a:r>
+              <a:rPr lang="en-US" sz="1800" dirty="0">
+                <a:sym typeface="Wingdings" panose="05000000000000000000" pitchFamily="2" charset="2"/>
+              </a:rPr>
+              <a:t>= R1 - R2</a:t>
+            </a:r>
+            <a:endParaRPr lang="en-US" sz="1800" dirty="0"/>
+          </a:p>
+          <a:p>
+            <a:pPr lvl="1"/>
+            <a:r>
+              <a:rPr lang="en-US" sz="1800" dirty="0"/>
+              <a:t>SUB	R0,R1,</a:t>
+            </a:r>
+            <a:r>
+              <a:rPr lang="en-US" sz="1800" b="1" dirty="0">
+                <a:solidFill>
+                  <a:srgbClr val="0000FF"/>
+                </a:solidFill>
+              </a:rPr>
+              <a:t>R2,LSL #2</a:t>
+            </a:r>
+            <a:r>
+              <a:rPr lang="en-US" sz="1800" dirty="0"/>
+              <a:t>		// R0 </a:t>
+            </a:r>
+            <a:r>
+              <a:rPr lang="en-US" sz="1800" dirty="0">
+                <a:sym typeface="Wingdings" panose="05000000000000000000" pitchFamily="2" charset="2"/>
+              </a:rPr>
+              <a:t>= R1 - </a:t>
+            </a:r>
+            <a:r>
+              <a:rPr lang="en-US" sz="1800" b="1" dirty="0">
+                <a:solidFill>
+                  <a:srgbClr val="0000FF"/>
+                </a:solidFill>
+                <a:sym typeface="Wingdings" panose="05000000000000000000" pitchFamily="2" charset="2"/>
+              </a:rPr>
+              <a:t>(R2 &lt;&lt; 2)</a:t>
+            </a:r>
+            <a:r>
+              <a:rPr lang="en-US" sz="1800" dirty="0">
                 <a:solidFill>
                   <a:srgbClr val="0070C0"/>
                 </a:solidFill>
-              </a:rPr>
-              <a:t>}</a:t>
-            </a:r>
-            <a:r>
-              <a:rPr lang="en-US" dirty="0">
-                <a:solidFill>
-                  <a:schemeClr val="tx1"/>
-                </a:solidFill>
-              </a:rPr>
-              <a:t>,</a:t>
-            </a:r>
-            <a:r>
-              <a:rPr lang="en-US" dirty="0">
-                <a:solidFill>
-                  <a:srgbClr val="0070C0"/>
-                </a:solidFill>
-              </a:rPr>
-              <a:t> ADC{</a:t>
-            </a:r>
-            <a:r>
-              <a:rPr lang="en-US" b="1" dirty="0">
-                <a:solidFill>
-                  <a:srgbClr val="FF0000"/>
-                </a:solidFill>
-              </a:rPr>
-              <a:t>S</a:t>
-            </a:r>
-            <a:r>
-              <a:rPr lang="en-US" dirty="0">
-                <a:solidFill>
-                  <a:srgbClr val="0070C0"/>
-                </a:solidFill>
-              </a:rPr>
-              <a:t>}</a:t>
-            </a:r>
-          </a:p>
-          <a:p>
-            <a:r>
-              <a:rPr lang="en-US" dirty="0">
-                <a:solidFill>
-                  <a:schemeClr val="tx1"/>
-                </a:solidFill>
-              </a:rPr>
-              <a:t>Format Examples:</a:t>
-            </a:r>
-          </a:p>
-          <a:p>
-            <a:pPr lvl="1"/>
-            <a:r>
-              <a:rPr lang="en-US" dirty="0">
-                <a:solidFill>
-                  <a:schemeClr val="tx1"/>
-                </a:solidFill>
-              </a:rPr>
-              <a:t>ADD	R0,R1,</a:t>
-            </a:r>
-            <a:r>
-              <a:rPr lang="en-US" b="1" dirty="0">
-                <a:solidFill>
-                  <a:srgbClr val="0000FF"/>
-                </a:solidFill>
-              </a:rPr>
-              <a:t>#5</a:t>
-            </a:r>
-            <a:r>
-              <a:rPr lang="en-US" dirty="0">
-                <a:solidFill>
-                  <a:schemeClr val="tx1"/>
-                </a:solidFill>
-              </a:rPr>
-              <a:t>			// R0 </a:t>
-            </a:r>
-            <a:r>
-              <a:rPr lang="en-US" dirty="0">
-                <a:solidFill>
-                  <a:schemeClr val="tx1"/>
-                </a:solidFill>
                 <a:sym typeface="Wingdings" panose="05000000000000000000" pitchFamily="2" charset="2"/>
               </a:rPr>
-              <a:t>= R1 + 5</a:t>
-            </a:r>
-            <a:endParaRPr lang="en-US" dirty="0">
-              <a:solidFill>
-                <a:schemeClr val="tx1"/>
-              </a:solidFill>
-            </a:endParaRPr>
-          </a:p>
-          <a:p>
-            <a:pPr lvl="1"/>
-            <a:r>
-              <a:rPr lang="en-US" dirty="0">
-                <a:solidFill>
-                  <a:schemeClr val="tx1"/>
-                </a:solidFill>
-              </a:rPr>
-              <a:t>ADD	R0,R1,R2		// R0 </a:t>
-            </a:r>
-            <a:r>
-              <a:rPr lang="en-US" dirty="0">
-                <a:solidFill>
-                  <a:schemeClr val="tx1"/>
-                </a:solidFill>
-                <a:sym typeface="Wingdings" panose="05000000000000000000" pitchFamily="2" charset="2"/>
-              </a:rPr>
-              <a:t>= R1 + R2</a:t>
-            </a:r>
-            <a:endParaRPr lang="en-US" dirty="0">
-              <a:solidFill>
-                <a:schemeClr val="tx1"/>
-              </a:solidFill>
-            </a:endParaRPr>
-          </a:p>
-          <a:p>
-            <a:pPr lvl="1"/>
-            <a:r>
-              <a:rPr lang="en-US" dirty="0">
-                <a:solidFill>
-                  <a:schemeClr val="tx1"/>
-                </a:solidFill>
-              </a:rPr>
-              <a:t>ADD	R0,R1,</a:t>
-            </a:r>
-            <a:r>
-              <a:rPr lang="en-US" b="1" dirty="0">
-                <a:solidFill>
-                  <a:srgbClr val="0000FF"/>
-                </a:solidFill>
-              </a:rPr>
-              <a:t>R2,LSL #2</a:t>
-            </a:r>
-            <a:r>
-              <a:rPr lang="en-US" dirty="0">
-                <a:solidFill>
-                  <a:schemeClr val="tx1"/>
-                </a:solidFill>
-              </a:rPr>
-              <a:t>		// R0 </a:t>
-            </a:r>
-            <a:r>
-              <a:rPr lang="en-US" dirty="0">
-                <a:solidFill>
-                  <a:schemeClr val="tx1"/>
-                </a:solidFill>
-                <a:sym typeface="Wingdings" panose="05000000000000000000" pitchFamily="2" charset="2"/>
-              </a:rPr>
-              <a:t>= R1 + </a:t>
-            </a:r>
-            <a:r>
-              <a:rPr lang="en-US" b="1" dirty="0">
-                <a:solidFill>
-                  <a:srgbClr val="0000FF"/>
-                </a:solidFill>
-                <a:sym typeface="Wingdings" panose="05000000000000000000" pitchFamily="2" charset="2"/>
-              </a:rPr>
-              <a:t>(R2 &lt;&lt; 2)</a:t>
-            </a:r>
-            <a:endParaRPr lang="en-US" b="1" dirty="0">
-              <a:solidFill>
-                <a:srgbClr val="0000FF"/>
-              </a:solidFill>
-            </a:endParaRPr>
-          </a:p>
-          <a:p>
-            <a:r>
-              <a:rPr lang="en-US" dirty="0">
-                <a:solidFill>
-                  <a:schemeClr val="tx1"/>
-                </a:solidFill>
-              </a:rPr>
-              <a:t>Flags: </a:t>
-            </a:r>
-            <a:r>
-              <a:rPr lang="en-US" dirty="0">
-                <a:solidFill>
-                  <a:srgbClr val="0070C0"/>
-                </a:solidFill>
-              </a:rPr>
-              <a:t>Append “S” to capture result characteristics in NCVZ</a:t>
-            </a:r>
-          </a:p>
-          <a:p>
-            <a:endParaRPr lang="en-US" dirty="0"/>
-          </a:p>
-          <a:p>
-            <a:r>
-              <a:rPr lang="en-US" dirty="0">
-                <a:solidFill>
-                  <a:schemeClr val="tx1"/>
-                </a:solidFill>
-              </a:rPr>
-              <a:t>Overflow:</a:t>
-            </a:r>
-          </a:p>
-          <a:p>
-            <a:pPr lvl="1"/>
-            <a:r>
-              <a:rPr lang="en-US" b="1" dirty="0">
-                <a:solidFill>
-                  <a:srgbClr val="92D050"/>
-                </a:solidFill>
-              </a:rPr>
-              <a:t>Unsigned</a:t>
-            </a:r>
-            <a:r>
-              <a:rPr lang="en-US" dirty="0">
-                <a:solidFill>
-                  <a:srgbClr val="0070C0"/>
-                </a:solidFill>
-              </a:rPr>
-              <a:t>: Carry Flag (C) = 1</a:t>
-            </a:r>
-          </a:p>
-          <a:p>
-            <a:pPr lvl="1"/>
-            <a:r>
-              <a:rPr lang="en-US" dirty="0">
-                <a:solidFill>
-                  <a:srgbClr val="0070C0"/>
-                </a:solidFill>
-              </a:rPr>
-              <a:t>     </a:t>
-            </a:r>
-            <a:r>
-              <a:rPr lang="en-US" b="1" dirty="0">
-                <a:solidFill>
-                  <a:srgbClr val="FF0000"/>
-                </a:solidFill>
-              </a:rPr>
-              <a:t>Signed</a:t>
-            </a:r>
-            <a:r>
-              <a:rPr lang="en-US" dirty="0">
-                <a:solidFill>
-                  <a:srgbClr val="0070C0"/>
-                </a:solidFill>
-              </a:rPr>
-              <a:t>: Overflow Flag (V) = 1 (Set when C</a:t>
-            </a:r>
-            <a:r>
-              <a:rPr lang="en-US" baseline="-25000" dirty="0">
-                <a:solidFill>
-                  <a:srgbClr val="0070C0"/>
-                </a:solidFill>
-              </a:rPr>
-              <a:t>N</a:t>
-            </a:r>
-            <a:r>
-              <a:rPr lang="en-US" dirty="0">
-                <a:solidFill>
-                  <a:srgbClr val="0070C0"/>
-                </a:solidFill>
-              </a:rPr>
-              <a:t>≠C</a:t>
-            </a:r>
-            <a:r>
-              <a:rPr lang="en-US" baseline="-25000" dirty="0">
-                <a:solidFill>
-                  <a:srgbClr val="0070C0"/>
-                </a:solidFill>
-              </a:rPr>
-              <a:t>N-1</a:t>
-            </a:r>
-            <a:r>
-              <a:rPr lang="en-US" dirty="0">
-                <a:solidFill>
-                  <a:srgbClr val="0070C0"/>
-                </a:solidFill>
-              </a:rPr>
-              <a:t>)</a:t>
-            </a:r>
-          </a:p>
-          <a:p>
-            <a:endParaRPr lang="en-US" dirty="0"/>
-          </a:p>
-          <a:p>
-            <a:r>
-              <a:rPr lang="en-US" dirty="0">
-                <a:solidFill>
-                  <a:schemeClr val="tx1"/>
-                </a:solidFill>
-              </a:rPr>
-              <a:t>Multiple precision addition: </a:t>
-            </a:r>
-            <a:r>
-              <a:rPr lang="en-US" dirty="0">
-                <a:solidFill>
-                  <a:srgbClr val="0070C0"/>
-                </a:solidFill>
-              </a:rPr>
-              <a:t>ADD</a:t>
-            </a:r>
-            <a:r>
-              <a:rPr lang="en-US" b="1" dirty="0">
-                <a:solidFill>
-                  <a:srgbClr val="FF0000"/>
-                </a:solidFill>
-              </a:rPr>
-              <a:t>S</a:t>
-            </a:r>
-            <a:r>
-              <a:rPr lang="en-US" dirty="0">
-                <a:solidFill>
-                  <a:srgbClr val="0070C0"/>
-                </a:solidFill>
-              </a:rPr>
-              <a:t> </a:t>
-            </a:r>
-            <a:r>
-              <a:rPr lang="en-US" dirty="0">
-                <a:solidFill>
-                  <a:srgbClr val="0070C0"/>
-                </a:solidFill>
-                <a:sym typeface="Wingdings" panose="05000000000000000000" pitchFamily="2" charset="2"/>
-              </a:rPr>
-              <a:t> ADC</a:t>
-            </a:r>
-            <a:endParaRPr lang="en-US" dirty="0">
+              <a:t>	</a:t>
+            </a:r>
+            <a:endParaRPr lang="en-US" sz="1800" dirty="0">
               <a:solidFill>
                 <a:srgbClr val="0070C0"/>
               </a:solidFill>
             </a:endParaRPr>
           </a:p>
           <a:p>
-            <a:endParaRPr lang="en-US" dirty="0"/>
-          </a:p>
-          <a:p>
-            <a:endParaRPr lang="en-US" dirty="0"/>
+            <a:endParaRPr lang="en-US" sz="2100" dirty="0"/>
+          </a:p>
+          <a:p>
+            <a:r>
+              <a:rPr lang="en-US" sz="2100" dirty="0"/>
+              <a:t>Flags: </a:t>
+            </a:r>
+            <a:r>
+              <a:rPr lang="en-US" sz="2100" dirty="0">
+                <a:solidFill>
+                  <a:srgbClr val="0070C0"/>
+                </a:solidFill>
+              </a:rPr>
+              <a:t>Append “S” to capture result characteristics in NCVZ</a:t>
+            </a:r>
+          </a:p>
+          <a:p>
+            <a:endParaRPr lang="en-US" sz="2100" dirty="0"/>
+          </a:p>
+          <a:p>
+            <a:r>
+              <a:rPr lang="en-US" sz="2100" dirty="0"/>
+              <a:t>Overflow:</a:t>
+            </a:r>
+          </a:p>
+          <a:p>
+            <a:pPr lvl="1"/>
+            <a:r>
+              <a:rPr lang="en-US" sz="1800" b="1" dirty="0">
+                <a:solidFill>
+                  <a:srgbClr val="92D050"/>
+                </a:solidFill>
+              </a:rPr>
+              <a:t>Unsigned</a:t>
+            </a:r>
+            <a:r>
+              <a:rPr lang="en-US" sz="1800" dirty="0">
+                <a:solidFill>
+                  <a:srgbClr val="0070C0"/>
+                </a:solidFill>
+              </a:rPr>
+              <a:t>: Carry Flag       (C) = 0</a:t>
+            </a:r>
+          </a:p>
+          <a:p>
+            <a:pPr lvl="1"/>
+            <a:r>
+              <a:rPr lang="en-US" sz="1800" dirty="0">
+                <a:solidFill>
+                  <a:srgbClr val="0070C0"/>
+                </a:solidFill>
+              </a:rPr>
+              <a:t>     </a:t>
+            </a:r>
+            <a:r>
+              <a:rPr lang="en-US" sz="1800" b="1" dirty="0">
+                <a:solidFill>
+                  <a:srgbClr val="FF0000"/>
+                </a:solidFill>
+              </a:rPr>
+              <a:t>Signed</a:t>
+            </a:r>
+            <a:r>
+              <a:rPr lang="en-US" sz="1800" dirty="0">
+                <a:solidFill>
+                  <a:srgbClr val="0070C0"/>
+                </a:solidFill>
+              </a:rPr>
+              <a:t>: Overflow Flag (V) = 1 (Set when C</a:t>
+            </a:r>
+            <a:r>
+              <a:rPr lang="en-US" sz="1800" baseline="-25000" dirty="0">
+                <a:solidFill>
+                  <a:srgbClr val="0070C0"/>
+                </a:solidFill>
+              </a:rPr>
+              <a:t>N</a:t>
+            </a:r>
+            <a:r>
+              <a:rPr lang="en-US" sz="1800" dirty="0">
+                <a:solidFill>
+                  <a:srgbClr val="0070C0"/>
+                </a:solidFill>
+              </a:rPr>
+              <a:t>≠C</a:t>
+            </a:r>
+            <a:r>
+              <a:rPr lang="en-US" sz="1800" baseline="-25000" dirty="0">
+                <a:solidFill>
+                  <a:srgbClr val="0070C0"/>
+                </a:solidFill>
+              </a:rPr>
+              <a:t>N-1</a:t>
+            </a:r>
+            <a:r>
+              <a:rPr lang="en-US" sz="1800" dirty="0">
+                <a:solidFill>
+                  <a:srgbClr val="0070C0"/>
+                </a:solidFill>
+              </a:rPr>
+              <a:t>)</a:t>
+            </a:r>
+          </a:p>
+          <a:p>
+            <a:endParaRPr lang="en-US" sz="2100" dirty="0"/>
+          </a:p>
+          <a:p>
+            <a:r>
+              <a:rPr lang="en-US" sz="2100" dirty="0"/>
+              <a:t>Multiple precision subtraction: </a:t>
+            </a:r>
+            <a:r>
+              <a:rPr lang="en-US" sz="2100" dirty="0">
+                <a:solidFill>
+                  <a:srgbClr val="0070C0"/>
+                </a:solidFill>
+              </a:rPr>
+              <a:t>SUB</a:t>
+            </a:r>
+            <a:r>
+              <a:rPr lang="en-US" sz="2100" b="1" dirty="0">
+                <a:solidFill>
+                  <a:srgbClr val="FF0000"/>
+                </a:solidFill>
+              </a:rPr>
+              <a:t>S</a:t>
+            </a:r>
+            <a:r>
+              <a:rPr lang="en-US" sz="2100" dirty="0">
+                <a:solidFill>
+                  <a:srgbClr val="0070C0"/>
+                </a:solidFill>
+              </a:rPr>
+              <a:t> </a:t>
+            </a:r>
+            <a:r>
+              <a:rPr lang="en-US" sz="2100" dirty="0">
+                <a:solidFill>
+                  <a:srgbClr val="0070C0"/>
+                </a:solidFill>
+                <a:sym typeface="Wingdings" panose="05000000000000000000" pitchFamily="2" charset="2"/>
+              </a:rPr>
+              <a:t> SBC</a:t>
+            </a:r>
+            <a:endParaRPr lang="en-US" sz="2100" dirty="0">
+              <a:solidFill>
+                <a:srgbClr val="0070C0"/>
+              </a:solidFill>
+            </a:endParaRPr>
+          </a:p>
+          <a:p>
+            <a:endParaRPr lang="en-US" sz="2100" dirty="0"/>
+          </a:p>
+          <a:p>
+            <a:endParaRPr lang="en-US" sz="2100" dirty="0"/>
           </a:p>
         </p:txBody>
       </p:sp>
     </p:spTree>
     <p:extLst>
       <p:ext uri="{BB962C8B-B14F-4D97-AF65-F5344CB8AC3E}">
-        <p14:creationId xmlns:p14="http://schemas.microsoft.com/office/powerpoint/2010/main" val="385189333"/>
+        <p14:creationId xmlns:p14="http://schemas.microsoft.com/office/powerpoint/2010/main" val="2046813644"/>
       </p:ext>
     </p:extLst>
   </p:cSld>
@@ -42478,477 +42923,355 @@
         </p:nvSpPr>
         <p:spPr>
           <a:xfrm>
-            <a:off x="936516" y="749192"/>
-            <a:ext cx="4606031" cy="662513"/>
+            <a:off x="936516" y="745181"/>
+            <a:ext cx="9466789" cy="686577"/>
           </a:xfrm>
         </p:spPr>
         <p:txBody>
-          <a:bodyPr/>
+          <a:bodyPr>
+            <a:normAutofit/>
+          </a:bodyPr>
           <a:lstStyle/>
           <a:p>
             <a:r>
               <a:rPr lang="en-US" dirty="0"/>
-              <a:t>Integer Subtraction</a:t>
+              <a:t>Single-Length 32x32 Integer Multiplication</a:t>
             </a:r>
           </a:p>
         </p:txBody>
       </p:sp>
       <p:sp>
         <p:nvSpPr>
-          <p:cNvPr id="6" name="Content Placeholder 4"/>
-          <p:cNvSpPr txBox="1">
-            <a:spLocks/>
+          <p:cNvPr id="3" name="Content Placeholder 2"/>
+          <p:cNvSpPr>
+            <a:spLocks noGrp="1"/>
           </p:cNvSpPr>
-          <p:nvPr/>
+          <p:nvPr>
+            <p:ph idx="1"/>
+          </p:nvPr>
         </p:nvSpPr>
         <p:spPr>
           <a:xfrm>
-            <a:off x="936515" y="1708172"/>
-            <a:ext cx="10425305" cy="4953311"/>
+            <a:off x="936515" y="1807701"/>
+            <a:ext cx="10441347" cy="4841752"/>
           </a:xfrm>
-          <a:prstGeom prst="rect">
-            <a:avLst/>
-          </a:prstGeom>
         </p:spPr>
         <p:txBody>
-          <a:bodyPr vert="horz" lIns="68580" tIns="34290" rIns="68580" bIns="34290" rtlCol="0">
-            <a:normAutofit/>
+          <a:bodyPr>
+            <a:normAutofit lnSpcReduction="10000"/>
           </a:bodyPr>
-          <a:lstStyle>
-            <a:lvl1pPr marL="228600" indent="-228600" algn="l" defTabSz="914400" rtl="0" eaLnBrk="1" latinLnBrk="0" hangingPunct="1">
-              <a:lnSpc>
-                <a:spcPct val="90000"/>
-              </a:lnSpc>
-              <a:spcBef>
-                <a:spcPts val="1000"/>
-              </a:spcBef>
-              <a:buFont typeface="Arial" panose="020B0604020202020204" pitchFamily="34" charset="0"/>
-              <a:buChar char="•"/>
-              <a:defRPr sz="2800" kern="1200">
+          <a:lstStyle/>
+          <a:p>
+            <a:r>
+              <a:rPr lang="en-US" dirty="0">
                 <a:solidFill>
                   <a:schemeClr val="tx1"/>
                 </a:solidFill>
-                <a:latin typeface="+mn-lt"/>
-                <a:ea typeface="+mn-ea"/>
-                <a:cs typeface="+mn-cs"/>
-              </a:defRPr>
-            </a:lvl1pPr>
-            <a:lvl2pPr marL="685800" indent="-228600" algn="l" defTabSz="914400" rtl="0" eaLnBrk="1" latinLnBrk="0" hangingPunct="1">
-              <a:lnSpc>
-                <a:spcPct val="90000"/>
-              </a:lnSpc>
-              <a:spcBef>
-                <a:spcPts val="500"/>
-              </a:spcBef>
-              <a:buFont typeface="Arial" panose="020B0604020202020204" pitchFamily="34" charset="0"/>
-              <a:buChar char="•"/>
-              <a:defRPr sz="2400" kern="1200">
+              </a:rPr>
+              <a:t>Instructions:</a:t>
+            </a:r>
+            <a:r>
+              <a:rPr lang="en-US" dirty="0"/>
+              <a:t> </a:t>
+            </a:r>
+            <a:r>
+              <a:rPr lang="en-US" dirty="0">
+                <a:solidFill>
+                  <a:srgbClr val="0070C0"/>
+                </a:solidFill>
+              </a:rPr>
+              <a:t>MUL{</a:t>
+            </a:r>
+            <a:r>
+              <a:rPr lang="en-US" b="1" dirty="0">
+                <a:solidFill>
+                  <a:srgbClr val="FF0000"/>
+                </a:solidFill>
+              </a:rPr>
+              <a:t>S</a:t>
+            </a:r>
+            <a:r>
+              <a:rPr lang="en-US" dirty="0">
+                <a:solidFill>
+                  <a:srgbClr val="0070C0"/>
+                </a:solidFill>
+              </a:rPr>
+              <a:t>}, MLA, MLS</a:t>
+            </a:r>
+          </a:p>
+          <a:p>
+            <a:endParaRPr lang="en-US" dirty="0"/>
+          </a:p>
+          <a:p>
+            <a:r>
+              <a:rPr lang="en-US" b="1" dirty="0">
+                <a:solidFill>
+                  <a:srgbClr val="FF0000"/>
+                </a:solidFill>
+              </a:rPr>
+              <a:t>Signed</a:t>
+            </a:r>
+            <a:r>
+              <a:rPr lang="en-US" dirty="0"/>
+              <a:t> </a:t>
+            </a:r>
+            <a:r>
+              <a:rPr lang="en-US" dirty="0">
                 <a:solidFill>
                   <a:schemeClr val="tx1"/>
                 </a:solidFill>
-                <a:latin typeface="+mn-lt"/>
-                <a:ea typeface="+mn-ea"/>
-                <a:cs typeface="+mn-cs"/>
-              </a:defRPr>
-            </a:lvl2pPr>
-            <a:lvl3pPr marL="1143000" indent="-228600" algn="l" defTabSz="914400" rtl="0" eaLnBrk="1" latinLnBrk="0" hangingPunct="1">
-              <a:lnSpc>
-                <a:spcPct val="90000"/>
-              </a:lnSpc>
-              <a:spcBef>
-                <a:spcPts val="500"/>
-              </a:spcBef>
-              <a:buFont typeface="Arial" panose="020B0604020202020204" pitchFamily="34" charset="0"/>
-              <a:buChar char="•"/>
-              <a:defRPr sz="2000" kern="1200">
+              </a:rPr>
+              <a:t>vs.</a:t>
+            </a:r>
+            <a:r>
+              <a:rPr lang="en-US" dirty="0"/>
+              <a:t> </a:t>
+            </a:r>
+            <a:r>
+              <a:rPr lang="en-US" b="1" dirty="0">
+                <a:solidFill>
+                  <a:srgbClr val="92D050"/>
+                </a:solidFill>
+              </a:rPr>
+              <a:t>Unsigned</a:t>
+            </a:r>
+            <a:r>
+              <a:rPr lang="en-US" dirty="0">
                 <a:solidFill>
                   <a:schemeClr val="tx1"/>
                 </a:solidFill>
-                <a:latin typeface="+mn-lt"/>
-                <a:ea typeface="+mn-ea"/>
-                <a:cs typeface="+mn-cs"/>
-              </a:defRPr>
-            </a:lvl3pPr>
-            <a:lvl4pPr marL="1600200" indent="-228600" algn="l" defTabSz="914400" rtl="0" eaLnBrk="1" latinLnBrk="0" hangingPunct="1">
-              <a:lnSpc>
-                <a:spcPct val="90000"/>
-              </a:lnSpc>
-              <a:spcBef>
-                <a:spcPts val="500"/>
-              </a:spcBef>
-              <a:buFont typeface="Arial" panose="020B0604020202020204" pitchFamily="34" charset="0"/>
-              <a:buChar char="•"/>
-              <a:defRPr sz="1800" kern="1200">
+              </a:rPr>
+              <a:t>:</a:t>
+            </a:r>
+            <a:r>
+              <a:rPr lang="en-US" dirty="0"/>
+              <a:t> </a:t>
+            </a:r>
+            <a:r>
+              <a:rPr lang="en-US" dirty="0">
+                <a:solidFill>
+                  <a:srgbClr val="0070C0"/>
+                </a:solidFill>
+              </a:rPr>
+              <a:t>Use </a:t>
+            </a:r>
+            <a:r>
+              <a:rPr lang="en-US" b="1" dirty="0">
+                <a:solidFill>
+                  <a:srgbClr val="0070C0"/>
+                </a:solidFill>
+              </a:rPr>
+              <a:t>same</a:t>
+            </a:r>
+            <a:r>
+              <a:rPr lang="en-US" dirty="0">
+                <a:solidFill>
+                  <a:srgbClr val="0070C0"/>
+                </a:solidFill>
+              </a:rPr>
+              <a:t> instruction</a:t>
+            </a:r>
+          </a:p>
+          <a:p>
+            <a:endParaRPr lang="en-US" dirty="0"/>
+          </a:p>
+          <a:p>
+            <a:r>
+              <a:rPr lang="en-US" dirty="0">
                 <a:solidFill>
                   <a:schemeClr val="tx1"/>
                 </a:solidFill>
-                <a:latin typeface="+mn-lt"/>
-                <a:ea typeface="+mn-ea"/>
-                <a:cs typeface="+mn-cs"/>
-              </a:defRPr>
-            </a:lvl4pPr>
-            <a:lvl5pPr marL="2057400" indent="-228600" algn="l" defTabSz="914400" rtl="0" eaLnBrk="1" latinLnBrk="0" hangingPunct="1">
-              <a:lnSpc>
-                <a:spcPct val="90000"/>
-              </a:lnSpc>
-              <a:spcBef>
-                <a:spcPts val="500"/>
-              </a:spcBef>
-              <a:buFont typeface="Arial" panose="020B0604020202020204" pitchFamily="34" charset="0"/>
-              <a:buChar char="•"/>
-              <a:defRPr sz="1800" kern="1200">
+              </a:rPr>
+              <a:t>Format Examples:</a:t>
+            </a:r>
+          </a:p>
+          <a:p>
+            <a:pPr lvl="1"/>
+            <a:r>
+              <a:rPr lang="en-US" dirty="0">
                 <a:solidFill>
                   <a:schemeClr val="tx1"/>
                 </a:solidFill>
-                <a:latin typeface="+mn-lt"/>
-                <a:ea typeface="+mn-ea"/>
-                <a:cs typeface="+mn-cs"/>
-              </a:defRPr>
-            </a:lvl5pPr>
-            <a:lvl6pPr marL="2514600" indent="-228600" algn="l" defTabSz="914400" rtl="0" eaLnBrk="1" latinLnBrk="0" hangingPunct="1">
-              <a:lnSpc>
-                <a:spcPct val="90000"/>
-              </a:lnSpc>
-              <a:spcBef>
-                <a:spcPts val="500"/>
-              </a:spcBef>
-              <a:buFont typeface="Arial" panose="020B0604020202020204" pitchFamily="34" charset="0"/>
-              <a:buChar char="•"/>
-              <a:defRPr sz="1800" kern="1200">
+              </a:rPr>
+              <a:t>MUL	R0,</a:t>
+            </a:r>
+            <a:r>
+              <a:rPr lang="en-US" b="1" dirty="0">
+                <a:solidFill>
+                  <a:srgbClr val="0000FF"/>
+                </a:solidFill>
+              </a:rPr>
+              <a:t>R1,R2</a:t>
+            </a:r>
+            <a:r>
+              <a:rPr lang="en-US" dirty="0">
                 <a:solidFill>
                   <a:schemeClr val="tx1"/>
                 </a:solidFill>
-                <a:latin typeface="+mn-lt"/>
-                <a:ea typeface="+mn-ea"/>
-                <a:cs typeface="+mn-cs"/>
-              </a:defRPr>
-            </a:lvl6pPr>
-            <a:lvl7pPr marL="2971800" indent="-228600" algn="l" defTabSz="914400" rtl="0" eaLnBrk="1" latinLnBrk="0" hangingPunct="1">
-              <a:lnSpc>
-                <a:spcPct val="90000"/>
-              </a:lnSpc>
-              <a:spcBef>
-                <a:spcPts val="500"/>
-              </a:spcBef>
-              <a:buFont typeface="Arial" panose="020B0604020202020204" pitchFamily="34" charset="0"/>
-              <a:buChar char="•"/>
-              <a:defRPr sz="1800" kern="1200">
+              </a:rPr>
+              <a:t>		// R0 </a:t>
+            </a:r>
+            <a:r>
+              <a:rPr lang="en-US" dirty="0">
                 <a:solidFill>
                   <a:schemeClr val="tx1"/>
                 </a:solidFill>
-                <a:latin typeface="+mn-lt"/>
-                <a:ea typeface="+mn-ea"/>
-                <a:cs typeface="+mn-cs"/>
-              </a:defRPr>
-            </a:lvl7pPr>
-            <a:lvl8pPr marL="3429000" indent="-228600" algn="l" defTabSz="914400" rtl="0" eaLnBrk="1" latinLnBrk="0" hangingPunct="1">
-              <a:lnSpc>
-                <a:spcPct val="90000"/>
-              </a:lnSpc>
-              <a:spcBef>
-                <a:spcPts val="500"/>
-              </a:spcBef>
-              <a:buFont typeface="Arial" panose="020B0604020202020204" pitchFamily="34" charset="0"/>
-              <a:buChar char="•"/>
-              <a:defRPr sz="1800" kern="1200">
+                <a:sym typeface="Wingdings" panose="05000000000000000000" pitchFamily="2" charset="2"/>
+              </a:rPr>
+              <a:t>= </a:t>
+            </a:r>
+            <a:r>
+              <a:rPr lang="en-US" b="1" dirty="0">
+                <a:solidFill>
+                  <a:srgbClr val="0000FF"/>
+                </a:solidFill>
+                <a:sym typeface="Wingdings" panose="05000000000000000000" pitchFamily="2" charset="2"/>
+              </a:rPr>
+              <a:t>R1 × R2</a:t>
+            </a:r>
+          </a:p>
+          <a:p>
+            <a:pPr lvl="1"/>
+            <a:r>
+              <a:rPr lang="en-US" dirty="0">
                 <a:solidFill>
                   <a:schemeClr val="tx1"/>
                 </a:solidFill>
-                <a:latin typeface="+mn-lt"/>
-                <a:ea typeface="+mn-ea"/>
-                <a:cs typeface="+mn-cs"/>
-              </a:defRPr>
-            </a:lvl8pPr>
-            <a:lvl9pPr marL="3886200" indent="-228600" algn="l" defTabSz="914400" rtl="0" eaLnBrk="1" latinLnBrk="0" hangingPunct="1">
-              <a:lnSpc>
-                <a:spcPct val="90000"/>
-              </a:lnSpc>
-              <a:spcBef>
-                <a:spcPts val="500"/>
-              </a:spcBef>
-              <a:buFont typeface="Arial" panose="020B0604020202020204" pitchFamily="34" charset="0"/>
-              <a:buChar char="•"/>
-              <a:defRPr sz="1800" kern="1200">
+              </a:rPr>
+              <a:t>MLA	R0,</a:t>
+            </a:r>
+            <a:r>
+              <a:rPr lang="en-US" b="1" dirty="0">
+                <a:solidFill>
+                  <a:srgbClr val="0000FF"/>
+                </a:solidFill>
+              </a:rPr>
+              <a:t>R1,R2</a:t>
+            </a:r>
+            <a:r>
+              <a:rPr lang="en-US" dirty="0">
                 <a:solidFill>
                   <a:schemeClr val="tx1"/>
                 </a:solidFill>
-                <a:latin typeface="+mn-lt"/>
-                <a:ea typeface="+mn-ea"/>
-                <a:cs typeface="+mn-cs"/>
-              </a:defRPr>
-            </a:lvl9pPr>
-          </a:lstStyle>
-          <a:p>
-            <a:r>
-              <a:rPr lang="en-US" sz="2100" dirty="0"/>
-              <a:t>Instructions: </a:t>
-            </a:r>
-            <a:r>
-              <a:rPr lang="en-US" sz="2100" dirty="0">
+              </a:rPr>
+              <a:t>,R3		// R0 </a:t>
+            </a:r>
+            <a:r>
+              <a:rPr lang="en-US" dirty="0">
+                <a:solidFill>
+                  <a:schemeClr val="tx1"/>
+                </a:solidFill>
+                <a:sym typeface="Wingdings" panose="05000000000000000000" pitchFamily="2" charset="2"/>
+              </a:rPr>
+              <a:t>= R3 + </a:t>
+            </a:r>
+            <a:r>
+              <a:rPr lang="en-US" b="1" dirty="0">
+                <a:solidFill>
+                  <a:srgbClr val="0000FF"/>
+                </a:solidFill>
+                <a:sym typeface="Wingdings" panose="05000000000000000000" pitchFamily="2" charset="2"/>
+              </a:rPr>
+              <a:t>R1 × R2</a:t>
+            </a:r>
+          </a:p>
+          <a:p>
+            <a:pPr lvl="1"/>
+            <a:r>
+              <a:rPr lang="en-US" dirty="0">
+                <a:solidFill>
+                  <a:schemeClr val="tx1"/>
+                </a:solidFill>
+              </a:rPr>
+              <a:t>MLS	R0,</a:t>
+            </a:r>
+            <a:r>
+              <a:rPr lang="en-US" b="1" dirty="0">
+                <a:solidFill>
+                  <a:srgbClr val="0000FF"/>
+                </a:solidFill>
+              </a:rPr>
+              <a:t>R1,R2</a:t>
+            </a:r>
+            <a:r>
+              <a:rPr lang="en-US" dirty="0">
+                <a:solidFill>
+                  <a:schemeClr val="tx1"/>
+                </a:solidFill>
+              </a:rPr>
+              <a:t>,R3		// R0 </a:t>
+            </a:r>
+            <a:r>
+              <a:rPr lang="en-US" dirty="0">
+                <a:solidFill>
+                  <a:schemeClr val="tx1"/>
+                </a:solidFill>
+                <a:sym typeface="Wingdings" panose="05000000000000000000" pitchFamily="2" charset="2"/>
+              </a:rPr>
+              <a:t>= R3 -  </a:t>
+            </a:r>
+            <a:r>
+              <a:rPr lang="en-US" b="1" dirty="0">
+                <a:solidFill>
+                  <a:srgbClr val="0000FF"/>
+                </a:solidFill>
+                <a:sym typeface="Wingdings" panose="05000000000000000000" pitchFamily="2" charset="2"/>
+              </a:rPr>
+              <a:t>R1 × R2</a:t>
+            </a:r>
+          </a:p>
+          <a:p>
+            <a:endParaRPr lang="en-US" dirty="0"/>
+          </a:p>
+          <a:p>
+            <a:r>
+              <a:rPr lang="en-US" dirty="0">
+                <a:solidFill>
+                  <a:schemeClr val="tx1"/>
+                </a:solidFill>
+              </a:rPr>
+              <a:t>Flags:</a:t>
+            </a:r>
+            <a:r>
+              <a:rPr lang="en-US" dirty="0"/>
+              <a:t> </a:t>
+            </a:r>
+            <a:r>
+              <a:rPr lang="en-US" dirty="0">
                 <a:solidFill>
                   <a:srgbClr val="0070C0"/>
                 </a:solidFill>
               </a:rPr>
-              <a:t>SUB{S}, SBC{S}, RSB{S}</a:t>
-            </a:r>
-          </a:p>
-          <a:p>
-            <a:r>
-              <a:rPr lang="en-US" sz="2100" dirty="0"/>
-              <a:t>Format Examples:</a:t>
-            </a:r>
-          </a:p>
-          <a:p>
-            <a:pPr lvl="1"/>
-            <a:r>
-              <a:rPr lang="en-US" sz="1800" dirty="0"/>
-              <a:t>SUB	R0,R1,</a:t>
-            </a:r>
-            <a:r>
-              <a:rPr lang="en-US" sz="1800" b="1" dirty="0">
-                <a:solidFill>
-                  <a:srgbClr val="0000FF"/>
-                </a:solidFill>
-              </a:rPr>
-              <a:t>#5</a:t>
-            </a:r>
-            <a:r>
-              <a:rPr lang="en-US" sz="1800" dirty="0"/>
-              <a:t>		// R0 </a:t>
-            </a:r>
-            <a:r>
-              <a:rPr lang="en-US" sz="1800" dirty="0">
-                <a:sym typeface="Wingdings" panose="05000000000000000000" pitchFamily="2" charset="2"/>
-              </a:rPr>
-              <a:t>= R1 - 5</a:t>
-            </a:r>
-            <a:endParaRPr lang="en-US" sz="1800" dirty="0"/>
-          </a:p>
-          <a:p>
-            <a:pPr lvl="1"/>
-            <a:r>
-              <a:rPr lang="en-US" sz="1800" dirty="0"/>
-              <a:t>SUB	R0,R1,R2		// R0 </a:t>
-            </a:r>
-            <a:r>
-              <a:rPr lang="en-US" sz="1800" dirty="0">
-                <a:sym typeface="Wingdings" panose="05000000000000000000" pitchFamily="2" charset="2"/>
-              </a:rPr>
-              <a:t>= R1 - R2</a:t>
-            </a:r>
-            <a:endParaRPr lang="en-US" sz="1800" dirty="0"/>
-          </a:p>
-          <a:p>
-            <a:pPr lvl="1"/>
-            <a:r>
-              <a:rPr lang="en-US" sz="1800" dirty="0"/>
-              <a:t>SUB	R0,R1,</a:t>
-            </a:r>
-            <a:r>
-              <a:rPr lang="en-US" sz="1800" b="1" dirty="0">
-                <a:solidFill>
-                  <a:srgbClr val="0000FF"/>
-                </a:solidFill>
-              </a:rPr>
-              <a:t>R2,LSL #2</a:t>
-            </a:r>
-            <a:r>
-              <a:rPr lang="en-US" sz="1800" dirty="0"/>
-              <a:t>		// R0 </a:t>
-            </a:r>
-            <a:r>
-              <a:rPr lang="en-US" sz="1800" dirty="0">
-                <a:sym typeface="Wingdings" panose="05000000000000000000" pitchFamily="2" charset="2"/>
-              </a:rPr>
-              <a:t>= R1 - </a:t>
-            </a:r>
-            <a:r>
-              <a:rPr lang="en-US" sz="1800" b="1" dirty="0">
-                <a:solidFill>
-                  <a:srgbClr val="0000FF"/>
-                </a:solidFill>
-                <a:sym typeface="Wingdings" panose="05000000000000000000" pitchFamily="2" charset="2"/>
-              </a:rPr>
-              <a:t>(R2 &lt;&lt; 2)</a:t>
-            </a:r>
-            <a:r>
-              <a:rPr lang="en-US" sz="1800" dirty="0">
-                <a:solidFill>
-                  <a:srgbClr val="0070C0"/>
-                </a:solidFill>
-                <a:sym typeface="Wingdings" panose="05000000000000000000" pitchFamily="2" charset="2"/>
-              </a:rPr>
-              <a:t>	</a:t>
-            </a:r>
-            <a:endParaRPr lang="en-US" sz="1800" dirty="0">
-              <a:solidFill>
-                <a:srgbClr val="0070C0"/>
-              </a:solidFill>
-            </a:endParaRPr>
-          </a:p>
-          <a:p>
-            <a:endParaRPr lang="en-US" sz="2100" dirty="0"/>
-          </a:p>
-          <a:p>
-            <a:r>
-              <a:rPr lang="en-US" sz="2100" dirty="0"/>
-              <a:t>Flags: </a:t>
-            </a:r>
-            <a:r>
-              <a:rPr lang="en-US" sz="2100" dirty="0">
-                <a:solidFill>
-                  <a:srgbClr val="0070C0"/>
-                </a:solidFill>
-              </a:rPr>
-              <a:t>Append “S” to capture result characteristics in NCVZ</a:t>
-            </a:r>
-          </a:p>
-          <a:p>
-            <a:endParaRPr lang="en-US" sz="2100" dirty="0"/>
-          </a:p>
-          <a:p>
-            <a:r>
-              <a:rPr lang="en-US" sz="2100" dirty="0"/>
-              <a:t>Overflow:</a:t>
-            </a:r>
-          </a:p>
-          <a:p>
-            <a:pPr lvl="1"/>
-            <a:r>
-              <a:rPr lang="en-US" sz="1800" b="1" dirty="0">
-                <a:solidFill>
-                  <a:srgbClr val="92D050"/>
-                </a:solidFill>
-              </a:rPr>
-              <a:t>Unsigned</a:t>
-            </a:r>
-            <a:r>
-              <a:rPr lang="en-US" sz="1800" dirty="0">
-                <a:solidFill>
-                  <a:srgbClr val="0070C0"/>
-                </a:solidFill>
-              </a:rPr>
-              <a:t>: Carry Flag       (C) = 0</a:t>
-            </a:r>
-          </a:p>
-          <a:p>
-            <a:pPr lvl="1"/>
-            <a:r>
-              <a:rPr lang="en-US" sz="1800" dirty="0">
-                <a:solidFill>
-                  <a:srgbClr val="0070C0"/>
-                </a:solidFill>
-              </a:rPr>
-              <a:t>     </a:t>
-            </a:r>
-            <a:r>
-              <a:rPr lang="en-US" sz="1800" b="1" dirty="0">
+              <a:t>Append “S” (only MUL) to capture result characteristics in N and Z flags</a:t>
+            </a:r>
+          </a:p>
+          <a:p>
+            <a:endParaRPr lang="en-US" dirty="0"/>
+          </a:p>
+          <a:p>
+            <a:r>
+              <a:rPr lang="en-US" dirty="0">
+                <a:solidFill>
+                  <a:schemeClr val="tx1"/>
+                </a:solidFill>
+              </a:rPr>
+              <a:t>Overflow: </a:t>
+            </a:r>
+            <a:r>
+              <a:rPr lang="en-US" b="1" dirty="0">
                 <a:solidFill>
                   <a:srgbClr val="FF0000"/>
                 </a:solidFill>
               </a:rPr>
-              <a:t>Signed</a:t>
-            </a:r>
-            <a:r>
-              <a:rPr lang="en-US" sz="1800" dirty="0">
-                <a:solidFill>
-                  <a:srgbClr val="0070C0"/>
-                </a:solidFill>
-              </a:rPr>
-              <a:t>: Overflow Flag (V) = 1 (Set when C</a:t>
-            </a:r>
-            <a:r>
-              <a:rPr lang="en-US" sz="1800" baseline="-25000" dirty="0">
-                <a:solidFill>
-                  <a:srgbClr val="0070C0"/>
-                </a:solidFill>
-              </a:rPr>
-              <a:t>N</a:t>
-            </a:r>
-            <a:r>
-              <a:rPr lang="en-US" sz="1800" dirty="0">
-                <a:solidFill>
-                  <a:srgbClr val="0070C0"/>
-                </a:solidFill>
-              </a:rPr>
-              <a:t>≠C</a:t>
-            </a:r>
-            <a:r>
-              <a:rPr lang="en-US" sz="1800" baseline="-25000" dirty="0">
-                <a:solidFill>
-                  <a:srgbClr val="0070C0"/>
-                </a:solidFill>
-              </a:rPr>
-              <a:t>N-1</a:t>
-            </a:r>
-            <a:r>
-              <a:rPr lang="en-US" sz="1800" dirty="0">
-                <a:solidFill>
-                  <a:srgbClr val="0070C0"/>
-                </a:solidFill>
-              </a:rPr>
-              <a:t>)</a:t>
-            </a:r>
-          </a:p>
-          <a:p>
-            <a:endParaRPr lang="en-US" sz="2100" dirty="0"/>
-          </a:p>
-          <a:p>
-            <a:r>
-              <a:rPr lang="en-US" sz="2100" dirty="0"/>
-              <a:t>Multiple precision subtraction: </a:t>
-            </a:r>
-            <a:r>
-              <a:rPr lang="en-US" sz="2100" dirty="0">
-                <a:solidFill>
-                  <a:srgbClr val="0070C0"/>
-                </a:solidFill>
-              </a:rPr>
-              <a:t>SUB</a:t>
-            </a:r>
-            <a:r>
-              <a:rPr lang="en-US" sz="2100" b="1" dirty="0">
-                <a:solidFill>
-                  <a:srgbClr val="FF0000"/>
-                </a:solidFill>
-              </a:rPr>
-              <a:t>S</a:t>
-            </a:r>
-            <a:r>
-              <a:rPr lang="en-US" sz="2100" dirty="0">
-                <a:solidFill>
-                  <a:srgbClr val="0070C0"/>
-                </a:solidFill>
-              </a:rPr>
-              <a:t> </a:t>
-            </a:r>
-            <a:r>
-              <a:rPr lang="en-US" sz="2100" dirty="0">
-                <a:solidFill>
-                  <a:srgbClr val="0070C0"/>
-                </a:solidFill>
-                <a:sym typeface="Wingdings" panose="05000000000000000000" pitchFamily="2" charset="2"/>
-              </a:rPr>
-              <a:t> SBC</a:t>
-            </a:r>
-            <a:endParaRPr lang="en-US" sz="2100" dirty="0">
-              <a:solidFill>
-                <a:srgbClr val="0070C0"/>
-              </a:solidFill>
-            </a:endParaRPr>
-          </a:p>
-          <a:p>
-            <a:endParaRPr lang="en-US" sz="2100" dirty="0"/>
-          </a:p>
-          <a:p>
-            <a:endParaRPr lang="en-US" sz="2100" dirty="0"/>
+              <a:t>May happen but impossible to detect!</a:t>
+            </a:r>
           </a:p>
         </p:txBody>
       </p:sp>
     </p:spTree>
     <p:extLst>
       <p:ext uri="{BB962C8B-B14F-4D97-AF65-F5344CB8AC3E}">
-        <p14:creationId xmlns:p14="http://schemas.microsoft.com/office/powerpoint/2010/main" val="2046813644"/>
+        <p14:creationId xmlns:p14="http://schemas.microsoft.com/office/powerpoint/2010/main" val="3196419567"/>
       </p:ext>
     </p:extLst>
   </p:cSld>
@@ -42987,8 +43310,8 @@
         </p:nvSpPr>
         <p:spPr>
           <a:xfrm>
-            <a:off x="936516" y="745181"/>
-            <a:ext cx="9466789" cy="686577"/>
+            <a:off x="936516" y="741171"/>
+            <a:ext cx="9643252" cy="734703"/>
           </a:xfrm>
         </p:spPr>
         <p:txBody>
@@ -42999,7 +43322,7 @@
           <a:p>
             <a:r>
               <a:rPr lang="en-US" dirty="0"/>
-              <a:t>Single-Length 32x32 Integer Multiplication</a:t>
+              <a:t>Double-Length 32x32 Integer Multiplication</a:t>
             </a:r>
           </a:p>
         </p:txBody>
@@ -43016,13 +43339,13 @@
         </p:nvSpPr>
         <p:spPr>
           <a:xfrm>
-            <a:off x="936515" y="1807701"/>
-            <a:ext cx="10441347" cy="4841752"/>
+            <a:off x="936515" y="1795670"/>
+            <a:ext cx="10425305" cy="4833730"/>
           </a:xfrm>
         </p:spPr>
         <p:txBody>
           <a:bodyPr>
-            <a:normAutofit lnSpcReduction="10000"/>
+            <a:normAutofit fontScale="92500" lnSpcReduction="10000"/>
           </a:bodyPr>
           <a:lstStyle/>
           <a:p>
@@ -43044,23 +43367,7 @@
                   <a:srgbClr val="0070C0"/>
                 </a:solidFill>
               </a:rPr>
-              <a:t>MUL{</a:t>
-            </a:r>
-            <a:r>
-              <a:rPr lang="en-US" b="1" dirty="0">
-                <a:solidFill>
-                  <a:srgbClr val="FF0000"/>
-                </a:solidFill>
-              </a:rPr>
-              <a:t>S</a:t>
-            </a:r>
-            <a:r>
-              <a:rPr lang="en-US" dirty="0">
-                <a:solidFill>
-                  <a:srgbClr val="0070C0"/>
-                </a:solidFill>
-              </a:rPr>
-              <a:t>}, MLA, MLS</a:t>
+              <a:t>UMULL, SMULL, UMLAL, SMLAL</a:t>
             </a:r>
           </a:p>
           <a:p>
@@ -43085,27 +43392,184 @@
                   <a:schemeClr val="tx1"/>
                 </a:solidFill>
               </a:rPr>
-              <a:t>vs.</a:t>
+              <a:t>vs. </a:t>
+            </a:r>
+            <a:r>
+              <a:rPr lang="en-US" b="1" dirty="0">
+                <a:solidFill>
+                  <a:srgbClr val="92D050"/>
+                </a:solidFill>
+              </a:rPr>
+              <a:t>Unsigned</a:t>
+            </a:r>
+            <a:r>
+              <a:rPr lang="en-US" dirty="0"/>
+              <a:t>: </a:t>
+            </a:r>
+            <a:r>
+              <a:rPr lang="en-US" dirty="0">
+                <a:solidFill>
+                  <a:srgbClr val="0070C0"/>
+                </a:solidFill>
+              </a:rPr>
+              <a:t>Use </a:t>
+            </a:r>
+            <a:r>
+              <a:rPr lang="en-US" b="1" dirty="0">
+                <a:solidFill>
+                  <a:srgbClr val="0070C0"/>
+                </a:solidFill>
+              </a:rPr>
+              <a:t>different</a:t>
+            </a:r>
+            <a:r>
+              <a:rPr lang="en-US" dirty="0">
+                <a:solidFill>
+                  <a:srgbClr val="0070C0"/>
+                </a:solidFill>
+              </a:rPr>
+              <a:t> instructions!</a:t>
+            </a:r>
+          </a:p>
+          <a:p>
+            <a:endParaRPr lang="en-US" dirty="0"/>
+          </a:p>
+          <a:p>
+            <a:r>
+              <a:rPr lang="en-US" b="1" dirty="0">
+                <a:solidFill>
+                  <a:srgbClr val="FF0000"/>
+                </a:solidFill>
+              </a:rPr>
+              <a:t>Signed</a:t>
             </a:r>
             <a:r>
               <a:rPr lang="en-US" dirty="0"/>
               <a:t> </a:t>
             </a:r>
             <a:r>
+              <a:rPr lang="en-US" dirty="0">
+                <a:solidFill>
+                  <a:schemeClr val="tx1"/>
+                </a:solidFill>
+              </a:rPr>
+              <a:t>Instruction Formats:</a:t>
+            </a:r>
+          </a:p>
+          <a:p>
+            <a:pPr lvl="1"/>
+            <a:r>
               <a:rPr lang="en-US" b="1" dirty="0">
                 <a:solidFill>
+                  <a:srgbClr val="FF0000"/>
+                </a:solidFill>
+              </a:rPr>
+              <a:t>S</a:t>
+            </a:r>
+            <a:r>
+              <a:rPr lang="en-US" dirty="0">
+                <a:solidFill>
+                  <a:schemeClr val="tx1"/>
+                </a:solidFill>
+              </a:rPr>
+              <a:t>MULL	R0,R1,</a:t>
+            </a:r>
+            <a:r>
+              <a:rPr lang="en-US" b="1" dirty="0">
+                <a:solidFill>
+                  <a:srgbClr val="0000FF"/>
+                </a:solidFill>
+              </a:rPr>
+              <a:t>R2,R3</a:t>
+            </a:r>
+            <a:r>
+              <a:rPr lang="en-US" dirty="0">
+                <a:solidFill>
+                  <a:schemeClr val="tx1"/>
+                </a:solidFill>
+              </a:rPr>
+              <a:t>		// R0.R1 </a:t>
+            </a:r>
+            <a:r>
+              <a:rPr lang="en-US" dirty="0">
+                <a:solidFill>
+                  <a:schemeClr val="tx1"/>
+                </a:solidFill>
+                <a:sym typeface="Wingdings" panose="05000000000000000000" pitchFamily="2" charset="2"/>
+              </a:rPr>
+              <a:t>=               </a:t>
+            </a:r>
+            <a:r>
+              <a:rPr lang="en-US" b="1" dirty="0">
+                <a:solidFill>
+                  <a:srgbClr val="0000FF"/>
+                </a:solidFill>
+                <a:sym typeface="Wingdings" panose="05000000000000000000" pitchFamily="2" charset="2"/>
+              </a:rPr>
+              <a:t>R2 × R3</a:t>
+            </a:r>
+          </a:p>
+          <a:p>
+            <a:pPr lvl="1"/>
+            <a:r>
+              <a:rPr lang="en-US" b="1" dirty="0">
+                <a:solidFill>
+                  <a:srgbClr val="FF0000"/>
+                </a:solidFill>
+              </a:rPr>
+              <a:t>S</a:t>
+            </a:r>
+            <a:r>
+              <a:rPr lang="en-US" dirty="0">
+                <a:solidFill>
+                  <a:schemeClr val="tx1"/>
+                </a:solidFill>
+              </a:rPr>
+              <a:t>MLAL	R0,R1,</a:t>
+            </a:r>
+            <a:r>
+              <a:rPr lang="en-US" b="1" dirty="0">
+                <a:solidFill>
+                  <a:srgbClr val="0000FF"/>
+                </a:solidFill>
+              </a:rPr>
+              <a:t>R2,R3</a:t>
+            </a:r>
+            <a:r>
+              <a:rPr lang="en-US" dirty="0">
+                <a:solidFill>
+                  <a:schemeClr val="tx1"/>
+                </a:solidFill>
+              </a:rPr>
+              <a:t>		// R0.R1 </a:t>
+            </a:r>
+            <a:r>
+              <a:rPr lang="en-US" dirty="0">
+                <a:solidFill>
+                  <a:schemeClr val="tx1"/>
+                </a:solidFill>
+                <a:sym typeface="Wingdings" panose="05000000000000000000" pitchFamily="2" charset="2"/>
+              </a:rPr>
+              <a:t>= R0.R1 + </a:t>
+            </a:r>
+            <a:r>
+              <a:rPr lang="en-US" b="1" dirty="0">
+                <a:solidFill>
+                  <a:srgbClr val="0000FF"/>
+                </a:solidFill>
+                <a:sym typeface="Wingdings" panose="05000000000000000000" pitchFamily="2" charset="2"/>
+              </a:rPr>
+              <a:t>R2 × R3</a:t>
+            </a:r>
+          </a:p>
+          <a:p>
+            <a:r>
+              <a:rPr lang="en-US" b="1" dirty="0">
+                <a:solidFill>
                   <a:srgbClr val="92D050"/>
                 </a:solidFill>
               </a:rPr>
               <a:t>Unsigned</a:t>
-            </a:r>
-            <a:r>
-              <a:rPr lang="en-US" dirty="0">
-                <a:solidFill>
-                  <a:schemeClr val="tx1"/>
-                </a:solidFill>
-              </a:rPr>
-              <a:t>:</a:t>
             </a:r>
             <a:r>
               <a:rPr lang="en-US" dirty="0"/>
@@ -43114,26 +43578,116 @@
             <a:r>
               <a:rPr lang="en-US" dirty="0">
                 <a:solidFill>
-                  <a:srgbClr val="0070C0"/>
-                </a:solidFill>
-              </a:rPr>
-              <a:t>Use </a:t>
-            </a:r>
+                  <a:schemeClr val="tx1"/>
+                </a:solidFill>
+              </a:rPr>
+              <a:t>Instruction Formats:</a:t>
+            </a:r>
+          </a:p>
+          <a:p>
+            <a:pPr lvl="1"/>
             <a:r>
               <a:rPr lang="en-US" b="1" dirty="0">
                 <a:solidFill>
-                  <a:srgbClr val="0070C0"/>
-                </a:solidFill>
-              </a:rPr>
-              <a:t>same</a:t>
+                  <a:srgbClr val="92D050"/>
+                </a:solidFill>
+              </a:rPr>
+              <a:t>U</a:t>
             </a:r>
             <a:r>
               <a:rPr lang="en-US" dirty="0">
                 <a:solidFill>
-                  <a:srgbClr val="0070C0"/>
-                </a:solidFill>
-              </a:rPr>
-              <a:t> instruction</a:t>
+                  <a:schemeClr val="tx1"/>
+                </a:solidFill>
+              </a:rPr>
+              <a:t>MULL	R0,R1,</a:t>
+            </a:r>
+            <a:r>
+              <a:rPr lang="en-US" b="1" dirty="0">
+                <a:solidFill>
+                  <a:srgbClr val="0000FF"/>
+                </a:solidFill>
+              </a:rPr>
+              <a:t>R2,R3</a:t>
+            </a:r>
+            <a:r>
+              <a:rPr lang="en-US" dirty="0">
+                <a:solidFill>
+                  <a:schemeClr val="tx1"/>
+                </a:solidFill>
+              </a:rPr>
+              <a:t>		// R0.R1 </a:t>
+            </a:r>
+            <a:r>
+              <a:rPr lang="en-US" dirty="0">
+                <a:solidFill>
+                  <a:schemeClr val="tx1"/>
+                </a:solidFill>
+                <a:sym typeface="Wingdings" panose="05000000000000000000" pitchFamily="2" charset="2"/>
+              </a:rPr>
+              <a:t>=               </a:t>
+            </a:r>
+            <a:r>
+              <a:rPr lang="en-US" b="1" dirty="0">
+                <a:solidFill>
+                  <a:srgbClr val="0000FF"/>
+                </a:solidFill>
+                <a:sym typeface="Wingdings" panose="05000000000000000000" pitchFamily="2" charset="2"/>
+              </a:rPr>
+              <a:t>R2 × R3</a:t>
+            </a:r>
+          </a:p>
+          <a:p>
+            <a:pPr lvl="1"/>
+            <a:r>
+              <a:rPr lang="en-US" b="1" dirty="0">
+                <a:solidFill>
+                  <a:srgbClr val="92D050"/>
+                </a:solidFill>
+              </a:rPr>
+              <a:t>U</a:t>
+            </a:r>
+            <a:r>
+              <a:rPr lang="en-US" dirty="0">
+                <a:solidFill>
+                  <a:schemeClr val="tx1"/>
+                </a:solidFill>
+              </a:rPr>
+              <a:t>MLAL	R0,R1,</a:t>
+            </a:r>
+            <a:r>
+              <a:rPr lang="en-US" b="1" dirty="0">
+                <a:solidFill>
+                  <a:srgbClr val="0000FF"/>
+                </a:solidFill>
+              </a:rPr>
+              <a:t>R2,R3</a:t>
+            </a:r>
+            <a:r>
+              <a:rPr lang="en-US" dirty="0">
+                <a:solidFill>
+                  <a:schemeClr val="tx1"/>
+                </a:solidFill>
+              </a:rPr>
+              <a:t>		// R0.R1 </a:t>
+            </a:r>
+            <a:r>
+              <a:rPr lang="en-US" dirty="0">
+                <a:solidFill>
+                  <a:schemeClr val="tx1"/>
+                </a:solidFill>
+                <a:sym typeface="Wingdings" panose="05000000000000000000" pitchFamily="2" charset="2"/>
+              </a:rPr>
+              <a:t>= R0.R1 + </a:t>
+            </a:r>
+            <a:r>
+              <a:rPr lang="en-US" b="1" dirty="0">
+                <a:solidFill>
+                  <a:srgbClr val="0000FF"/>
+                </a:solidFill>
+                <a:sym typeface="Wingdings" panose="05000000000000000000" pitchFamily="2" charset="2"/>
+              </a:rPr>
+              <a:t>R2 × R3</a:t>
             </a:r>
           </a:p>
           <a:p>
@@ -43146,188 +43700,37 @@
                   <a:schemeClr val="tx1"/>
                 </a:solidFill>
               </a:rPr>
-              <a:t>Format Examples:</a:t>
-            </a:r>
-          </a:p>
-          <a:p>
-            <a:pPr lvl="1"/>
+              <a:t>Flags:</a:t>
+            </a:r>
+            <a:r>
+              <a:rPr lang="en-US" dirty="0"/>
+              <a:t>      </a:t>
+            </a:r>
+            <a:r>
+              <a:rPr lang="en-US" b="1" dirty="0">
+                <a:solidFill>
+                  <a:srgbClr val="FF0000"/>
+                </a:solidFill>
+              </a:rPr>
+              <a:t>Unaffected!</a:t>
+            </a:r>
+          </a:p>
+          <a:p>
             <a:r>
               <a:rPr lang="en-US" dirty="0">
                 <a:solidFill>
                   <a:schemeClr val="tx1"/>
                 </a:solidFill>
               </a:rPr>
-              <a:t>MUL	R0,</a:t>
+              <a:t>Overflow: </a:t>
             </a:r>
             <a:r>
               <a:rPr lang="en-US" b="1" dirty="0">
                 <a:solidFill>
-                  <a:srgbClr val="0000FF"/>
-                </a:solidFill>
-              </a:rPr>
-              <a:t>R1,R2</a:t>
-            </a:r>
-            <a:r>
-              <a:rPr lang="en-US" dirty="0">
-                <a:solidFill>
-                  <a:schemeClr val="tx1"/>
-                </a:solidFill>
-              </a:rPr>
-              <a:t>		// R0 </a:t>
-            </a:r>
-            <a:r>
-              <a:rPr lang="en-US" dirty="0">
-                <a:solidFill>
-                  <a:schemeClr val="tx1"/>
-                </a:solidFill>
-                <a:sym typeface="Wingdings" panose="05000000000000000000" pitchFamily="2" charset="2"/>
-              </a:rPr>
-              <a:t>= </a:t>
-            </a:r>
-            <a:r>
-              <a:rPr lang="en-US" b="1" dirty="0">
-                <a:solidFill>
-                  <a:srgbClr val="0000FF"/>
-                </a:solidFill>
-                <a:sym typeface="Wingdings" panose="05000000000000000000" pitchFamily="2" charset="2"/>
-              </a:rPr>
-              <a:t>R1 × R2</a:t>
-            </a:r>
-          </a:p>
-          <a:p>
-            <a:pPr lvl="1"/>
-            <a:r>
-              <a:rPr lang="en-US" dirty="0">
-                <a:solidFill>
-                  <a:schemeClr val="tx1"/>
-                </a:solidFill>
-              </a:rPr>
-              <a:t>MLA	R0,</a:t>
-            </a:r>
-            <a:r>
-              <a:rPr lang="en-US" b="1" dirty="0">
-                <a:solidFill>
-                  <a:srgbClr val="0000FF"/>
-                </a:solidFill>
-              </a:rPr>
-              <a:t>R1,R2</a:t>
-            </a:r>
-            <a:r>
-              <a:rPr lang="en-US" dirty="0">
-                <a:solidFill>
-                  <a:schemeClr val="tx1"/>
-                </a:solidFill>
-              </a:rPr>
-              <a:t>,R3		// R0 </a:t>
-            </a:r>
-            <a:r>
-              <a:rPr lang="en-US" dirty="0">
-                <a:solidFill>
-                  <a:schemeClr val="tx1"/>
-                </a:solidFill>
-                <a:sym typeface="Wingdings" panose="05000000000000000000" pitchFamily="2" charset="2"/>
-              </a:rPr>
-              <a:t>= R3 + </a:t>
-            </a:r>
-            <a:r>
-              <a:rPr lang="en-US" b="1" dirty="0">
-                <a:solidFill>
-                  <a:srgbClr val="0000FF"/>
-                </a:solidFill>
-                <a:sym typeface="Wingdings" panose="05000000000000000000" pitchFamily="2" charset="2"/>
-              </a:rPr>
-              <a:t>R1 × R2</a:t>
-            </a:r>
-          </a:p>
-          <a:p>
-            <a:pPr lvl="1"/>
-            <a:r>
-              <a:rPr lang="en-US" dirty="0">
-                <a:solidFill>
-                  <a:schemeClr val="tx1"/>
-                </a:solidFill>
-              </a:rPr>
-              <a:t>MLS	R0,</a:t>
-            </a:r>
-            <a:r>
-              <a:rPr lang="en-US" b="1" dirty="0">
-                <a:solidFill>
-                  <a:srgbClr val="0000FF"/>
-                </a:solidFill>
-              </a:rPr>
-              <a:t>R1,R2</a:t>
-            </a:r>
-            <a:r>
-              <a:rPr lang="en-US" dirty="0">
-                <a:solidFill>
-                  <a:schemeClr val="tx1"/>
-                </a:solidFill>
-              </a:rPr>
-              <a:t>,R3		// R0 </a:t>
-            </a:r>
-            <a:r>
-              <a:rPr lang="en-US" dirty="0">
-                <a:solidFill>
-                  <a:schemeClr val="tx1"/>
-                </a:solidFill>
-                <a:sym typeface="Wingdings" panose="05000000000000000000" pitchFamily="2" charset="2"/>
-              </a:rPr>
-              <a:t>= R3 -  </a:t>
-            </a:r>
-            <a:r>
-              <a:rPr lang="en-US" b="1" dirty="0">
-                <a:solidFill>
-                  <a:srgbClr val="0000FF"/>
-                </a:solidFill>
-                <a:sym typeface="Wingdings" panose="05000000000000000000" pitchFamily="2" charset="2"/>
-              </a:rPr>
-              <a:t>R1 × R2</a:t>
-            </a:r>
-          </a:p>
-          <a:p>
-            <a:endParaRPr lang="en-US" dirty="0"/>
-          </a:p>
-          <a:p>
-            <a:r>
-              <a:rPr lang="en-US" dirty="0">
-                <a:solidFill>
-                  <a:schemeClr val="tx1"/>
-                </a:solidFill>
-              </a:rPr>
-              <a:t>Flags:</a:t>
-            </a:r>
-            <a:r>
-              <a:rPr lang="en-US" dirty="0"/>
-              <a:t> </a:t>
-            </a:r>
-            <a:r>
-              <a:rPr lang="en-US" dirty="0">
-                <a:solidFill>
-                  <a:srgbClr val="0070C0"/>
-                </a:solidFill>
-              </a:rPr>
-              <a:t>Append “S” (only MUL) to capture result characteristics in N and Z flags</a:t>
-            </a:r>
-          </a:p>
-          <a:p>
-            <a:endParaRPr lang="en-US" dirty="0"/>
-          </a:p>
-          <a:p>
-            <a:r>
-              <a:rPr lang="en-US" dirty="0">
-                <a:solidFill>
-                  <a:schemeClr val="tx1"/>
-                </a:solidFill>
-              </a:rPr>
-              <a:t>Overflow: </a:t>
-            </a:r>
-            <a:r>
-              <a:rPr lang="en-US" b="1" dirty="0">
-                <a:solidFill>
                   <a:srgbClr val="FF0000"/>
                 </a:solidFill>
               </a:rPr>
-              <a:t>May happen but impossible to detect!</a:t>
+              <a:t>Can’t happen</a:t>
             </a:r>
           </a:p>
         </p:txBody>
@@ -43335,7 +43738,7 @@
     </p:spTree>
     <p:extLst>
       <p:ext uri="{BB962C8B-B14F-4D97-AF65-F5344CB8AC3E}">
-        <p14:creationId xmlns:p14="http://schemas.microsoft.com/office/powerpoint/2010/main" val="3196419567"/>
+        <p14:creationId xmlns:p14="http://schemas.microsoft.com/office/powerpoint/2010/main" val="228742505"/>
       </p:ext>
     </p:extLst>
   </p:cSld>
@@ -43374,8 +43777,8 @@
         </p:nvSpPr>
         <p:spPr>
           <a:xfrm>
-            <a:off x="936516" y="741171"/>
-            <a:ext cx="9643252" cy="734703"/>
+            <a:off x="940526" y="745181"/>
+            <a:ext cx="8315769" cy="746735"/>
           </a:xfrm>
         </p:spPr>
         <p:txBody>
@@ -43386,7 +43789,7 @@
           <a:p>
             <a:r>
               <a:rPr lang="en-US" dirty="0"/>
-              <a:t>Double-Length 32x32 Integer Multiplication</a:t>
+              <a:t>Single-Length 32÷32 Integer Division</a:t>
             </a:r>
           </a:p>
         </p:txBody>
@@ -43403,8 +43806,8 @@
         </p:nvSpPr>
         <p:spPr>
           <a:xfrm>
-            <a:off x="936515" y="1795670"/>
-            <a:ext cx="10425305" cy="4833730"/>
+            <a:off x="940525" y="1806366"/>
+            <a:ext cx="10409263" cy="4835066"/>
           </a:xfrm>
         </p:spPr>
         <p:txBody>
@@ -43419,7 +43822,65 @@
                   <a:schemeClr val="tx1"/>
                 </a:solidFill>
               </a:rPr>
-              <a:t>Instructions:</a:t>
+              <a:t>Instructions: </a:t>
+            </a:r>
+            <a:r>
+              <a:rPr lang="en-US" b="1" dirty="0">
+                <a:solidFill>
+                  <a:srgbClr val="FF0000"/>
+                </a:solidFill>
+              </a:rPr>
+              <a:t>S</a:t>
+            </a:r>
+            <a:r>
+              <a:rPr lang="en-US" dirty="0">
+                <a:solidFill>
+                  <a:srgbClr val="0070C0"/>
+                </a:solidFill>
+              </a:rPr>
+              <a:t>DIV</a:t>
+            </a:r>
+            <a:r>
+              <a:rPr lang="en-US" dirty="0">
+                <a:solidFill>
+                  <a:schemeClr val="tx1"/>
+                </a:solidFill>
+              </a:rPr>
+              <a:t>,</a:t>
+            </a:r>
+            <a:r>
+              <a:rPr lang="en-US" dirty="0">
+                <a:solidFill>
+                  <a:srgbClr val="0070C0"/>
+                </a:solidFill>
+              </a:rPr>
+              <a:t> </a:t>
+            </a:r>
+            <a:r>
+              <a:rPr lang="en-US" b="1" dirty="0">
+                <a:solidFill>
+                  <a:srgbClr val="92D050"/>
+                </a:solidFill>
+              </a:rPr>
+              <a:t>U</a:t>
+            </a:r>
+            <a:r>
+              <a:rPr lang="en-US" dirty="0">
+                <a:solidFill>
+                  <a:srgbClr val="0070C0"/>
+                </a:solidFill>
+              </a:rPr>
+              <a:t>DIV</a:t>
+            </a:r>
+          </a:p>
+          <a:p>
+            <a:r>
+              <a:rPr lang="en-US" b="1" dirty="0">
+                <a:solidFill>
+                  <a:srgbClr val="FF0000"/>
+                </a:solidFill>
+              </a:rPr>
+              <a:t>Signed</a:t>
             </a:r>
             <a:r>
               <a:rPr lang="en-US" dirty="0"/>
@@ -43428,37 +43889,16 @@
             <a:r>
               <a:rPr lang="en-US" dirty="0">
                 <a:solidFill>
-                  <a:srgbClr val="0070C0"/>
-                </a:solidFill>
-              </a:rPr>
-              <a:t>UMULL, SMULL, UMLAL, SMLAL</a:t>
-            </a:r>
-          </a:p>
-          <a:p>
-            <a:endParaRPr lang="en-US" dirty="0"/>
-          </a:p>
-          <a:p>
-            <a:r>
-              <a:rPr lang="en-US" b="1" dirty="0">
-                <a:solidFill>
-                  <a:srgbClr val="FF0000"/>
-                </a:solidFill>
-              </a:rPr>
-              <a:t>Signed</a:t>
+                  <a:schemeClr val="tx1"/>
+                </a:solidFill>
+              </a:rPr>
+              <a:t>vs.</a:t>
             </a:r>
             <a:r>
               <a:rPr lang="en-US" dirty="0"/>
               <a:t> </a:t>
             </a:r>
             <a:r>
-              <a:rPr lang="en-US" dirty="0">
-                <a:solidFill>
-                  <a:schemeClr val="tx1"/>
-                </a:solidFill>
-              </a:rPr>
-              <a:t>vs. </a:t>
-            </a:r>
-            <a:r>
               <a:rPr lang="en-US" b="1" dirty="0">
                 <a:solidFill>
                   <a:srgbClr val="92D050"/>
@@ -43479,9 +43919,9 @@
               <a:t>Use </a:t>
             </a:r>
             <a:r>
-              <a:rPr lang="en-US" b="1" dirty="0">
-                <a:solidFill>
-                  <a:srgbClr val="0070C0"/>
+              <a:rPr lang="en-US" dirty="0">
+                <a:solidFill>
+                  <a:srgbClr val="FF0000"/>
                 </a:solidFill>
               </a:rPr>
               <a:t>different</a:t>
@@ -43517,7 +43957,7 @@
                   <a:schemeClr val="tx1"/>
                 </a:solidFill>
               </a:rPr>
-              <a:t>Instruction Formats:</a:t>
+              <a:t>Instruction Format:</a:t>
             </a:r>
           </a:p>
           <a:p>
@@ -43533,97 +43973,19 @@
             <a:r>
               <a:rPr lang="en-US" dirty="0">
                 <a:solidFill>
-                  <a:schemeClr val="tx1"/>
-                </a:solidFill>
-              </a:rPr>
-              <a:t>MULL	R0,R1,</a:t>
-            </a:r>
-            <a:r>
-              <a:rPr lang="en-US" b="1" dirty="0">
-                <a:solidFill>
-                  <a:srgbClr val="0000FF"/>
-                </a:solidFill>
-              </a:rPr>
-              <a:t>R2,R3</a:t>
+                  <a:srgbClr val="0070C0"/>
+                </a:solidFill>
+              </a:rPr>
+              <a:t>DIV	R0,R1,R2		// R0 </a:t>
             </a:r>
             <a:r>
               <a:rPr lang="en-US" dirty="0">
                 <a:solidFill>
-                  <a:schemeClr val="tx1"/>
-                </a:solidFill>
-              </a:rPr>
-              <a:t>		// R0.R1 </a:t>
-            </a:r>
-            <a:r>
-              <a:rPr lang="en-US" dirty="0">
-                <a:solidFill>
-                  <a:schemeClr val="tx1"/>
+                  <a:srgbClr val="0070C0"/>
                 </a:solidFill>
                 <a:sym typeface="Wingdings" panose="05000000000000000000" pitchFamily="2" charset="2"/>
               </a:rPr>
-              <a:t>=               </a:t>
-            </a:r>
-            <a:r>
-              <a:rPr lang="en-US" b="1" dirty="0">
-                <a:solidFill>
-                  <a:srgbClr val="0000FF"/>
-                </a:solidFill>
-                <a:sym typeface="Wingdings" panose="05000000000000000000" pitchFamily="2" charset="2"/>
-              </a:rPr>
-              <a:t>R2 × R3</a:t>
-            </a:r>
-          </a:p>
-          <a:p>
-            <a:pPr lvl="1"/>
-            <a:r>
-              <a:rPr lang="en-US" b="1" dirty="0">
-                <a:solidFill>
-                  <a:srgbClr val="FF0000"/>
-                </a:solidFill>
-              </a:rPr>
-              <a:t>S</a:t>
-            </a:r>
-            <a:r>
-              <a:rPr lang="en-US" dirty="0">
-                <a:solidFill>
-                  <a:schemeClr val="tx1"/>
-                </a:solidFill>
-              </a:rPr>
-              <a:t>MLAL	R0,R1,</a:t>
-            </a:r>
-            <a:r>
-              <a:rPr lang="en-US" b="1" dirty="0">
-                <a:solidFill>
-                  <a:srgbClr val="0000FF"/>
-                </a:solidFill>
-              </a:rPr>
-              <a:t>R2,R3</a:t>
-            </a:r>
-            <a:r>
-              <a:rPr lang="en-US" dirty="0">
-                <a:solidFill>
-                  <a:schemeClr val="tx1"/>
-                </a:solidFill>
-              </a:rPr>
-              <a:t>		// R0.R1 </a:t>
-            </a:r>
-            <a:r>
-              <a:rPr lang="en-US" dirty="0">
-                <a:solidFill>
-                  <a:schemeClr val="tx1"/>
-                </a:solidFill>
-                <a:sym typeface="Wingdings" panose="05000000000000000000" pitchFamily="2" charset="2"/>
-              </a:rPr>
-              <a:t>= R0.R1 + </a:t>
-            </a:r>
-            <a:r>
-              <a:rPr lang="en-US" b="1" dirty="0">
-                <a:solidFill>
-                  <a:srgbClr val="0000FF"/>
-                </a:solidFill>
-                <a:sym typeface="Wingdings" panose="05000000000000000000" pitchFamily="2" charset="2"/>
-              </a:rPr>
-              <a:t>R2 × R3</a:t>
+              <a:t>= R1 ÷ R2</a:t>
             </a:r>
           </a:p>
           <a:p>
@@ -43645,7 +44007,7 @@
                   <a:schemeClr val="tx1"/>
                 </a:solidFill>
               </a:rPr>
-              <a:t>Instruction Formats:</a:t>
+              <a:t>Instruction Format:</a:t>
             </a:r>
           </a:p>
           <a:p>
@@ -43661,140 +44023,79 @@
             <a:r>
               <a:rPr lang="en-US" dirty="0">
                 <a:solidFill>
+                  <a:srgbClr val="0070C0"/>
+                </a:solidFill>
+              </a:rPr>
+              <a:t>DIV	R0,R1,R2		// R0 </a:t>
+            </a:r>
+            <a:r>
+              <a:rPr lang="en-US" dirty="0">
+                <a:solidFill>
+                  <a:srgbClr val="0070C0"/>
+                </a:solidFill>
+                <a:sym typeface="Wingdings" panose="05000000000000000000" pitchFamily="2" charset="2"/>
+              </a:rPr>
+              <a:t>= R1 ÷ R2</a:t>
+            </a:r>
+          </a:p>
+          <a:p>
+            <a:endParaRPr lang="en-US" dirty="0"/>
+          </a:p>
+          <a:p>
+            <a:r>
+              <a:rPr lang="en-US" dirty="0">
+                <a:solidFill>
                   <a:schemeClr val="tx1"/>
                 </a:solidFill>
               </a:rPr>
-              <a:t>MULL	R0,R1,</a:t>
+              <a:t>Flags:</a:t>
+            </a:r>
+            <a:r>
+              <a:rPr lang="en-US" dirty="0"/>
+              <a:t> </a:t>
             </a:r>
             <a:r>
               <a:rPr lang="en-US" b="1" dirty="0">
                 <a:solidFill>
-                  <a:srgbClr val="0000FF"/>
-                </a:solidFill>
-              </a:rPr>
-              <a:t>R2,R3</a:t>
-            </a:r>
+                  <a:srgbClr val="FF0000"/>
+                </a:solidFill>
+              </a:rPr>
+              <a:t>Unaffected</a:t>
+            </a:r>
+          </a:p>
+          <a:p>
+            <a:endParaRPr lang="en-US" dirty="0"/>
+          </a:p>
+          <a:p>
             <a:r>
               <a:rPr lang="en-US" dirty="0">
                 <a:solidFill>
                   <a:schemeClr val="tx1"/>
                 </a:solidFill>
               </a:rPr>
-              <a:t>		// R0.R1 </a:t>
-            </a:r>
+              <a:t>Overflow:</a:t>
+            </a:r>
+          </a:p>
+          <a:p>
+            <a:pPr lvl="1"/>
             <a:r>
               <a:rPr lang="en-US" dirty="0">
                 <a:solidFill>
-                  <a:schemeClr val="tx1"/>
-                </a:solidFill>
-                <a:sym typeface="Wingdings" panose="05000000000000000000" pitchFamily="2" charset="2"/>
-              </a:rPr>
-              <a:t>=               </a:t>
-            </a:r>
-            <a:r>
-              <a:rPr lang="en-US" b="1" dirty="0">
-                <a:solidFill>
-                  <a:srgbClr val="0000FF"/>
-                </a:solidFill>
-                <a:sym typeface="Wingdings" panose="05000000000000000000" pitchFamily="2" charset="2"/>
-              </a:rPr>
-              <a:t>R2 × R3</a:t>
+                  <a:srgbClr val="0070C0"/>
+                </a:solidFill>
+              </a:rPr>
+              <a:t>Division by zero</a:t>
             </a:r>
           </a:p>
           <a:p>
             <a:pPr lvl="1"/>
             <a:r>
-              <a:rPr lang="en-US" b="1" dirty="0">
-                <a:solidFill>
-                  <a:srgbClr val="92D050"/>
-                </a:solidFill>
-              </a:rPr>
-              <a:t>U</a:t>
-            </a:r>
-            <a:r>
               <a:rPr lang="en-US" dirty="0">
                 <a:solidFill>
-                  <a:schemeClr val="tx1"/>
-                </a:solidFill>
-              </a:rPr>
-              <a:t>MLAL	R0,R1,</a:t>
-            </a:r>
-            <a:r>
-              <a:rPr lang="en-US" b="1" dirty="0">
-                <a:solidFill>
-                  <a:srgbClr val="0000FF"/>
-                </a:solidFill>
-              </a:rPr>
-              <a:t>R2,R3</a:t>
-            </a:r>
-            <a:r>
-              <a:rPr lang="en-US" dirty="0">
-                <a:solidFill>
-                  <a:schemeClr val="tx1"/>
-                </a:solidFill>
-              </a:rPr>
-              <a:t>		// R0.R1 </a:t>
-            </a:r>
-            <a:r>
-              <a:rPr lang="en-US" dirty="0">
-                <a:solidFill>
-                  <a:schemeClr val="tx1"/>
-                </a:solidFill>
-                <a:sym typeface="Wingdings" panose="05000000000000000000" pitchFamily="2" charset="2"/>
-              </a:rPr>
-              <a:t>= R0.R1 + </a:t>
-            </a:r>
-            <a:r>
-              <a:rPr lang="en-US" b="1" dirty="0">
-                <a:solidFill>
-                  <a:srgbClr val="0000FF"/>
-                </a:solidFill>
-                <a:sym typeface="Wingdings" panose="05000000000000000000" pitchFamily="2" charset="2"/>
-              </a:rPr>
-              <a:t>R2 × R3</a:t>
-            </a:r>
-          </a:p>
-          <a:p>
-            <a:endParaRPr lang="en-US" dirty="0"/>
-          </a:p>
-          <a:p>
-            <a:r>
-              <a:rPr lang="en-US" dirty="0">
-                <a:solidFill>
-                  <a:schemeClr val="tx1"/>
-                </a:solidFill>
-              </a:rPr>
-              <a:t>Flags:</a:t>
-            </a:r>
-            <a:r>
-              <a:rPr lang="en-US" dirty="0"/>
-              <a:t>      </a:t>
-            </a:r>
-            <a:r>
-              <a:rPr lang="en-US" b="1" dirty="0">
-                <a:solidFill>
-                  <a:srgbClr val="FF0000"/>
-                </a:solidFill>
-              </a:rPr>
-              <a:t>Unaffected!</a:t>
-            </a:r>
-          </a:p>
-          <a:p>
-            <a:r>
-              <a:rPr lang="en-US" dirty="0">
-                <a:solidFill>
-                  <a:schemeClr val="tx1"/>
-                </a:solidFill>
-              </a:rPr>
-              <a:t>Overflow: </a:t>
-            </a:r>
-            <a:r>
-              <a:rPr lang="en-US" b="1" dirty="0">
-                <a:solidFill>
-                  <a:srgbClr val="FF0000"/>
-                </a:solidFill>
-              </a:rPr>
-              <a:t>Can’t happen</a:t>
+                  <a:srgbClr val="0070C0"/>
+                </a:solidFill>
+              </a:rPr>
+              <a:t>Full-scale negative divided by -1</a:t>
             </a:r>
           </a:p>
         </p:txBody>
@@ -43802,7 +44103,7 @@
     </p:spTree>
     <p:extLst>
       <p:ext uri="{BB962C8B-B14F-4D97-AF65-F5344CB8AC3E}">
-        <p14:creationId xmlns:p14="http://schemas.microsoft.com/office/powerpoint/2010/main" val="228742505"/>
+        <p14:creationId xmlns:p14="http://schemas.microsoft.com/office/powerpoint/2010/main" val="3769027795"/>
       </p:ext>
     </p:extLst>
   </p:cSld>
@@ -43839,371 +44140,6 @@
             <p:ph type="title"/>
           </p:nvPr>
         </p:nvSpPr>
-        <p:spPr>
-          <a:xfrm>
-            <a:off x="940526" y="745181"/>
-            <a:ext cx="8315769" cy="746735"/>
-          </a:xfrm>
-        </p:spPr>
-        <p:txBody>
-          <a:bodyPr>
-            <a:normAutofit/>
-          </a:bodyPr>
-          <a:lstStyle/>
-          <a:p>
-            <a:r>
-              <a:rPr lang="en-US" dirty="0"/>
-              <a:t>Single-Length 32÷32 Integer Division</a:t>
-            </a:r>
-          </a:p>
-        </p:txBody>
-      </p:sp>
-      <p:sp>
-        <p:nvSpPr>
-          <p:cNvPr id="3" name="Content Placeholder 2"/>
-          <p:cNvSpPr>
-            <a:spLocks noGrp="1"/>
-          </p:cNvSpPr>
-          <p:nvPr>
-            <p:ph idx="1"/>
-          </p:nvPr>
-        </p:nvSpPr>
-        <p:spPr>
-          <a:xfrm>
-            <a:off x="940525" y="1806366"/>
-            <a:ext cx="10409263" cy="4835066"/>
-          </a:xfrm>
-        </p:spPr>
-        <p:txBody>
-          <a:bodyPr>
-            <a:normAutofit fontScale="92500" lnSpcReduction="10000"/>
-          </a:bodyPr>
-          <a:lstStyle/>
-          <a:p>
-            <a:r>
-              <a:rPr lang="en-US" dirty="0">
-                <a:solidFill>
-                  <a:schemeClr val="tx1"/>
-                </a:solidFill>
-              </a:rPr>
-              <a:t>Instructions: </a:t>
-            </a:r>
-            <a:r>
-              <a:rPr lang="en-US" b="1" dirty="0">
-                <a:solidFill>
-                  <a:srgbClr val="FF0000"/>
-                </a:solidFill>
-              </a:rPr>
-              <a:t>S</a:t>
-            </a:r>
-            <a:r>
-              <a:rPr lang="en-US" dirty="0">
-                <a:solidFill>
-                  <a:srgbClr val="0070C0"/>
-                </a:solidFill>
-              </a:rPr>
-              <a:t>DIV</a:t>
-            </a:r>
-            <a:r>
-              <a:rPr lang="en-US" dirty="0">
-                <a:solidFill>
-                  <a:schemeClr val="tx1"/>
-                </a:solidFill>
-              </a:rPr>
-              <a:t>,</a:t>
-            </a:r>
-            <a:r>
-              <a:rPr lang="en-US" dirty="0">
-                <a:solidFill>
-                  <a:srgbClr val="0070C0"/>
-                </a:solidFill>
-              </a:rPr>
-              <a:t> </a:t>
-            </a:r>
-            <a:r>
-              <a:rPr lang="en-US" b="1" dirty="0">
-                <a:solidFill>
-                  <a:srgbClr val="92D050"/>
-                </a:solidFill>
-              </a:rPr>
-              <a:t>U</a:t>
-            </a:r>
-            <a:r>
-              <a:rPr lang="en-US" dirty="0">
-                <a:solidFill>
-                  <a:srgbClr val="0070C0"/>
-                </a:solidFill>
-              </a:rPr>
-              <a:t>DIV</a:t>
-            </a:r>
-          </a:p>
-          <a:p>
-            <a:r>
-              <a:rPr lang="en-US" b="1" dirty="0">
-                <a:solidFill>
-                  <a:srgbClr val="FF0000"/>
-                </a:solidFill>
-              </a:rPr>
-              <a:t>Signed</a:t>
-            </a:r>
-            <a:r>
-              <a:rPr lang="en-US" dirty="0"/>
-              <a:t> </a:t>
-            </a:r>
-            <a:r>
-              <a:rPr lang="en-US" dirty="0">
-                <a:solidFill>
-                  <a:schemeClr val="tx1"/>
-                </a:solidFill>
-              </a:rPr>
-              <a:t>vs.</a:t>
-            </a:r>
-            <a:r>
-              <a:rPr lang="en-US" dirty="0"/>
-              <a:t> </a:t>
-            </a:r>
-            <a:r>
-              <a:rPr lang="en-US" b="1" dirty="0">
-                <a:solidFill>
-                  <a:srgbClr val="92D050"/>
-                </a:solidFill>
-              </a:rPr>
-              <a:t>Unsigned</a:t>
-            </a:r>
-            <a:r>
-              <a:rPr lang="en-US" dirty="0"/>
-              <a:t>: </a:t>
-            </a:r>
-            <a:r>
-              <a:rPr lang="en-US" dirty="0">
-                <a:solidFill>
-                  <a:srgbClr val="0070C0"/>
-                </a:solidFill>
-              </a:rPr>
-              <a:t>Use </a:t>
-            </a:r>
-            <a:r>
-              <a:rPr lang="en-US" dirty="0">
-                <a:solidFill>
-                  <a:srgbClr val="FF0000"/>
-                </a:solidFill>
-              </a:rPr>
-              <a:t>different</a:t>
-            </a:r>
-            <a:r>
-              <a:rPr lang="en-US" dirty="0">
-                <a:solidFill>
-                  <a:srgbClr val="0070C0"/>
-                </a:solidFill>
-              </a:rPr>
-              <a:t> instructions!</a:t>
-            </a:r>
-          </a:p>
-          <a:p>
-            <a:endParaRPr lang="en-US" dirty="0"/>
-          </a:p>
-          <a:p>
-            <a:r>
-              <a:rPr lang="en-US" b="1" dirty="0">
-                <a:solidFill>
-                  <a:srgbClr val="FF0000"/>
-                </a:solidFill>
-              </a:rPr>
-              <a:t>Signed</a:t>
-            </a:r>
-            <a:r>
-              <a:rPr lang="en-US" dirty="0"/>
-              <a:t> </a:t>
-            </a:r>
-            <a:r>
-              <a:rPr lang="en-US" dirty="0">
-                <a:solidFill>
-                  <a:schemeClr val="tx1"/>
-                </a:solidFill>
-              </a:rPr>
-              <a:t>Instruction Format:</a:t>
-            </a:r>
-          </a:p>
-          <a:p>
-            <a:pPr lvl="1"/>
-            <a:r>
-              <a:rPr lang="en-US" b="1" dirty="0">
-                <a:solidFill>
-                  <a:srgbClr val="FF0000"/>
-                </a:solidFill>
-              </a:rPr>
-              <a:t>S</a:t>
-            </a:r>
-            <a:r>
-              <a:rPr lang="en-US" dirty="0">
-                <a:solidFill>
-                  <a:srgbClr val="0070C0"/>
-                </a:solidFill>
-              </a:rPr>
-              <a:t>DIV	R0,R1,R2		// R0 </a:t>
-            </a:r>
-            <a:r>
-              <a:rPr lang="en-US" dirty="0">
-                <a:solidFill>
-                  <a:srgbClr val="0070C0"/>
-                </a:solidFill>
-                <a:sym typeface="Wingdings" panose="05000000000000000000" pitchFamily="2" charset="2"/>
-              </a:rPr>
-              <a:t>= R1 ÷ R2</a:t>
-            </a:r>
-          </a:p>
-          <a:p>
-            <a:r>
-              <a:rPr lang="en-US" b="1" dirty="0">
-                <a:solidFill>
-                  <a:srgbClr val="92D050"/>
-                </a:solidFill>
-              </a:rPr>
-              <a:t>Unsigned</a:t>
-            </a:r>
-            <a:r>
-              <a:rPr lang="en-US" dirty="0"/>
-              <a:t> </a:t>
-            </a:r>
-            <a:r>
-              <a:rPr lang="en-US" dirty="0">
-                <a:solidFill>
-                  <a:schemeClr val="tx1"/>
-                </a:solidFill>
-              </a:rPr>
-              <a:t>Instruction Format:</a:t>
-            </a:r>
-          </a:p>
-          <a:p>
-            <a:pPr lvl="1"/>
-            <a:r>
-              <a:rPr lang="en-US" b="1" dirty="0">
-                <a:solidFill>
-                  <a:srgbClr val="92D050"/>
-                </a:solidFill>
-              </a:rPr>
-              <a:t>U</a:t>
-            </a:r>
-            <a:r>
-              <a:rPr lang="en-US" dirty="0">
-                <a:solidFill>
-                  <a:srgbClr val="0070C0"/>
-                </a:solidFill>
-              </a:rPr>
-              <a:t>DIV	R0,R1,R2		// R0 </a:t>
-            </a:r>
-            <a:r>
-              <a:rPr lang="en-US" dirty="0">
-                <a:solidFill>
-                  <a:srgbClr val="0070C0"/>
-                </a:solidFill>
-                <a:sym typeface="Wingdings" panose="05000000000000000000" pitchFamily="2" charset="2"/>
-              </a:rPr>
-              <a:t>= R1 ÷ R2</a:t>
-            </a:r>
-          </a:p>
-          <a:p>
-            <a:endParaRPr lang="en-US" dirty="0"/>
-          </a:p>
-          <a:p>
-            <a:r>
-              <a:rPr lang="en-US" dirty="0">
-                <a:solidFill>
-                  <a:schemeClr val="tx1"/>
-                </a:solidFill>
-              </a:rPr>
-              <a:t>Flags:</a:t>
-            </a:r>
-            <a:r>
-              <a:rPr lang="en-US" dirty="0"/>
-              <a:t> </a:t>
-            </a:r>
-            <a:r>
-              <a:rPr lang="en-US" b="1" dirty="0">
-                <a:solidFill>
-                  <a:srgbClr val="FF0000"/>
-                </a:solidFill>
-              </a:rPr>
-              <a:t>Unaffected</a:t>
-            </a:r>
-          </a:p>
-          <a:p>
-            <a:endParaRPr lang="en-US" dirty="0"/>
-          </a:p>
-          <a:p>
-            <a:r>
-              <a:rPr lang="en-US" dirty="0">
-                <a:solidFill>
-                  <a:schemeClr val="tx1"/>
-                </a:solidFill>
-              </a:rPr>
-              <a:t>Overflow:</a:t>
-            </a:r>
-          </a:p>
-          <a:p>
-            <a:pPr lvl="1"/>
-            <a:r>
-              <a:rPr lang="en-US" dirty="0">
-                <a:solidFill>
-                  <a:srgbClr val="0070C0"/>
-                </a:solidFill>
-              </a:rPr>
-              <a:t>Division by zero</a:t>
-            </a:r>
-          </a:p>
-          <a:p>
-            <a:pPr lvl="1"/>
-            <a:r>
-              <a:rPr lang="en-US" dirty="0">
-                <a:solidFill>
-                  <a:srgbClr val="0070C0"/>
-                </a:solidFill>
-              </a:rPr>
-              <a:t>Full-scale negative divided by -1</a:t>
-            </a:r>
-          </a:p>
-        </p:txBody>
-      </p:sp>
-    </p:spTree>
-    <p:extLst>
-      <p:ext uri="{BB962C8B-B14F-4D97-AF65-F5344CB8AC3E}">
-        <p14:creationId xmlns:p14="http://schemas.microsoft.com/office/powerpoint/2010/main" val="3769027795"/>
-      </p:ext>
-    </p:extLst>
-  </p:cSld>
-  <p:clrMapOvr>
-    <a:masterClrMapping/>
-  </p:clrMapOvr>
-</p:sld>
-</file>
-
-<file path=ppt/slides/slide38.xml><?xml version="1.0" encoding="utf-8"?>
-<p:sld xmlns:a="http://schemas.openxmlformats.org/drawingml/2006/main" xmlns:r="http://schemas.openxmlformats.org/officeDocument/2006/relationships" xmlns:p="http://schemas.openxmlformats.org/presentationml/2006/main">
-  <p:cSld>
-    <p:spTree>
-      <p:nvGrpSpPr>
-        <p:cNvPr id="1" name=""/>
-        <p:cNvGrpSpPr/>
-        <p:nvPr/>
-      </p:nvGrpSpPr>
-      <p:grpSpPr>
-        <a:xfrm>
-          <a:off x="0" y="0"/>
-          <a:ext cx="0" cy="0"/>
-          <a:chOff x="0" y="0"/>
-          <a:chExt cx="0" cy="0"/>
-        </a:xfrm>
-      </p:grpSpPr>
-      <p:sp>
-        <p:nvSpPr>
-          <p:cNvPr id="2" name="Title 1"/>
-          <p:cNvSpPr>
-            <a:spLocks noGrp="1"/>
-          </p:cNvSpPr>
-          <p:nvPr>
-            <p:ph type="title"/>
-          </p:nvPr>
-        </p:nvSpPr>
         <p:spPr/>
         <p:txBody>
           <a:bodyPr rtlCol="0">
@@ -44428,6 +44364,70 @@
     <p:extLst>
       <p:ext uri="{BB962C8B-B14F-4D97-AF65-F5344CB8AC3E}">
         <p14:creationId xmlns:p14="http://schemas.microsoft.com/office/powerpoint/2010/main" val="2453586173"/>
+      </p:ext>
+    </p:extLst>
+  </p:cSld>
+  <p:clrMapOvr>
+    <a:masterClrMapping/>
+  </p:clrMapOvr>
+</p:sld>
+</file>
+
+<file path=ppt/slides/slide38.xml><?xml version="1.0" encoding="utf-8"?>
+<p:sld xmlns:a="http://schemas.openxmlformats.org/drawingml/2006/main" xmlns:r="http://schemas.openxmlformats.org/officeDocument/2006/relationships" xmlns:p="http://schemas.openxmlformats.org/presentationml/2006/main">
+  <p:cSld>
+    <p:spTree>
+      <p:nvGrpSpPr>
+        <p:cNvPr id="1" name="">
+          <a:extLst>
+            <a:ext uri="{FF2B5EF4-FFF2-40B4-BE49-F238E27FC236}">
+              <a16:creationId xmlns:a16="http://schemas.microsoft.com/office/drawing/2014/main" id="{84DA25F2-3AE0-BDCF-0880-EDD5EEF55E54}"/>
+            </a:ext>
+          </a:extLst>
+        </p:cNvPr>
+        <p:cNvGrpSpPr/>
+        <p:nvPr/>
+      </p:nvGrpSpPr>
+      <p:grpSpPr>
+        <a:xfrm>
+          <a:off x="0" y="0"/>
+          <a:ext cx="0" cy="0"/>
+          <a:chOff x="0" y="0"/>
+          <a:chExt cx="0" cy="0"/>
+        </a:xfrm>
+      </p:grpSpPr>
+      <p:sp>
+        <p:nvSpPr>
+          <p:cNvPr id="2" name="Title 1">
+            <a:extLst>
+              <a:ext uri="{FF2B5EF4-FFF2-40B4-BE49-F238E27FC236}">
+                <a16:creationId xmlns:a16="http://schemas.microsoft.com/office/drawing/2014/main" id="{6EAE57A2-3A61-C5F8-EEFD-EA2961784338}"/>
+              </a:ext>
+            </a:extLst>
+          </p:cNvPr>
+          <p:cNvSpPr>
+            <a:spLocks noGrp="1"/>
+          </p:cNvSpPr>
+          <p:nvPr>
+            <p:ph type="ctrTitle"/>
+          </p:nvPr>
+        </p:nvSpPr>
+        <p:spPr/>
+        <p:txBody>
+          <a:bodyPr/>
+          <a:lstStyle/>
+          <a:p>
+            <a:r>
+              <a:rPr lang="en-US" dirty="0"/>
+              <a:t>… to here …</a:t>
+            </a:r>
+          </a:p>
+        </p:txBody>
+      </p:sp>
+    </p:spTree>
+    <p:extLst>
+      <p:ext uri="{BB962C8B-B14F-4D97-AF65-F5344CB8AC3E}">
+        <p14:creationId xmlns:p14="http://schemas.microsoft.com/office/powerpoint/2010/main" val="2815624037"/>
       </p:ext>
     </p:extLst>
   </p:cSld>
